--- a/decks/2026_Week0_Episode1.pptx
+++ b/decks/2026_Week0_Episode1.pptx
@@ -3232,7 +3232,7 @@
             <a:avLst/>
           </a:prstGeom>
           <a:solidFill>
-            <a:srgbClr val="7BAFD4"/>
+            <a:srgbClr val="FFFFFF"/>
           </a:solidFill>
           <a:ln>
             <a:noFill/>
@@ -3254,25 +3254,40 @@
           </a:fontRef>
         </p:style>
         <p:txBody>
-          <a:bodyPr rtlCol="0" anchor="ctr" wrap="none" lIns="0" rIns="0"/>
+          <a:bodyPr rtlCol="0" anchor="ctr"/>
           <a:lstStyle/>
           <a:p>
             <a:pPr algn="ctr"/>
-            <a:r>
-              <a:rPr b="1" sz="1100">
-                <a:solidFill>
-                  <a:srgbClr val="16273D"/>
-                </a:solidFill>
-                <a:latin typeface="Arial"/>
-              </a:rPr>
-              <a:t>UNC</a:t>
-            </a:r>
-          </a:p>
-        </p:txBody>
-      </p:sp>
-      <p:sp>
-        <p:nvSpPr>
-          <p:cNvPr id="6" name="Oval 5"/>
+          </a:p>
+        </p:txBody>
+      </p:sp>
+      <p:pic>
+        <p:nvPicPr>
+          <p:cNvPr id="6" name="Picture 5" descr="unc.png"/>
+          <p:cNvPicPr>
+            <a:picLocks noChangeAspect="1"/>
+          </p:cNvPicPr>
+          <p:nvPr/>
+        </p:nvPicPr>
+        <p:blipFill>
+          <a:blip r:embed="rId2"/>
+          <a:stretch>
+            <a:fillRect/>
+          </a:stretch>
+        </p:blipFill>
+        <p:spPr>
+          <a:xfrm>
+            <a:off x="1113739" y="2951683"/>
+            <a:ext cx="497433" cy="497433"/>
+          </a:xfrm>
+          <a:prstGeom prst="rect">
+            <a:avLst/>
+          </a:prstGeom>
+        </p:spPr>
+      </p:pic>
+      <p:sp>
+        <p:nvSpPr>
+          <p:cNvPr id="7" name="Oval 6"/>
           <p:cNvSpPr/>
           <p:nvPr/>
         </p:nvSpPr>
@@ -3285,7 +3300,7 @@
             <a:avLst/>
           </a:prstGeom>
           <a:solidFill>
-            <a:srgbClr val="4D1979"/>
+            <a:srgbClr val="FFFFFF"/>
           </a:solidFill>
           <a:ln>
             <a:noFill/>
@@ -3307,25 +3322,40 @@
           </a:fontRef>
         </p:style>
         <p:txBody>
-          <a:bodyPr rtlCol="0" anchor="ctr" wrap="none" lIns="0" rIns="0"/>
+          <a:bodyPr rtlCol="0" anchor="ctr"/>
           <a:lstStyle/>
           <a:p>
             <a:pPr algn="ctr"/>
-            <a:r>
-              <a:rPr b="1" sz="1100">
-                <a:solidFill>
-                  <a:srgbClr val="FFFFFF"/>
-                </a:solidFill>
-                <a:latin typeface="Arial"/>
-              </a:rPr>
-              <a:t>TCU</a:t>
-            </a:r>
-          </a:p>
-        </p:txBody>
-      </p:sp>
-      <p:sp>
-        <p:nvSpPr>
-          <p:cNvPr id="7" name="TextBox 6"/>
+          </a:p>
+        </p:txBody>
+      </p:sp>
+      <p:pic>
+        <p:nvPicPr>
+          <p:cNvPr id="8" name="Picture 7" descr="tcu.png"/>
+          <p:cNvPicPr>
+            <a:picLocks noChangeAspect="1"/>
+          </p:cNvPicPr>
+          <p:nvPr/>
+        </p:nvPicPr>
+        <p:blipFill>
+          <a:blip r:embed="rId3"/>
+          <a:stretch>
+            <a:fillRect/>
+          </a:stretch>
+        </p:blipFill>
+        <p:spPr>
+          <a:xfrm>
+            <a:off x="1890979" y="2951683"/>
+            <a:ext cx="497433" cy="497433"/>
+          </a:xfrm>
+          <a:prstGeom prst="rect">
+            <a:avLst/>
+          </a:prstGeom>
+        </p:spPr>
+      </p:pic>
+      <p:sp>
+        <p:nvSpPr>
+          <p:cNvPr id="9" name="TextBox 8"/>
           <p:cNvSpPr txBox="1"/>
           <p:nvPr/>
         </p:nvSpPr>
@@ -3360,7 +3390,7 @@
       </p:sp>
       <p:sp>
         <p:nvSpPr>
-          <p:cNvPr id="8" name="TextBox 7"/>
+          <p:cNvPr id="10" name="TextBox 9"/>
           <p:cNvSpPr txBox="1"/>
           <p:nvPr/>
         </p:nvSpPr>
@@ -3395,7 +3425,7 @@
       </p:sp>
       <p:sp>
         <p:nvSpPr>
-          <p:cNvPr id="9" name="TextBox 8"/>
+          <p:cNvPr id="11" name="TextBox 10"/>
           <p:cNvSpPr txBox="1"/>
           <p:nvPr/>
         </p:nvSpPr>
@@ -3430,7 +3460,7 @@
       </p:sp>
       <p:sp>
         <p:nvSpPr>
-          <p:cNvPr id="10" name="TextBox 9"/>
+          <p:cNvPr id="12" name="TextBox 11"/>
           <p:cNvSpPr txBox="1"/>
           <p:nvPr/>
         </p:nvSpPr>
@@ -3465,7 +3495,7 @@
       </p:sp>
       <p:sp>
         <p:nvSpPr>
-          <p:cNvPr id="11" name="Rounded Rectangle 10"/>
+          <p:cNvPr id="13" name="Rounded Rectangle 12"/>
           <p:cNvSpPr/>
           <p:nvPr/>
         </p:nvSpPr>
@@ -3509,7 +3539,7 @@
       </p:sp>
       <p:sp>
         <p:nvSpPr>
-          <p:cNvPr id="12" name="Oval 11"/>
+          <p:cNvPr id="14" name="Oval 13"/>
           <p:cNvSpPr/>
           <p:nvPr/>
         </p:nvSpPr>
@@ -3522,7 +3552,7 @@
             <a:avLst/>
           </a:prstGeom>
           <a:solidFill>
-            <a:srgbClr val="CC0000"/>
+            <a:srgbClr val="FFFFFF"/>
           </a:solidFill>
           <a:ln>
             <a:noFill/>
@@ -3544,25 +3574,40 @@
           </a:fontRef>
         </p:style>
         <p:txBody>
-          <a:bodyPr rtlCol="0" anchor="ctr" wrap="none" lIns="0" rIns="0"/>
+          <a:bodyPr rtlCol="0" anchor="ctr"/>
           <a:lstStyle/>
           <a:p>
             <a:pPr algn="ctr"/>
-            <a:r>
-              <a:rPr b="1" sz="1100">
-                <a:solidFill>
-                  <a:srgbClr val="FFFFFF"/>
-                </a:solidFill>
-                <a:latin typeface="Arial"/>
-              </a:rPr>
-              <a:t>NCSU</a:t>
-            </a:r>
-          </a:p>
-        </p:txBody>
-      </p:sp>
-      <p:sp>
-        <p:nvSpPr>
-          <p:cNvPr id="13" name="Oval 12"/>
+          </a:p>
+        </p:txBody>
+      </p:sp>
+      <p:pic>
+        <p:nvPicPr>
+          <p:cNvPr id="15" name="Picture 14" descr="ncsu.png"/>
+          <p:cNvPicPr>
+            <a:picLocks noChangeAspect="1"/>
+          </p:cNvPicPr>
+          <p:nvPr/>
+        </p:nvPicPr>
+        <p:blipFill>
+          <a:blip r:embed="rId4"/>
+          <a:stretch>
+            <a:fillRect/>
+          </a:stretch>
+        </p:blipFill>
+        <p:spPr>
+          <a:xfrm>
+            <a:off x="1113739" y="4067251"/>
+            <a:ext cx="497433" cy="497433"/>
+          </a:xfrm>
+          <a:prstGeom prst="rect">
+            <a:avLst/>
+          </a:prstGeom>
+        </p:spPr>
+      </p:pic>
+      <p:sp>
+        <p:nvSpPr>
+          <p:cNvPr id="16" name="Oval 15"/>
           <p:cNvSpPr/>
           <p:nvPr/>
         </p:nvSpPr>
@@ -3575,7 +3620,7 @@
             <a:avLst/>
           </a:prstGeom>
           <a:solidFill>
-            <a:srgbClr val="232D4B"/>
+            <a:srgbClr val="FFFFFF"/>
           </a:solidFill>
           <a:ln>
             <a:noFill/>
@@ -3597,25 +3642,40 @@
           </a:fontRef>
         </p:style>
         <p:txBody>
-          <a:bodyPr rtlCol="0" anchor="ctr" wrap="none" lIns="0" rIns="0"/>
+          <a:bodyPr rtlCol="0" anchor="ctr"/>
           <a:lstStyle/>
           <a:p>
             <a:pPr algn="ctr"/>
-            <a:r>
-              <a:rPr b="1" sz="1100">
-                <a:solidFill>
-                  <a:srgbClr val="FFFFFF"/>
-                </a:solidFill>
-                <a:latin typeface="Arial"/>
-              </a:rPr>
-              <a:t>UVA</a:t>
-            </a:r>
-          </a:p>
-        </p:txBody>
-      </p:sp>
-      <p:sp>
-        <p:nvSpPr>
-          <p:cNvPr id="14" name="TextBox 13"/>
+          </a:p>
+        </p:txBody>
+      </p:sp>
+      <p:pic>
+        <p:nvPicPr>
+          <p:cNvPr id="17" name="Picture 16" descr="uva.png"/>
+          <p:cNvPicPr>
+            <a:picLocks noChangeAspect="1"/>
+          </p:cNvPicPr>
+          <p:nvPr/>
+        </p:nvPicPr>
+        <p:blipFill>
+          <a:blip r:embed="rId5"/>
+          <a:stretch>
+            <a:fillRect/>
+          </a:stretch>
+        </p:blipFill>
+        <p:spPr>
+          <a:xfrm>
+            <a:off x="1890979" y="4067251"/>
+            <a:ext cx="497433" cy="497433"/>
+          </a:xfrm>
+          <a:prstGeom prst="rect">
+            <a:avLst/>
+          </a:prstGeom>
+        </p:spPr>
+      </p:pic>
+      <p:sp>
+        <p:nvSpPr>
+          <p:cNvPr id="18" name="TextBox 17"/>
           <p:cNvSpPr txBox="1"/>
           <p:nvPr/>
         </p:nvSpPr>
@@ -3650,7 +3710,7 @@
       </p:sp>
       <p:sp>
         <p:nvSpPr>
-          <p:cNvPr id="15" name="TextBox 14"/>
+          <p:cNvPr id="19" name="TextBox 18"/>
           <p:cNvSpPr txBox="1"/>
           <p:nvPr/>
         </p:nvSpPr>
@@ -3685,7 +3745,7 @@
       </p:sp>
       <p:sp>
         <p:nvSpPr>
-          <p:cNvPr id="16" name="TextBox 15"/>
+          <p:cNvPr id="20" name="TextBox 19"/>
           <p:cNvSpPr txBox="1"/>
           <p:nvPr/>
         </p:nvSpPr>
@@ -3720,7 +3780,7 @@
       </p:sp>
       <p:sp>
         <p:nvSpPr>
-          <p:cNvPr id="17" name="TextBox 16"/>
+          <p:cNvPr id="21" name="TextBox 20"/>
           <p:cNvSpPr txBox="1"/>
           <p:nvPr/>
         </p:nvSpPr>
@@ -3755,7 +3815,7 @@
       </p:sp>
       <p:sp>
         <p:nvSpPr>
-          <p:cNvPr id="18" name="Rounded Rectangle 17"/>
+          <p:cNvPr id="22" name="Rounded Rectangle 21"/>
           <p:cNvSpPr/>
           <p:nvPr/>
         </p:nvSpPr>
@@ -3799,7 +3859,7 @@
       </p:sp>
       <p:sp>
         <p:nvSpPr>
-          <p:cNvPr id="19" name="Oval 18"/>
+          <p:cNvPr id="23" name="Oval 22"/>
           <p:cNvSpPr/>
           <p:nvPr/>
         </p:nvSpPr>
@@ -3812,7 +3872,7 @@
             <a:avLst/>
           </a:prstGeom>
           <a:solidFill>
-            <a:srgbClr val="B5121B"/>
+            <a:srgbClr val="FFFFFF"/>
           </a:solidFill>
           <a:ln>
             <a:noFill/>
@@ -3834,25 +3894,40 @@
           </a:fontRef>
         </p:style>
         <p:txBody>
-          <a:bodyPr rtlCol="0" anchor="ctr" wrap="none" lIns="0" rIns="0"/>
+          <a:bodyPr rtlCol="0" anchor="ctr"/>
           <a:lstStyle/>
           <a:p>
             <a:pPr algn="ctr"/>
-            <a:r>
-              <a:rPr b="1" sz="1100">
-                <a:solidFill>
-                  <a:srgbClr val="FFFFFF"/>
-                </a:solidFill>
-                <a:latin typeface="Arial"/>
-              </a:rPr>
-              <a:t>JSU</a:t>
-            </a:r>
-          </a:p>
-        </p:txBody>
-      </p:sp>
-      <p:sp>
-        <p:nvSpPr>
-          <p:cNvPr id="20" name="Oval 19"/>
+          </a:p>
+        </p:txBody>
+      </p:sp>
+      <p:pic>
+        <p:nvPicPr>
+          <p:cNvPr id="24" name="Picture 23" descr="jsu.png"/>
+          <p:cNvPicPr>
+            <a:picLocks noChangeAspect="1"/>
+          </p:cNvPicPr>
+          <p:nvPr/>
+        </p:nvPicPr>
+        <p:blipFill>
+          <a:blip r:embed="rId6"/>
+          <a:stretch>
+            <a:fillRect/>
+          </a:stretch>
+        </p:blipFill>
+        <p:spPr>
+          <a:xfrm>
+            <a:off x="1113739" y="5182819"/>
+            <a:ext cx="497433" cy="497433"/>
+          </a:xfrm>
+          <a:prstGeom prst="rect">
+            <a:avLst/>
+          </a:prstGeom>
+        </p:spPr>
+      </p:pic>
+      <p:sp>
+        <p:nvSpPr>
+          <p:cNvPr id="25" name="Oval 24"/>
           <p:cNvSpPr/>
           <p:nvPr/>
         </p:nvSpPr>
@@ -3865,7 +3940,7 @@
             <a:avLst/>
           </a:prstGeom>
           <a:solidFill>
-            <a:srgbClr val="0A5640"/>
+            <a:srgbClr val="FFFFFF"/>
           </a:solidFill>
           <a:ln>
             <a:noFill/>
@@ -3887,25 +3962,40 @@
           </a:fontRef>
         </p:style>
         <p:txBody>
-          <a:bodyPr rtlCol="0" anchor="ctr" wrap="none" lIns="0" rIns="0"/>
+          <a:bodyPr rtlCol="0" anchor="ctr"/>
           <a:lstStyle/>
           <a:p>
             <a:pPr algn="ctr"/>
-            <a:r>
-              <a:rPr b="1" sz="1100">
-                <a:solidFill>
-                  <a:srgbClr val="FFFFFF"/>
-                </a:solidFill>
-                <a:latin typeface="Arial"/>
-              </a:rPr>
-              <a:t>NDSU</a:t>
-            </a:r>
-          </a:p>
-        </p:txBody>
-      </p:sp>
-      <p:sp>
-        <p:nvSpPr>
-          <p:cNvPr id="21" name="TextBox 20"/>
+          </a:p>
+        </p:txBody>
+      </p:sp>
+      <p:pic>
+        <p:nvPicPr>
+          <p:cNvPr id="26" name="Picture 25" descr="ndsu.png"/>
+          <p:cNvPicPr>
+            <a:picLocks noChangeAspect="1"/>
+          </p:cNvPicPr>
+          <p:nvPr/>
+        </p:nvPicPr>
+        <p:blipFill>
+          <a:blip r:embed="rId7"/>
+          <a:stretch>
+            <a:fillRect/>
+          </a:stretch>
+        </p:blipFill>
+        <p:spPr>
+          <a:xfrm>
+            <a:off x="1890979" y="5182819"/>
+            <a:ext cx="497433" cy="497433"/>
+          </a:xfrm>
+          <a:prstGeom prst="rect">
+            <a:avLst/>
+          </a:prstGeom>
+        </p:spPr>
+      </p:pic>
+      <p:sp>
+        <p:nvSpPr>
+          <p:cNvPr id="27" name="TextBox 26"/>
           <p:cNvSpPr txBox="1"/>
           <p:nvPr/>
         </p:nvSpPr>
@@ -3940,7 +4030,7 @@
       </p:sp>
       <p:sp>
         <p:nvSpPr>
-          <p:cNvPr id="22" name="TextBox 21"/>
+          <p:cNvPr id="28" name="TextBox 27"/>
           <p:cNvSpPr txBox="1"/>
           <p:nvPr/>
         </p:nvSpPr>
@@ -3975,7 +4065,7 @@
       </p:sp>
       <p:sp>
         <p:nvSpPr>
-          <p:cNvPr id="23" name="TextBox 22"/>
+          <p:cNvPr id="29" name="TextBox 28"/>
           <p:cNvSpPr txBox="1"/>
           <p:nvPr/>
         </p:nvSpPr>
@@ -4010,7 +4100,7 @@
       </p:sp>
       <p:sp>
         <p:nvSpPr>
-          <p:cNvPr id="24" name="TextBox 23"/>
+          <p:cNvPr id="30" name="TextBox 29"/>
           <p:cNvSpPr txBox="1"/>
           <p:nvPr/>
         </p:nvSpPr>
@@ -4045,7 +4135,7 @@
       </p:sp>
       <p:sp>
         <p:nvSpPr>
-          <p:cNvPr id="25" name="TextBox 24"/>
+          <p:cNvPr id="31" name="TextBox 30"/>
           <p:cNvSpPr txBox="1"/>
           <p:nvPr/>
         </p:nvSpPr>
@@ -4104,59 +4194,30 @@
         <p:nvPr/>
       </p:nvGrpSpPr>
       <p:grpSpPr/>
-      <p:sp>
-        <p:nvSpPr>
-          <p:cNvPr id="2" name="Oval 1"/>
-          <p:cNvSpPr/>
-          <p:nvPr/>
-        </p:nvSpPr>
+      <p:pic>
+        <p:nvPicPr>
+          <p:cNvPr id="2" name="Picture 1" descr="unc.png"/>
+          <p:cNvPicPr>
+            <a:picLocks noChangeAspect="1"/>
+          </p:cNvPicPr>
+          <p:nvPr/>
+        </p:nvPicPr>
+        <p:blipFill>
+          <a:blip r:embed="rId2"/>
+          <a:stretch>
+            <a:fillRect/>
+          </a:stretch>
+        </p:blipFill>
         <p:spPr>
           <a:xfrm>
             <a:off x="822960" y="384048"/>
             <a:ext cx="731520" cy="731520"/>
           </a:xfrm>
-          <a:prstGeom prst="ellipse">
-            <a:avLst/>
-          </a:prstGeom>
-          <a:solidFill>
-            <a:srgbClr val="7BAFD4"/>
-          </a:solidFill>
-          <a:ln>
-            <a:noFill/>
-          </a:ln>
-          <a:effectLst/>
-        </p:spPr>
-        <p:style>
-          <a:lnRef idx="1">
-            <a:schemeClr val="accent1"/>
-          </a:lnRef>
-          <a:fillRef idx="3">
-            <a:schemeClr val="accent1"/>
-          </a:fillRef>
-          <a:effectRef idx="2">
-            <a:schemeClr val="accent1"/>
-          </a:effectRef>
-          <a:fontRef idx="minor">
-            <a:schemeClr val="lt1"/>
-          </a:fontRef>
-        </p:style>
-        <p:txBody>
-          <a:bodyPr rtlCol="0" anchor="ctr" wrap="none" lIns="0" rIns="0"/>
-          <a:lstStyle/>
-          <a:p>
-            <a:pPr algn="ctr"/>
-            <a:r>
-              <a:rPr b="1" sz="1500">
-                <a:solidFill>
-                  <a:srgbClr val="16273D"/>
-                </a:solidFill>
-                <a:latin typeface="Arial"/>
-              </a:rPr>
-              <a:t>UNC</a:t>
-            </a:r>
-          </a:p>
-        </p:txBody>
-      </p:sp>
+          <a:prstGeom prst="rect">
+            <a:avLst/>
+          </a:prstGeom>
+        </p:spPr>
+      </p:pic>
       <p:sp>
         <p:nvSpPr>
           <p:cNvPr id="3" name="TextBox 2"/>
@@ -4192,59 +4253,30 @@
           </a:p>
         </p:txBody>
       </p:sp>
-      <p:sp>
-        <p:nvSpPr>
-          <p:cNvPr id="4" name="Oval 3"/>
-          <p:cNvSpPr/>
-          <p:nvPr/>
-        </p:nvSpPr>
+      <p:pic>
+        <p:nvPicPr>
+          <p:cNvPr id="4" name="Picture 3" descr="tcu.png"/>
+          <p:cNvPicPr>
+            <a:picLocks noChangeAspect="1"/>
+          </p:cNvPicPr>
+          <p:nvPr/>
+        </p:nvPicPr>
+        <p:blipFill>
+          <a:blip r:embed="rId3"/>
+          <a:stretch>
+            <a:fillRect/>
+          </a:stretch>
+        </p:blipFill>
         <p:spPr>
           <a:xfrm>
             <a:off x="2148840" y="384048"/>
             <a:ext cx="731520" cy="731520"/>
           </a:xfrm>
-          <a:prstGeom prst="ellipse">
-            <a:avLst/>
-          </a:prstGeom>
-          <a:solidFill>
-            <a:srgbClr val="4D1979"/>
-          </a:solidFill>
-          <a:ln>
-            <a:noFill/>
-          </a:ln>
-          <a:effectLst/>
-        </p:spPr>
-        <p:style>
-          <a:lnRef idx="1">
-            <a:schemeClr val="accent1"/>
-          </a:lnRef>
-          <a:fillRef idx="3">
-            <a:schemeClr val="accent1"/>
-          </a:fillRef>
-          <a:effectRef idx="2">
-            <a:schemeClr val="accent1"/>
-          </a:effectRef>
-          <a:fontRef idx="minor">
-            <a:schemeClr val="lt1"/>
-          </a:fontRef>
-        </p:style>
-        <p:txBody>
-          <a:bodyPr rtlCol="0" anchor="ctr" wrap="none" lIns="0" rIns="0"/>
-          <a:lstStyle/>
-          <a:p>
-            <a:pPr algn="ctr"/>
-            <a:r>
-              <a:rPr b="1" sz="1500">
-                <a:solidFill>
-                  <a:srgbClr val="FFFFFF"/>
-                </a:solidFill>
-                <a:latin typeface="Arial"/>
-              </a:rPr>
-              <a:t>TCU</a:t>
-            </a:r>
-          </a:p>
-        </p:txBody>
-      </p:sp>
+          <a:prstGeom prst="rect">
+            <a:avLst/>
+          </a:prstGeom>
+        </p:spPr>
+      </p:pic>
       <p:sp>
         <p:nvSpPr>
           <p:cNvPr id="5" name="TextBox 4"/>
@@ -5288,59 +5320,30 @@
         <p:nvPr/>
       </p:nvGrpSpPr>
       <p:grpSpPr/>
-      <p:sp>
-        <p:nvSpPr>
-          <p:cNvPr id="2" name="Oval 1"/>
-          <p:cNvSpPr/>
-          <p:nvPr/>
-        </p:nvSpPr>
+      <p:pic>
+        <p:nvPicPr>
+          <p:cNvPr id="2" name="Picture 1" descr="unc.png"/>
+          <p:cNvPicPr>
+            <a:picLocks noChangeAspect="1"/>
+          </p:cNvPicPr>
+          <p:nvPr/>
+        </p:nvPicPr>
+        <p:blipFill>
+          <a:blip r:embed="rId2"/>
+          <a:stretch>
+            <a:fillRect/>
+          </a:stretch>
+        </p:blipFill>
         <p:spPr>
           <a:xfrm>
             <a:off x="822960" y="384048"/>
             <a:ext cx="731520" cy="731520"/>
           </a:xfrm>
-          <a:prstGeom prst="ellipse">
-            <a:avLst/>
-          </a:prstGeom>
-          <a:solidFill>
-            <a:srgbClr val="7BAFD4"/>
-          </a:solidFill>
-          <a:ln>
-            <a:noFill/>
-          </a:ln>
-          <a:effectLst/>
-        </p:spPr>
-        <p:style>
-          <a:lnRef idx="1">
-            <a:schemeClr val="accent1"/>
-          </a:lnRef>
-          <a:fillRef idx="3">
-            <a:schemeClr val="accent1"/>
-          </a:fillRef>
-          <a:effectRef idx="2">
-            <a:schemeClr val="accent1"/>
-          </a:effectRef>
-          <a:fontRef idx="minor">
-            <a:schemeClr val="lt1"/>
-          </a:fontRef>
-        </p:style>
-        <p:txBody>
-          <a:bodyPr rtlCol="0" anchor="ctr" wrap="none" lIns="0" rIns="0"/>
-          <a:lstStyle/>
-          <a:p>
-            <a:pPr algn="ctr"/>
-            <a:r>
-              <a:rPr b="1" sz="1500">
-                <a:solidFill>
-                  <a:srgbClr val="16273D"/>
-                </a:solidFill>
-                <a:latin typeface="Arial"/>
-              </a:rPr>
-              <a:t>UNC</a:t>
-            </a:r>
-          </a:p>
-        </p:txBody>
-      </p:sp>
+          <a:prstGeom prst="rect">
+            <a:avLst/>
+          </a:prstGeom>
+        </p:spPr>
+      </p:pic>
       <p:sp>
         <p:nvSpPr>
           <p:cNvPr id="3" name="TextBox 2"/>
@@ -5376,59 +5379,30 @@
           </a:p>
         </p:txBody>
       </p:sp>
-      <p:sp>
-        <p:nvSpPr>
-          <p:cNvPr id="4" name="Oval 3"/>
-          <p:cNvSpPr/>
-          <p:nvPr/>
-        </p:nvSpPr>
+      <p:pic>
+        <p:nvPicPr>
+          <p:cNvPr id="4" name="Picture 3" descr="tcu.png"/>
+          <p:cNvPicPr>
+            <a:picLocks noChangeAspect="1"/>
+          </p:cNvPicPr>
+          <p:nvPr/>
+        </p:nvPicPr>
+        <p:blipFill>
+          <a:blip r:embed="rId3"/>
+          <a:stretch>
+            <a:fillRect/>
+          </a:stretch>
+        </p:blipFill>
         <p:spPr>
           <a:xfrm>
             <a:off x="2148840" y="384048"/>
             <a:ext cx="731520" cy="731520"/>
           </a:xfrm>
-          <a:prstGeom prst="ellipse">
-            <a:avLst/>
-          </a:prstGeom>
-          <a:solidFill>
-            <a:srgbClr val="4D1979"/>
-          </a:solidFill>
-          <a:ln>
-            <a:noFill/>
-          </a:ln>
-          <a:effectLst/>
-        </p:spPr>
-        <p:style>
-          <a:lnRef idx="1">
-            <a:schemeClr val="accent1"/>
-          </a:lnRef>
-          <a:fillRef idx="3">
-            <a:schemeClr val="accent1"/>
-          </a:fillRef>
-          <a:effectRef idx="2">
-            <a:schemeClr val="accent1"/>
-          </a:effectRef>
-          <a:fontRef idx="minor">
-            <a:schemeClr val="lt1"/>
-          </a:fontRef>
-        </p:style>
-        <p:txBody>
-          <a:bodyPr rtlCol="0" anchor="ctr" wrap="none" lIns="0" rIns="0"/>
-          <a:lstStyle/>
-          <a:p>
-            <a:pPr algn="ctr"/>
-            <a:r>
-              <a:rPr b="1" sz="1500">
-                <a:solidFill>
-                  <a:srgbClr val="FFFFFF"/>
-                </a:solidFill>
-                <a:latin typeface="Arial"/>
-              </a:rPr>
-              <a:t>TCU</a:t>
-            </a:r>
-          </a:p>
-        </p:txBody>
-      </p:sp>
+          <a:prstGeom prst="rect">
+            <a:avLst/>
+          </a:prstGeom>
+        </p:spPr>
+      </p:pic>
       <p:sp>
         <p:nvSpPr>
           <p:cNvPr id="5" name="TextBox 4"/>
@@ -5508,59 +5482,30 @@
           </a:p>
         </p:txBody>
       </p:sp>
-      <p:sp>
-        <p:nvSpPr>
-          <p:cNvPr id="7" name="Oval 6"/>
-          <p:cNvSpPr/>
-          <p:nvPr/>
-        </p:nvSpPr>
+      <p:pic>
+        <p:nvPicPr>
+          <p:cNvPr id="7" name="Picture 6" descr="unc.png"/>
+          <p:cNvPicPr>
+            <a:picLocks noChangeAspect="1"/>
+          </p:cNvPicPr>
+          <p:nvPr/>
+        </p:nvPicPr>
+        <p:blipFill>
+          <a:blip r:embed="rId2"/>
+          <a:stretch>
+            <a:fillRect/>
+          </a:stretch>
+        </p:blipFill>
         <p:spPr>
           <a:xfrm>
             <a:off x="1097280" y="1691640"/>
             <a:ext cx="566928" cy="566928"/>
           </a:xfrm>
-          <a:prstGeom prst="ellipse">
-            <a:avLst/>
-          </a:prstGeom>
-          <a:solidFill>
-            <a:srgbClr val="7BAFD4"/>
-          </a:solidFill>
-          <a:ln>
-            <a:noFill/>
-          </a:ln>
-          <a:effectLst/>
-        </p:spPr>
-        <p:style>
-          <a:lnRef idx="1">
-            <a:schemeClr val="accent1"/>
-          </a:lnRef>
-          <a:fillRef idx="3">
-            <a:schemeClr val="accent1"/>
-          </a:fillRef>
-          <a:effectRef idx="2">
-            <a:schemeClr val="accent1"/>
-          </a:effectRef>
-          <a:fontRef idx="minor">
-            <a:schemeClr val="lt1"/>
-          </a:fontRef>
-        </p:style>
-        <p:txBody>
-          <a:bodyPr rtlCol="0" anchor="ctr" wrap="none" lIns="0" rIns="0"/>
-          <a:lstStyle/>
-          <a:p>
-            <a:pPr algn="ctr"/>
-            <a:r>
-              <a:rPr b="1" sz="1100">
-                <a:solidFill>
-                  <a:srgbClr val="16273D"/>
-                </a:solidFill>
-                <a:latin typeface="Arial"/>
-              </a:rPr>
-              <a:t>UNC</a:t>
-            </a:r>
-          </a:p>
-        </p:txBody>
-      </p:sp>
+          <a:prstGeom prst="rect">
+            <a:avLst/>
+          </a:prstGeom>
+        </p:spPr>
+      </p:pic>
       <p:sp>
         <p:nvSpPr>
           <p:cNvPr id="8" name="TextBox 7"/>
@@ -5955,59 +5900,30 @@
           </a:p>
         </p:txBody>
       </p:sp>
-      <p:sp>
-        <p:nvSpPr>
-          <p:cNvPr id="19" name="Oval 18"/>
-          <p:cNvSpPr/>
-          <p:nvPr/>
-        </p:nvSpPr>
+      <p:pic>
+        <p:nvPicPr>
+          <p:cNvPr id="19" name="Picture 18" descr="tcu.png"/>
+          <p:cNvPicPr>
+            <a:picLocks noChangeAspect="1"/>
+          </p:cNvPicPr>
+          <p:nvPr/>
+        </p:nvPicPr>
+        <p:blipFill>
+          <a:blip r:embed="rId3"/>
+          <a:stretch>
+            <a:fillRect/>
+          </a:stretch>
+        </p:blipFill>
         <p:spPr>
           <a:xfrm>
             <a:off x="6583680" y="1691640"/>
             <a:ext cx="566928" cy="566928"/>
           </a:xfrm>
-          <a:prstGeom prst="ellipse">
-            <a:avLst/>
-          </a:prstGeom>
-          <a:solidFill>
-            <a:srgbClr val="4D1979"/>
-          </a:solidFill>
-          <a:ln>
-            <a:noFill/>
-          </a:ln>
-          <a:effectLst/>
-        </p:spPr>
-        <p:style>
-          <a:lnRef idx="1">
-            <a:schemeClr val="accent1"/>
-          </a:lnRef>
-          <a:fillRef idx="3">
-            <a:schemeClr val="accent1"/>
-          </a:fillRef>
-          <a:effectRef idx="2">
-            <a:schemeClr val="accent1"/>
-          </a:effectRef>
-          <a:fontRef idx="minor">
-            <a:schemeClr val="lt1"/>
-          </a:fontRef>
-        </p:style>
-        <p:txBody>
-          <a:bodyPr rtlCol="0" anchor="ctr" wrap="none" lIns="0" rIns="0"/>
-          <a:lstStyle/>
-          <a:p>
-            <a:pPr algn="ctr"/>
-            <a:r>
-              <a:rPr b="1" sz="1100">
-                <a:solidFill>
-                  <a:srgbClr val="FFFFFF"/>
-                </a:solidFill>
-                <a:latin typeface="Arial"/>
-              </a:rPr>
-              <a:t>TCU</a:t>
-            </a:r>
-          </a:p>
-        </p:txBody>
-      </p:sp>
+          <a:prstGeom prst="rect">
+            <a:avLst/>
+          </a:prstGeom>
+        </p:spPr>
+      </p:pic>
       <p:sp>
         <p:nvSpPr>
           <p:cNvPr id="20" name="TextBox 19"/>
@@ -6419,59 +6335,30 @@
         <p:nvPr/>
       </p:nvGrpSpPr>
       <p:grpSpPr/>
-      <p:sp>
-        <p:nvSpPr>
-          <p:cNvPr id="2" name="Oval 1"/>
-          <p:cNvSpPr/>
-          <p:nvPr/>
-        </p:nvSpPr>
+      <p:pic>
+        <p:nvPicPr>
+          <p:cNvPr id="2" name="Picture 1" descr="ncsu.png"/>
+          <p:cNvPicPr>
+            <a:picLocks noChangeAspect="1"/>
+          </p:cNvPicPr>
+          <p:nvPr/>
+        </p:nvPicPr>
+        <p:blipFill>
+          <a:blip r:embed="rId2"/>
+          <a:stretch>
+            <a:fillRect/>
+          </a:stretch>
+        </p:blipFill>
         <p:spPr>
           <a:xfrm>
             <a:off x="822960" y="384048"/>
             <a:ext cx="731520" cy="731520"/>
           </a:xfrm>
-          <a:prstGeom prst="ellipse">
-            <a:avLst/>
-          </a:prstGeom>
-          <a:solidFill>
-            <a:srgbClr val="CC0000"/>
-          </a:solidFill>
-          <a:ln>
-            <a:noFill/>
-          </a:ln>
-          <a:effectLst/>
-        </p:spPr>
-        <p:style>
-          <a:lnRef idx="1">
-            <a:schemeClr val="accent1"/>
-          </a:lnRef>
-          <a:fillRef idx="3">
-            <a:schemeClr val="accent1"/>
-          </a:fillRef>
-          <a:effectRef idx="2">
-            <a:schemeClr val="accent1"/>
-          </a:effectRef>
-          <a:fontRef idx="minor">
-            <a:schemeClr val="lt1"/>
-          </a:fontRef>
-        </p:style>
-        <p:txBody>
-          <a:bodyPr rtlCol="0" anchor="ctr" wrap="none" lIns="0" rIns="0"/>
-          <a:lstStyle/>
-          <a:p>
-            <a:pPr algn="ctr"/>
-            <a:r>
-              <a:rPr b="1" sz="1500">
-                <a:solidFill>
-                  <a:srgbClr val="FFFFFF"/>
-                </a:solidFill>
-                <a:latin typeface="Arial"/>
-              </a:rPr>
-              <a:t>NCSU</a:t>
-            </a:r>
-          </a:p>
-        </p:txBody>
-      </p:sp>
+          <a:prstGeom prst="rect">
+            <a:avLst/>
+          </a:prstGeom>
+        </p:spPr>
+      </p:pic>
       <p:sp>
         <p:nvSpPr>
           <p:cNvPr id="3" name="TextBox 2"/>
@@ -6507,59 +6394,30 @@
           </a:p>
         </p:txBody>
       </p:sp>
-      <p:sp>
-        <p:nvSpPr>
-          <p:cNvPr id="4" name="Oval 3"/>
-          <p:cNvSpPr/>
-          <p:nvPr/>
-        </p:nvSpPr>
+      <p:pic>
+        <p:nvPicPr>
+          <p:cNvPr id="4" name="Picture 3" descr="uva.png"/>
+          <p:cNvPicPr>
+            <a:picLocks noChangeAspect="1"/>
+          </p:cNvPicPr>
+          <p:nvPr/>
+        </p:nvPicPr>
+        <p:blipFill>
+          <a:blip r:embed="rId3"/>
+          <a:stretch>
+            <a:fillRect/>
+          </a:stretch>
+        </p:blipFill>
         <p:spPr>
           <a:xfrm>
             <a:off x="2148840" y="384048"/>
             <a:ext cx="731520" cy="731520"/>
           </a:xfrm>
-          <a:prstGeom prst="ellipse">
-            <a:avLst/>
-          </a:prstGeom>
-          <a:solidFill>
-            <a:srgbClr val="232D4B"/>
-          </a:solidFill>
-          <a:ln>
-            <a:noFill/>
-          </a:ln>
-          <a:effectLst/>
-        </p:spPr>
-        <p:style>
-          <a:lnRef idx="1">
-            <a:schemeClr val="accent1"/>
-          </a:lnRef>
-          <a:fillRef idx="3">
-            <a:schemeClr val="accent1"/>
-          </a:fillRef>
-          <a:effectRef idx="2">
-            <a:schemeClr val="accent1"/>
-          </a:effectRef>
-          <a:fontRef idx="minor">
-            <a:schemeClr val="lt1"/>
-          </a:fontRef>
-        </p:style>
-        <p:txBody>
-          <a:bodyPr rtlCol="0" anchor="ctr" wrap="none" lIns="0" rIns="0"/>
-          <a:lstStyle/>
-          <a:p>
-            <a:pPr algn="ctr"/>
-            <a:r>
-              <a:rPr b="1" sz="1500">
-                <a:solidFill>
-                  <a:srgbClr val="FFFFFF"/>
-                </a:solidFill>
-                <a:latin typeface="Arial"/>
-              </a:rPr>
-              <a:t>UVA</a:t>
-            </a:r>
-          </a:p>
-        </p:txBody>
-      </p:sp>
+          <a:prstGeom prst="rect">
+            <a:avLst/>
+          </a:prstGeom>
+        </p:spPr>
+      </p:pic>
       <p:sp>
         <p:nvSpPr>
           <p:cNvPr id="5" name="TextBox 4"/>
@@ -7603,59 +7461,30 @@
         <p:nvPr/>
       </p:nvGrpSpPr>
       <p:grpSpPr/>
-      <p:sp>
-        <p:nvSpPr>
-          <p:cNvPr id="2" name="Oval 1"/>
-          <p:cNvSpPr/>
-          <p:nvPr/>
-        </p:nvSpPr>
+      <p:pic>
+        <p:nvPicPr>
+          <p:cNvPr id="2" name="Picture 1" descr="ncsu.png"/>
+          <p:cNvPicPr>
+            <a:picLocks noChangeAspect="1"/>
+          </p:cNvPicPr>
+          <p:nvPr/>
+        </p:nvPicPr>
+        <p:blipFill>
+          <a:blip r:embed="rId2"/>
+          <a:stretch>
+            <a:fillRect/>
+          </a:stretch>
+        </p:blipFill>
         <p:spPr>
           <a:xfrm>
             <a:off x="822960" y="384048"/>
             <a:ext cx="731520" cy="731520"/>
           </a:xfrm>
-          <a:prstGeom prst="ellipse">
-            <a:avLst/>
-          </a:prstGeom>
-          <a:solidFill>
-            <a:srgbClr val="CC0000"/>
-          </a:solidFill>
-          <a:ln>
-            <a:noFill/>
-          </a:ln>
-          <a:effectLst/>
-        </p:spPr>
-        <p:style>
-          <a:lnRef idx="1">
-            <a:schemeClr val="accent1"/>
-          </a:lnRef>
-          <a:fillRef idx="3">
-            <a:schemeClr val="accent1"/>
-          </a:fillRef>
-          <a:effectRef idx="2">
-            <a:schemeClr val="accent1"/>
-          </a:effectRef>
-          <a:fontRef idx="minor">
-            <a:schemeClr val="lt1"/>
-          </a:fontRef>
-        </p:style>
-        <p:txBody>
-          <a:bodyPr rtlCol="0" anchor="ctr" wrap="none" lIns="0" rIns="0"/>
-          <a:lstStyle/>
-          <a:p>
-            <a:pPr algn="ctr"/>
-            <a:r>
-              <a:rPr b="1" sz="1500">
-                <a:solidFill>
-                  <a:srgbClr val="FFFFFF"/>
-                </a:solidFill>
-                <a:latin typeface="Arial"/>
-              </a:rPr>
-              <a:t>NCSU</a:t>
-            </a:r>
-          </a:p>
-        </p:txBody>
-      </p:sp>
+          <a:prstGeom prst="rect">
+            <a:avLst/>
+          </a:prstGeom>
+        </p:spPr>
+      </p:pic>
       <p:sp>
         <p:nvSpPr>
           <p:cNvPr id="3" name="TextBox 2"/>
@@ -7691,59 +7520,30 @@
           </a:p>
         </p:txBody>
       </p:sp>
-      <p:sp>
-        <p:nvSpPr>
-          <p:cNvPr id="4" name="Oval 3"/>
-          <p:cNvSpPr/>
-          <p:nvPr/>
-        </p:nvSpPr>
+      <p:pic>
+        <p:nvPicPr>
+          <p:cNvPr id="4" name="Picture 3" descr="uva.png"/>
+          <p:cNvPicPr>
+            <a:picLocks noChangeAspect="1"/>
+          </p:cNvPicPr>
+          <p:nvPr/>
+        </p:nvPicPr>
+        <p:blipFill>
+          <a:blip r:embed="rId3"/>
+          <a:stretch>
+            <a:fillRect/>
+          </a:stretch>
+        </p:blipFill>
         <p:spPr>
           <a:xfrm>
             <a:off x="2148840" y="384048"/>
             <a:ext cx="731520" cy="731520"/>
           </a:xfrm>
-          <a:prstGeom prst="ellipse">
-            <a:avLst/>
-          </a:prstGeom>
-          <a:solidFill>
-            <a:srgbClr val="232D4B"/>
-          </a:solidFill>
-          <a:ln>
-            <a:noFill/>
-          </a:ln>
-          <a:effectLst/>
-        </p:spPr>
-        <p:style>
-          <a:lnRef idx="1">
-            <a:schemeClr val="accent1"/>
-          </a:lnRef>
-          <a:fillRef idx="3">
-            <a:schemeClr val="accent1"/>
-          </a:fillRef>
-          <a:effectRef idx="2">
-            <a:schemeClr val="accent1"/>
-          </a:effectRef>
-          <a:fontRef idx="minor">
-            <a:schemeClr val="lt1"/>
-          </a:fontRef>
-        </p:style>
-        <p:txBody>
-          <a:bodyPr rtlCol="0" anchor="ctr" wrap="none" lIns="0" rIns="0"/>
-          <a:lstStyle/>
-          <a:p>
-            <a:pPr algn="ctr"/>
-            <a:r>
-              <a:rPr b="1" sz="1500">
-                <a:solidFill>
-                  <a:srgbClr val="FFFFFF"/>
-                </a:solidFill>
-                <a:latin typeface="Arial"/>
-              </a:rPr>
-              <a:t>UVA</a:t>
-            </a:r>
-          </a:p>
-        </p:txBody>
-      </p:sp>
+          <a:prstGeom prst="rect">
+            <a:avLst/>
+          </a:prstGeom>
+        </p:spPr>
+      </p:pic>
       <p:sp>
         <p:nvSpPr>
           <p:cNvPr id="5" name="TextBox 4"/>
@@ -7823,59 +7623,30 @@
           </a:p>
         </p:txBody>
       </p:sp>
-      <p:sp>
-        <p:nvSpPr>
-          <p:cNvPr id="7" name="Oval 6"/>
-          <p:cNvSpPr/>
-          <p:nvPr/>
-        </p:nvSpPr>
+      <p:pic>
+        <p:nvPicPr>
+          <p:cNvPr id="7" name="Picture 6" descr="ncsu.png"/>
+          <p:cNvPicPr>
+            <a:picLocks noChangeAspect="1"/>
+          </p:cNvPicPr>
+          <p:nvPr/>
+        </p:nvPicPr>
+        <p:blipFill>
+          <a:blip r:embed="rId2"/>
+          <a:stretch>
+            <a:fillRect/>
+          </a:stretch>
+        </p:blipFill>
         <p:spPr>
           <a:xfrm>
             <a:off x="1097280" y="1691640"/>
             <a:ext cx="566928" cy="566928"/>
           </a:xfrm>
-          <a:prstGeom prst="ellipse">
-            <a:avLst/>
-          </a:prstGeom>
-          <a:solidFill>
-            <a:srgbClr val="CC0000"/>
-          </a:solidFill>
-          <a:ln>
-            <a:noFill/>
-          </a:ln>
-          <a:effectLst/>
-        </p:spPr>
-        <p:style>
-          <a:lnRef idx="1">
-            <a:schemeClr val="accent1"/>
-          </a:lnRef>
-          <a:fillRef idx="3">
-            <a:schemeClr val="accent1"/>
-          </a:fillRef>
-          <a:effectRef idx="2">
-            <a:schemeClr val="accent1"/>
-          </a:effectRef>
-          <a:fontRef idx="minor">
-            <a:schemeClr val="lt1"/>
-          </a:fontRef>
-        </p:style>
-        <p:txBody>
-          <a:bodyPr rtlCol="0" anchor="ctr" wrap="none" lIns="0" rIns="0"/>
-          <a:lstStyle/>
-          <a:p>
-            <a:pPr algn="ctr"/>
-            <a:r>
-              <a:rPr b="1" sz="1100">
-                <a:solidFill>
-                  <a:srgbClr val="FFFFFF"/>
-                </a:solidFill>
-                <a:latin typeface="Arial"/>
-              </a:rPr>
-              <a:t>NCSU</a:t>
-            </a:r>
-          </a:p>
-        </p:txBody>
-      </p:sp>
+          <a:prstGeom prst="rect">
+            <a:avLst/>
+          </a:prstGeom>
+        </p:spPr>
+      </p:pic>
       <p:sp>
         <p:nvSpPr>
           <p:cNvPr id="8" name="TextBox 7"/>
@@ -8270,59 +8041,30 @@
           </a:p>
         </p:txBody>
       </p:sp>
-      <p:sp>
-        <p:nvSpPr>
-          <p:cNvPr id="19" name="Oval 18"/>
-          <p:cNvSpPr/>
-          <p:nvPr/>
-        </p:nvSpPr>
+      <p:pic>
+        <p:nvPicPr>
+          <p:cNvPr id="19" name="Picture 18" descr="uva.png"/>
+          <p:cNvPicPr>
+            <a:picLocks noChangeAspect="1"/>
+          </p:cNvPicPr>
+          <p:nvPr/>
+        </p:nvPicPr>
+        <p:blipFill>
+          <a:blip r:embed="rId3"/>
+          <a:stretch>
+            <a:fillRect/>
+          </a:stretch>
+        </p:blipFill>
         <p:spPr>
           <a:xfrm>
             <a:off x="6583680" y="1691640"/>
             <a:ext cx="566928" cy="566928"/>
           </a:xfrm>
-          <a:prstGeom prst="ellipse">
-            <a:avLst/>
-          </a:prstGeom>
-          <a:solidFill>
-            <a:srgbClr val="232D4B"/>
-          </a:solidFill>
-          <a:ln>
-            <a:noFill/>
-          </a:ln>
-          <a:effectLst/>
-        </p:spPr>
-        <p:style>
-          <a:lnRef idx="1">
-            <a:schemeClr val="accent1"/>
-          </a:lnRef>
-          <a:fillRef idx="3">
-            <a:schemeClr val="accent1"/>
-          </a:fillRef>
-          <a:effectRef idx="2">
-            <a:schemeClr val="accent1"/>
-          </a:effectRef>
-          <a:fontRef idx="minor">
-            <a:schemeClr val="lt1"/>
-          </a:fontRef>
-        </p:style>
-        <p:txBody>
-          <a:bodyPr rtlCol="0" anchor="ctr" wrap="none" lIns="0" rIns="0"/>
-          <a:lstStyle/>
-          <a:p>
-            <a:pPr algn="ctr"/>
-            <a:r>
-              <a:rPr b="1" sz="1100">
-                <a:solidFill>
-                  <a:srgbClr val="FFFFFF"/>
-                </a:solidFill>
-                <a:latin typeface="Arial"/>
-              </a:rPr>
-              <a:t>UVA</a:t>
-            </a:r>
-          </a:p>
-        </p:txBody>
-      </p:sp>
+          <a:prstGeom prst="rect">
+            <a:avLst/>
+          </a:prstGeom>
+        </p:spPr>
+      </p:pic>
       <p:sp>
         <p:nvSpPr>
           <p:cNvPr id="20" name="TextBox 19"/>
@@ -8734,59 +8476,30 @@
         <p:nvPr/>
       </p:nvGrpSpPr>
       <p:grpSpPr/>
-      <p:sp>
-        <p:nvSpPr>
-          <p:cNvPr id="2" name="Oval 1"/>
-          <p:cNvSpPr/>
-          <p:nvPr/>
-        </p:nvSpPr>
+      <p:pic>
+        <p:nvPicPr>
+          <p:cNvPr id="2" name="Picture 1" descr="jsu.png"/>
+          <p:cNvPicPr>
+            <a:picLocks noChangeAspect="1"/>
+          </p:cNvPicPr>
+          <p:nvPr/>
+        </p:nvPicPr>
+        <p:blipFill>
+          <a:blip r:embed="rId2"/>
+          <a:stretch>
+            <a:fillRect/>
+          </a:stretch>
+        </p:blipFill>
         <p:spPr>
           <a:xfrm>
             <a:off x="822960" y="384048"/>
             <a:ext cx="731520" cy="731520"/>
           </a:xfrm>
-          <a:prstGeom prst="ellipse">
-            <a:avLst/>
-          </a:prstGeom>
-          <a:solidFill>
-            <a:srgbClr val="B5121B"/>
-          </a:solidFill>
-          <a:ln>
-            <a:noFill/>
-          </a:ln>
-          <a:effectLst/>
-        </p:spPr>
-        <p:style>
-          <a:lnRef idx="1">
-            <a:schemeClr val="accent1"/>
-          </a:lnRef>
-          <a:fillRef idx="3">
-            <a:schemeClr val="accent1"/>
-          </a:fillRef>
-          <a:effectRef idx="2">
-            <a:schemeClr val="accent1"/>
-          </a:effectRef>
-          <a:fontRef idx="minor">
-            <a:schemeClr val="lt1"/>
-          </a:fontRef>
-        </p:style>
-        <p:txBody>
-          <a:bodyPr rtlCol="0" anchor="ctr" wrap="none" lIns="0" rIns="0"/>
-          <a:lstStyle/>
-          <a:p>
-            <a:pPr algn="ctr"/>
-            <a:r>
-              <a:rPr b="1" sz="1500">
-                <a:solidFill>
-                  <a:srgbClr val="FFFFFF"/>
-                </a:solidFill>
-                <a:latin typeface="Arial"/>
-              </a:rPr>
-              <a:t>JSU</a:t>
-            </a:r>
-          </a:p>
-        </p:txBody>
-      </p:sp>
+          <a:prstGeom prst="rect">
+            <a:avLst/>
+          </a:prstGeom>
+        </p:spPr>
+      </p:pic>
       <p:sp>
         <p:nvSpPr>
           <p:cNvPr id="3" name="TextBox 2"/>
@@ -8822,59 +8535,30 @@
           </a:p>
         </p:txBody>
       </p:sp>
-      <p:sp>
-        <p:nvSpPr>
-          <p:cNvPr id="4" name="Oval 3"/>
-          <p:cNvSpPr/>
-          <p:nvPr/>
-        </p:nvSpPr>
+      <p:pic>
+        <p:nvPicPr>
+          <p:cNvPr id="4" name="Picture 3" descr="ndsu.png"/>
+          <p:cNvPicPr>
+            <a:picLocks noChangeAspect="1"/>
+          </p:cNvPicPr>
+          <p:nvPr/>
+        </p:nvPicPr>
+        <p:blipFill>
+          <a:blip r:embed="rId3"/>
+          <a:stretch>
+            <a:fillRect/>
+          </a:stretch>
+        </p:blipFill>
         <p:spPr>
           <a:xfrm>
             <a:off x="2148840" y="384048"/>
             <a:ext cx="731520" cy="731520"/>
           </a:xfrm>
-          <a:prstGeom prst="ellipse">
-            <a:avLst/>
-          </a:prstGeom>
-          <a:solidFill>
-            <a:srgbClr val="0A5640"/>
-          </a:solidFill>
-          <a:ln>
-            <a:noFill/>
-          </a:ln>
-          <a:effectLst/>
-        </p:spPr>
-        <p:style>
-          <a:lnRef idx="1">
-            <a:schemeClr val="accent1"/>
-          </a:lnRef>
-          <a:fillRef idx="3">
-            <a:schemeClr val="accent1"/>
-          </a:fillRef>
-          <a:effectRef idx="2">
-            <a:schemeClr val="accent1"/>
-          </a:effectRef>
-          <a:fontRef idx="minor">
-            <a:schemeClr val="lt1"/>
-          </a:fontRef>
-        </p:style>
-        <p:txBody>
-          <a:bodyPr rtlCol="0" anchor="ctr" wrap="none" lIns="0" rIns="0"/>
-          <a:lstStyle/>
-          <a:p>
-            <a:pPr algn="ctr"/>
-            <a:r>
-              <a:rPr b="1" sz="1500">
-                <a:solidFill>
-                  <a:srgbClr val="FFFFFF"/>
-                </a:solidFill>
-                <a:latin typeface="Arial"/>
-              </a:rPr>
-              <a:t>NDSU</a:t>
-            </a:r>
-          </a:p>
-        </p:txBody>
-      </p:sp>
+          <a:prstGeom prst="rect">
+            <a:avLst/>
+          </a:prstGeom>
+        </p:spPr>
+      </p:pic>
       <p:sp>
         <p:nvSpPr>
           <p:cNvPr id="5" name="TextBox 4"/>
@@ -9918,59 +9602,30 @@
         <p:nvPr/>
       </p:nvGrpSpPr>
       <p:grpSpPr/>
-      <p:sp>
-        <p:nvSpPr>
-          <p:cNvPr id="2" name="Oval 1"/>
-          <p:cNvSpPr/>
-          <p:nvPr/>
-        </p:nvSpPr>
+      <p:pic>
+        <p:nvPicPr>
+          <p:cNvPr id="2" name="Picture 1" descr="jsu.png"/>
+          <p:cNvPicPr>
+            <a:picLocks noChangeAspect="1"/>
+          </p:cNvPicPr>
+          <p:nvPr/>
+        </p:nvPicPr>
+        <p:blipFill>
+          <a:blip r:embed="rId2"/>
+          <a:stretch>
+            <a:fillRect/>
+          </a:stretch>
+        </p:blipFill>
         <p:spPr>
           <a:xfrm>
             <a:off x="822960" y="384048"/>
             <a:ext cx="731520" cy="731520"/>
           </a:xfrm>
-          <a:prstGeom prst="ellipse">
-            <a:avLst/>
-          </a:prstGeom>
-          <a:solidFill>
-            <a:srgbClr val="B5121B"/>
-          </a:solidFill>
-          <a:ln>
-            <a:noFill/>
-          </a:ln>
-          <a:effectLst/>
-        </p:spPr>
-        <p:style>
-          <a:lnRef idx="1">
-            <a:schemeClr val="accent1"/>
-          </a:lnRef>
-          <a:fillRef idx="3">
-            <a:schemeClr val="accent1"/>
-          </a:fillRef>
-          <a:effectRef idx="2">
-            <a:schemeClr val="accent1"/>
-          </a:effectRef>
-          <a:fontRef idx="minor">
-            <a:schemeClr val="lt1"/>
-          </a:fontRef>
-        </p:style>
-        <p:txBody>
-          <a:bodyPr rtlCol="0" anchor="ctr" wrap="none" lIns="0" rIns="0"/>
-          <a:lstStyle/>
-          <a:p>
-            <a:pPr algn="ctr"/>
-            <a:r>
-              <a:rPr b="1" sz="1500">
-                <a:solidFill>
-                  <a:srgbClr val="FFFFFF"/>
-                </a:solidFill>
-                <a:latin typeface="Arial"/>
-              </a:rPr>
-              <a:t>JSU</a:t>
-            </a:r>
-          </a:p>
-        </p:txBody>
-      </p:sp>
+          <a:prstGeom prst="rect">
+            <a:avLst/>
+          </a:prstGeom>
+        </p:spPr>
+      </p:pic>
       <p:sp>
         <p:nvSpPr>
           <p:cNvPr id="3" name="TextBox 2"/>
@@ -10006,59 +9661,30 @@
           </a:p>
         </p:txBody>
       </p:sp>
-      <p:sp>
-        <p:nvSpPr>
-          <p:cNvPr id="4" name="Oval 3"/>
-          <p:cNvSpPr/>
-          <p:nvPr/>
-        </p:nvSpPr>
+      <p:pic>
+        <p:nvPicPr>
+          <p:cNvPr id="4" name="Picture 3" descr="ndsu.png"/>
+          <p:cNvPicPr>
+            <a:picLocks noChangeAspect="1"/>
+          </p:cNvPicPr>
+          <p:nvPr/>
+        </p:nvPicPr>
+        <p:blipFill>
+          <a:blip r:embed="rId3"/>
+          <a:stretch>
+            <a:fillRect/>
+          </a:stretch>
+        </p:blipFill>
         <p:spPr>
           <a:xfrm>
             <a:off x="2148840" y="384048"/>
             <a:ext cx="731520" cy="731520"/>
           </a:xfrm>
-          <a:prstGeom prst="ellipse">
-            <a:avLst/>
-          </a:prstGeom>
-          <a:solidFill>
-            <a:srgbClr val="0A5640"/>
-          </a:solidFill>
-          <a:ln>
-            <a:noFill/>
-          </a:ln>
-          <a:effectLst/>
-        </p:spPr>
-        <p:style>
-          <a:lnRef idx="1">
-            <a:schemeClr val="accent1"/>
-          </a:lnRef>
-          <a:fillRef idx="3">
-            <a:schemeClr val="accent1"/>
-          </a:fillRef>
-          <a:effectRef idx="2">
-            <a:schemeClr val="accent1"/>
-          </a:effectRef>
-          <a:fontRef idx="minor">
-            <a:schemeClr val="lt1"/>
-          </a:fontRef>
-        </p:style>
-        <p:txBody>
-          <a:bodyPr rtlCol="0" anchor="ctr" wrap="none" lIns="0" rIns="0"/>
-          <a:lstStyle/>
-          <a:p>
-            <a:pPr algn="ctr"/>
-            <a:r>
-              <a:rPr b="1" sz="1500">
-                <a:solidFill>
-                  <a:srgbClr val="FFFFFF"/>
-                </a:solidFill>
-                <a:latin typeface="Arial"/>
-              </a:rPr>
-              <a:t>NDSU</a:t>
-            </a:r>
-          </a:p>
-        </p:txBody>
-      </p:sp>
+          <a:prstGeom prst="rect">
+            <a:avLst/>
+          </a:prstGeom>
+        </p:spPr>
+      </p:pic>
       <p:sp>
         <p:nvSpPr>
           <p:cNvPr id="5" name="TextBox 4"/>
@@ -10138,59 +9764,30 @@
           </a:p>
         </p:txBody>
       </p:sp>
-      <p:sp>
-        <p:nvSpPr>
-          <p:cNvPr id="7" name="Oval 6"/>
-          <p:cNvSpPr/>
-          <p:nvPr/>
-        </p:nvSpPr>
+      <p:pic>
+        <p:nvPicPr>
+          <p:cNvPr id="7" name="Picture 6" descr="jsu.png"/>
+          <p:cNvPicPr>
+            <a:picLocks noChangeAspect="1"/>
+          </p:cNvPicPr>
+          <p:nvPr/>
+        </p:nvPicPr>
+        <p:blipFill>
+          <a:blip r:embed="rId2"/>
+          <a:stretch>
+            <a:fillRect/>
+          </a:stretch>
+        </p:blipFill>
         <p:spPr>
           <a:xfrm>
             <a:off x="1097280" y="1691640"/>
             <a:ext cx="566928" cy="566928"/>
           </a:xfrm>
-          <a:prstGeom prst="ellipse">
-            <a:avLst/>
-          </a:prstGeom>
-          <a:solidFill>
-            <a:srgbClr val="B5121B"/>
-          </a:solidFill>
-          <a:ln>
-            <a:noFill/>
-          </a:ln>
-          <a:effectLst/>
-        </p:spPr>
-        <p:style>
-          <a:lnRef idx="1">
-            <a:schemeClr val="accent1"/>
-          </a:lnRef>
-          <a:fillRef idx="3">
-            <a:schemeClr val="accent1"/>
-          </a:fillRef>
-          <a:effectRef idx="2">
-            <a:schemeClr val="accent1"/>
-          </a:effectRef>
-          <a:fontRef idx="minor">
-            <a:schemeClr val="lt1"/>
-          </a:fontRef>
-        </p:style>
-        <p:txBody>
-          <a:bodyPr rtlCol="0" anchor="ctr" wrap="none" lIns="0" rIns="0"/>
-          <a:lstStyle/>
-          <a:p>
-            <a:pPr algn="ctr"/>
-            <a:r>
-              <a:rPr b="1" sz="1100">
-                <a:solidFill>
-                  <a:srgbClr val="FFFFFF"/>
-                </a:solidFill>
-                <a:latin typeface="Arial"/>
-              </a:rPr>
-              <a:t>JSU</a:t>
-            </a:r>
-          </a:p>
-        </p:txBody>
-      </p:sp>
+          <a:prstGeom prst="rect">
+            <a:avLst/>
+          </a:prstGeom>
+        </p:spPr>
+      </p:pic>
       <p:sp>
         <p:nvSpPr>
           <p:cNvPr id="8" name="TextBox 7"/>
@@ -10585,59 +10182,30 @@
           </a:p>
         </p:txBody>
       </p:sp>
-      <p:sp>
-        <p:nvSpPr>
-          <p:cNvPr id="19" name="Oval 18"/>
-          <p:cNvSpPr/>
-          <p:nvPr/>
-        </p:nvSpPr>
+      <p:pic>
+        <p:nvPicPr>
+          <p:cNvPr id="19" name="Picture 18" descr="ndsu.png"/>
+          <p:cNvPicPr>
+            <a:picLocks noChangeAspect="1"/>
+          </p:cNvPicPr>
+          <p:nvPr/>
+        </p:nvPicPr>
+        <p:blipFill>
+          <a:blip r:embed="rId3"/>
+          <a:stretch>
+            <a:fillRect/>
+          </a:stretch>
+        </p:blipFill>
         <p:spPr>
           <a:xfrm>
             <a:off x="6583680" y="1691640"/>
             <a:ext cx="566928" cy="566928"/>
           </a:xfrm>
-          <a:prstGeom prst="ellipse">
-            <a:avLst/>
-          </a:prstGeom>
-          <a:solidFill>
-            <a:srgbClr val="0A5640"/>
-          </a:solidFill>
-          <a:ln>
-            <a:noFill/>
-          </a:ln>
-          <a:effectLst/>
-        </p:spPr>
-        <p:style>
-          <a:lnRef idx="1">
-            <a:schemeClr val="accent1"/>
-          </a:lnRef>
-          <a:fillRef idx="3">
-            <a:schemeClr val="accent1"/>
-          </a:fillRef>
-          <a:effectRef idx="2">
-            <a:schemeClr val="accent1"/>
-          </a:effectRef>
-          <a:fontRef idx="minor">
-            <a:schemeClr val="lt1"/>
-          </a:fontRef>
-        </p:style>
-        <p:txBody>
-          <a:bodyPr rtlCol="0" anchor="ctr" wrap="none" lIns="0" rIns="0"/>
-          <a:lstStyle/>
-          <a:p>
-            <a:pPr algn="ctr"/>
-            <a:r>
-              <a:rPr b="1" sz="1100">
-                <a:solidFill>
-                  <a:srgbClr val="FFFFFF"/>
-                </a:solidFill>
-                <a:latin typeface="Arial"/>
-              </a:rPr>
-              <a:t>NDSU</a:t>
-            </a:r>
-          </a:p>
-        </p:txBody>
-      </p:sp>
+          <a:prstGeom prst="rect">
+            <a:avLst/>
+          </a:prstGeom>
+        </p:spPr>
+      </p:pic>
       <p:sp>
         <p:nvSpPr>
           <p:cNvPr id="20" name="TextBox 19"/>
@@ -11178,7 +10746,7 @@
             <a:avLst/>
           </a:prstGeom>
           <a:solidFill>
-            <a:srgbClr val="7BAFD4"/>
+            <a:srgbClr val="FFFFFF"/>
           </a:solidFill>
           <a:ln>
             <a:noFill/>
@@ -11200,25 +10768,40 @@
           </a:fontRef>
         </p:style>
         <p:txBody>
-          <a:bodyPr rtlCol="0" anchor="ctr" wrap="none" lIns="0" rIns="0"/>
+          <a:bodyPr rtlCol="0" anchor="ctr"/>
           <a:lstStyle/>
           <a:p>
             <a:pPr algn="ctr"/>
-            <a:r>
-              <a:rPr b="1" sz="1100">
-                <a:solidFill>
-                  <a:srgbClr val="16273D"/>
-                </a:solidFill>
-                <a:latin typeface="Arial"/>
-              </a:rPr>
-              <a:t>UNC</a:t>
-            </a:r>
-          </a:p>
-        </p:txBody>
-      </p:sp>
-      <p:sp>
-        <p:nvSpPr>
-          <p:cNvPr id="6" name="Oval 5"/>
+          </a:p>
+        </p:txBody>
+      </p:sp>
+      <p:pic>
+        <p:nvPicPr>
+          <p:cNvPr id="6" name="Picture 5" descr="unc.png"/>
+          <p:cNvPicPr>
+            <a:picLocks noChangeAspect="1"/>
+          </p:cNvPicPr>
+          <p:nvPr/>
+        </p:nvPicPr>
+        <p:blipFill>
+          <a:blip r:embed="rId2"/>
+          <a:stretch>
+            <a:fillRect/>
+          </a:stretch>
+        </p:blipFill>
+        <p:spPr>
+          <a:xfrm>
+            <a:off x="1113739" y="2567635"/>
+            <a:ext cx="497433" cy="497433"/>
+          </a:xfrm>
+          <a:prstGeom prst="rect">
+            <a:avLst/>
+          </a:prstGeom>
+        </p:spPr>
+      </p:pic>
+      <p:sp>
+        <p:nvSpPr>
+          <p:cNvPr id="7" name="Oval 6"/>
           <p:cNvSpPr/>
           <p:nvPr/>
         </p:nvSpPr>
@@ -11231,7 +10814,7 @@
             <a:avLst/>
           </a:prstGeom>
           <a:solidFill>
-            <a:srgbClr val="4D1979"/>
+            <a:srgbClr val="FFFFFF"/>
           </a:solidFill>
           <a:ln>
             <a:noFill/>
@@ -11253,25 +10836,40 @@
           </a:fontRef>
         </p:style>
         <p:txBody>
-          <a:bodyPr rtlCol="0" anchor="ctr" wrap="none" lIns="0" rIns="0"/>
+          <a:bodyPr rtlCol="0" anchor="ctr"/>
           <a:lstStyle/>
           <a:p>
             <a:pPr algn="ctr"/>
-            <a:r>
-              <a:rPr b="1" sz="1100">
-                <a:solidFill>
-                  <a:srgbClr val="FFFFFF"/>
-                </a:solidFill>
-                <a:latin typeface="Arial"/>
-              </a:rPr>
-              <a:t>TCU</a:t>
-            </a:r>
-          </a:p>
-        </p:txBody>
-      </p:sp>
-      <p:sp>
-        <p:nvSpPr>
-          <p:cNvPr id="7" name="TextBox 6"/>
+          </a:p>
+        </p:txBody>
+      </p:sp>
+      <p:pic>
+        <p:nvPicPr>
+          <p:cNvPr id="8" name="Picture 7" descr="tcu.png"/>
+          <p:cNvPicPr>
+            <a:picLocks noChangeAspect="1"/>
+          </p:cNvPicPr>
+          <p:nvPr/>
+        </p:nvPicPr>
+        <p:blipFill>
+          <a:blip r:embed="rId3"/>
+          <a:stretch>
+            <a:fillRect/>
+          </a:stretch>
+        </p:blipFill>
+        <p:spPr>
+          <a:xfrm>
+            <a:off x="1890979" y="2567635"/>
+            <a:ext cx="497433" cy="497433"/>
+          </a:xfrm>
+          <a:prstGeom prst="rect">
+            <a:avLst/>
+          </a:prstGeom>
+        </p:spPr>
+      </p:pic>
+      <p:sp>
+        <p:nvSpPr>
+          <p:cNvPr id="9" name="TextBox 8"/>
           <p:cNvSpPr txBox="1"/>
           <p:nvPr/>
         </p:nvSpPr>
@@ -11306,7 +10904,7 @@
       </p:sp>
       <p:sp>
         <p:nvSpPr>
-          <p:cNvPr id="8" name="TextBox 7"/>
+          <p:cNvPr id="10" name="TextBox 9"/>
           <p:cNvSpPr txBox="1"/>
           <p:nvPr/>
         </p:nvSpPr>
@@ -11341,7 +10939,7 @@
       </p:sp>
       <p:sp>
         <p:nvSpPr>
-          <p:cNvPr id="9" name="TextBox 8"/>
+          <p:cNvPr id="11" name="TextBox 10"/>
           <p:cNvSpPr txBox="1"/>
           <p:nvPr/>
         </p:nvSpPr>
@@ -11376,7 +10974,7 @@
       </p:sp>
       <p:sp>
         <p:nvSpPr>
-          <p:cNvPr id="10" name="TextBox 9"/>
+          <p:cNvPr id="12" name="TextBox 11"/>
           <p:cNvSpPr txBox="1"/>
           <p:nvPr/>
         </p:nvSpPr>
@@ -11411,7 +11009,7 @@
       </p:sp>
       <p:sp>
         <p:nvSpPr>
-          <p:cNvPr id="11" name="Rounded Rectangle 10"/>
+          <p:cNvPr id="13" name="Rounded Rectangle 12"/>
           <p:cNvSpPr/>
           <p:nvPr/>
         </p:nvSpPr>
@@ -11455,7 +11053,7 @@
       </p:sp>
       <p:sp>
         <p:nvSpPr>
-          <p:cNvPr id="12" name="Oval 11"/>
+          <p:cNvPr id="14" name="Oval 13"/>
           <p:cNvSpPr/>
           <p:nvPr/>
         </p:nvSpPr>
@@ -11468,7 +11066,7 @@
             <a:avLst/>
           </a:prstGeom>
           <a:solidFill>
-            <a:srgbClr val="CC0000"/>
+            <a:srgbClr val="FFFFFF"/>
           </a:solidFill>
           <a:ln>
             <a:noFill/>
@@ -11490,25 +11088,40 @@
           </a:fontRef>
         </p:style>
         <p:txBody>
-          <a:bodyPr rtlCol="0" anchor="ctr" wrap="none" lIns="0" rIns="0"/>
+          <a:bodyPr rtlCol="0" anchor="ctr"/>
           <a:lstStyle/>
           <a:p>
             <a:pPr algn="ctr"/>
-            <a:r>
-              <a:rPr b="1" sz="1100">
-                <a:solidFill>
-                  <a:srgbClr val="FFFFFF"/>
-                </a:solidFill>
-                <a:latin typeface="Arial"/>
-              </a:rPr>
-              <a:t>NCSU</a:t>
-            </a:r>
-          </a:p>
-        </p:txBody>
-      </p:sp>
-      <p:sp>
-        <p:nvSpPr>
-          <p:cNvPr id="13" name="Oval 12"/>
+          </a:p>
+        </p:txBody>
+      </p:sp>
+      <p:pic>
+        <p:nvPicPr>
+          <p:cNvPr id="15" name="Picture 14" descr="ncsu.png"/>
+          <p:cNvPicPr>
+            <a:picLocks noChangeAspect="1"/>
+          </p:cNvPicPr>
+          <p:nvPr/>
+        </p:nvPicPr>
+        <p:blipFill>
+          <a:blip r:embed="rId4"/>
+          <a:stretch>
+            <a:fillRect/>
+          </a:stretch>
+        </p:blipFill>
+        <p:spPr>
+          <a:xfrm>
+            <a:off x="1113739" y="3829507"/>
+            <a:ext cx="497433" cy="497433"/>
+          </a:xfrm>
+          <a:prstGeom prst="rect">
+            <a:avLst/>
+          </a:prstGeom>
+        </p:spPr>
+      </p:pic>
+      <p:sp>
+        <p:nvSpPr>
+          <p:cNvPr id="16" name="Oval 15"/>
           <p:cNvSpPr/>
           <p:nvPr/>
         </p:nvSpPr>
@@ -11521,7 +11134,7 @@
             <a:avLst/>
           </a:prstGeom>
           <a:solidFill>
-            <a:srgbClr val="232D4B"/>
+            <a:srgbClr val="FFFFFF"/>
           </a:solidFill>
           <a:ln>
             <a:noFill/>
@@ -11543,25 +11156,40 @@
           </a:fontRef>
         </p:style>
         <p:txBody>
-          <a:bodyPr rtlCol="0" anchor="ctr" wrap="none" lIns="0" rIns="0"/>
+          <a:bodyPr rtlCol="0" anchor="ctr"/>
           <a:lstStyle/>
           <a:p>
             <a:pPr algn="ctr"/>
-            <a:r>
-              <a:rPr b="1" sz="1100">
-                <a:solidFill>
-                  <a:srgbClr val="FFFFFF"/>
-                </a:solidFill>
-                <a:latin typeface="Arial"/>
-              </a:rPr>
-              <a:t>UVA</a:t>
-            </a:r>
-          </a:p>
-        </p:txBody>
-      </p:sp>
-      <p:sp>
-        <p:nvSpPr>
-          <p:cNvPr id="14" name="TextBox 13"/>
+          </a:p>
+        </p:txBody>
+      </p:sp>
+      <p:pic>
+        <p:nvPicPr>
+          <p:cNvPr id="17" name="Picture 16" descr="uva.png"/>
+          <p:cNvPicPr>
+            <a:picLocks noChangeAspect="1"/>
+          </p:cNvPicPr>
+          <p:nvPr/>
+        </p:nvPicPr>
+        <p:blipFill>
+          <a:blip r:embed="rId5"/>
+          <a:stretch>
+            <a:fillRect/>
+          </a:stretch>
+        </p:blipFill>
+        <p:spPr>
+          <a:xfrm>
+            <a:off x="1890979" y="3829507"/>
+            <a:ext cx="497433" cy="497433"/>
+          </a:xfrm>
+          <a:prstGeom prst="rect">
+            <a:avLst/>
+          </a:prstGeom>
+        </p:spPr>
+      </p:pic>
+      <p:sp>
+        <p:nvSpPr>
+          <p:cNvPr id="18" name="TextBox 17"/>
           <p:cNvSpPr txBox="1"/>
           <p:nvPr/>
         </p:nvSpPr>
@@ -11596,7 +11224,7 @@
       </p:sp>
       <p:sp>
         <p:nvSpPr>
-          <p:cNvPr id="15" name="TextBox 14"/>
+          <p:cNvPr id="19" name="TextBox 18"/>
           <p:cNvSpPr txBox="1"/>
           <p:nvPr/>
         </p:nvSpPr>
@@ -11631,7 +11259,7 @@
       </p:sp>
       <p:sp>
         <p:nvSpPr>
-          <p:cNvPr id="16" name="TextBox 15"/>
+          <p:cNvPr id="20" name="TextBox 19"/>
           <p:cNvSpPr txBox="1"/>
           <p:nvPr/>
         </p:nvSpPr>
@@ -11666,7 +11294,7 @@
       </p:sp>
       <p:sp>
         <p:nvSpPr>
-          <p:cNvPr id="17" name="TextBox 16"/>
+          <p:cNvPr id="21" name="TextBox 20"/>
           <p:cNvSpPr txBox="1"/>
           <p:nvPr/>
         </p:nvSpPr>
@@ -11701,7 +11329,7 @@
       </p:sp>
       <p:sp>
         <p:nvSpPr>
-          <p:cNvPr id="18" name="Rounded Rectangle 17"/>
+          <p:cNvPr id="22" name="Rounded Rectangle 21"/>
           <p:cNvSpPr/>
           <p:nvPr/>
         </p:nvSpPr>
@@ -11745,7 +11373,7 @@
       </p:sp>
       <p:sp>
         <p:nvSpPr>
-          <p:cNvPr id="19" name="Oval 18"/>
+          <p:cNvPr id="23" name="Oval 22"/>
           <p:cNvSpPr/>
           <p:nvPr/>
         </p:nvSpPr>
@@ -11758,7 +11386,7 @@
             <a:avLst/>
           </a:prstGeom>
           <a:solidFill>
-            <a:srgbClr val="B5121B"/>
+            <a:srgbClr val="FFFFFF"/>
           </a:solidFill>
           <a:ln>
             <a:noFill/>
@@ -11780,25 +11408,40 @@
           </a:fontRef>
         </p:style>
         <p:txBody>
-          <a:bodyPr rtlCol="0" anchor="ctr" wrap="none" lIns="0" rIns="0"/>
+          <a:bodyPr rtlCol="0" anchor="ctr"/>
           <a:lstStyle/>
           <a:p>
             <a:pPr algn="ctr"/>
-            <a:r>
-              <a:rPr b="1" sz="1100">
-                <a:solidFill>
-                  <a:srgbClr val="FFFFFF"/>
-                </a:solidFill>
-                <a:latin typeface="Arial"/>
-              </a:rPr>
-              <a:t>JSU</a:t>
-            </a:r>
-          </a:p>
-        </p:txBody>
-      </p:sp>
-      <p:sp>
-        <p:nvSpPr>
-          <p:cNvPr id="20" name="Oval 19"/>
+          </a:p>
+        </p:txBody>
+      </p:sp>
+      <p:pic>
+        <p:nvPicPr>
+          <p:cNvPr id="24" name="Picture 23" descr="jsu.png"/>
+          <p:cNvPicPr>
+            <a:picLocks noChangeAspect="1"/>
+          </p:cNvPicPr>
+          <p:nvPr/>
+        </p:nvPicPr>
+        <p:blipFill>
+          <a:blip r:embed="rId6"/>
+          <a:stretch>
+            <a:fillRect/>
+          </a:stretch>
+        </p:blipFill>
+        <p:spPr>
+          <a:xfrm>
+            <a:off x="1113739" y="5091379"/>
+            <a:ext cx="497433" cy="497433"/>
+          </a:xfrm>
+          <a:prstGeom prst="rect">
+            <a:avLst/>
+          </a:prstGeom>
+        </p:spPr>
+      </p:pic>
+      <p:sp>
+        <p:nvSpPr>
+          <p:cNvPr id="25" name="Oval 24"/>
           <p:cNvSpPr/>
           <p:nvPr/>
         </p:nvSpPr>
@@ -11811,7 +11454,7 @@
             <a:avLst/>
           </a:prstGeom>
           <a:solidFill>
-            <a:srgbClr val="0A5640"/>
+            <a:srgbClr val="FFFFFF"/>
           </a:solidFill>
           <a:ln>
             <a:noFill/>
@@ -11833,25 +11476,40 @@
           </a:fontRef>
         </p:style>
         <p:txBody>
-          <a:bodyPr rtlCol="0" anchor="ctr" wrap="none" lIns="0" rIns="0"/>
+          <a:bodyPr rtlCol="0" anchor="ctr"/>
           <a:lstStyle/>
           <a:p>
             <a:pPr algn="ctr"/>
-            <a:r>
-              <a:rPr b="1" sz="1100">
-                <a:solidFill>
-                  <a:srgbClr val="FFFFFF"/>
-                </a:solidFill>
-                <a:latin typeface="Arial"/>
-              </a:rPr>
-              <a:t>NDSU</a:t>
-            </a:r>
-          </a:p>
-        </p:txBody>
-      </p:sp>
-      <p:sp>
-        <p:nvSpPr>
-          <p:cNvPr id="21" name="TextBox 20"/>
+          </a:p>
+        </p:txBody>
+      </p:sp>
+      <p:pic>
+        <p:nvPicPr>
+          <p:cNvPr id="26" name="Picture 25" descr="ndsu.png"/>
+          <p:cNvPicPr>
+            <a:picLocks noChangeAspect="1"/>
+          </p:cNvPicPr>
+          <p:nvPr/>
+        </p:nvPicPr>
+        <p:blipFill>
+          <a:blip r:embed="rId7"/>
+          <a:stretch>
+            <a:fillRect/>
+          </a:stretch>
+        </p:blipFill>
+        <p:spPr>
+          <a:xfrm>
+            <a:off x="1890979" y="5091379"/>
+            <a:ext cx="497433" cy="497433"/>
+          </a:xfrm>
+          <a:prstGeom prst="rect">
+            <a:avLst/>
+          </a:prstGeom>
+        </p:spPr>
+      </p:pic>
+      <p:sp>
+        <p:nvSpPr>
+          <p:cNvPr id="27" name="TextBox 26"/>
           <p:cNvSpPr txBox="1"/>
           <p:nvPr/>
         </p:nvSpPr>
@@ -11886,7 +11544,7 @@
       </p:sp>
       <p:sp>
         <p:nvSpPr>
-          <p:cNvPr id="22" name="TextBox 21"/>
+          <p:cNvPr id="28" name="TextBox 27"/>
           <p:cNvSpPr txBox="1"/>
           <p:nvPr/>
         </p:nvSpPr>
@@ -11921,7 +11579,7 @@
       </p:sp>
       <p:sp>
         <p:nvSpPr>
-          <p:cNvPr id="23" name="TextBox 22"/>
+          <p:cNvPr id="29" name="TextBox 28"/>
           <p:cNvSpPr txBox="1"/>
           <p:nvPr/>
         </p:nvSpPr>
@@ -11956,7 +11614,7 @@
       </p:sp>
       <p:sp>
         <p:nvSpPr>
-          <p:cNvPr id="24" name="TextBox 23"/>
+          <p:cNvPr id="30" name="TextBox 29"/>
           <p:cNvSpPr txBox="1"/>
           <p:nvPr/>
         </p:nvSpPr>
@@ -11991,7 +11649,7 @@
       </p:sp>
       <p:sp>
         <p:nvSpPr>
-          <p:cNvPr id="25" name="TextBox 24"/>
+          <p:cNvPr id="31" name="TextBox 30"/>
           <p:cNvSpPr txBox="1"/>
           <p:nvPr/>
         </p:nvSpPr>

--- a/decks/2026_Week0_Episode1.pptx
+++ b/decks/2026_Week0_Episode1.pptx
@@ -4163,7 +4163,7 @@
                 </a:solidFill>
                 <a:latin typeface="Arial"/>
               </a:rPr>
-              <a:t>Machine = ESPN 2026 preseason FPI + 2.5 HFA, σ 13.5 · lines as of Aug 18 · model plays graded vs first-seen lines</a:t>
+              <a:t>Machine = ESPN 2026 preseason FPI + 2.5 HFA, empirical margin curve (σ 17.9, 2021–25 fit) · lines as of Aug 18 · model plays graded vs first-seen lines</a:t>
             </a:r>
           </a:p>
         </p:txBody>
@@ -7260,7 +7260,7 @@
         <p:spPr>
           <a:xfrm>
             <a:off x="8046720" y="4892040"/>
-            <a:ext cx="2082088" cy="384048"/>
+            <a:ext cx="1961388" cy="384048"/>
           </a:xfrm>
           <a:prstGeom prst="roundRect">
             <a:avLst/>
@@ -7325,7 +7325,7 @@
                 </a:solidFill>
                 <a:latin typeface="Arial"/>
               </a:rPr>
-              <a:t>UVA 69%</a:t>
+              <a:t>UVA 65%</a:t>
             </a:r>
           </a:p>
         </p:txBody>
@@ -7360,7 +7360,7 @@
                 </a:solidFill>
                 <a:latin typeface="Arial"/>
               </a:rPr>
-              <a:t>31% NCSU</a:t>
+              <a:t>35% NCSU</a:t>
             </a:r>
           </a:p>
         </p:txBody>
@@ -9401,7 +9401,7 @@
         <p:spPr>
           <a:xfrm>
             <a:off x="8046720" y="4892040"/>
-            <a:ext cx="1750161" cy="384048"/>
+            <a:ext cx="1719986" cy="384048"/>
           </a:xfrm>
           <a:prstGeom prst="roundRect">
             <a:avLst/>
@@ -9466,7 +9466,7 @@
                 </a:solidFill>
                 <a:latin typeface="Arial"/>
               </a:rPr>
-              <a:t>NDSU 58%</a:t>
+              <a:t>NDSU 57%</a:t>
             </a:r>
           </a:p>
         </p:txBody>
@@ -9501,7 +9501,7 @@
                 </a:solidFill>
                 <a:latin typeface="Arial"/>
               </a:rPr>
-              <a:t>42% JSU</a:t>
+              <a:t>43% JSU</a:t>
             </a:r>
           </a:p>
         </p:txBody>

--- a/decks/2026_Week0_Episode1.pptx
+++ b/decks/2026_Week0_Episode1.pptx
@@ -5641,7 +5641,7 @@
                 </a:solidFill>
                 <a:latin typeface="Arial"/>
               </a:rPr>
-              <a:t>QB — Maryland grad; 2,881 yds/15 TD in 2024; Belichick's pick</a:t>
+              <a:t>QB — Maryland grad; 2,881 yds/15 TD in '24; '25 at Wisconsin lost to injury (7/16, 113 yds); Belichick's pick</a:t>
             </a:r>
           </a:p>
         </p:txBody>
@@ -5711,7 +5711,7 @@
                 </a:solidFill>
                 <a:latin typeface="Arial"/>
               </a:rPr>
-              <a:t>RB — Corey's key, but see the run-front matchup</a:t>
+              <a:t>RB — 2025: 464 yds at 5.5/carry, 3 total TD — Corey's key, but see the run-front matchup</a:t>
             </a:r>
           </a:p>
         </p:txBody>
@@ -5781,7 +5781,7 @@
                 </a:solidFill>
                 <a:latin typeface="Arial"/>
               </a:rPr>
-              <a:t>WR — the X</a:t>
+              <a:t>WR — the X; 2025: 60 rec, 671 yds, 6 TD</a:t>
             </a:r>
           </a:p>
         </p:txBody>
@@ -5851,7 +5851,7 @@
                 </a:solidFill>
                 <a:latin typeface="Arial"/>
               </a:rPr>
-              <a:t>slot</a:t>
+              <a:t>slot — 2025 at Wisconsin: 26 rec, 211 yds; 129 rush yds, 1 TD</a:t>
             </a:r>
           </a:p>
         </p:txBody>
@@ -6059,7 +6059,7 @@
                 </a:solidFill>
                 <a:latin typeface="Arial"/>
               </a:rPr>
-              <a:t>QB — grad transfer, first year as the guy post-Hoover</a:t>
+              <a:t>QB — Harvard grad transfer; 2025: 61.6%, 2,829 yds, 25-7; first year as the guy post-Hoover</a:t>
             </a:r>
           </a:p>
         </p:txBody>
@@ -6129,7 +6129,7 @@
                 </a:solidFill>
                 <a:latin typeface="Arial"/>
               </a:rPr>
-              <a:t>WR</a:t>
+              <a:t>WR — 2025: 54 rec, 730 yds, 7 TD (13.5 avg)</a:t>
             </a:r>
           </a:p>
         </p:txBody>
@@ -6199,7 +6199,7 @@
                 </a:solidFill>
                 <a:latin typeface="Arial"/>
               </a:rPr>
-              <a:t>TE</a:t>
+              <a:t>TE — 2025: just 1 catch (a TD)</a:t>
             </a:r>
           </a:p>
         </p:txBody>
@@ -6269,7 +6269,7 @@
                 </a:solidFill>
                 <a:latin typeface="Arial"/>
               </a:rPr>
-              <a:t>NT — anchors the #28 run front</a:t>
+              <a:t>NT — anchors the #28 run front; 2025: 26 tkl, 2 TFL, 1 sack</a:t>
             </a:r>
           </a:p>
         </p:txBody>
@@ -7782,7 +7782,7 @@
                 </a:solidFill>
                 <a:latin typeface="Arial"/>
               </a:rPr>
-              <a:t>QB — yr 3; 3,105 yds, 25 TD at 68.8%; top-5 returning ACC QB</a:t>
+              <a:t>QB — yr 3; 2025: 3,105 yds, 25-9 at 68.8%; top-5 returning ACC QB</a:t>
             </a:r>
           </a:p>
         </p:txBody>
@@ -7852,7 +7852,7 @@
                 </a:solidFill>
                 <a:latin typeface="Arial"/>
               </a:rPr>
-              <a:t>RB</a:t>
+              <a:t>RB — 2025: 595 yds at 5.6/carry, 4 TD, plus 15 catches (Jayden on the stat sheet)</a:t>
             </a:r>
           </a:p>
         </p:txBody>
@@ -7922,7 +7922,7 @@
                 </a:solidFill>
                 <a:latin typeface="Arial"/>
               </a:rPr>
-              <a:t>WR</a:t>
+              <a:t>WR — Miami transfer; 2025: 13 rec, 178 yds, 1 TD</a:t>
             </a:r>
           </a:p>
         </p:txBody>
@@ -7992,7 +7992,7 @@
                 </a:solidFill>
                 <a:latin typeface="Arial"/>
               </a:rPr>
-              <a:t>DE</a:t>
+              <a:t>DE — 2025: 6 tkl, 2 TFL, 1 sack</a:t>
             </a:r>
           </a:p>
         </p:txBody>
@@ -8200,7 +8200,7 @@
                 </a:solidFill>
                 <a:latin typeface="Arial"/>
               </a:rPr>
-              <a:t>QB — Missouri transfer; named starter Jul 19; 11-9 TD-INT is the risk</a:t>
+              <a:t>QB — Missouri transfer; 2025: 67.4%, 1,946 yds, 11-9 TD-INT (+6 rush TD); named starter Jul 19</a:t>
             </a:r>
           </a:p>
         </p:txBody>
@@ -8270,7 +8270,7 @@
                 </a:solidFill>
                 <a:latin typeface="Arial"/>
               </a:rPr>
-              <a:t>RB</a:t>
+              <a:t>RB — Tennessee transfer; 2025: 290 yds, 7 TD on 70 carries</a:t>
             </a:r>
           </a:p>
         </p:txBody>
@@ -8340,7 +8340,7 @@
                 </a:solidFill>
                 <a:latin typeface="Arial"/>
               </a:rPr>
-              <a:t>WR</a:t>
+              <a:t>WR — UCLA transfer; 2025: 26 rec, 274 yds</a:t>
             </a:r>
           </a:p>
         </p:txBody>
@@ -8410,7 +8410,7 @@
                 </a:solidFill>
                 <a:latin typeface="Arial"/>
               </a:rPr>
-              <a:t>DE</a:t>
+              <a:t>DE — 2025: 44 tkl, 5.5 TFL, 3.5 sacks</a:t>
             </a:r>
           </a:p>
         </p:txBody>
@@ -9923,7 +9923,7 @@
                 </a:solidFill>
                 <a:latin typeface="Arial"/>
               </a:rPr>
-              <a:t>QB — 2,600+ combined yds; dual-threat = Bison D's soft spot</a:t>
+              <a:t>QB — 2025: 1,514 pass + 1,075 rush (5.9/carry), 16 total TD; dual-threat = Bison D's soft spot</a:t>
             </a:r>
           </a:p>
         </p:txBody>
@@ -9993,7 +9993,7 @@
                 </a:solidFill>
                 <a:latin typeface="Arial"/>
               </a:rPr>
-              <a:t>RB — the 'unleash' key</a:t>
+              <a:t>RB — the 'unleash' key; 2025: 201 yds on 51 carries behind Creel</a:t>
             </a:r>
           </a:p>
         </p:txBody>
@@ -10063,7 +10063,7 @@
                 </a:solidFill>
                 <a:latin typeface="Arial"/>
               </a:rPr>
-              <a:t>DT</a:t>
+              <a:t>DT — 2025: 20 tkl, 4.5 TFL, 2 sacks</a:t>
             </a:r>
           </a:p>
         </p:txBody>
@@ -10133,7 +10133,7 @@
                 </a:solidFill>
                 <a:latin typeface="Arial"/>
               </a:rPr>
-              <a:t>EDGE</a:t>
+              <a:t>EDGE — 2025: 14 tkl, 1.5 TFL, 1 INT</a:t>
             </a:r>
           </a:p>
         </p:txBody>
@@ -10341,7 +10341,7 @@
                 </a:solidFill>
                 <a:latin typeface="Arial"/>
               </a:rPr>
-              <a:t>QB — FIRST career start; 'strongest arm since Wentz'</a:t>
+              <a:t>QB — FIRST career start; 2025 in relief: 25/44, 381 yds, 4-1, plus 88 rush yds; 'strongest arm since Wentz'</a:t>
             </a:r>
           </a:p>
         </p:txBody>
@@ -10411,7 +10411,7 @@
                 </a:solidFill>
                 <a:latin typeface="Arial"/>
               </a:rPr>
-              <a:t>RB</a:t>
+              <a:t>RB — 2025: 502 yds at 5.3/carry, 6 TD</a:t>
             </a:r>
           </a:p>
         </p:txBody>
@@ -10481,7 +10481,7 @@
                 </a:solidFill>
                 <a:latin typeface="Arial"/>
               </a:rPr>
-              <a:t>WR</a:t>
+              <a:t>WR — 2025: 6 catches, 159 yds, 2 TD — 26.5 per grab</a:t>
             </a:r>
           </a:p>
         </p:txBody>

--- a/decks/2026_Week0_Episode1.pptx
+++ b/decks/2026_Week0_Episode1.pptx
@@ -13,6 +13,10 @@
     <p:sldId id="261" r:id="rId12"/>
     <p:sldId id="262" r:id="rId13"/>
     <p:sldId id="263" r:id="rId14"/>
+    <p:sldId id="264" r:id="rId15"/>
+    <p:sldId id="265" r:id="rId16"/>
+    <p:sldId id="266" r:id="rId17"/>
+    <p:sldId id="267" r:id="rId18"/>
   </p:sldIdLst>
   <p:sldSz cx="12191695" cy="6858000" type="screen4x3"/>
   <p:notesSz cx="6858000" cy="9144000"/>
@@ -3146,29 +3150,29 @@
         </p:nvSpPr>
         <p:spPr>
           <a:xfrm>
-            <a:off x="822960" y="1188720"/>
-            <a:ext cx="10515600" cy="1188720"/>
-          </a:xfrm>
-          <a:prstGeom prst="rect">
-            <a:avLst/>
-          </a:prstGeom>
-          <a:noFill/>
-        </p:spPr>
-        <p:txBody>
-          <a:bodyPr wrap="square" lIns="0" rIns="0" tIns="0" bIns="0">
-            <a:spAutoFit/>
-          </a:bodyPr>
-          <a:lstStyle/>
-          <a:p>
-            <a:pPr algn="l"/>
-            <a:r>
-              <a:rPr sz="4600" b="1" i="0">
+            <a:off x="822960" y="1097280"/>
+            <a:ext cx="10515600" cy="1005840"/>
+          </a:xfrm>
+          <a:prstGeom prst="rect">
+            <a:avLst/>
+          </a:prstGeom>
+          <a:noFill/>
+        </p:spPr>
+        <p:txBody>
+          <a:bodyPr wrap="square" lIns="0" rIns="0" tIns="0" bIns="0">
+            <a:spAutoFit/>
+          </a:bodyPr>
+          <a:lstStyle/>
+          <a:p>
+            <a:pPr algn="l"/>
+            <a:r>
+              <a:rPr sz="4400" b="1" i="0">
                 <a:solidFill>
                   <a:srgbClr val="FFFFFF"/>
                 </a:solidFill>
                 <a:latin typeface="Arial"/>
               </a:rPr>
-              <a:t>Three Games, One Card</a:t>
+              <a:t>Five Games, One Card</a:t>
             </a:r>
           </a:p>
         </p:txBody>
@@ -3181,8 +3185,8 @@
         </p:nvSpPr>
         <p:spPr>
           <a:xfrm>
-            <a:off x="822960" y="2743200"/>
-            <a:ext cx="10515600" cy="914400"/>
+            <a:off x="822960" y="2194560"/>
+            <a:ext cx="10515600" cy="731520"/>
           </a:xfrm>
           <a:prstGeom prst="roundRect">
             <a:avLst/>
@@ -3225,8 +3229,8 @@
         </p:nvSpPr>
         <p:spPr>
           <a:xfrm>
-            <a:off x="1051560" y="2889504"/>
-            <a:ext cx="621792" cy="621792"/>
+            <a:off x="1005840" y="2286000"/>
+            <a:ext cx="548640" cy="548640"/>
           </a:xfrm>
           <a:prstGeom prst="ellipse">
             <a:avLst/>
@@ -3277,8 +3281,8 @@
         </p:blipFill>
         <p:spPr>
           <a:xfrm>
-            <a:off x="1113739" y="2951683"/>
-            <a:ext cx="497433" cy="497433"/>
+            <a:off x="1060704" y="2340864"/>
+            <a:ext cx="438912" cy="438912"/>
           </a:xfrm>
           <a:prstGeom prst="rect">
             <a:avLst/>
@@ -3293,8 +3297,8 @@
         </p:nvSpPr>
         <p:spPr>
           <a:xfrm>
-            <a:off x="1828800" y="2889504"/>
-            <a:ext cx="621792" cy="621792"/>
+            <a:off x="1691640" y="2286000"/>
+            <a:ext cx="548640" cy="548640"/>
           </a:xfrm>
           <a:prstGeom prst="ellipse">
             <a:avLst/>
@@ -3345,8 +3349,8 @@
         </p:blipFill>
         <p:spPr>
           <a:xfrm>
-            <a:off x="1890979" y="2951683"/>
-            <a:ext cx="497433" cy="497433"/>
+            <a:off x="1746504" y="2340864"/>
+            <a:ext cx="438912" cy="438912"/>
           </a:xfrm>
           <a:prstGeom prst="rect">
             <a:avLst/>
@@ -3361,23 +3365,23 @@
         </p:nvSpPr>
         <p:spPr>
           <a:xfrm>
-            <a:off x="2697480" y="2871216"/>
-            <a:ext cx="5760720" cy="411480"/>
-          </a:xfrm>
-          <a:prstGeom prst="rect">
-            <a:avLst/>
-          </a:prstGeom>
-          <a:noFill/>
-        </p:spPr>
-        <p:txBody>
-          <a:bodyPr wrap="square" lIns="0" rIns="0" tIns="0" bIns="0">
-            <a:spAutoFit/>
-          </a:bodyPr>
-          <a:lstStyle/>
-          <a:p>
-            <a:pPr algn="l"/>
-            <a:r>
-              <a:rPr sz="1700" b="1" i="0">
+            <a:off x="2468880" y="2286000"/>
+            <a:ext cx="5943600" cy="365760"/>
+          </a:xfrm>
+          <a:prstGeom prst="rect">
+            <a:avLst/>
+          </a:prstGeom>
+          <a:noFill/>
+        </p:spPr>
+        <p:txBody>
+          <a:bodyPr wrap="square" lIns="0" rIns="0" tIns="0" bIns="0">
+            <a:spAutoFit/>
+          </a:bodyPr>
+          <a:lstStyle/>
+          <a:p>
+            <a:pPr algn="l"/>
+            <a:r>
+              <a:rPr sz="1500" b="1" i="0">
                 <a:solidFill>
                   <a:srgbClr val="FFFFFF"/>
                 </a:solidFill>
@@ -3396,23 +3400,23 @@
         </p:nvSpPr>
         <p:spPr>
           <a:xfrm>
-            <a:off x="2697480" y="3255264"/>
-            <a:ext cx="5760720" cy="320040"/>
-          </a:xfrm>
-          <a:prstGeom prst="rect">
-            <a:avLst/>
-          </a:prstGeom>
-          <a:noFill/>
-        </p:spPr>
-        <p:txBody>
-          <a:bodyPr wrap="square" lIns="0" rIns="0" tIns="0" bIns="0">
-            <a:spAutoFit/>
-          </a:bodyPr>
-          <a:lstStyle/>
-          <a:p>
-            <a:pPr algn="l"/>
-            <a:r>
-              <a:rPr sz="1100" b="0" i="0">
+            <a:off x="2468880" y="2615184"/>
+            <a:ext cx="5943600" cy="274320"/>
+          </a:xfrm>
+          <a:prstGeom prst="rect">
+            <a:avLst/>
+          </a:prstGeom>
+          <a:noFill/>
+        </p:spPr>
+        <p:txBody>
+          <a:bodyPr wrap="square" lIns="0" rIns="0" tIns="0" bIns="0">
+            <a:spAutoFit/>
+          </a:bodyPr>
+          <a:lstStyle/>
+          <a:p>
+            <a:pPr algn="l"/>
+            <a:r>
+              <a:rPr sz="1000" b="0" i="0">
                 <a:solidFill>
                   <a:srgbClr val="CADCFC"/>
                 </a:solidFill>
@@ -3431,7 +3435,7 @@
         </p:nvSpPr>
         <p:spPr>
           <a:xfrm>
-            <a:off x="8503920" y="2871216"/>
+            <a:off x="8503920" y="2286000"/>
             <a:ext cx="2651760" cy="365760"/>
           </a:xfrm>
           <a:prstGeom prst="rect">
@@ -3447,7 +3451,7 @@
           <a:p>
             <a:pPr algn="r"/>
             <a:r>
-              <a:rPr sz="1600" b="1" i="0">
+              <a:rPr sz="1500" b="1" i="0">
                 <a:solidFill>
                   <a:srgbClr val="F47321"/>
                 </a:solidFill>
@@ -3466,8 +3470,8 @@
         </p:nvSpPr>
         <p:spPr>
           <a:xfrm>
-            <a:off x="8503920" y="3255264"/>
-            <a:ext cx="2651760" cy="320040"/>
+            <a:off x="8503920" y="2624328"/>
+            <a:ext cx="2651760" cy="274320"/>
           </a:xfrm>
           <a:prstGeom prst="rect">
             <a:avLst/>
@@ -3482,7 +3486,7 @@
           <a:p>
             <a:pPr algn="r"/>
             <a:r>
-              <a:rPr sz="1000" b="0" i="0">
+              <a:rPr sz="950" b="0" i="0">
                 <a:solidFill>
                   <a:srgbClr val="CADCFC"/>
                 </a:solidFill>
@@ -3501,8 +3505,8 @@
         </p:nvSpPr>
         <p:spPr>
           <a:xfrm>
-            <a:off x="822960" y="3858768"/>
-            <a:ext cx="10515600" cy="914400"/>
+            <a:off x="822960" y="2999232"/>
+            <a:ext cx="10515600" cy="731520"/>
           </a:xfrm>
           <a:prstGeom prst="roundRect">
             <a:avLst/>
@@ -3545,8 +3549,8 @@
         </p:nvSpPr>
         <p:spPr>
           <a:xfrm>
-            <a:off x="1051560" y="4005072"/>
-            <a:ext cx="621792" cy="621792"/>
+            <a:off x="1005840" y="3090672"/>
+            <a:ext cx="548640" cy="548640"/>
           </a:xfrm>
           <a:prstGeom prst="ellipse">
             <a:avLst/>
@@ -3597,8 +3601,8 @@
         </p:blipFill>
         <p:spPr>
           <a:xfrm>
-            <a:off x="1113739" y="4067251"/>
-            <a:ext cx="497433" cy="497433"/>
+            <a:off x="1060704" y="3145536"/>
+            <a:ext cx="438912" cy="438912"/>
           </a:xfrm>
           <a:prstGeom prst="rect">
             <a:avLst/>
@@ -3613,8 +3617,8 @@
         </p:nvSpPr>
         <p:spPr>
           <a:xfrm>
-            <a:off x="1828800" y="4005072"/>
-            <a:ext cx="621792" cy="621792"/>
+            <a:off x="1691640" y="3090672"/>
+            <a:ext cx="548640" cy="548640"/>
           </a:xfrm>
           <a:prstGeom prst="ellipse">
             <a:avLst/>
@@ -3665,8 +3669,8 @@
         </p:blipFill>
         <p:spPr>
           <a:xfrm>
-            <a:off x="1890979" y="4067251"/>
-            <a:ext cx="497433" cy="497433"/>
+            <a:off x="1746504" y="3145536"/>
+            <a:ext cx="438912" cy="438912"/>
           </a:xfrm>
           <a:prstGeom prst="rect">
             <a:avLst/>
@@ -3681,23 +3685,23 @@
         </p:nvSpPr>
         <p:spPr>
           <a:xfrm>
-            <a:off x="2697480" y="3986783"/>
-            <a:ext cx="5760720" cy="411480"/>
-          </a:xfrm>
-          <a:prstGeom prst="rect">
-            <a:avLst/>
-          </a:prstGeom>
-          <a:noFill/>
-        </p:spPr>
-        <p:txBody>
-          <a:bodyPr wrap="square" lIns="0" rIns="0" tIns="0" bIns="0">
-            <a:spAutoFit/>
-          </a:bodyPr>
-          <a:lstStyle/>
-          <a:p>
-            <a:pPr algn="l"/>
-            <a:r>
-              <a:rPr sz="1700" b="1" i="0">
+            <a:off x="2468880" y="3090672"/>
+            <a:ext cx="5943600" cy="365760"/>
+          </a:xfrm>
+          <a:prstGeom prst="rect">
+            <a:avLst/>
+          </a:prstGeom>
+          <a:noFill/>
+        </p:spPr>
+        <p:txBody>
+          <a:bodyPr wrap="square" lIns="0" rIns="0" tIns="0" bIns="0">
+            <a:spAutoFit/>
+          </a:bodyPr>
+          <a:lstStyle/>
+          <a:p>
+            <a:pPr algn="l"/>
+            <a:r>
+              <a:rPr sz="1500" b="1" i="0">
                 <a:solidFill>
                   <a:srgbClr val="FFFFFF"/>
                 </a:solidFill>
@@ -3716,23 +3720,23 @@
         </p:nvSpPr>
         <p:spPr>
           <a:xfrm>
-            <a:off x="2697480" y="4370831"/>
-            <a:ext cx="5760720" cy="320040"/>
-          </a:xfrm>
-          <a:prstGeom prst="rect">
-            <a:avLst/>
-          </a:prstGeom>
-          <a:noFill/>
-        </p:spPr>
-        <p:txBody>
-          <a:bodyPr wrap="square" lIns="0" rIns="0" tIns="0" bIns="0">
-            <a:spAutoFit/>
-          </a:bodyPr>
-          <a:lstStyle/>
-          <a:p>
-            <a:pPr algn="l"/>
-            <a:r>
-              <a:rPr sz="1100" b="0" i="0">
+            <a:off x="2468880" y="3419856"/>
+            <a:ext cx="5943600" cy="274320"/>
+          </a:xfrm>
+          <a:prstGeom prst="rect">
+            <a:avLst/>
+          </a:prstGeom>
+          <a:noFill/>
+        </p:spPr>
+        <p:txBody>
+          <a:bodyPr wrap="square" lIns="0" rIns="0" tIns="0" bIns="0">
+            <a:spAutoFit/>
+          </a:bodyPr>
+          <a:lstStyle/>
+          <a:p>
+            <a:pPr algn="l"/>
+            <a:r>
+              <a:rPr sz="1000" b="0" i="0">
                 <a:solidFill>
                   <a:srgbClr val="CADCFC"/>
                 </a:solidFill>
@@ -3751,7 +3755,7 @@
         </p:nvSpPr>
         <p:spPr>
           <a:xfrm>
-            <a:off x="8503920" y="3986783"/>
+            <a:off x="8503920" y="3090672"/>
             <a:ext cx="2651760" cy="365760"/>
           </a:xfrm>
           <a:prstGeom prst="rect">
@@ -3767,7 +3771,7 @@
           <a:p>
             <a:pPr algn="r"/>
             <a:r>
-              <a:rPr sz="1600" b="1" i="0">
+              <a:rPr sz="1500" b="1" i="0">
                 <a:solidFill>
                   <a:srgbClr val="F47321"/>
                 </a:solidFill>
@@ -3786,8 +3790,8 @@
         </p:nvSpPr>
         <p:spPr>
           <a:xfrm>
-            <a:off x="8503920" y="4370831"/>
-            <a:ext cx="2651760" cy="320040"/>
+            <a:off x="8503920" y="3429000"/>
+            <a:ext cx="2651760" cy="274320"/>
           </a:xfrm>
           <a:prstGeom prst="rect">
             <a:avLst/>
@@ -3802,7 +3806,7 @@
           <a:p>
             <a:pPr algn="r"/>
             <a:r>
-              <a:rPr sz="1000" b="0" i="0">
+              <a:rPr sz="950" b="0" i="0">
                 <a:solidFill>
                   <a:srgbClr val="CADCFC"/>
                 </a:solidFill>
@@ -3821,8 +3825,8 @@
         </p:nvSpPr>
         <p:spPr>
           <a:xfrm>
-            <a:off x="822960" y="4974336"/>
-            <a:ext cx="10515600" cy="914400"/>
+            <a:off x="822960" y="3803904"/>
+            <a:ext cx="10515600" cy="731520"/>
           </a:xfrm>
           <a:prstGeom prst="roundRect">
             <a:avLst/>
@@ -3865,8 +3869,8 @@
         </p:nvSpPr>
         <p:spPr>
           <a:xfrm>
-            <a:off x="1051560" y="5120640"/>
-            <a:ext cx="621792" cy="621792"/>
+            <a:off x="1005840" y="3895344"/>
+            <a:ext cx="548640" cy="548640"/>
           </a:xfrm>
           <a:prstGeom prst="ellipse">
             <a:avLst/>
@@ -3917,8 +3921,8 @@
         </p:blipFill>
         <p:spPr>
           <a:xfrm>
-            <a:off x="1113739" y="5182819"/>
-            <a:ext cx="497433" cy="497433"/>
+            <a:off x="1060704" y="3950207"/>
+            <a:ext cx="438912" cy="438912"/>
           </a:xfrm>
           <a:prstGeom prst="rect">
             <a:avLst/>
@@ -3933,8 +3937,8 @@
         </p:nvSpPr>
         <p:spPr>
           <a:xfrm>
-            <a:off x="1828800" y="5120640"/>
-            <a:ext cx="621792" cy="621792"/>
+            <a:off x="1691640" y="3895344"/>
+            <a:ext cx="548640" cy="548640"/>
           </a:xfrm>
           <a:prstGeom prst="ellipse">
             <a:avLst/>
@@ -3985,8 +3989,8 @@
         </p:blipFill>
         <p:spPr>
           <a:xfrm>
-            <a:off x="1890979" y="5182819"/>
-            <a:ext cx="497433" cy="497433"/>
+            <a:off x="1746504" y="3950207"/>
+            <a:ext cx="438912" cy="438912"/>
           </a:xfrm>
           <a:prstGeom prst="rect">
             <a:avLst/>
@@ -4001,8 +4005,2196 @@
         </p:nvSpPr>
         <p:spPr>
           <a:xfrm>
-            <a:off x="2697480" y="5102351"/>
-            <a:ext cx="5760720" cy="411480"/>
+            <a:off x="2468880" y="3895344"/>
+            <a:ext cx="5943600" cy="365760"/>
+          </a:xfrm>
+          <a:prstGeom prst="rect">
+            <a:avLst/>
+          </a:prstGeom>
+          <a:noFill/>
+        </p:spPr>
+        <p:txBody>
+          <a:bodyPr wrap="square" lIns="0" rIns="0" tIns="0" bIns="0">
+            <a:spAutoFit/>
+          </a:bodyPr>
+          <a:lstStyle/>
+          <a:p>
+            <a:pPr algn="l"/>
+            <a:r>
+              <a:rPr sz="1500" b="1" i="0">
+                <a:solidFill>
+                  <a:srgbClr val="FFFFFF"/>
+                </a:solidFill>
+                <a:latin typeface="Arial"/>
+              </a:rPr>
+              <a:t>Jacksonville State at North Dakota State</a:t>
+            </a:r>
+          </a:p>
+        </p:txBody>
+      </p:sp>
+      <p:sp>
+        <p:nvSpPr>
+          <p:cNvPr id="28" name="TextBox 27"/>
+          <p:cNvSpPr txBox="1"/>
+          <p:nvPr/>
+        </p:nvSpPr>
+        <p:spPr>
+          <a:xfrm>
+            <a:off x="2468880" y="4224528"/>
+            <a:ext cx="5943600" cy="274320"/>
+          </a:xfrm>
+          <a:prstGeom prst="rect">
+            <a:avLst/>
+          </a:prstGeom>
+          <a:noFill/>
+        </p:spPr>
+        <p:txBody>
+          <a:bodyPr wrap="square" lIns="0" rIns="0" tIns="0" bIns="0">
+            <a:spAutoFit/>
+          </a:bodyPr>
+          <a:lstStyle/>
+          <a:p>
+            <a:pPr algn="l"/>
+            <a:r>
+              <a:rPr sz="1000" b="0" i="0">
+                <a:solidFill>
+                  <a:srgbClr val="CADCFC"/>
+                </a:solidFill>
+                <a:latin typeface="Arial"/>
+              </a:rPr>
+              <a:t>Fargo · Fargodome</a:t>
+            </a:r>
+          </a:p>
+        </p:txBody>
+      </p:sp>
+      <p:sp>
+        <p:nvSpPr>
+          <p:cNvPr id="29" name="TextBox 28"/>
+          <p:cNvSpPr txBox="1"/>
+          <p:nvPr/>
+        </p:nvSpPr>
+        <p:spPr>
+          <a:xfrm>
+            <a:off x="8503920" y="3895344"/>
+            <a:ext cx="2651760" cy="365760"/>
+          </a:xfrm>
+          <a:prstGeom prst="rect">
+            <a:avLst/>
+          </a:prstGeom>
+          <a:noFill/>
+        </p:spPr>
+        <p:txBody>
+          <a:bodyPr wrap="square" lIns="0" rIns="0" tIns="0" bIns="0">
+            <a:spAutoFit/>
+          </a:bodyPr>
+          <a:lstStyle/>
+          <a:p>
+            <a:pPr algn="r"/>
+            <a:r>
+              <a:rPr sz="1500" b="1" i="0">
+                <a:solidFill>
+                  <a:srgbClr val="F47321"/>
+                </a:solidFill>
+                <a:latin typeface="Arial"/>
+              </a:rPr>
+              <a:t>NDSU –2.7</a:t>
+            </a:r>
+          </a:p>
+        </p:txBody>
+      </p:sp>
+      <p:sp>
+        <p:nvSpPr>
+          <p:cNvPr id="30" name="TextBox 29"/>
+          <p:cNvSpPr txBox="1"/>
+          <p:nvPr/>
+        </p:nvSpPr>
+        <p:spPr>
+          <a:xfrm>
+            <a:off x="8503920" y="4233672"/>
+            <a:ext cx="2651760" cy="274320"/>
+          </a:xfrm>
+          <a:prstGeom prst="rect">
+            <a:avLst/>
+          </a:prstGeom>
+          <a:noFill/>
+        </p:spPr>
+        <p:txBody>
+          <a:bodyPr wrap="square" lIns="0" rIns="0" tIns="0" bIns="0">
+            <a:spAutoFit/>
+          </a:bodyPr>
+          <a:lstStyle/>
+          <a:p>
+            <a:pPr algn="r"/>
+            <a:r>
+              <a:rPr sz="950" b="0" i="0">
+                <a:solidFill>
+                  <a:srgbClr val="CADCFC"/>
+                </a:solidFill>
+                <a:latin typeface="Arial"/>
+              </a:rPr>
+              <a:t>machine</a:t>
+            </a:r>
+          </a:p>
+        </p:txBody>
+      </p:sp>
+      <p:sp>
+        <p:nvSpPr>
+          <p:cNvPr id="31" name="Rounded Rectangle 30"/>
+          <p:cNvSpPr/>
+          <p:nvPr/>
+        </p:nvSpPr>
+        <p:spPr>
+          <a:xfrm>
+            <a:off x="822960" y="4608576"/>
+            <a:ext cx="10515600" cy="731520"/>
+          </a:xfrm>
+          <a:prstGeom prst="roundRect">
+            <a:avLst/>
+          </a:prstGeom>
+          <a:solidFill>
+            <a:srgbClr val="123568"/>
+          </a:solidFill>
+          <a:ln>
+            <a:noFill/>
+          </a:ln>
+          <a:effectLst/>
+        </p:spPr>
+        <p:style>
+          <a:lnRef idx="1">
+            <a:schemeClr val="accent1"/>
+          </a:lnRef>
+          <a:fillRef idx="3">
+            <a:schemeClr val="accent1"/>
+          </a:fillRef>
+          <a:effectRef idx="2">
+            <a:schemeClr val="accent1"/>
+          </a:effectRef>
+          <a:fontRef idx="minor">
+            <a:schemeClr val="lt1"/>
+          </a:fontRef>
+        </p:style>
+        <p:txBody>
+          <a:bodyPr rtlCol="0" anchor="ctr"/>
+          <a:lstStyle/>
+          <a:p>
+            <a:pPr algn="ctr"/>
+          </a:p>
+        </p:txBody>
+      </p:sp>
+      <p:sp>
+        <p:nvSpPr>
+          <p:cNvPr id="32" name="Oval 31"/>
+          <p:cNvSpPr/>
+          <p:nvPr/>
+        </p:nvSpPr>
+        <p:spPr>
+          <a:xfrm>
+            <a:off x="1005840" y="4700016"/>
+            <a:ext cx="548640" cy="548640"/>
+          </a:xfrm>
+          <a:prstGeom prst="ellipse">
+            <a:avLst/>
+          </a:prstGeom>
+          <a:solidFill>
+            <a:srgbClr val="FFFFFF"/>
+          </a:solidFill>
+          <a:ln>
+            <a:noFill/>
+          </a:ln>
+          <a:effectLst/>
+        </p:spPr>
+        <p:style>
+          <a:lnRef idx="1">
+            <a:schemeClr val="accent1"/>
+          </a:lnRef>
+          <a:fillRef idx="3">
+            <a:schemeClr val="accent1"/>
+          </a:fillRef>
+          <a:effectRef idx="2">
+            <a:schemeClr val="accent1"/>
+          </a:effectRef>
+          <a:fontRef idx="minor">
+            <a:schemeClr val="lt1"/>
+          </a:fontRef>
+        </p:style>
+        <p:txBody>
+          <a:bodyPr rtlCol="0" anchor="ctr"/>
+          <a:lstStyle/>
+          <a:p>
+            <a:pPr algn="ctr"/>
+          </a:p>
+        </p:txBody>
+      </p:sp>
+      <p:pic>
+        <p:nvPicPr>
+          <p:cNvPr id="33" name="Picture 32" descr="hawaii.png"/>
+          <p:cNvPicPr>
+            <a:picLocks noChangeAspect="1"/>
+          </p:cNvPicPr>
+          <p:nvPr/>
+        </p:nvPicPr>
+        <p:blipFill>
+          <a:blip r:embed="rId8"/>
+          <a:stretch>
+            <a:fillRect/>
+          </a:stretch>
+        </p:blipFill>
+        <p:spPr>
+          <a:xfrm>
+            <a:off x="1060704" y="4754879"/>
+            <a:ext cx="438912" cy="438912"/>
+          </a:xfrm>
+          <a:prstGeom prst="rect">
+            <a:avLst/>
+          </a:prstGeom>
+        </p:spPr>
+      </p:pic>
+      <p:sp>
+        <p:nvSpPr>
+          <p:cNvPr id="34" name="Oval 33"/>
+          <p:cNvSpPr/>
+          <p:nvPr/>
+        </p:nvSpPr>
+        <p:spPr>
+          <a:xfrm>
+            <a:off x="1691640" y="4700016"/>
+            <a:ext cx="548640" cy="548640"/>
+          </a:xfrm>
+          <a:prstGeom prst="ellipse">
+            <a:avLst/>
+          </a:prstGeom>
+          <a:solidFill>
+            <a:srgbClr val="FFFFFF"/>
+          </a:solidFill>
+          <a:ln>
+            <a:noFill/>
+          </a:ln>
+          <a:effectLst/>
+        </p:spPr>
+        <p:style>
+          <a:lnRef idx="1">
+            <a:schemeClr val="accent1"/>
+          </a:lnRef>
+          <a:fillRef idx="3">
+            <a:schemeClr val="accent1"/>
+          </a:fillRef>
+          <a:effectRef idx="2">
+            <a:schemeClr val="accent1"/>
+          </a:effectRef>
+          <a:fontRef idx="minor">
+            <a:schemeClr val="lt1"/>
+          </a:fontRef>
+        </p:style>
+        <p:txBody>
+          <a:bodyPr rtlCol="0" anchor="ctr"/>
+          <a:lstStyle/>
+          <a:p>
+            <a:pPr algn="ctr"/>
+          </a:p>
+        </p:txBody>
+      </p:sp>
+      <p:pic>
+        <p:nvPicPr>
+          <p:cNvPr id="35" name="Picture 34" descr="stanford.png"/>
+          <p:cNvPicPr>
+            <a:picLocks noChangeAspect="1"/>
+          </p:cNvPicPr>
+          <p:nvPr/>
+        </p:nvPicPr>
+        <p:blipFill>
+          <a:blip r:embed="rId9"/>
+          <a:stretch>
+            <a:fillRect/>
+          </a:stretch>
+        </p:blipFill>
+        <p:spPr>
+          <a:xfrm>
+            <a:off x="1746504" y="4754879"/>
+            <a:ext cx="438912" cy="438912"/>
+          </a:xfrm>
+          <a:prstGeom prst="rect">
+            <a:avLst/>
+          </a:prstGeom>
+        </p:spPr>
+      </p:pic>
+      <p:sp>
+        <p:nvSpPr>
+          <p:cNvPr id="36" name="TextBox 35"/>
+          <p:cNvSpPr txBox="1"/>
+          <p:nvPr/>
+        </p:nvSpPr>
+        <p:spPr>
+          <a:xfrm>
+            <a:off x="2468880" y="4700016"/>
+            <a:ext cx="5943600" cy="365760"/>
+          </a:xfrm>
+          <a:prstGeom prst="rect">
+            <a:avLst/>
+          </a:prstGeom>
+          <a:noFill/>
+        </p:spPr>
+        <p:txBody>
+          <a:bodyPr wrap="square" lIns="0" rIns="0" tIns="0" bIns="0">
+            <a:spAutoFit/>
+          </a:bodyPr>
+          <a:lstStyle/>
+          <a:p>
+            <a:pPr algn="l"/>
+            <a:r>
+              <a:rPr sz="1500" b="1" i="0">
+                <a:solidFill>
+                  <a:srgbClr val="FFFFFF"/>
+                </a:solidFill>
+                <a:latin typeface="Arial"/>
+              </a:rPr>
+              <a:t>Hawai'i at Stanford</a:t>
+            </a:r>
+          </a:p>
+        </p:txBody>
+      </p:sp>
+      <p:sp>
+        <p:nvSpPr>
+          <p:cNvPr id="37" name="TextBox 36"/>
+          <p:cNvSpPr txBox="1"/>
+          <p:nvPr/>
+        </p:nvSpPr>
+        <p:spPr>
+          <a:xfrm>
+            <a:off x="2468880" y="5029200"/>
+            <a:ext cx="5943600" cy="274320"/>
+          </a:xfrm>
+          <a:prstGeom prst="rect">
+            <a:avLst/>
+          </a:prstGeom>
+          <a:noFill/>
+        </p:spPr>
+        <p:txBody>
+          <a:bodyPr wrap="square" lIns="0" rIns="0" tIns="0" bIns="0">
+            <a:spAutoFit/>
+          </a:bodyPr>
+          <a:lstStyle/>
+          <a:p>
+            <a:pPr algn="l"/>
+            <a:r>
+              <a:rPr sz="1000" b="0" i="0">
+                <a:solidFill>
+                  <a:srgbClr val="CADCFC"/>
+                </a:solidFill>
+                <a:latin typeface="Arial"/>
+              </a:rPr>
+              <a:t>Palo Alto · Stanford Stadium</a:t>
+            </a:r>
+          </a:p>
+        </p:txBody>
+      </p:sp>
+      <p:sp>
+        <p:nvSpPr>
+          <p:cNvPr id="38" name="TextBox 37"/>
+          <p:cNvSpPr txBox="1"/>
+          <p:nvPr/>
+        </p:nvSpPr>
+        <p:spPr>
+          <a:xfrm>
+            <a:off x="8503920" y="4700016"/>
+            <a:ext cx="2651760" cy="365760"/>
+          </a:xfrm>
+          <a:prstGeom prst="rect">
+            <a:avLst/>
+          </a:prstGeom>
+          <a:noFill/>
+        </p:spPr>
+        <p:txBody>
+          <a:bodyPr wrap="square" lIns="0" rIns="0" tIns="0" bIns="0">
+            <a:spAutoFit/>
+          </a:bodyPr>
+          <a:lstStyle/>
+          <a:p>
+            <a:pPr algn="r"/>
+            <a:r>
+              <a:rPr sz="1500" b="1" i="0">
+                <a:solidFill>
+                  <a:srgbClr val="F47321"/>
+                </a:solidFill>
+                <a:latin typeface="Arial"/>
+              </a:rPr>
+              <a:t>Stanford –1.6</a:t>
+            </a:r>
+          </a:p>
+        </p:txBody>
+      </p:sp>
+      <p:sp>
+        <p:nvSpPr>
+          <p:cNvPr id="39" name="TextBox 38"/>
+          <p:cNvSpPr txBox="1"/>
+          <p:nvPr/>
+        </p:nvSpPr>
+        <p:spPr>
+          <a:xfrm>
+            <a:off x="8503920" y="5038344"/>
+            <a:ext cx="2651760" cy="274320"/>
+          </a:xfrm>
+          <a:prstGeom prst="rect">
+            <a:avLst/>
+          </a:prstGeom>
+          <a:noFill/>
+        </p:spPr>
+        <p:txBody>
+          <a:bodyPr wrap="square" lIns="0" rIns="0" tIns="0" bIns="0">
+            <a:spAutoFit/>
+          </a:bodyPr>
+          <a:lstStyle/>
+          <a:p>
+            <a:pPr algn="r"/>
+            <a:r>
+              <a:rPr sz="950" b="0" i="0">
+                <a:solidFill>
+                  <a:srgbClr val="CADCFC"/>
+                </a:solidFill>
+                <a:latin typeface="Arial"/>
+              </a:rPr>
+              <a:t>machine</a:t>
+            </a:r>
+          </a:p>
+        </p:txBody>
+      </p:sp>
+      <p:sp>
+        <p:nvSpPr>
+          <p:cNvPr id="40" name="Rounded Rectangle 39"/>
+          <p:cNvSpPr/>
+          <p:nvPr/>
+        </p:nvSpPr>
+        <p:spPr>
+          <a:xfrm>
+            <a:off x="822960" y="5413248"/>
+            <a:ext cx="10515600" cy="731520"/>
+          </a:xfrm>
+          <a:prstGeom prst="roundRect">
+            <a:avLst/>
+          </a:prstGeom>
+          <a:solidFill>
+            <a:srgbClr val="123568"/>
+          </a:solidFill>
+          <a:ln>
+            <a:noFill/>
+          </a:ln>
+          <a:effectLst/>
+        </p:spPr>
+        <p:style>
+          <a:lnRef idx="1">
+            <a:schemeClr val="accent1"/>
+          </a:lnRef>
+          <a:fillRef idx="3">
+            <a:schemeClr val="accent1"/>
+          </a:fillRef>
+          <a:effectRef idx="2">
+            <a:schemeClr val="accent1"/>
+          </a:effectRef>
+          <a:fontRef idx="minor">
+            <a:schemeClr val="lt1"/>
+          </a:fontRef>
+        </p:style>
+        <p:txBody>
+          <a:bodyPr rtlCol="0" anchor="ctr"/>
+          <a:lstStyle/>
+          <a:p>
+            <a:pPr algn="ctr"/>
+          </a:p>
+        </p:txBody>
+      </p:sp>
+      <p:sp>
+        <p:nvSpPr>
+          <p:cNvPr id="41" name="Oval 40"/>
+          <p:cNvSpPr/>
+          <p:nvPr/>
+        </p:nvSpPr>
+        <p:spPr>
+          <a:xfrm>
+            <a:off x="1005840" y="5504688"/>
+            <a:ext cx="548640" cy="548640"/>
+          </a:xfrm>
+          <a:prstGeom prst="ellipse">
+            <a:avLst/>
+          </a:prstGeom>
+          <a:solidFill>
+            <a:srgbClr val="FFFFFF"/>
+          </a:solidFill>
+          <a:ln>
+            <a:noFill/>
+          </a:ln>
+          <a:effectLst/>
+        </p:spPr>
+        <p:style>
+          <a:lnRef idx="1">
+            <a:schemeClr val="accent1"/>
+          </a:lnRef>
+          <a:fillRef idx="3">
+            <a:schemeClr val="accent1"/>
+          </a:fillRef>
+          <a:effectRef idx="2">
+            <a:schemeClr val="accent1"/>
+          </a:effectRef>
+          <a:fontRef idx="minor">
+            <a:schemeClr val="lt1"/>
+          </a:fontRef>
+        </p:style>
+        <p:txBody>
+          <a:bodyPr rtlCol="0" anchor="ctr"/>
+          <a:lstStyle/>
+          <a:p>
+            <a:pPr algn="ctr"/>
+          </a:p>
+        </p:txBody>
+      </p:sp>
+      <p:pic>
+        <p:nvPicPr>
+          <p:cNvPr id="42" name="Picture 41" descr="memphis.png"/>
+          <p:cNvPicPr>
+            <a:picLocks noChangeAspect="1"/>
+          </p:cNvPicPr>
+          <p:nvPr/>
+        </p:nvPicPr>
+        <p:blipFill>
+          <a:blip r:embed="rId10"/>
+          <a:stretch>
+            <a:fillRect/>
+          </a:stretch>
+        </p:blipFill>
+        <p:spPr>
+          <a:xfrm>
+            <a:off x="1060704" y="5559551"/>
+            <a:ext cx="438912" cy="438912"/>
+          </a:xfrm>
+          <a:prstGeom prst="rect">
+            <a:avLst/>
+          </a:prstGeom>
+        </p:spPr>
+      </p:pic>
+      <p:sp>
+        <p:nvSpPr>
+          <p:cNvPr id="43" name="Oval 42"/>
+          <p:cNvSpPr/>
+          <p:nvPr/>
+        </p:nvSpPr>
+        <p:spPr>
+          <a:xfrm>
+            <a:off x="1691640" y="5504688"/>
+            <a:ext cx="548640" cy="548640"/>
+          </a:xfrm>
+          <a:prstGeom prst="ellipse">
+            <a:avLst/>
+          </a:prstGeom>
+          <a:solidFill>
+            <a:srgbClr val="FFFFFF"/>
+          </a:solidFill>
+          <a:ln>
+            <a:noFill/>
+          </a:ln>
+          <a:effectLst/>
+        </p:spPr>
+        <p:style>
+          <a:lnRef idx="1">
+            <a:schemeClr val="accent1"/>
+          </a:lnRef>
+          <a:fillRef idx="3">
+            <a:schemeClr val="accent1"/>
+          </a:fillRef>
+          <a:effectRef idx="2">
+            <a:schemeClr val="accent1"/>
+          </a:effectRef>
+          <a:fontRef idx="minor">
+            <a:schemeClr val="lt1"/>
+          </a:fontRef>
+        </p:style>
+        <p:txBody>
+          <a:bodyPr rtlCol="0" anchor="ctr"/>
+          <a:lstStyle/>
+          <a:p>
+            <a:pPr algn="ctr"/>
+          </a:p>
+        </p:txBody>
+      </p:sp>
+      <p:pic>
+        <p:nvPicPr>
+          <p:cNvPr id="44" name="Picture 43" descr="unlv.png"/>
+          <p:cNvPicPr>
+            <a:picLocks noChangeAspect="1"/>
+          </p:cNvPicPr>
+          <p:nvPr/>
+        </p:nvPicPr>
+        <p:blipFill>
+          <a:blip r:embed="rId11"/>
+          <a:stretch>
+            <a:fillRect/>
+          </a:stretch>
+        </p:blipFill>
+        <p:spPr>
+          <a:xfrm>
+            <a:off x="1746504" y="5559551"/>
+            <a:ext cx="438912" cy="438912"/>
+          </a:xfrm>
+          <a:prstGeom prst="rect">
+            <a:avLst/>
+          </a:prstGeom>
+        </p:spPr>
+      </p:pic>
+      <p:sp>
+        <p:nvSpPr>
+          <p:cNvPr id="45" name="TextBox 44"/>
+          <p:cNvSpPr txBox="1"/>
+          <p:nvPr/>
+        </p:nvSpPr>
+        <p:spPr>
+          <a:xfrm>
+            <a:off x="2468880" y="5504688"/>
+            <a:ext cx="5943600" cy="365760"/>
+          </a:xfrm>
+          <a:prstGeom prst="rect">
+            <a:avLst/>
+          </a:prstGeom>
+          <a:noFill/>
+        </p:spPr>
+        <p:txBody>
+          <a:bodyPr wrap="square" lIns="0" rIns="0" tIns="0" bIns="0">
+            <a:spAutoFit/>
+          </a:bodyPr>
+          <a:lstStyle/>
+          <a:p>
+            <a:pPr algn="l"/>
+            <a:r>
+              <a:rPr sz="1500" b="1" i="0">
+                <a:solidFill>
+                  <a:srgbClr val="FFFFFF"/>
+                </a:solidFill>
+                <a:latin typeface="Arial"/>
+              </a:rPr>
+              <a:t>Memphis at UNLV</a:t>
+            </a:r>
+          </a:p>
+        </p:txBody>
+      </p:sp>
+      <p:sp>
+        <p:nvSpPr>
+          <p:cNvPr id="46" name="TextBox 45"/>
+          <p:cNvSpPr txBox="1"/>
+          <p:nvPr/>
+        </p:nvSpPr>
+        <p:spPr>
+          <a:xfrm>
+            <a:off x="2468880" y="5833872"/>
+            <a:ext cx="5943600" cy="274320"/>
+          </a:xfrm>
+          <a:prstGeom prst="rect">
+            <a:avLst/>
+          </a:prstGeom>
+          <a:noFill/>
+        </p:spPr>
+        <p:txBody>
+          <a:bodyPr wrap="square" lIns="0" rIns="0" tIns="0" bIns="0">
+            <a:spAutoFit/>
+          </a:bodyPr>
+          <a:lstStyle/>
+          <a:p>
+            <a:pPr algn="l"/>
+            <a:r>
+              <a:rPr sz="1000" b="0" i="0">
+                <a:solidFill>
+                  <a:srgbClr val="CADCFC"/>
+                </a:solidFill>
+                <a:latin typeface="Arial"/>
+              </a:rPr>
+              <a:t>Las Vegas · Allegiant Stadium</a:t>
+            </a:r>
+          </a:p>
+        </p:txBody>
+      </p:sp>
+      <p:sp>
+        <p:nvSpPr>
+          <p:cNvPr id="47" name="TextBox 46"/>
+          <p:cNvSpPr txBox="1"/>
+          <p:nvPr/>
+        </p:nvSpPr>
+        <p:spPr>
+          <a:xfrm>
+            <a:off x="8503920" y="5504688"/>
+            <a:ext cx="2651760" cy="365760"/>
+          </a:xfrm>
+          <a:prstGeom prst="rect">
+            <a:avLst/>
+          </a:prstGeom>
+          <a:noFill/>
+        </p:spPr>
+        <p:txBody>
+          <a:bodyPr wrap="square" lIns="0" rIns="0" tIns="0" bIns="0">
+            <a:spAutoFit/>
+          </a:bodyPr>
+          <a:lstStyle/>
+          <a:p>
+            <a:pPr algn="r"/>
+            <a:r>
+              <a:rPr sz="1500" b="1" i="0">
+                <a:solidFill>
+                  <a:srgbClr val="F47321"/>
+                </a:solidFill>
+                <a:latin typeface="Arial"/>
+              </a:rPr>
+              <a:t>UNLV –6.2</a:t>
+            </a:r>
+          </a:p>
+        </p:txBody>
+      </p:sp>
+      <p:sp>
+        <p:nvSpPr>
+          <p:cNvPr id="48" name="TextBox 47"/>
+          <p:cNvSpPr txBox="1"/>
+          <p:nvPr/>
+        </p:nvSpPr>
+        <p:spPr>
+          <a:xfrm>
+            <a:off x="8503920" y="5843016"/>
+            <a:ext cx="2651760" cy="274320"/>
+          </a:xfrm>
+          <a:prstGeom prst="rect">
+            <a:avLst/>
+          </a:prstGeom>
+          <a:noFill/>
+        </p:spPr>
+        <p:txBody>
+          <a:bodyPr wrap="square" lIns="0" rIns="0" tIns="0" bIns="0">
+            <a:spAutoFit/>
+          </a:bodyPr>
+          <a:lstStyle/>
+          <a:p>
+            <a:pPr algn="r"/>
+            <a:r>
+              <a:rPr sz="950" b="0" i="0">
+                <a:solidFill>
+                  <a:srgbClr val="CADCFC"/>
+                </a:solidFill>
+                <a:latin typeface="Arial"/>
+              </a:rPr>
+              <a:t>machine</a:t>
+            </a:r>
+          </a:p>
+        </p:txBody>
+      </p:sp>
+      <p:sp>
+        <p:nvSpPr>
+          <p:cNvPr id="49" name="TextBox 48"/>
+          <p:cNvSpPr txBox="1"/>
+          <p:nvPr/>
+        </p:nvSpPr>
+        <p:spPr>
+          <a:xfrm>
+            <a:off x="822960" y="6263640"/>
+            <a:ext cx="10515600" cy="457200"/>
+          </a:xfrm>
+          <a:prstGeom prst="rect">
+            <a:avLst/>
+          </a:prstGeom>
+          <a:noFill/>
+        </p:spPr>
+        <p:txBody>
+          <a:bodyPr wrap="square" lIns="0" rIns="0" tIns="0" bIns="0">
+            <a:spAutoFit/>
+          </a:bodyPr>
+          <a:lstStyle/>
+          <a:p>
+            <a:pPr algn="l"/>
+            <a:r>
+              <a:rPr sz="1050" b="0" i="0">
+                <a:solidFill>
+                  <a:srgbClr val="8FA5C4"/>
+                </a:solidFill>
+                <a:latin typeface="Arial"/>
+              </a:rPr>
+              <a:t>Machine = ESPN 2026 preseason FPI + 2.5 HFA, empirical margin curve (σ 17.9, 2021–25 fit) · lines as of Aug 23 · model plays graded vs first-seen lines</a:t>
+            </a:r>
+          </a:p>
+        </p:txBody>
+      </p:sp>
+    </p:spTree>
+  </p:cSld>
+  <p:clrMapOvr>
+    <a:masterClrMapping/>
+  </p:clrMapOvr>
+</p:sld>
+</file>
+
+<file path=ppt/slides/slide10.xml><?xml version="1.0" encoding="utf-8"?>
+<p:sld xmlns:a="http://schemas.openxmlformats.org/drawingml/2006/main" xmlns:p="http://schemas.openxmlformats.org/presentationml/2006/main" xmlns:r="http://schemas.openxmlformats.org/officeDocument/2006/relationships">
+  <p:cSld>
+    <p:bg>
+      <p:bgPr>
+        <a:solidFill>
+          <a:srgbClr val="FFFFFF"/>
+        </a:solidFill>
+        <a:effectLst/>
+      </p:bgPr>
+    </p:bg>
+    <p:spTree>
+      <p:nvGrpSpPr>
+        <p:cNvPr id="1" name=""/>
+        <p:cNvGrpSpPr/>
+        <p:nvPr/>
+      </p:nvGrpSpPr>
+      <p:grpSpPr/>
+      <p:pic>
+        <p:nvPicPr>
+          <p:cNvPr id="2" name="Picture 1" descr="memphis.png"/>
+          <p:cNvPicPr>
+            <a:picLocks noChangeAspect="1"/>
+          </p:cNvPicPr>
+          <p:nvPr/>
+        </p:nvPicPr>
+        <p:blipFill>
+          <a:blip r:embed="rId2"/>
+          <a:stretch>
+            <a:fillRect/>
+          </a:stretch>
+        </p:blipFill>
+        <p:spPr>
+          <a:xfrm>
+            <a:off x="822960" y="384048"/>
+            <a:ext cx="731520" cy="731520"/>
+          </a:xfrm>
+          <a:prstGeom prst="rect">
+            <a:avLst/>
+          </a:prstGeom>
+        </p:spPr>
+      </p:pic>
+      <p:sp>
+        <p:nvSpPr>
+          <p:cNvPr id="3" name="TextBox 2"/>
+          <p:cNvSpPr txBox="1"/>
+          <p:nvPr/>
+        </p:nvSpPr>
+        <p:spPr>
+          <a:xfrm>
+            <a:off x="1664208" y="475488"/>
+            <a:ext cx="457200" cy="457200"/>
+          </a:xfrm>
+          <a:prstGeom prst="rect">
+            <a:avLst/>
+          </a:prstGeom>
+          <a:noFill/>
+        </p:spPr>
+        <p:txBody>
+          <a:bodyPr wrap="square" lIns="0" rIns="0" tIns="0" bIns="0">
+            <a:spAutoFit/>
+          </a:bodyPr>
+          <a:lstStyle/>
+          <a:p>
+            <a:pPr algn="ctr"/>
+            <a:r>
+              <a:rPr sz="1400" b="0" i="0">
+                <a:solidFill>
+                  <a:srgbClr val="5C6B7E"/>
+                </a:solidFill>
+                <a:latin typeface="Arial"/>
+              </a:rPr>
+              <a:t>at</a:t>
+            </a:r>
+          </a:p>
+        </p:txBody>
+      </p:sp>
+      <p:pic>
+        <p:nvPicPr>
+          <p:cNvPr id="4" name="Picture 3" descr="unlv.png"/>
+          <p:cNvPicPr>
+            <a:picLocks noChangeAspect="1"/>
+          </p:cNvPicPr>
+          <p:nvPr/>
+        </p:nvPicPr>
+        <p:blipFill>
+          <a:blip r:embed="rId3"/>
+          <a:stretch>
+            <a:fillRect/>
+          </a:stretch>
+        </p:blipFill>
+        <p:spPr>
+          <a:xfrm>
+            <a:off x="2148840" y="384048"/>
+            <a:ext cx="731520" cy="731520"/>
+          </a:xfrm>
+          <a:prstGeom prst="rect">
+            <a:avLst/>
+          </a:prstGeom>
+        </p:spPr>
+      </p:pic>
+      <p:sp>
+        <p:nvSpPr>
+          <p:cNvPr id="5" name="TextBox 4"/>
+          <p:cNvSpPr txBox="1"/>
+          <p:nvPr/>
+        </p:nvSpPr>
+        <p:spPr>
+          <a:xfrm>
+            <a:off x="3154680" y="347472"/>
+            <a:ext cx="8138160" cy="502920"/>
+          </a:xfrm>
+          <a:prstGeom prst="rect">
+            <a:avLst/>
+          </a:prstGeom>
+          <a:noFill/>
+        </p:spPr>
+        <p:txBody>
+          <a:bodyPr wrap="square" lIns="0" rIns="0" tIns="0" bIns="0">
+            <a:spAutoFit/>
+          </a:bodyPr>
+          <a:lstStyle/>
+          <a:p>
+            <a:pPr algn="l"/>
+            <a:r>
+              <a:rPr sz="2700" b="1" i="0">
+                <a:solidFill>
+                  <a:srgbClr val="0A2851"/>
+                </a:solidFill>
+                <a:latin typeface="Arial"/>
+              </a:rPr>
+              <a:t>Memphis at UNLV</a:t>
+            </a:r>
+          </a:p>
+        </p:txBody>
+      </p:sp>
+      <p:sp>
+        <p:nvSpPr>
+          <p:cNvPr id="6" name="TextBox 5"/>
+          <p:cNvSpPr txBox="1"/>
+          <p:nvPr/>
+        </p:nvSpPr>
+        <p:spPr>
+          <a:xfrm>
+            <a:off x="3154680" y="859536"/>
+            <a:ext cx="8138160" cy="320040"/>
+          </a:xfrm>
+          <a:prstGeom prst="rect">
+            <a:avLst/>
+          </a:prstGeom>
+          <a:noFill/>
+        </p:spPr>
+        <p:txBody>
+          <a:bodyPr wrap="square" lIns="0" rIns="0" tIns="0" bIns="0">
+            <a:spAutoFit/>
+          </a:bodyPr>
+          <a:lstStyle/>
+          <a:p>
+            <a:pPr algn="l"/>
+            <a:r>
+              <a:rPr sz="1100" b="0" i="1">
+                <a:solidFill>
+                  <a:srgbClr val="5C6B7E"/>
+                </a:solidFill>
+                <a:latin typeface="Arial"/>
+              </a:rPr>
+              <a:t>Sat Aug 29 · 10:00 ET · FOX · G5 heavyweight opener · Huff's 53-transfer debut · first film_study game</a:t>
+            </a:r>
+          </a:p>
+        </p:txBody>
+      </p:sp>
+      <p:sp>
+        <p:nvSpPr>
+          <p:cNvPr id="7" name="TextBox 6"/>
+          <p:cNvSpPr txBox="1"/>
+          <p:nvPr/>
+        </p:nvSpPr>
+        <p:spPr>
+          <a:xfrm>
+            <a:off x="822960" y="1600200"/>
+            <a:ext cx="6583680" cy="365760"/>
+          </a:xfrm>
+          <a:prstGeom prst="rect">
+            <a:avLst/>
+          </a:prstGeom>
+          <a:noFill/>
+        </p:spPr>
+        <p:txBody>
+          <a:bodyPr wrap="square" lIns="0" rIns="0" tIns="0" bIns="0">
+            <a:spAutoFit/>
+          </a:bodyPr>
+          <a:lstStyle/>
+          <a:p>
+            <a:pPr algn="l"/>
+            <a:r>
+              <a:rPr sz="1300" b="1" i="0">
+                <a:solidFill>
+                  <a:srgbClr val="0A2851"/>
+                </a:solidFill>
+                <a:latin typeface="Arial"/>
+              </a:rPr>
+              <a:t>WHAT DECIDES IT</a:t>
+            </a:r>
+          </a:p>
+        </p:txBody>
+      </p:sp>
+      <p:sp>
+        <p:nvSpPr>
+          <p:cNvPr id="8" name="Oval 7"/>
+          <p:cNvSpPr/>
+          <p:nvPr/>
+        </p:nvSpPr>
+        <p:spPr>
+          <a:xfrm>
+            <a:off x="868680" y="2139696"/>
+            <a:ext cx="128016" cy="128016"/>
+          </a:xfrm>
+          <a:prstGeom prst="ellipse">
+            <a:avLst/>
+          </a:prstGeom>
+          <a:solidFill>
+            <a:srgbClr val="F47321"/>
+          </a:solidFill>
+          <a:ln>
+            <a:noFill/>
+          </a:ln>
+          <a:effectLst/>
+        </p:spPr>
+        <p:style>
+          <a:lnRef idx="1">
+            <a:schemeClr val="accent1"/>
+          </a:lnRef>
+          <a:fillRef idx="3">
+            <a:schemeClr val="accent1"/>
+          </a:fillRef>
+          <a:effectRef idx="2">
+            <a:schemeClr val="accent1"/>
+          </a:effectRef>
+          <a:fontRef idx="minor">
+            <a:schemeClr val="lt1"/>
+          </a:fontRef>
+        </p:style>
+        <p:txBody>
+          <a:bodyPr rtlCol="0" anchor="ctr"/>
+          <a:lstStyle/>
+          <a:p>
+            <a:pPr algn="ctr"/>
+          </a:p>
+        </p:txBody>
+      </p:sp>
+      <p:sp>
+        <p:nvSpPr>
+          <p:cNvPr id="9" name="TextBox 8"/>
+          <p:cNvSpPr txBox="1"/>
+          <p:nvPr/>
+        </p:nvSpPr>
+        <p:spPr>
+          <a:xfrm>
+            <a:off x="1188720" y="2057400"/>
+            <a:ext cx="6217920" cy="731520"/>
+          </a:xfrm>
+          <a:prstGeom prst="rect">
+            <a:avLst/>
+          </a:prstGeom>
+          <a:noFill/>
+        </p:spPr>
+        <p:txBody>
+          <a:bodyPr wrap="square" lIns="0" rIns="0" tIns="0" bIns="0">
+            <a:spAutoFit/>
+          </a:bodyPr>
+          <a:lstStyle/>
+          <a:p>
+            <a:pPr algn="l"/>
+            <a:r>
+              <a:rPr sz="1350" b="0" i="0">
+                <a:solidFill>
+                  <a:srgbClr val="16273D"/>
+                </a:solidFill>
+                <a:latin typeface="Arial"/>
+              </a:rPr>
+              <a:t>Memphis rush offense #5 vs UNLV rush defense #130 — but that #5 was Silverfield's roster; Huff flipped 53 players (111th returning production)</a:t>
+            </a:r>
+          </a:p>
+        </p:txBody>
+      </p:sp>
+      <p:sp>
+        <p:nvSpPr>
+          <p:cNvPr id="10" name="Oval 9"/>
+          <p:cNvSpPr/>
+          <p:nvPr/>
+        </p:nvSpPr>
+        <p:spPr>
+          <a:xfrm>
+            <a:off x="868680" y="2852928"/>
+            <a:ext cx="128016" cy="128016"/>
+          </a:xfrm>
+          <a:prstGeom prst="ellipse">
+            <a:avLst/>
+          </a:prstGeom>
+          <a:solidFill>
+            <a:srgbClr val="F47321"/>
+          </a:solidFill>
+          <a:ln>
+            <a:noFill/>
+          </a:ln>
+          <a:effectLst/>
+        </p:spPr>
+        <p:style>
+          <a:lnRef idx="1">
+            <a:schemeClr val="accent1"/>
+          </a:lnRef>
+          <a:fillRef idx="3">
+            <a:schemeClr val="accent1"/>
+          </a:fillRef>
+          <a:effectRef idx="2">
+            <a:schemeClr val="accent1"/>
+          </a:effectRef>
+          <a:fontRef idx="minor">
+            <a:schemeClr val="lt1"/>
+          </a:fontRef>
+        </p:style>
+        <p:txBody>
+          <a:bodyPr rtlCol="0" anchor="ctr"/>
+          <a:lstStyle/>
+          <a:p>
+            <a:pPr algn="ctr"/>
+          </a:p>
+        </p:txBody>
+      </p:sp>
+      <p:sp>
+        <p:nvSpPr>
+          <p:cNvPr id="11" name="TextBox 10"/>
+          <p:cNvSpPr txBox="1"/>
+          <p:nvPr/>
+        </p:nvSpPr>
+        <p:spPr>
+          <a:xfrm>
+            <a:off x="1188720" y="2770632"/>
+            <a:ext cx="6217920" cy="731520"/>
+          </a:xfrm>
+          <a:prstGeom prst="rect">
+            <a:avLst/>
+          </a:prstGeom>
+          <a:noFill/>
+        </p:spPr>
+        <p:txBody>
+          <a:bodyPr wrap="square" lIns="0" rIns="0" tIns="0" bIns="0">
+            <a:spAutoFit/>
+          </a:bodyPr>
+          <a:lstStyle/>
+          <a:p>
+            <a:pPr algn="l"/>
+            <a:r>
+              <a:rPr sz="1350" b="0" i="0">
+                <a:solidFill>
+                  <a:srgbClr val="16273D"/>
+                </a:solidFill>
+                <a:latin typeface="Arial"/>
+              </a:rPr>
+              <a:t>UNLV rush offense #9 (Thomas, 7.0 a carry) vs Memphis rush D #20 — now led by transfers</a:t>
+            </a:r>
+          </a:p>
+        </p:txBody>
+      </p:sp>
+      <p:sp>
+        <p:nvSpPr>
+          <p:cNvPr id="12" name="Oval 11"/>
+          <p:cNvSpPr/>
+          <p:nvPr/>
+        </p:nvSpPr>
+        <p:spPr>
+          <a:xfrm>
+            <a:off x="868680" y="3566160"/>
+            <a:ext cx="128016" cy="128016"/>
+          </a:xfrm>
+          <a:prstGeom prst="ellipse">
+            <a:avLst/>
+          </a:prstGeom>
+          <a:solidFill>
+            <a:srgbClr val="F47321"/>
+          </a:solidFill>
+          <a:ln>
+            <a:noFill/>
+          </a:ln>
+          <a:effectLst/>
+        </p:spPr>
+        <p:style>
+          <a:lnRef idx="1">
+            <a:schemeClr val="accent1"/>
+          </a:lnRef>
+          <a:fillRef idx="3">
+            <a:schemeClr val="accent1"/>
+          </a:fillRef>
+          <a:effectRef idx="2">
+            <a:schemeClr val="accent1"/>
+          </a:effectRef>
+          <a:fontRef idx="minor">
+            <a:schemeClr val="lt1"/>
+          </a:fontRef>
+        </p:style>
+        <p:txBody>
+          <a:bodyPr rtlCol="0" anchor="ctr"/>
+          <a:lstStyle/>
+          <a:p>
+            <a:pPr algn="ctr"/>
+          </a:p>
+        </p:txBody>
+      </p:sp>
+      <p:sp>
+        <p:nvSpPr>
+          <p:cNvPr id="13" name="TextBox 12"/>
+          <p:cNvSpPr txBox="1"/>
+          <p:nvPr/>
+        </p:nvSpPr>
+        <p:spPr>
+          <a:xfrm>
+            <a:off x="1188720" y="3483864"/>
+            <a:ext cx="6217920" cy="731520"/>
+          </a:xfrm>
+          <a:prstGeom prst="rect">
+            <a:avLst/>
+          </a:prstGeom>
+          <a:noFill/>
+        </p:spPr>
+        <p:txBody>
+          <a:bodyPr wrap="square" lIns="0" rIns="0" tIns="0" bIns="0">
+            <a:spAutoFit/>
+          </a:bodyPr>
+          <a:lstStyle/>
+          <a:p>
+            <a:pPr algn="l"/>
+            <a:r>
+              <a:rPr sz="1350" b="0" i="0">
+                <a:solidFill>
+                  <a:srgbClr val="16273D"/>
+                </a:solidFill>
+                <a:latin typeface="Arial"/>
+              </a:rPr>
+              <a:t>Arnold (#32 pass O context) at Memphis's #118 pass defense; Memphis's QB derby is a zero-FBS-snap tier</a:t>
+            </a:r>
+          </a:p>
+        </p:txBody>
+      </p:sp>
+      <p:sp>
+        <p:nvSpPr>
+          <p:cNvPr id="14" name="Oval 13"/>
+          <p:cNvSpPr/>
+          <p:nvPr/>
+        </p:nvSpPr>
+        <p:spPr>
+          <a:xfrm>
+            <a:off x="868680" y="4279392"/>
+            <a:ext cx="128016" cy="128016"/>
+          </a:xfrm>
+          <a:prstGeom prst="ellipse">
+            <a:avLst/>
+          </a:prstGeom>
+          <a:solidFill>
+            <a:srgbClr val="F47321"/>
+          </a:solidFill>
+          <a:ln>
+            <a:noFill/>
+          </a:ln>
+          <a:effectLst/>
+        </p:spPr>
+        <p:style>
+          <a:lnRef idx="1">
+            <a:schemeClr val="accent1"/>
+          </a:lnRef>
+          <a:fillRef idx="3">
+            <a:schemeClr val="accent1"/>
+          </a:fillRef>
+          <a:effectRef idx="2">
+            <a:schemeClr val="accent1"/>
+          </a:effectRef>
+          <a:fontRef idx="minor">
+            <a:schemeClr val="lt1"/>
+          </a:fontRef>
+        </p:style>
+        <p:txBody>
+          <a:bodyPr rtlCol="0" anchor="ctr"/>
+          <a:lstStyle/>
+          <a:p>
+            <a:pPr algn="ctr"/>
+          </a:p>
+        </p:txBody>
+      </p:sp>
+      <p:sp>
+        <p:nvSpPr>
+          <p:cNvPr id="15" name="TextBox 14"/>
+          <p:cNvSpPr txBox="1"/>
+          <p:nvPr/>
+        </p:nvSpPr>
+        <p:spPr>
+          <a:xfrm>
+            <a:off x="1188720" y="4197096"/>
+            <a:ext cx="6217920" cy="731520"/>
+          </a:xfrm>
+          <a:prstGeom prst="rect">
+            <a:avLst/>
+          </a:prstGeom>
+          <a:noFill/>
+        </p:spPr>
+        <p:txBody>
+          <a:bodyPr wrap="square" lIns="0" rIns="0" tIns="0" bIns="0">
+            <a:spAutoFit/>
+          </a:bodyPr>
+          <a:lstStyle/>
+          <a:p>
+            <a:pPr algn="l"/>
+            <a:r>
+              <a:rPr sz="1350" b="0" i="0">
+                <a:solidFill>
+                  <a:srgbClr val="16273D"/>
+                </a:solidFill>
+                <a:latin typeface="Arial"/>
+              </a:rPr>
+              <a:t>Memphis's #16 special teams was Sutton Smith's 99-yd return TD — he's gone; UNLV #65</a:t>
+            </a:r>
+          </a:p>
+        </p:txBody>
+      </p:sp>
+      <p:sp>
+        <p:nvSpPr>
+          <p:cNvPr id="16" name="Rounded Rectangle 15"/>
+          <p:cNvSpPr/>
+          <p:nvPr/>
+        </p:nvSpPr>
+        <p:spPr>
+          <a:xfrm>
+            <a:off x="822960" y="5047488"/>
+            <a:ext cx="6583680" cy="960120"/>
+          </a:xfrm>
+          <a:prstGeom prst="roundRect">
+            <a:avLst/>
+          </a:prstGeom>
+          <a:solidFill>
+            <a:srgbClr val="EAF0F8"/>
+          </a:solidFill>
+          <a:ln>
+            <a:noFill/>
+          </a:ln>
+          <a:effectLst/>
+        </p:spPr>
+        <p:style>
+          <a:lnRef idx="1">
+            <a:schemeClr val="accent1"/>
+          </a:lnRef>
+          <a:fillRef idx="3">
+            <a:schemeClr val="accent1"/>
+          </a:fillRef>
+          <a:effectRef idx="2">
+            <a:schemeClr val="accent1"/>
+          </a:effectRef>
+          <a:fontRef idx="minor">
+            <a:schemeClr val="lt1"/>
+          </a:fontRef>
+        </p:style>
+        <p:txBody>
+          <a:bodyPr rtlCol="0" anchor="ctr"/>
+          <a:lstStyle/>
+          <a:p>
+            <a:pPr algn="ctr"/>
+          </a:p>
+        </p:txBody>
+      </p:sp>
+      <p:sp>
+        <p:nvSpPr>
+          <p:cNvPr id="17" name="TextBox 16"/>
+          <p:cNvSpPr txBox="1"/>
+          <p:nvPr/>
+        </p:nvSpPr>
+        <p:spPr>
+          <a:xfrm>
+            <a:off x="1051560" y="5202936"/>
+            <a:ext cx="6126480" cy="685800"/>
+          </a:xfrm>
+          <a:prstGeom prst="rect">
+            <a:avLst/>
+          </a:prstGeom>
+          <a:noFill/>
+        </p:spPr>
+        <p:txBody>
+          <a:bodyPr wrap="square" lIns="0" rIns="0" tIns="0" bIns="0">
+            <a:spAutoFit/>
+          </a:bodyPr>
+          <a:lstStyle/>
+          <a:p>
+            <a:pPr algn="l"/>
+            <a:r>
+              <a:rPr sz="1150" b="0" i="1">
+                <a:solidFill>
+                  <a:srgbClr val="5C6B7E"/>
+                </a:solidFill>
+                <a:latin typeface="Arial"/>
+              </a:rPr>
+              <a:t>The machine's −6.2 is built on 2025 unit ranks for a Memphis roster that is 53 transfers new — both sides' numbers are stale in opposite directions. Residuals are flat (MEM −1.8, UNLV +0.7); the line already moved to our side.</a:t>
+            </a:r>
+          </a:p>
+        </p:txBody>
+      </p:sp>
+      <p:sp>
+        <p:nvSpPr>
+          <p:cNvPr id="18" name="Rounded Rectangle 17"/>
+          <p:cNvSpPr/>
+          <p:nvPr/>
+        </p:nvSpPr>
+        <p:spPr>
+          <a:xfrm>
+            <a:off x="7772400" y="1600200"/>
+            <a:ext cx="3566160" cy="4206240"/>
+          </a:xfrm>
+          <a:prstGeom prst="roundRect">
+            <a:avLst/>
+          </a:prstGeom>
+          <a:solidFill>
+            <a:srgbClr val="0A2851"/>
+          </a:solidFill>
+          <a:ln>
+            <a:noFill/>
+          </a:ln>
+          <a:effectLst/>
+        </p:spPr>
+        <p:style>
+          <a:lnRef idx="1">
+            <a:schemeClr val="accent1"/>
+          </a:lnRef>
+          <a:fillRef idx="3">
+            <a:schemeClr val="accent1"/>
+          </a:fillRef>
+          <a:effectRef idx="2">
+            <a:schemeClr val="accent1"/>
+          </a:effectRef>
+          <a:fontRef idx="minor">
+            <a:schemeClr val="lt1"/>
+          </a:fontRef>
+        </p:style>
+        <p:txBody>
+          <a:bodyPr rtlCol="0" anchor="ctr"/>
+          <a:lstStyle/>
+          <a:p>
+            <a:pPr algn="ctr"/>
+          </a:p>
+        </p:txBody>
+      </p:sp>
+      <p:sp>
+        <p:nvSpPr>
+          <p:cNvPr id="19" name="TextBox 18"/>
+          <p:cNvSpPr txBox="1"/>
+          <p:nvPr/>
+        </p:nvSpPr>
+        <p:spPr>
+          <a:xfrm>
+            <a:off x="8046720" y="1828800"/>
+            <a:ext cx="3017520" cy="320040"/>
+          </a:xfrm>
+          <a:prstGeom prst="rect">
+            <a:avLst/>
+          </a:prstGeom>
+          <a:noFill/>
+        </p:spPr>
+        <p:txBody>
+          <a:bodyPr wrap="square" lIns="0" rIns="0" tIns="0" bIns="0">
+            <a:spAutoFit/>
+          </a:bodyPr>
+          <a:lstStyle/>
+          <a:p>
+            <a:pPr algn="l"/>
+            <a:r>
+              <a:rPr sz="1200" b="1" i="0">
+                <a:solidFill>
+                  <a:srgbClr val="F47321"/>
+                </a:solidFill>
+                <a:latin typeface="Arial"/>
+              </a:rPr>
+              <a:t>THE NUMBER</a:t>
+            </a:r>
+          </a:p>
+        </p:txBody>
+      </p:sp>
+      <p:sp>
+        <p:nvSpPr>
+          <p:cNvPr id="20" name="TextBox 19"/>
+          <p:cNvSpPr txBox="1"/>
+          <p:nvPr/>
+        </p:nvSpPr>
+        <p:spPr>
+          <a:xfrm>
+            <a:off x="8046720" y="2194560"/>
+            <a:ext cx="3017520" cy="640080"/>
+          </a:xfrm>
+          <a:prstGeom prst="rect">
+            <a:avLst/>
+          </a:prstGeom>
+          <a:noFill/>
+        </p:spPr>
+        <p:txBody>
+          <a:bodyPr wrap="square" lIns="0" rIns="0" tIns="0" bIns="0">
+            <a:spAutoFit/>
+          </a:bodyPr>
+          <a:lstStyle/>
+          <a:p>
+            <a:pPr algn="l"/>
+            <a:r>
+              <a:rPr sz="3000" b="1" i="0">
+                <a:solidFill>
+                  <a:srgbClr val="FFFFFF"/>
+                </a:solidFill>
+                <a:latin typeface="Arial"/>
+              </a:rPr>
+              <a:t>UNLV –6.2</a:t>
+            </a:r>
+          </a:p>
+        </p:txBody>
+      </p:sp>
+      <p:sp>
+        <p:nvSpPr>
+          <p:cNvPr id="21" name="TextBox 20"/>
+          <p:cNvSpPr txBox="1"/>
+          <p:nvPr/>
+        </p:nvSpPr>
+        <p:spPr>
+          <a:xfrm>
+            <a:off x="8046720" y="2788920"/>
+            <a:ext cx="3017520" cy="274320"/>
+          </a:xfrm>
+          <a:prstGeom prst="rect">
+            <a:avLst/>
+          </a:prstGeom>
+          <a:noFill/>
+        </p:spPr>
+        <p:txBody>
+          <a:bodyPr wrap="square" lIns="0" rIns="0" tIns="0" bIns="0">
+            <a:spAutoFit/>
+          </a:bodyPr>
+          <a:lstStyle/>
+          <a:p>
+            <a:pPr algn="l"/>
+            <a:r>
+              <a:rPr sz="1000" b="0" i="0">
+                <a:solidFill>
+                  <a:srgbClr val="CADCFC"/>
+                </a:solidFill>
+                <a:latin typeface="Arial"/>
+              </a:rPr>
+              <a:t>machine</a:t>
+            </a:r>
+          </a:p>
+        </p:txBody>
+      </p:sp>
+      <p:sp>
+        <p:nvSpPr>
+          <p:cNvPr id="22" name="TextBox 21"/>
+          <p:cNvSpPr txBox="1"/>
+          <p:nvPr/>
+        </p:nvSpPr>
+        <p:spPr>
+          <a:xfrm>
+            <a:off x="8046720" y="3154680"/>
+            <a:ext cx="3017520" cy="502920"/>
+          </a:xfrm>
+          <a:prstGeom prst="rect">
+            <a:avLst/>
+          </a:prstGeom>
+          <a:noFill/>
+        </p:spPr>
+        <p:txBody>
+          <a:bodyPr wrap="square" lIns="0" rIns="0" tIns="0" bIns="0">
+            <a:spAutoFit/>
+          </a:bodyPr>
+          <a:lstStyle/>
+          <a:p>
+            <a:pPr algn="l"/>
+            <a:r>
+              <a:rPr sz="2200" b="1" i="0">
+                <a:solidFill>
+                  <a:srgbClr val="FFFFFF"/>
+                </a:solidFill>
+                <a:latin typeface="Arial"/>
+              </a:rPr>
+              <a:t>–5.5 / –5.5</a:t>
+            </a:r>
+          </a:p>
+        </p:txBody>
+      </p:sp>
+      <p:sp>
+        <p:nvSpPr>
+          <p:cNvPr id="23" name="TextBox 22"/>
+          <p:cNvSpPr txBox="1"/>
+          <p:nvPr/>
+        </p:nvSpPr>
+        <p:spPr>
+          <a:xfrm>
+            <a:off x="8046720" y="3611880"/>
+            <a:ext cx="3017520" cy="274320"/>
+          </a:xfrm>
+          <a:prstGeom prst="rect">
+            <a:avLst/>
+          </a:prstGeom>
+          <a:noFill/>
+        </p:spPr>
+        <p:txBody>
+          <a:bodyPr wrap="square" lIns="0" rIns="0" tIns="0" bIns="0">
+            <a:spAutoFit/>
+          </a:bodyPr>
+          <a:lstStyle/>
+          <a:p>
+            <a:pPr algn="l"/>
+            <a:r>
+              <a:rPr sz="1000" b="0" i="0">
+                <a:solidFill>
+                  <a:srgbClr val="CADCFC"/>
+                </a:solidFill>
+                <a:latin typeface="Arial"/>
+              </a:rPr>
+              <a:t>market (DK / Bovada)</a:t>
+            </a:r>
+          </a:p>
+        </p:txBody>
+      </p:sp>
+      <p:sp>
+        <p:nvSpPr>
+          <p:cNvPr id="24" name="TextBox 23"/>
+          <p:cNvSpPr txBox="1"/>
+          <p:nvPr/>
+        </p:nvSpPr>
+        <p:spPr>
+          <a:xfrm>
+            <a:off x="8046720" y="3977639"/>
+            <a:ext cx="3017520" cy="411480"/>
+          </a:xfrm>
+          <a:prstGeom prst="rect">
+            <a:avLst/>
+          </a:prstGeom>
+          <a:noFill/>
+        </p:spPr>
+        <p:txBody>
+          <a:bodyPr wrap="square" lIns="0" rIns="0" tIns="0" bIns="0">
+            <a:spAutoFit/>
+          </a:bodyPr>
+          <a:lstStyle/>
+          <a:p>
+            <a:pPr algn="l"/>
+            <a:r>
+              <a:rPr sz="1600" b="1" i="0">
+                <a:solidFill>
+                  <a:srgbClr val="F47321"/>
+                </a:solidFill>
+                <a:latin typeface="Arial"/>
+              </a:rPr>
+              <a:t>market came to us: –3 → –5.5</a:t>
+            </a:r>
+          </a:p>
+        </p:txBody>
+      </p:sp>
+      <p:sp>
+        <p:nvSpPr>
+          <p:cNvPr id="25" name="TextBox 24"/>
+          <p:cNvSpPr txBox="1"/>
+          <p:nvPr/>
+        </p:nvSpPr>
+        <p:spPr>
+          <a:xfrm>
+            <a:off x="8046720" y="4370832"/>
+            <a:ext cx="3017520" cy="274320"/>
+          </a:xfrm>
+          <a:prstGeom prst="rect">
+            <a:avLst/>
+          </a:prstGeom>
+          <a:noFill/>
+        </p:spPr>
+        <p:txBody>
+          <a:bodyPr wrap="square" lIns="0" rIns="0" tIns="0" bIns="0">
+            <a:spAutoFit/>
+          </a:bodyPr>
+          <a:lstStyle/>
+          <a:p>
+            <a:pPr algn="l"/>
+            <a:r>
+              <a:rPr sz="1000" b="0" i="0">
+                <a:solidFill>
+                  <a:srgbClr val="CADCFC"/>
+                </a:solidFill>
+                <a:latin typeface="Arial"/>
+              </a:rPr>
+              <a:t>the gap</a:t>
+            </a:r>
+          </a:p>
+        </p:txBody>
+      </p:sp>
+      <p:sp>
+        <p:nvSpPr>
+          <p:cNvPr id="26" name="Rounded Rectangle 25"/>
+          <p:cNvSpPr/>
+          <p:nvPr/>
+        </p:nvSpPr>
+        <p:spPr>
+          <a:xfrm>
+            <a:off x="8046720" y="4892040"/>
+            <a:ext cx="3017520" cy="384048"/>
+          </a:xfrm>
+          <a:prstGeom prst="roundRect">
+            <a:avLst/>
+          </a:prstGeom>
+          <a:solidFill>
+            <a:srgbClr val="004991"/>
+          </a:solidFill>
+          <a:ln>
+            <a:noFill/>
+          </a:ln>
+          <a:effectLst/>
+        </p:spPr>
+        <p:style>
+          <a:lnRef idx="1">
+            <a:schemeClr val="accent1"/>
+          </a:lnRef>
+          <a:fillRef idx="3">
+            <a:schemeClr val="accent1"/>
+          </a:fillRef>
+          <a:effectRef idx="2">
+            <a:schemeClr val="accent1"/>
+          </a:effectRef>
+          <a:fontRef idx="minor">
+            <a:schemeClr val="lt1"/>
+          </a:fontRef>
+        </p:style>
+        <p:txBody>
+          <a:bodyPr rtlCol="0" anchor="ctr"/>
+          <a:lstStyle/>
+          <a:p>
+            <a:pPr algn="ctr"/>
+          </a:p>
+        </p:txBody>
+      </p:sp>
+      <p:sp>
+        <p:nvSpPr>
+          <p:cNvPr id="27" name="Rounded Rectangle 26"/>
+          <p:cNvSpPr/>
+          <p:nvPr/>
+        </p:nvSpPr>
+        <p:spPr>
+          <a:xfrm>
+            <a:off x="8046720" y="4892040"/>
+            <a:ext cx="1931212" cy="384048"/>
+          </a:xfrm>
+          <a:prstGeom prst="roundRect">
+            <a:avLst/>
+          </a:prstGeom>
+          <a:solidFill>
+            <a:srgbClr val="B10202"/>
+          </a:solidFill>
+          <a:ln>
+            <a:noFill/>
+          </a:ln>
+          <a:effectLst/>
+        </p:spPr>
+        <p:style>
+          <a:lnRef idx="1">
+            <a:schemeClr val="accent1"/>
+          </a:lnRef>
+          <a:fillRef idx="3">
+            <a:schemeClr val="accent1"/>
+          </a:fillRef>
+          <a:effectRef idx="2">
+            <a:schemeClr val="accent1"/>
+          </a:effectRef>
+          <a:fontRef idx="minor">
+            <a:schemeClr val="lt1"/>
+          </a:fontRef>
+        </p:style>
+        <p:txBody>
+          <a:bodyPr rtlCol="0" anchor="ctr"/>
+          <a:lstStyle/>
+          <a:p>
+            <a:pPr algn="ctr"/>
+          </a:p>
+        </p:txBody>
+      </p:sp>
+      <p:sp>
+        <p:nvSpPr>
+          <p:cNvPr id="28" name="TextBox 27"/>
+          <p:cNvSpPr txBox="1"/>
+          <p:nvPr/>
+        </p:nvSpPr>
+        <p:spPr>
+          <a:xfrm>
+            <a:off x="8119872" y="4983479"/>
+            <a:ext cx="2194560" cy="228600"/>
+          </a:xfrm>
+          <a:prstGeom prst="rect">
+            <a:avLst/>
+          </a:prstGeom>
+          <a:noFill/>
+        </p:spPr>
+        <p:txBody>
+          <a:bodyPr wrap="square" lIns="0" rIns="0" tIns="0" bIns="0">
+            <a:spAutoFit/>
+          </a:bodyPr>
+          <a:lstStyle/>
+          <a:p>
+            <a:pPr algn="l"/>
+            <a:r>
+              <a:rPr sz="1050" b="1" i="0">
+                <a:solidFill>
+                  <a:srgbClr val="FFFFFF"/>
+                </a:solidFill>
+                <a:latin typeface="Arial"/>
+              </a:rPr>
+              <a:t>UNLV 64%</a:t>
+            </a:r>
+          </a:p>
+        </p:txBody>
+      </p:sp>
+      <p:sp>
+        <p:nvSpPr>
+          <p:cNvPr id="29" name="TextBox 28"/>
+          <p:cNvSpPr txBox="1"/>
+          <p:nvPr/>
+        </p:nvSpPr>
+        <p:spPr>
+          <a:xfrm>
+            <a:off x="8796528" y="4983479"/>
+            <a:ext cx="2194560" cy="228600"/>
+          </a:xfrm>
+          <a:prstGeom prst="rect">
+            <a:avLst/>
+          </a:prstGeom>
+          <a:noFill/>
+        </p:spPr>
+        <p:txBody>
+          <a:bodyPr wrap="square" lIns="0" rIns="0" tIns="0" bIns="0">
+            <a:spAutoFit/>
+          </a:bodyPr>
+          <a:lstStyle/>
+          <a:p>
+            <a:pPr algn="r"/>
+            <a:r>
+              <a:rPr sz="1050" b="1" i="0">
+                <a:solidFill>
+                  <a:srgbClr val="FFFFFF"/>
+                </a:solidFill>
+                <a:latin typeface="Arial"/>
+              </a:rPr>
+              <a:t>36% MEM</a:t>
+            </a:r>
+          </a:p>
+        </p:txBody>
+      </p:sp>
+      <p:sp>
+        <p:nvSpPr>
+          <p:cNvPr id="30" name="TextBox 29"/>
+          <p:cNvSpPr txBox="1"/>
+          <p:nvPr/>
+        </p:nvSpPr>
+        <p:spPr>
+          <a:xfrm>
+            <a:off x="8046720" y="5349240"/>
+            <a:ext cx="3017520" cy="274320"/>
+          </a:xfrm>
+          <a:prstGeom prst="rect">
+            <a:avLst/>
+          </a:prstGeom>
+          <a:noFill/>
+        </p:spPr>
+        <p:txBody>
+          <a:bodyPr wrap="square" lIns="0" rIns="0" tIns="0" bIns="0">
+            <a:spAutoFit/>
+          </a:bodyPr>
+          <a:lstStyle/>
+          <a:p>
+            <a:pPr algn="l"/>
+            <a:r>
+              <a:rPr sz="950" b="0" i="0">
+                <a:solidFill>
+                  <a:srgbClr val="CADCFC"/>
+                </a:solidFill>
+                <a:latin typeface="Arial"/>
+              </a:rPr>
+              <a:t>win probability (machine)</a:t>
+            </a:r>
+          </a:p>
+        </p:txBody>
+      </p:sp>
+      <p:sp>
+        <p:nvSpPr>
+          <p:cNvPr id="31" name="TextBox 30"/>
+          <p:cNvSpPr txBox="1"/>
+          <p:nvPr/>
+        </p:nvSpPr>
+        <p:spPr>
+          <a:xfrm>
+            <a:off x="822960" y="6263640"/>
+            <a:ext cx="10515600" cy="365760"/>
+          </a:xfrm>
+          <a:prstGeom prst="rect">
+            <a:avLst/>
+          </a:prstGeom>
+          <a:noFill/>
+        </p:spPr>
+        <p:txBody>
+          <a:bodyPr wrap="square" lIns="0" rIns="0" tIns="0" bIns="0">
+            <a:spAutoFit/>
+          </a:bodyPr>
+          <a:lstStyle/>
+          <a:p>
+            <a:pPr algn="l"/>
+            <a:r>
+              <a:rPr sz="1300" b="1" i="0">
+                <a:solidFill>
+                  <a:srgbClr val="0A2851"/>
+                </a:solidFill>
+                <a:latin typeface="Arial"/>
+              </a:rPr>
+              <a:t>Model side UNLV — the edge was at −3 and it's gone; at −5.5 this is a watch and the first film_study run, not a play</a:t>
+            </a:r>
+          </a:p>
+        </p:txBody>
+      </p:sp>
+    </p:spTree>
+  </p:cSld>
+  <p:clrMapOvr>
+    <a:masterClrMapping/>
+  </p:clrMapOvr>
+</p:sld>
+</file>
+
+<file path=ppt/slides/slide11.xml><?xml version="1.0" encoding="utf-8"?>
+<p:sld xmlns:a="http://schemas.openxmlformats.org/drawingml/2006/main" xmlns:p="http://schemas.openxmlformats.org/presentationml/2006/main" xmlns:r="http://schemas.openxmlformats.org/officeDocument/2006/relationships">
+  <p:cSld>
+    <p:bg>
+      <p:bgPr>
+        <a:solidFill>
+          <a:srgbClr val="FFFFFF"/>
+        </a:solidFill>
+        <a:effectLst/>
+      </p:bgPr>
+    </p:bg>
+    <p:spTree>
+      <p:nvGrpSpPr>
+        <p:cNvPr id="1" name=""/>
+        <p:cNvGrpSpPr/>
+        <p:nvPr/>
+      </p:nvGrpSpPr>
+      <p:grpSpPr/>
+      <p:pic>
+        <p:nvPicPr>
+          <p:cNvPr id="2" name="Picture 1" descr="memphis.png"/>
+          <p:cNvPicPr>
+            <a:picLocks noChangeAspect="1"/>
+          </p:cNvPicPr>
+          <p:nvPr/>
+        </p:nvPicPr>
+        <p:blipFill>
+          <a:blip r:embed="rId2"/>
+          <a:stretch>
+            <a:fillRect/>
+          </a:stretch>
+        </p:blipFill>
+        <p:spPr>
+          <a:xfrm>
+            <a:off x="822960" y="384048"/>
+            <a:ext cx="731520" cy="731520"/>
+          </a:xfrm>
+          <a:prstGeom prst="rect">
+            <a:avLst/>
+          </a:prstGeom>
+        </p:spPr>
+      </p:pic>
+      <p:sp>
+        <p:nvSpPr>
+          <p:cNvPr id="3" name="TextBox 2"/>
+          <p:cNvSpPr txBox="1"/>
+          <p:nvPr/>
+        </p:nvSpPr>
+        <p:spPr>
+          <a:xfrm>
+            <a:off x="1664208" y="475488"/>
+            <a:ext cx="457200" cy="457200"/>
+          </a:xfrm>
+          <a:prstGeom prst="rect">
+            <a:avLst/>
+          </a:prstGeom>
+          <a:noFill/>
+        </p:spPr>
+        <p:txBody>
+          <a:bodyPr wrap="square" lIns="0" rIns="0" tIns="0" bIns="0">
+            <a:spAutoFit/>
+          </a:bodyPr>
+          <a:lstStyle/>
+          <a:p>
+            <a:pPr algn="ctr"/>
+            <a:r>
+              <a:rPr sz="1400" b="0" i="0">
+                <a:solidFill>
+                  <a:srgbClr val="5C6B7E"/>
+                </a:solidFill>
+                <a:latin typeface="Arial"/>
+              </a:rPr>
+              <a:t>at</a:t>
+            </a:r>
+          </a:p>
+        </p:txBody>
+      </p:sp>
+      <p:pic>
+        <p:nvPicPr>
+          <p:cNvPr id="4" name="Picture 3" descr="unlv.png"/>
+          <p:cNvPicPr>
+            <a:picLocks noChangeAspect="1"/>
+          </p:cNvPicPr>
+          <p:nvPr/>
+        </p:nvPicPr>
+        <p:blipFill>
+          <a:blip r:embed="rId3"/>
+          <a:stretch>
+            <a:fillRect/>
+          </a:stretch>
+        </p:blipFill>
+        <p:spPr>
+          <a:xfrm>
+            <a:off x="2148840" y="384048"/>
+            <a:ext cx="731520" cy="731520"/>
+          </a:xfrm>
+          <a:prstGeom prst="rect">
+            <a:avLst/>
+          </a:prstGeom>
+        </p:spPr>
+      </p:pic>
+      <p:sp>
+        <p:nvSpPr>
+          <p:cNvPr id="5" name="TextBox 4"/>
+          <p:cNvSpPr txBox="1"/>
+          <p:nvPr/>
+        </p:nvSpPr>
+        <p:spPr>
+          <a:xfrm>
+            <a:off x="3154680" y="384048"/>
+            <a:ext cx="8138160" cy="502920"/>
+          </a:xfrm>
+          <a:prstGeom prst="rect">
+            <a:avLst/>
+          </a:prstGeom>
+          <a:noFill/>
+        </p:spPr>
+        <p:txBody>
+          <a:bodyPr wrap="square" lIns="0" rIns="0" tIns="0" bIns="0">
+            <a:spAutoFit/>
+          </a:bodyPr>
+          <a:lstStyle/>
+          <a:p>
+            <a:pPr algn="l"/>
+            <a:r>
+              <a:rPr sz="2700" b="1" i="0">
+                <a:solidFill>
+                  <a:srgbClr val="0A2851"/>
+                </a:solidFill>
+                <a:latin typeface="Arial"/>
+              </a:rPr>
+              <a:t>Players to watch</a:t>
+            </a:r>
+          </a:p>
+        </p:txBody>
+      </p:sp>
+      <p:sp>
+        <p:nvSpPr>
+          <p:cNvPr id="6" name="Rounded Rectangle 5"/>
+          <p:cNvSpPr/>
+          <p:nvPr/>
+        </p:nvSpPr>
+        <p:spPr>
+          <a:xfrm>
+            <a:off x="822960" y="1417320"/>
+            <a:ext cx="5166360" cy="4754880"/>
+          </a:xfrm>
+          <a:prstGeom prst="roundRect">
+            <a:avLst/>
+          </a:prstGeom>
+          <a:solidFill>
+            <a:srgbClr val="EAF0F8"/>
+          </a:solidFill>
+          <a:ln>
+            <a:noFill/>
+          </a:ln>
+          <a:effectLst/>
+        </p:spPr>
+        <p:style>
+          <a:lnRef idx="1">
+            <a:schemeClr val="accent1"/>
+          </a:lnRef>
+          <a:fillRef idx="3">
+            <a:schemeClr val="accent1"/>
+          </a:fillRef>
+          <a:effectRef idx="2">
+            <a:schemeClr val="accent1"/>
+          </a:effectRef>
+          <a:fontRef idx="minor">
+            <a:schemeClr val="lt1"/>
+          </a:fontRef>
+        </p:style>
+        <p:txBody>
+          <a:bodyPr rtlCol="0" anchor="ctr"/>
+          <a:lstStyle/>
+          <a:p>
+            <a:pPr algn="ctr"/>
+          </a:p>
+        </p:txBody>
+      </p:sp>
+      <p:pic>
+        <p:nvPicPr>
+          <p:cNvPr id="7" name="Picture 6" descr="memphis.png"/>
+          <p:cNvPicPr>
+            <a:picLocks noChangeAspect="1"/>
+          </p:cNvPicPr>
+          <p:nvPr/>
+        </p:nvPicPr>
+        <p:blipFill>
+          <a:blip r:embed="rId2"/>
+          <a:stretch>
+            <a:fillRect/>
+          </a:stretch>
+        </p:blipFill>
+        <p:spPr>
+          <a:xfrm>
+            <a:off x="1097280" y="1691640"/>
+            <a:ext cx="566928" cy="566928"/>
+          </a:xfrm>
+          <a:prstGeom prst="rect">
+            <a:avLst/>
+          </a:prstGeom>
+        </p:spPr>
+      </p:pic>
+      <p:sp>
+        <p:nvSpPr>
+          <p:cNvPr id="8" name="TextBox 7"/>
+          <p:cNvSpPr txBox="1"/>
+          <p:nvPr/>
+        </p:nvSpPr>
+        <p:spPr>
+          <a:xfrm>
+            <a:off x="1828800" y="1783080"/>
+            <a:ext cx="3840480" cy="411480"/>
+          </a:xfrm>
+          <a:prstGeom prst="rect">
+            <a:avLst/>
+          </a:prstGeom>
+          <a:noFill/>
+        </p:spPr>
+        <p:txBody>
+          <a:bodyPr wrap="square" lIns="0" rIns="0" tIns="0" bIns="0">
+            <a:spAutoFit/>
+          </a:bodyPr>
+          <a:lstStyle/>
+          <a:p>
+            <a:pPr algn="l"/>
+            <a:r>
+              <a:rPr sz="100" b="0" i="0">
+                <a:solidFill>
+                  <a:srgbClr val="EAF0F8"/>
+                </a:solidFill>
+                <a:latin typeface="Arial"/>
+              </a:rPr>
+              <a:t>Memphis</a:t>
+            </a:r>
+          </a:p>
+        </p:txBody>
+      </p:sp>
+      <p:sp>
+        <p:nvSpPr>
+          <p:cNvPr id="9" name="TextBox 8"/>
+          <p:cNvSpPr txBox="1"/>
+          <p:nvPr/>
+        </p:nvSpPr>
+        <p:spPr>
+          <a:xfrm>
+            <a:off x="1828800" y="1755648"/>
+            <a:ext cx="3931920" cy="457200"/>
           </a:xfrm>
           <a:prstGeom prst="rect">
             <a:avLst/>
@@ -4019,10 +6211,1694 @@
             <a:r>
               <a:rPr sz="1700" b="1" i="0">
                 <a:solidFill>
+                  <a:srgbClr val="16273D"/>
+                </a:solidFill>
+                <a:latin typeface="Arial"/>
+              </a:rPr>
+              <a:t>Memphis</a:t>
+            </a:r>
+          </a:p>
+        </p:txBody>
+      </p:sp>
+      <p:sp>
+        <p:nvSpPr>
+          <p:cNvPr id="10" name="TextBox 9"/>
+          <p:cNvSpPr txBox="1"/>
+          <p:nvPr/>
+        </p:nvSpPr>
+        <p:spPr>
+          <a:xfrm>
+            <a:off x="1143000" y="2514600"/>
+            <a:ext cx="4572000" cy="320040"/>
+          </a:xfrm>
+          <a:prstGeom prst="rect">
+            <a:avLst/>
+          </a:prstGeom>
+          <a:noFill/>
+        </p:spPr>
+        <p:txBody>
+          <a:bodyPr wrap="square" lIns="0" rIns="0" tIns="0" bIns="0">
+            <a:spAutoFit/>
+          </a:bodyPr>
+          <a:lstStyle/>
+          <a:p>
+            <a:pPr algn="l"/>
+            <a:r>
+              <a:rPr sz="1450" b="1" i="0">
+                <a:solidFill>
+                  <a:srgbClr val="16273D"/>
+                </a:solidFill>
+                <a:latin typeface="Arial"/>
+              </a:rPr>
+              <a:t>Air Noland / Marcus Stokes</a:t>
+            </a:r>
+          </a:p>
+        </p:txBody>
+      </p:sp>
+      <p:sp>
+        <p:nvSpPr>
+          <p:cNvPr id="11" name="TextBox 10"/>
+          <p:cNvSpPr txBox="1"/>
+          <p:nvPr/>
+        </p:nvSpPr>
+        <p:spPr>
+          <a:xfrm>
+            <a:off x="1143000" y="2825496"/>
+            <a:ext cx="4572000" cy="502920"/>
+          </a:xfrm>
+          <a:prstGeom prst="rect">
+            <a:avLst/>
+          </a:prstGeom>
+          <a:noFill/>
+        </p:spPr>
+        <p:txBody>
+          <a:bodyPr wrap="square" lIns="0" rIns="0" tIns="0" bIns="0">
+            <a:spAutoFit/>
+          </a:bodyPr>
+          <a:lstStyle/>
+          <a:p>
+            <a:pPr algn="l"/>
+            <a:r>
+              <a:rPr sz="1150" b="0" i="0">
+                <a:solidFill>
+                  <a:srgbClr val="5C6B7E"/>
+                </a:solidFill>
+                <a:latin typeface="Arial"/>
+              </a:rPr>
+              <a:t>QB derby — Noland threw 3 passes at South Carolina in 2025; Stokes: 3,297 yds, 30 TD at D-II West Florida</a:t>
+            </a:r>
+          </a:p>
+        </p:txBody>
+      </p:sp>
+      <p:sp>
+        <p:nvSpPr>
+          <p:cNvPr id="12" name="TextBox 11"/>
+          <p:cNvSpPr txBox="1"/>
+          <p:nvPr/>
+        </p:nvSpPr>
+        <p:spPr>
+          <a:xfrm>
+            <a:off x="1143000" y="3410712"/>
+            <a:ext cx="4572000" cy="320040"/>
+          </a:xfrm>
+          <a:prstGeom prst="rect">
+            <a:avLst/>
+          </a:prstGeom>
+          <a:noFill/>
+        </p:spPr>
+        <p:txBody>
+          <a:bodyPr wrap="square" lIns="0" rIns="0" tIns="0" bIns="0">
+            <a:spAutoFit/>
+          </a:bodyPr>
+          <a:lstStyle/>
+          <a:p>
+            <a:pPr algn="l"/>
+            <a:r>
+              <a:rPr sz="1450" b="1" i="0">
+                <a:solidFill>
+                  <a:srgbClr val="16273D"/>
+                </a:solidFill>
+                <a:latin typeface="Arial"/>
+              </a:rPr>
+              <a:t>Dallan Hayden</a:t>
+            </a:r>
+          </a:p>
+        </p:txBody>
+      </p:sp>
+      <p:sp>
+        <p:nvSpPr>
+          <p:cNvPr id="13" name="TextBox 12"/>
+          <p:cNvSpPr txBox="1"/>
+          <p:nvPr/>
+        </p:nvSpPr>
+        <p:spPr>
+          <a:xfrm>
+            <a:off x="1143000" y="3721608"/>
+            <a:ext cx="4572000" cy="502920"/>
+          </a:xfrm>
+          <a:prstGeom prst="rect">
+            <a:avLst/>
+          </a:prstGeom>
+          <a:noFill/>
+        </p:spPr>
+        <p:txBody>
+          <a:bodyPr wrap="square" lIns="0" rIns="0" tIns="0" bIns="0">
+            <a:spAutoFit/>
+          </a:bodyPr>
+          <a:lstStyle/>
+          <a:p>
+            <a:pPr algn="l"/>
+            <a:r>
+              <a:rPr sz="1150" b="0" i="0">
+                <a:solidFill>
+                  <a:srgbClr val="5C6B7E"/>
+                </a:solidFill>
+                <a:latin typeface="Arial"/>
+              </a:rPr>
+              <a:t>RB — Colorado transfer; 2025: 326 yds at 4.7/carry, 1 TD</a:t>
+            </a:r>
+          </a:p>
+        </p:txBody>
+      </p:sp>
+      <p:sp>
+        <p:nvSpPr>
+          <p:cNvPr id="14" name="TextBox 13"/>
+          <p:cNvSpPr txBox="1"/>
+          <p:nvPr/>
+        </p:nvSpPr>
+        <p:spPr>
+          <a:xfrm>
+            <a:off x="1143000" y="4306824"/>
+            <a:ext cx="4572000" cy="320040"/>
+          </a:xfrm>
+          <a:prstGeom prst="rect">
+            <a:avLst/>
+          </a:prstGeom>
+          <a:noFill/>
+        </p:spPr>
+        <p:txBody>
+          <a:bodyPr wrap="square" lIns="0" rIns="0" tIns="0" bIns="0">
+            <a:spAutoFit/>
+          </a:bodyPr>
+          <a:lstStyle/>
+          <a:p>
+            <a:pPr algn="l"/>
+            <a:r>
+              <a:rPr sz="1450" b="1" i="0">
+                <a:solidFill>
+                  <a:srgbClr val="16273D"/>
+                </a:solidFill>
+                <a:latin typeface="Arial"/>
+              </a:rPr>
+              <a:t>Tychaun Chapman</a:t>
+            </a:r>
+          </a:p>
+        </p:txBody>
+      </p:sp>
+      <p:sp>
+        <p:nvSpPr>
+          <p:cNvPr id="15" name="TextBox 14"/>
+          <p:cNvSpPr txBox="1"/>
+          <p:nvPr/>
+        </p:nvSpPr>
+        <p:spPr>
+          <a:xfrm>
+            <a:off x="1143000" y="4617720"/>
+            <a:ext cx="4572000" cy="502920"/>
+          </a:xfrm>
+          <a:prstGeom prst="rect">
+            <a:avLst/>
+          </a:prstGeom>
+          <a:noFill/>
+        </p:spPr>
+        <p:txBody>
+          <a:bodyPr wrap="square" lIns="0" rIns="0" tIns="0" bIns="0">
+            <a:spAutoFit/>
+          </a:bodyPr>
+          <a:lstStyle/>
+          <a:p>
+            <a:pPr algn="l"/>
+            <a:r>
+              <a:rPr sz="1150" b="0" i="0">
+                <a:solidFill>
+                  <a:srgbClr val="5C6B7E"/>
+                </a:solidFill>
+                <a:latin typeface="Arial"/>
+              </a:rPr>
+              <a:t>WR — Southern Miss transfer; 2025: 24 rec, 444 yds, 3 TD</a:t>
+            </a:r>
+          </a:p>
+        </p:txBody>
+      </p:sp>
+      <p:sp>
+        <p:nvSpPr>
+          <p:cNvPr id="16" name="TextBox 15"/>
+          <p:cNvSpPr txBox="1"/>
+          <p:nvPr/>
+        </p:nvSpPr>
+        <p:spPr>
+          <a:xfrm>
+            <a:off x="1143000" y="5202936"/>
+            <a:ext cx="4572000" cy="320040"/>
+          </a:xfrm>
+          <a:prstGeom prst="rect">
+            <a:avLst/>
+          </a:prstGeom>
+          <a:noFill/>
+        </p:spPr>
+        <p:txBody>
+          <a:bodyPr wrap="square" lIns="0" rIns="0" tIns="0" bIns="0">
+            <a:spAutoFit/>
+          </a:bodyPr>
+          <a:lstStyle/>
+          <a:p>
+            <a:pPr algn="l"/>
+            <a:r>
+              <a:rPr sz="1450" b="1" i="0">
+                <a:solidFill>
+                  <a:srgbClr val="16273D"/>
+                </a:solidFill>
+                <a:latin typeface="Arial"/>
+              </a:rPr>
+              <a:t>J'Mond Tapp</a:t>
+            </a:r>
+          </a:p>
+        </p:txBody>
+      </p:sp>
+      <p:sp>
+        <p:nvSpPr>
+          <p:cNvPr id="17" name="TextBox 16"/>
+          <p:cNvSpPr txBox="1"/>
+          <p:nvPr/>
+        </p:nvSpPr>
+        <p:spPr>
+          <a:xfrm>
+            <a:off x="1143000" y="5513831"/>
+            <a:ext cx="4572000" cy="502920"/>
+          </a:xfrm>
+          <a:prstGeom prst="rect">
+            <a:avLst/>
+          </a:prstGeom>
+          <a:noFill/>
+        </p:spPr>
+        <p:txBody>
+          <a:bodyPr wrap="square" lIns="0" rIns="0" tIns="0" bIns="0">
+            <a:spAutoFit/>
+          </a:bodyPr>
+          <a:lstStyle/>
+          <a:p>
+            <a:pPr algn="l"/>
+            <a:r>
+              <a:rPr sz="1150" b="0" i="0">
+                <a:solidFill>
+                  <a:srgbClr val="5C6B7E"/>
+                </a:solidFill>
+                <a:latin typeface="Arial"/>
+              </a:rPr>
+              <a:t>DL — Southern Miss transfer; 2025: 69 tkl, 12 TFL, 7.5 sacks, 10 hurries</a:t>
+            </a:r>
+          </a:p>
+        </p:txBody>
+      </p:sp>
+      <p:sp>
+        <p:nvSpPr>
+          <p:cNvPr id="18" name="Rounded Rectangle 17"/>
+          <p:cNvSpPr/>
+          <p:nvPr/>
+        </p:nvSpPr>
+        <p:spPr>
+          <a:xfrm>
+            <a:off x="6309360" y="1417320"/>
+            <a:ext cx="5166360" cy="4754880"/>
+          </a:xfrm>
+          <a:prstGeom prst="roundRect">
+            <a:avLst/>
+          </a:prstGeom>
+          <a:solidFill>
+            <a:srgbClr val="EAF0F8"/>
+          </a:solidFill>
+          <a:ln>
+            <a:noFill/>
+          </a:ln>
+          <a:effectLst/>
+        </p:spPr>
+        <p:style>
+          <a:lnRef idx="1">
+            <a:schemeClr val="accent1"/>
+          </a:lnRef>
+          <a:fillRef idx="3">
+            <a:schemeClr val="accent1"/>
+          </a:fillRef>
+          <a:effectRef idx="2">
+            <a:schemeClr val="accent1"/>
+          </a:effectRef>
+          <a:fontRef idx="minor">
+            <a:schemeClr val="lt1"/>
+          </a:fontRef>
+        </p:style>
+        <p:txBody>
+          <a:bodyPr rtlCol="0" anchor="ctr"/>
+          <a:lstStyle/>
+          <a:p>
+            <a:pPr algn="ctr"/>
+          </a:p>
+        </p:txBody>
+      </p:sp>
+      <p:pic>
+        <p:nvPicPr>
+          <p:cNvPr id="19" name="Picture 18" descr="unlv.png"/>
+          <p:cNvPicPr>
+            <a:picLocks noChangeAspect="1"/>
+          </p:cNvPicPr>
+          <p:nvPr/>
+        </p:nvPicPr>
+        <p:blipFill>
+          <a:blip r:embed="rId3"/>
+          <a:stretch>
+            <a:fillRect/>
+          </a:stretch>
+        </p:blipFill>
+        <p:spPr>
+          <a:xfrm>
+            <a:off x="6583680" y="1691640"/>
+            <a:ext cx="566928" cy="566928"/>
+          </a:xfrm>
+          <a:prstGeom prst="rect">
+            <a:avLst/>
+          </a:prstGeom>
+        </p:spPr>
+      </p:pic>
+      <p:sp>
+        <p:nvSpPr>
+          <p:cNvPr id="20" name="TextBox 19"/>
+          <p:cNvSpPr txBox="1"/>
+          <p:nvPr/>
+        </p:nvSpPr>
+        <p:spPr>
+          <a:xfrm>
+            <a:off x="7315200" y="1783080"/>
+            <a:ext cx="3840480" cy="411480"/>
+          </a:xfrm>
+          <a:prstGeom prst="rect">
+            <a:avLst/>
+          </a:prstGeom>
+          <a:noFill/>
+        </p:spPr>
+        <p:txBody>
+          <a:bodyPr wrap="square" lIns="0" rIns="0" tIns="0" bIns="0">
+            <a:spAutoFit/>
+          </a:bodyPr>
+          <a:lstStyle/>
+          <a:p>
+            <a:pPr algn="l"/>
+            <a:r>
+              <a:rPr sz="100" b="0" i="0">
+                <a:solidFill>
+                  <a:srgbClr val="EAF0F8"/>
+                </a:solidFill>
+                <a:latin typeface="Arial"/>
+              </a:rPr>
+              <a:t>UNLV</a:t>
+            </a:r>
+          </a:p>
+        </p:txBody>
+      </p:sp>
+      <p:sp>
+        <p:nvSpPr>
+          <p:cNvPr id="21" name="TextBox 20"/>
+          <p:cNvSpPr txBox="1"/>
+          <p:nvPr/>
+        </p:nvSpPr>
+        <p:spPr>
+          <a:xfrm>
+            <a:off x="7315200" y="1755648"/>
+            <a:ext cx="3931920" cy="457200"/>
+          </a:xfrm>
+          <a:prstGeom prst="rect">
+            <a:avLst/>
+          </a:prstGeom>
+          <a:noFill/>
+        </p:spPr>
+        <p:txBody>
+          <a:bodyPr wrap="square" lIns="0" rIns="0" tIns="0" bIns="0">
+            <a:spAutoFit/>
+          </a:bodyPr>
+          <a:lstStyle/>
+          <a:p>
+            <a:pPr algn="l"/>
+            <a:r>
+              <a:rPr sz="1700" b="1" i="0">
+                <a:solidFill>
+                  <a:srgbClr val="16273D"/>
+                </a:solidFill>
+                <a:latin typeface="Arial"/>
+              </a:rPr>
+              <a:t>UNLV</a:t>
+            </a:r>
+          </a:p>
+        </p:txBody>
+      </p:sp>
+      <p:sp>
+        <p:nvSpPr>
+          <p:cNvPr id="22" name="TextBox 21"/>
+          <p:cNvSpPr txBox="1"/>
+          <p:nvPr/>
+        </p:nvSpPr>
+        <p:spPr>
+          <a:xfrm>
+            <a:off x="6629400" y="2514600"/>
+            <a:ext cx="4572000" cy="320040"/>
+          </a:xfrm>
+          <a:prstGeom prst="rect">
+            <a:avLst/>
+          </a:prstGeom>
+          <a:noFill/>
+        </p:spPr>
+        <p:txBody>
+          <a:bodyPr wrap="square" lIns="0" rIns="0" tIns="0" bIns="0">
+            <a:spAutoFit/>
+          </a:bodyPr>
+          <a:lstStyle/>
+          <a:p>
+            <a:pPr algn="l"/>
+            <a:r>
+              <a:rPr sz="1450" b="1" i="0">
+                <a:solidFill>
+                  <a:srgbClr val="16273D"/>
+                </a:solidFill>
+                <a:latin typeface="Arial"/>
+              </a:rPr>
+              <a:t>Jackson Arnold</a:t>
+            </a:r>
+          </a:p>
+        </p:txBody>
+      </p:sp>
+      <p:sp>
+        <p:nvSpPr>
+          <p:cNvPr id="23" name="TextBox 22"/>
+          <p:cNvSpPr txBox="1"/>
+          <p:nvPr/>
+        </p:nvSpPr>
+        <p:spPr>
+          <a:xfrm>
+            <a:off x="6629400" y="2825496"/>
+            <a:ext cx="4572000" cy="502920"/>
+          </a:xfrm>
+          <a:prstGeom prst="rect">
+            <a:avLst/>
+          </a:prstGeom>
+          <a:noFill/>
+        </p:spPr>
+        <p:txBody>
+          <a:bodyPr wrap="square" lIns="0" rIns="0" tIns="0" bIns="0">
+            <a:spAutoFit/>
+          </a:bodyPr>
+          <a:lstStyle/>
+          <a:p>
+            <a:pPr algn="l"/>
+            <a:r>
+              <a:rPr sz="1150" b="0" i="0">
+                <a:solidFill>
+                  <a:srgbClr val="5C6B7E"/>
+                </a:solidFill>
+                <a:latin typeface="Arial"/>
+              </a:rPr>
+              <a:t>QB — Auburn transfer; 2025: 63.3%, 1,309 yds, 6-2, +311 rush/8 TD in 8 starts (4-4); Orji still pushing</a:t>
+            </a:r>
+          </a:p>
+        </p:txBody>
+      </p:sp>
+      <p:sp>
+        <p:nvSpPr>
+          <p:cNvPr id="24" name="TextBox 23"/>
+          <p:cNvSpPr txBox="1"/>
+          <p:nvPr/>
+        </p:nvSpPr>
+        <p:spPr>
+          <a:xfrm>
+            <a:off x="6629400" y="3410712"/>
+            <a:ext cx="4572000" cy="320040"/>
+          </a:xfrm>
+          <a:prstGeom prst="rect">
+            <a:avLst/>
+          </a:prstGeom>
+          <a:noFill/>
+        </p:spPr>
+        <p:txBody>
+          <a:bodyPr wrap="square" lIns="0" rIns="0" tIns="0" bIns="0">
+            <a:spAutoFit/>
+          </a:bodyPr>
+          <a:lstStyle/>
+          <a:p>
+            <a:pPr algn="l"/>
+            <a:r>
+              <a:rPr sz="1450" b="1" i="0">
+                <a:solidFill>
+                  <a:srgbClr val="16273D"/>
+                </a:solidFill>
+                <a:latin typeface="Arial"/>
+              </a:rPr>
+              <a:t>Jai'Den Thomas</a:t>
+            </a:r>
+          </a:p>
+        </p:txBody>
+      </p:sp>
+      <p:sp>
+        <p:nvSpPr>
+          <p:cNvPr id="25" name="TextBox 24"/>
+          <p:cNvSpPr txBox="1"/>
+          <p:nvPr/>
+        </p:nvSpPr>
+        <p:spPr>
+          <a:xfrm>
+            <a:off x="6629400" y="3721608"/>
+            <a:ext cx="4572000" cy="502920"/>
+          </a:xfrm>
+          <a:prstGeom prst="rect">
+            <a:avLst/>
+          </a:prstGeom>
+          <a:noFill/>
+        </p:spPr>
+        <p:txBody>
+          <a:bodyPr wrap="square" lIns="0" rIns="0" tIns="0" bIns="0">
+            <a:spAutoFit/>
+          </a:bodyPr>
+          <a:lstStyle/>
+          <a:p>
+            <a:pPr algn="l"/>
+            <a:r>
+              <a:rPr sz="1150" b="0" i="0">
+                <a:solidFill>
+                  <a:srgbClr val="5C6B7E"/>
+                </a:solidFill>
+                <a:latin typeface="Arial"/>
+              </a:rPr>
+              <a:t>RB — MW POY candidate; 2025: 1,034 yds at 7.0/carry, 12 TD, +38 catches</a:t>
+            </a:r>
+          </a:p>
+        </p:txBody>
+      </p:sp>
+      <p:sp>
+        <p:nvSpPr>
+          <p:cNvPr id="26" name="TextBox 25"/>
+          <p:cNvSpPr txBox="1"/>
+          <p:nvPr/>
+        </p:nvSpPr>
+        <p:spPr>
+          <a:xfrm>
+            <a:off x="6629400" y="4306824"/>
+            <a:ext cx="4572000" cy="320040"/>
+          </a:xfrm>
+          <a:prstGeom prst="rect">
+            <a:avLst/>
+          </a:prstGeom>
+          <a:noFill/>
+        </p:spPr>
+        <p:txBody>
+          <a:bodyPr wrap="square" lIns="0" rIns="0" tIns="0" bIns="0">
+            <a:spAutoFit/>
+          </a:bodyPr>
+          <a:lstStyle/>
+          <a:p>
+            <a:pPr algn="l"/>
+            <a:r>
+              <a:rPr sz="1450" b="1" i="0">
+                <a:solidFill>
+                  <a:srgbClr val="16273D"/>
+                </a:solidFill>
+                <a:latin typeface="Arial"/>
+              </a:rPr>
+              <a:t>Rebuilt WR room</a:t>
+            </a:r>
+          </a:p>
+        </p:txBody>
+      </p:sp>
+      <p:sp>
+        <p:nvSpPr>
+          <p:cNvPr id="27" name="TextBox 26"/>
+          <p:cNvSpPr txBox="1"/>
+          <p:nvPr/>
+        </p:nvSpPr>
+        <p:spPr>
+          <a:xfrm>
+            <a:off x="6629400" y="4617720"/>
+            <a:ext cx="4572000" cy="502920"/>
+          </a:xfrm>
+          <a:prstGeom prst="rect">
+            <a:avLst/>
+          </a:prstGeom>
+          <a:noFill/>
+        </p:spPr>
+        <p:txBody>
+          <a:bodyPr wrap="square" lIns="0" rIns="0" tIns="0" bIns="0">
+            <a:spAutoFit/>
+          </a:bodyPr>
+          <a:lstStyle/>
+          <a:p>
+            <a:pPr algn="l"/>
+            <a:r>
+              <a:rPr sz="1150" b="0" i="0">
+                <a:solidFill>
+                  <a:srgbClr val="5C6B7E"/>
+                </a:solidFill>
+                <a:latin typeface="Arial"/>
+              </a:rPr>
+              <a:t>every 2025 target gone (Bradley 931, Omeire, Reynolds); Reddicks, Stellato, Walker via portal</a:t>
+            </a:r>
+          </a:p>
+        </p:txBody>
+      </p:sp>
+      <p:sp>
+        <p:nvSpPr>
+          <p:cNvPr id="28" name="TextBox 27"/>
+          <p:cNvSpPr txBox="1"/>
+          <p:nvPr/>
+        </p:nvSpPr>
+        <p:spPr>
+          <a:xfrm>
+            <a:off x="6629400" y="5202936"/>
+            <a:ext cx="4572000" cy="320040"/>
+          </a:xfrm>
+          <a:prstGeom prst="rect">
+            <a:avLst/>
+          </a:prstGeom>
+          <a:noFill/>
+        </p:spPr>
+        <p:txBody>
+          <a:bodyPr wrap="square" lIns="0" rIns="0" tIns="0" bIns="0">
+            <a:spAutoFit/>
+          </a:bodyPr>
+          <a:lstStyle/>
+          <a:p>
+            <a:pPr algn="l"/>
+            <a:r>
+              <a:rPr sz="1450" b="1" i="0">
+                <a:solidFill>
+                  <a:srgbClr val="16273D"/>
+                </a:solidFill>
+                <a:latin typeface="Arial"/>
+              </a:rPr>
+              <a:t>Dee Crayton</a:t>
+            </a:r>
+          </a:p>
+        </p:txBody>
+      </p:sp>
+      <p:sp>
+        <p:nvSpPr>
+          <p:cNvPr id="29" name="TextBox 28"/>
+          <p:cNvSpPr txBox="1"/>
+          <p:nvPr/>
+        </p:nvSpPr>
+        <p:spPr>
+          <a:xfrm>
+            <a:off x="6629400" y="5513831"/>
+            <a:ext cx="4572000" cy="502920"/>
+          </a:xfrm>
+          <a:prstGeom prst="rect">
+            <a:avLst/>
+          </a:prstGeom>
+          <a:noFill/>
+        </p:spPr>
+        <p:txBody>
+          <a:bodyPr wrap="square" lIns="0" rIns="0" tIns="0" bIns="0">
+            <a:spAutoFit/>
+          </a:bodyPr>
+          <a:lstStyle/>
+          <a:p>
+            <a:pPr algn="l"/>
+            <a:r>
+              <a:rPr sz="1150" b="0" i="0">
+                <a:solidFill>
+                  <a:srgbClr val="5C6B7E"/>
+                </a:solidFill>
+                <a:latin typeface="Arial"/>
+              </a:rPr>
+              <a:t>LB — Clemson transfer; 2025: 5 tkl as a reserve — the defense's 'patch' is unproven</a:t>
+            </a:r>
+          </a:p>
+        </p:txBody>
+      </p:sp>
+      <p:sp>
+        <p:nvSpPr>
+          <p:cNvPr id="30" name="TextBox 29"/>
+          <p:cNvSpPr txBox="1"/>
+          <p:nvPr/>
+        </p:nvSpPr>
+        <p:spPr>
+          <a:xfrm>
+            <a:off x="822960" y="6355080"/>
+            <a:ext cx="10515600" cy="320040"/>
+          </a:xfrm>
+          <a:prstGeom prst="rect">
+            <a:avLst/>
+          </a:prstGeom>
+          <a:noFill/>
+        </p:spPr>
+        <p:txBody>
+          <a:bodyPr wrap="square" lIns="0" rIns="0" tIns="0" bIns="0">
+            <a:spAutoFit/>
+          </a:bodyPr>
+          <a:lstStyle/>
+          <a:p>
+            <a:pPr algn="l"/>
+            <a:r>
+              <a:rPr sz="950" b="0" i="0">
+                <a:solidFill>
+                  <a:srgbClr val="5C6B7E"/>
+                </a:solidFill>
+                <a:latin typeface="Arial"/>
+              </a:rPr>
+              <a:t>EP 1 · WEEK 0 · Memphis at UNLV</a:t>
+            </a:r>
+          </a:p>
+        </p:txBody>
+      </p:sp>
+    </p:spTree>
+  </p:cSld>
+  <p:clrMapOvr>
+    <a:masterClrMapping/>
+  </p:clrMapOvr>
+</p:sld>
+</file>
+
+<file path=ppt/slides/slide12.xml><?xml version="1.0" encoding="utf-8"?>
+<p:sld xmlns:a="http://schemas.openxmlformats.org/drawingml/2006/main" xmlns:p="http://schemas.openxmlformats.org/presentationml/2006/main" xmlns:r="http://schemas.openxmlformats.org/officeDocument/2006/relationships">
+  <p:cSld>
+    <p:bg>
+      <p:bgPr>
+        <a:solidFill>
+          <a:srgbClr val="0A2851"/>
+        </a:solidFill>
+        <a:effectLst/>
+      </p:bgPr>
+    </p:bg>
+    <p:spTree>
+      <p:nvGrpSpPr>
+        <p:cNvPr id="1" name=""/>
+        <p:cNvGrpSpPr/>
+        <p:nvPr/>
+      </p:nvGrpSpPr>
+      <p:grpSpPr/>
+      <p:sp>
+        <p:nvSpPr>
+          <p:cNvPr id="2" name="TextBox 1"/>
+          <p:cNvSpPr txBox="1"/>
+          <p:nvPr/>
+        </p:nvSpPr>
+        <p:spPr>
+          <a:xfrm>
+            <a:off x="822960" y="640080"/>
+            <a:ext cx="10515600" cy="411480"/>
+          </a:xfrm>
+          <a:prstGeom prst="rect">
+            <a:avLst/>
+          </a:prstGeom>
+          <a:noFill/>
+        </p:spPr>
+        <p:txBody>
+          <a:bodyPr wrap="square" lIns="0" rIns="0" tIns="0" bIns="0">
+            <a:spAutoFit/>
+          </a:bodyPr>
+          <a:lstStyle/>
+          <a:p>
+            <a:pPr algn="l"/>
+            <a:r>
+              <a:rPr sz="1400" b="1" i="0">
+                <a:solidFill>
+                  <a:srgbClr val="F47321"/>
+                </a:solidFill>
+                <a:latin typeface="Arial"/>
+              </a:rPr>
+              <a:t>EPISODE 1 · THE CARD</a:t>
+            </a:r>
+          </a:p>
+        </p:txBody>
+      </p:sp>
+      <p:sp>
+        <p:nvSpPr>
+          <p:cNvPr id="3" name="TextBox 2"/>
+          <p:cNvSpPr txBox="1"/>
+          <p:nvPr/>
+        </p:nvSpPr>
+        <p:spPr>
+          <a:xfrm>
+            <a:off x="822960" y="1005840"/>
+            <a:ext cx="10515600" cy="822960"/>
+          </a:xfrm>
+          <a:prstGeom prst="rect">
+            <a:avLst/>
+          </a:prstGeom>
+          <a:noFill/>
+        </p:spPr>
+        <p:txBody>
+          <a:bodyPr wrap="square" lIns="0" rIns="0" tIns="0" bIns="0">
+            <a:spAutoFit/>
+          </a:bodyPr>
+          <a:lstStyle/>
+          <a:p>
+            <a:pPr algn="l"/>
+            <a:r>
+              <a:rPr sz="3600" b="1" i="0">
+                <a:solidFill>
                   <a:srgbClr val="FFFFFF"/>
                 </a:solidFill>
                 <a:latin typeface="Arial"/>
               </a:rPr>
+              <a:t>Where the machine stands</a:t>
+            </a:r>
+          </a:p>
+        </p:txBody>
+      </p:sp>
+      <p:sp>
+        <p:nvSpPr>
+          <p:cNvPr id="4" name="Rounded Rectangle 3"/>
+          <p:cNvSpPr/>
+          <p:nvPr/>
+        </p:nvSpPr>
+        <p:spPr>
+          <a:xfrm>
+            <a:off x="822960" y="1965960"/>
+            <a:ext cx="10515600" cy="768096"/>
+          </a:xfrm>
+          <a:prstGeom prst="roundRect">
+            <a:avLst/>
+          </a:prstGeom>
+          <a:solidFill>
+            <a:srgbClr val="123568"/>
+          </a:solidFill>
+          <a:ln>
+            <a:noFill/>
+          </a:ln>
+          <a:effectLst/>
+        </p:spPr>
+        <p:style>
+          <a:lnRef idx="1">
+            <a:schemeClr val="accent1"/>
+          </a:lnRef>
+          <a:fillRef idx="3">
+            <a:schemeClr val="accent1"/>
+          </a:fillRef>
+          <a:effectRef idx="2">
+            <a:schemeClr val="accent1"/>
+          </a:effectRef>
+          <a:fontRef idx="minor">
+            <a:schemeClr val="lt1"/>
+          </a:fontRef>
+        </p:style>
+        <p:txBody>
+          <a:bodyPr rtlCol="0" anchor="ctr"/>
+          <a:lstStyle/>
+          <a:p>
+            <a:pPr algn="ctr"/>
+          </a:p>
+        </p:txBody>
+      </p:sp>
+      <p:sp>
+        <p:nvSpPr>
+          <p:cNvPr id="5" name="Oval 4"/>
+          <p:cNvSpPr/>
+          <p:nvPr/>
+        </p:nvSpPr>
+        <p:spPr>
+          <a:xfrm>
+            <a:off x="1005840" y="2075688"/>
+            <a:ext cx="548640" cy="548640"/>
+          </a:xfrm>
+          <a:prstGeom prst="ellipse">
+            <a:avLst/>
+          </a:prstGeom>
+          <a:solidFill>
+            <a:srgbClr val="FFFFFF"/>
+          </a:solidFill>
+          <a:ln>
+            <a:noFill/>
+          </a:ln>
+          <a:effectLst/>
+        </p:spPr>
+        <p:style>
+          <a:lnRef idx="1">
+            <a:schemeClr val="accent1"/>
+          </a:lnRef>
+          <a:fillRef idx="3">
+            <a:schemeClr val="accent1"/>
+          </a:fillRef>
+          <a:effectRef idx="2">
+            <a:schemeClr val="accent1"/>
+          </a:effectRef>
+          <a:fontRef idx="minor">
+            <a:schemeClr val="lt1"/>
+          </a:fontRef>
+        </p:style>
+        <p:txBody>
+          <a:bodyPr rtlCol="0" anchor="ctr"/>
+          <a:lstStyle/>
+          <a:p>
+            <a:pPr algn="ctr"/>
+          </a:p>
+        </p:txBody>
+      </p:sp>
+      <p:pic>
+        <p:nvPicPr>
+          <p:cNvPr id="6" name="Picture 5" descr="unc.png"/>
+          <p:cNvPicPr>
+            <a:picLocks noChangeAspect="1"/>
+          </p:cNvPicPr>
+          <p:nvPr/>
+        </p:nvPicPr>
+        <p:blipFill>
+          <a:blip r:embed="rId2"/>
+          <a:stretch>
+            <a:fillRect/>
+          </a:stretch>
+        </p:blipFill>
+        <p:spPr>
+          <a:xfrm>
+            <a:off x="1060704" y="2130552"/>
+            <a:ext cx="438912" cy="438912"/>
+          </a:xfrm>
+          <a:prstGeom prst="rect">
+            <a:avLst/>
+          </a:prstGeom>
+        </p:spPr>
+      </p:pic>
+      <p:sp>
+        <p:nvSpPr>
+          <p:cNvPr id="7" name="Oval 6"/>
+          <p:cNvSpPr/>
+          <p:nvPr/>
+        </p:nvSpPr>
+        <p:spPr>
+          <a:xfrm>
+            <a:off x="1691640" y="2075688"/>
+            <a:ext cx="548640" cy="548640"/>
+          </a:xfrm>
+          <a:prstGeom prst="ellipse">
+            <a:avLst/>
+          </a:prstGeom>
+          <a:solidFill>
+            <a:srgbClr val="FFFFFF"/>
+          </a:solidFill>
+          <a:ln>
+            <a:noFill/>
+          </a:ln>
+          <a:effectLst/>
+        </p:spPr>
+        <p:style>
+          <a:lnRef idx="1">
+            <a:schemeClr val="accent1"/>
+          </a:lnRef>
+          <a:fillRef idx="3">
+            <a:schemeClr val="accent1"/>
+          </a:fillRef>
+          <a:effectRef idx="2">
+            <a:schemeClr val="accent1"/>
+          </a:effectRef>
+          <a:fontRef idx="minor">
+            <a:schemeClr val="lt1"/>
+          </a:fontRef>
+        </p:style>
+        <p:txBody>
+          <a:bodyPr rtlCol="0" anchor="ctr"/>
+          <a:lstStyle/>
+          <a:p>
+            <a:pPr algn="ctr"/>
+          </a:p>
+        </p:txBody>
+      </p:sp>
+      <p:pic>
+        <p:nvPicPr>
+          <p:cNvPr id="8" name="Picture 7" descr="tcu.png"/>
+          <p:cNvPicPr>
+            <a:picLocks noChangeAspect="1"/>
+          </p:cNvPicPr>
+          <p:nvPr/>
+        </p:nvPicPr>
+        <p:blipFill>
+          <a:blip r:embed="rId3"/>
+          <a:stretch>
+            <a:fillRect/>
+          </a:stretch>
+        </p:blipFill>
+        <p:spPr>
+          <a:xfrm>
+            <a:off x="1746504" y="2130552"/>
+            <a:ext cx="438912" cy="438912"/>
+          </a:xfrm>
+          <a:prstGeom prst="rect">
+            <a:avLst/>
+          </a:prstGeom>
+        </p:spPr>
+      </p:pic>
+      <p:sp>
+        <p:nvSpPr>
+          <p:cNvPr id="9" name="TextBox 8"/>
+          <p:cNvSpPr txBox="1"/>
+          <p:nvPr/>
+        </p:nvSpPr>
+        <p:spPr>
+          <a:xfrm>
+            <a:off x="2468880" y="2039112"/>
+            <a:ext cx="5394960" cy="365760"/>
+          </a:xfrm>
+          <a:prstGeom prst="rect">
+            <a:avLst/>
+          </a:prstGeom>
+          <a:noFill/>
+        </p:spPr>
+        <p:txBody>
+          <a:bodyPr wrap="square" lIns="0" rIns="0" tIns="0" bIns="0">
+            <a:spAutoFit/>
+          </a:bodyPr>
+          <a:lstStyle/>
+          <a:p>
+            <a:pPr algn="l"/>
+            <a:r>
+              <a:rPr sz="1450" b="1" i="0">
+                <a:solidFill>
+                  <a:srgbClr val="FFFFFF"/>
+                </a:solidFill>
+                <a:latin typeface="Arial"/>
+              </a:rPr>
+              <a:t>North Carolina vs TCU</a:t>
+            </a:r>
+          </a:p>
+        </p:txBody>
+      </p:sp>
+      <p:sp>
+        <p:nvSpPr>
+          <p:cNvPr id="10" name="TextBox 9"/>
+          <p:cNvSpPr txBox="1"/>
+          <p:nvPr/>
+        </p:nvSpPr>
+        <p:spPr>
+          <a:xfrm>
+            <a:off x="2468880" y="2368296"/>
+            <a:ext cx="5760720" cy="347472"/>
+          </a:xfrm>
+          <a:prstGeom prst="rect">
+            <a:avLst/>
+          </a:prstGeom>
+          <a:noFill/>
+        </p:spPr>
+        <p:txBody>
+          <a:bodyPr wrap="square" lIns="0" rIns="0" tIns="0" bIns="0">
+            <a:spAutoFit/>
+          </a:bodyPr>
+          <a:lstStyle/>
+          <a:p>
+            <a:pPr algn="l"/>
+            <a:r>
+              <a:rPr sz="1000" b="0" i="0">
+                <a:solidFill>
+                  <a:srgbClr val="CADCFC"/>
+                </a:solidFill>
+                <a:latin typeface="Arial"/>
+              </a:rPr>
+              <a:t>UNC ATS at −7.5 — research, not a play, while the win-prob gap is this wide · O/U no lean</a:t>
+            </a:r>
+          </a:p>
+        </p:txBody>
+      </p:sp>
+      <p:sp>
+        <p:nvSpPr>
+          <p:cNvPr id="11" name="TextBox 10"/>
+          <p:cNvSpPr txBox="1"/>
+          <p:nvPr/>
+        </p:nvSpPr>
+        <p:spPr>
+          <a:xfrm>
+            <a:off x="8229600" y="2039112"/>
+            <a:ext cx="2926080" cy="365760"/>
+          </a:xfrm>
+          <a:prstGeom prst="rect">
+            <a:avLst/>
+          </a:prstGeom>
+          <a:noFill/>
+        </p:spPr>
+        <p:txBody>
+          <a:bodyPr wrap="square" lIns="0" rIns="0" tIns="0" bIns="0">
+            <a:spAutoFit/>
+          </a:bodyPr>
+          <a:lstStyle/>
+          <a:p>
+            <a:pPr algn="r"/>
+            <a:r>
+              <a:rPr sz="1250" b="1" i="0">
+                <a:solidFill>
+                  <a:srgbClr val="F47321"/>
+                </a:solidFill>
+                <a:latin typeface="Arial"/>
+              </a:rPr>
+              <a:t>TCU –1.5   ·   –7.5 / –8</a:t>
+            </a:r>
+          </a:p>
+        </p:txBody>
+      </p:sp>
+      <p:sp>
+        <p:nvSpPr>
+          <p:cNvPr id="12" name="TextBox 11"/>
+          <p:cNvSpPr txBox="1"/>
+          <p:nvPr/>
+        </p:nvSpPr>
+        <p:spPr>
+          <a:xfrm>
+            <a:off x="8229600" y="2386584"/>
+            <a:ext cx="2926080" cy="274320"/>
+          </a:xfrm>
+          <a:prstGeom prst="rect">
+            <a:avLst/>
+          </a:prstGeom>
+          <a:noFill/>
+        </p:spPr>
+        <p:txBody>
+          <a:bodyPr wrap="square" lIns="0" rIns="0" tIns="0" bIns="0">
+            <a:spAutoFit/>
+          </a:bodyPr>
+          <a:lstStyle/>
+          <a:p>
+            <a:pPr algn="r"/>
+            <a:r>
+              <a:rPr sz="900" b="0" i="0">
+                <a:solidFill>
+                  <a:srgbClr val="8FA5C4"/>
+                </a:solidFill>
+                <a:latin typeface="Arial"/>
+              </a:rPr>
+              <a:t>machine · market</a:t>
+            </a:r>
+          </a:p>
+        </p:txBody>
+      </p:sp>
+      <p:sp>
+        <p:nvSpPr>
+          <p:cNvPr id="13" name="Rounded Rectangle 12"/>
+          <p:cNvSpPr/>
+          <p:nvPr/>
+        </p:nvSpPr>
+        <p:spPr>
+          <a:xfrm>
+            <a:off x="822960" y="2807208"/>
+            <a:ext cx="10515600" cy="768096"/>
+          </a:xfrm>
+          <a:prstGeom prst="roundRect">
+            <a:avLst/>
+          </a:prstGeom>
+          <a:solidFill>
+            <a:srgbClr val="123568"/>
+          </a:solidFill>
+          <a:ln>
+            <a:noFill/>
+          </a:ln>
+          <a:effectLst/>
+        </p:spPr>
+        <p:style>
+          <a:lnRef idx="1">
+            <a:schemeClr val="accent1"/>
+          </a:lnRef>
+          <a:fillRef idx="3">
+            <a:schemeClr val="accent1"/>
+          </a:fillRef>
+          <a:effectRef idx="2">
+            <a:schemeClr val="accent1"/>
+          </a:effectRef>
+          <a:fontRef idx="minor">
+            <a:schemeClr val="lt1"/>
+          </a:fontRef>
+        </p:style>
+        <p:txBody>
+          <a:bodyPr rtlCol="0" anchor="ctr"/>
+          <a:lstStyle/>
+          <a:p>
+            <a:pPr algn="ctr"/>
+          </a:p>
+        </p:txBody>
+      </p:sp>
+      <p:sp>
+        <p:nvSpPr>
+          <p:cNvPr id="14" name="Oval 13"/>
+          <p:cNvSpPr/>
+          <p:nvPr/>
+        </p:nvSpPr>
+        <p:spPr>
+          <a:xfrm>
+            <a:off x="1005840" y="2916936"/>
+            <a:ext cx="548640" cy="548640"/>
+          </a:xfrm>
+          <a:prstGeom prst="ellipse">
+            <a:avLst/>
+          </a:prstGeom>
+          <a:solidFill>
+            <a:srgbClr val="FFFFFF"/>
+          </a:solidFill>
+          <a:ln>
+            <a:noFill/>
+          </a:ln>
+          <a:effectLst/>
+        </p:spPr>
+        <p:style>
+          <a:lnRef idx="1">
+            <a:schemeClr val="accent1"/>
+          </a:lnRef>
+          <a:fillRef idx="3">
+            <a:schemeClr val="accent1"/>
+          </a:fillRef>
+          <a:effectRef idx="2">
+            <a:schemeClr val="accent1"/>
+          </a:effectRef>
+          <a:fontRef idx="minor">
+            <a:schemeClr val="lt1"/>
+          </a:fontRef>
+        </p:style>
+        <p:txBody>
+          <a:bodyPr rtlCol="0" anchor="ctr"/>
+          <a:lstStyle/>
+          <a:p>
+            <a:pPr algn="ctr"/>
+          </a:p>
+        </p:txBody>
+      </p:sp>
+      <p:pic>
+        <p:nvPicPr>
+          <p:cNvPr id="15" name="Picture 14" descr="ncsu.png"/>
+          <p:cNvPicPr>
+            <a:picLocks noChangeAspect="1"/>
+          </p:cNvPicPr>
+          <p:nvPr/>
+        </p:nvPicPr>
+        <p:blipFill>
+          <a:blip r:embed="rId4"/>
+          <a:stretch>
+            <a:fillRect/>
+          </a:stretch>
+        </p:blipFill>
+        <p:spPr>
+          <a:xfrm>
+            <a:off x="1060704" y="2971800"/>
+            <a:ext cx="438912" cy="438912"/>
+          </a:xfrm>
+          <a:prstGeom prst="rect">
+            <a:avLst/>
+          </a:prstGeom>
+        </p:spPr>
+      </p:pic>
+      <p:sp>
+        <p:nvSpPr>
+          <p:cNvPr id="16" name="Oval 15"/>
+          <p:cNvSpPr/>
+          <p:nvPr/>
+        </p:nvSpPr>
+        <p:spPr>
+          <a:xfrm>
+            <a:off x="1691640" y="2916936"/>
+            <a:ext cx="548640" cy="548640"/>
+          </a:xfrm>
+          <a:prstGeom prst="ellipse">
+            <a:avLst/>
+          </a:prstGeom>
+          <a:solidFill>
+            <a:srgbClr val="FFFFFF"/>
+          </a:solidFill>
+          <a:ln>
+            <a:noFill/>
+          </a:ln>
+          <a:effectLst/>
+        </p:spPr>
+        <p:style>
+          <a:lnRef idx="1">
+            <a:schemeClr val="accent1"/>
+          </a:lnRef>
+          <a:fillRef idx="3">
+            <a:schemeClr val="accent1"/>
+          </a:fillRef>
+          <a:effectRef idx="2">
+            <a:schemeClr val="accent1"/>
+          </a:effectRef>
+          <a:fontRef idx="minor">
+            <a:schemeClr val="lt1"/>
+          </a:fontRef>
+        </p:style>
+        <p:txBody>
+          <a:bodyPr rtlCol="0" anchor="ctr"/>
+          <a:lstStyle/>
+          <a:p>
+            <a:pPr algn="ctr"/>
+          </a:p>
+        </p:txBody>
+      </p:sp>
+      <p:pic>
+        <p:nvPicPr>
+          <p:cNvPr id="17" name="Picture 16" descr="uva.png"/>
+          <p:cNvPicPr>
+            <a:picLocks noChangeAspect="1"/>
+          </p:cNvPicPr>
+          <p:nvPr/>
+        </p:nvPicPr>
+        <p:blipFill>
+          <a:blip r:embed="rId5"/>
+          <a:stretch>
+            <a:fillRect/>
+          </a:stretch>
+        </p:blipFill>
+        <p:spPr>
+          <a:xfrm>
+            <a:off x="1746504" y="2971800"/>
+            <a:ext cx="438912" cy="438912"/>
+          </a:xfrm>
+          <a:prstGeom prst="rect">
+            <a:avLst/>
+          </a:prstGeom>
+        </p:spPr>
+      </p:pic>
+      <p:sp>
+        <p:nvSpPr>
+          <p:cNvPr id="18" name="TextBox 17"/>
+          <p:cNvSpPr txBox="1"/>
+          <p:nvPr/>
+        </p:nvSpPr>
+        <p:spPr>
+          <a:xfrm>
+            <a:off x="2468880" y="2880360"/>
+            <a:ext cx="5394960" cy="365760"/>
+          </a:xfrm>
+          <a:prstGeom prst="rect">
+            <a:avLst/>
+          </a:prstGeom>
+          <a:noFill/>
+        </p:spPr>
+        <p:txBody>
+          <a:bodyPr wrap="square" lIns="0" rIns="0" tIns="0" bIns="0">
+            <a:spAutoFit/>
+          </a:bodyPr>
+          <a:lstStyle/>
+          <a:p>
+            <a:pPr algn="l"/>
+            <a:r>
+              <a:rPr sz="1450" b="1" i="0">
+                <a:solidFill>
+                  <a:srgbClr val="FFFFFF"/>
+                </a:solidFill>
+                <a:latin typeface="Arial"/>
+              </a:rPr>
+              <a:t>NC State at Virginia</a:t>
+            </a:r>
+          </a:p>
+        </p:txBody>
+      </p:sp>
+      <p:sp>
+        <p:nvSpPr>
+          <p:cNvPr id="19" name="TextBox 18"/>
+          <p:cNvSpPr txBox="1"/>
+          <p:nvPr/>
+        </p:nvSpPr>
+        <p:spPr>
+          <a:xfrm>
+            <a:off x="2468880" y="3209544"/>
+            <a:ext cx="5760720" cy="347472"/>
+          </a:xfrm>
+          <a:prstGeom prst="rect">
+            <a:avLst/>
+          </a:prstGeom>
+          <a:noFill/>
+        </p:spPr>
+        <p:txBody>
+          <a:bodyPr wrap="square" lIns="0" rIns="0" tIns="0" bIns="0">
+            <a:spAutoFit/>
+          </a:bodyPr>
+          <a:lstStyle/>
+          <a:p>
+            <a:pPr algn="l"/>
+            <a:r>
+              <a:rPr sz="1000" b="0" i="0">
+                <a:solidFill>
+                  <a:srgbClr val="CADCFC"/>
+                </a:solidFill>
+                <a:latin typeface="Arial"/>
+              </a:rPr>
+              <a:t>No play: value was at −3, fair is −6, the market sits at −5.5 · machine still leans UVA</a:t>
+            </a:r>
+          </a:p>
+        </p:txBody>
+      </p:sp>
+      <p:sp>
+        <p:nvSpPr>
+          <p:cNvPr id="20" name="TextBox 19"/>
+          <p:cNvSpPr txBox="1"/>
+          <p:nvPr/>
+        </p:nvSpPr>
+        <p:spPr>
+          <a:xfrm>
+            <a:off x="8229600" y="2880360"/>
+            <a:ext cx="2926080" cy="365760"/>
+          </a:xfrm>
+          <a:prstGeom prst="rect">
+            <a:avLst/>
+          </a:prstGeom>
+          <a:noFill/>
+        </p:spPr>
+        <p:txBody>
+          <a:bodyPr wrap="square" lIns="0" rIns="0" tIns="0" bIns="0">
+            <a:spAutoFit/>
+          </a:bodyPr>
+          <a:lstStyle/>
+          <a:p>
+            <a:pPr algn="r"/>
+            <a:r>
+              <a:rPr sz="1250" b="1" i="0">
+                <a:solidFill>
+                  <a:srgbClr val="F47321"/>
+                </a:solidFill>
+                <a:latin typeface="Arial"/>
+              </a:rPr>
+              <a:t>UVA –6.7   ·   –5.5 / –5.5</a:t>
+            </a:r>
+          </a:p>
+        </p:txBody>
+      </p:sp>
+      <p:sp>
+        <p:nvSpPr>
+          <p:cNvPr id="21" name="TextBox 20"/>
+          <p:cNvSpPr txBox="1"/>
+          <p:nvPr/>
+        </p:nvSpPr>
+        <p:spPr>
+          <a:xfrm>
+            <a:off x="8229600" y="3227832"/>
+            <a:ext cx="2926080" cy="274320"/>
+          </a:xfrm>
+          <a:prstGeom prst="rect">
+            <a:avLst/>
+          </a:prstGeom>
+          <a:noFill/>
+        </p:spPr>
+        <p:txBody>
+          <a:bodyPr wrap="square" lIns="0" rIns="0" tIns="0" bIns="0">
+            <a:spAutoFit/>
+          </a:bodyPr>
+          <a:lstStyle/>
+          <a:p>
+            <a:pPr algn="r"/>
+            <a:r>
+              <a:rPr sz="900" b="0" i="0">
+                <a:solidFill>
+                  <a:srgbClr val="8FA5C4"/>
+                </a:solidFill>
+                <a:latin typeface="Arial"/>
+              </a:rPr>
+              <a:t>machine · market</a:t>
+            </a:r>
+          </a:p>
+        </p:txBody>
+      </p:sp>
+      <p:sp>
+        <p:nvSpPr>
+          <p:cNvPr id="22" name="Rounded Rectangle 21"/>
+          <p:cNvSpPr/>
+          <p:nvPr/>
+        </p:nvSpPr>
+        <p:spPr>
+          <a:xfrm>
+            <a:off x="822960" y="3648456"/>
+            <a:ext cx="10515600" cy="768096"/>
+          </a:xfrm>
+          <a:prstGeom prst="roundRect">
+            <a:avLst/>
+          </a:prstGeom>
+          <a:solidFill>
+            <a:srgbClr val="123568"/>
+          </a:solidFill>
+          <a:ln>
+            <a:noFill/>
+          </a:ln>
+          <a:effectLst/>
+        </p:spPr>
+        <p:style>
+          <a:lnRef idx="1">
+            <a:schemeClr val="accent1"/>
+          </a:lnRef>
+          <a:fillRef idx="3">
+            <a:schemeClr val="accent1"/>
+          </a:fillRef>
+          <a:effectRef idx="2">
+            <a:schemeClr val="accent1"/>
+          </a:effectRef>
+          <a:fontRef idx="minor">
+            <a:schemeClr val="lt1"/>
+          </a:fontRef>
+        </p:style>
+        <p:txBody>
+          <a:bodyPr rtlCol="0" anchor="ctr"/>
+          <a:lstStyle/>
+          <a:p>
+            <a:pPr algn="ctr"/>
+          </a:p>
+        </p:txBody>
+      </p:sp>
+      <p:sp>
+        <p:nvSpPr>
+          <p:cNvPr id="23" name="Oval 22"/>
+          <p:cNvSpPr/>
+          <p:nvPr/>
+        </p:nvSpPr>
+        <p:spPr>
+          <a:xfrm>
+            <a:off x="1005840" y="3758183"/>
+            <a:ext cx="548640" cy="548640"/>
+          </a:xfrm>
+          <a:prstGeom prst="ellipse">
+            <a:avLst/>
+          </a:prstGeom>
+          <a:solidFill>
+            <a:srgbClr val="FFFFFF"/>
+          </a:solidFill>
+          <a:ln>
+            <a:noFill/>
+          </a:ln>
+          <a:effectLst/>
+        </p:spPr>
+        <p:style>
+          <a:lnRef idx="1">
+            <a:schemeClr val="accent1"/>
+          </a:lnRef>
+          <a:fillRef idx="3">
+            <a:schemeClr val="accent1"/>
+          </a:fillRef>
+          <a:effectRef idx="2">
+            <a:schemeClr val="accent1"/>
+          </a:effectRef>
+          <a:fontRef idx="minor">
+            <a:schemeClr val="lt1"/>
+          </a:fontRef>
+        </p:style>
+        <p:txBody>
+          <a:bodyPr rtlCol="0" anchor="ctr"/>
+          <a:lstStyle/>
+          <a:p>
+            <a:pPr algn="ctr"/>
+          </a:p>
+        </p:txBody>
+      </p:sp>
+      <p:pic>
+        <p:nvPicPr>
+          <p:cNvPr id="24" name="Picture 23" descr="jsu.png"/>
+          <p:cNvPicPr>
+            <a:picLocks noChangeAspect="1"/>
+          </p:cNvPicPr>
+          <p:nvPr/>
+        </p:nvPicPr>
+        <p:blipFill>
+          <a:blip r:embed="rId6"/>
+          <a:stretch>
+            <a:fillRect/>
+          </a:stretch>
+        </p:blipFill>
+        <p:spPr>
+          <a:xfrm>
+            <a:off x="1060704" y="3813047"/>
+            <a:ext cx="438912" cy="438912"/>
+          </a:xfrm>
+          <a:prstGeom prst="rect">
+            <a:avLst/>
+          </a:prstGeom>
+        </p:spPr>
+      </p:pic>
+      <p:sp>
+        <p:nvSpPr>
+          <p:cNvPr id="25" name="Oval 24"/>
+          <p:cNvSpPr/>
+          <p:nvPr/>
+        </p:nvSpPr>
+        <p:spPr>
+          <a:xfrm>
+            <a:off x="1691640" y="3758183"/>
+            <a:ext cx="548640" cy="548640"/>
+          </a:xfrm>
+          <a:prstGeom prst="ellipse">
+            <a:avLst/>
+          </a:prstGeom>
+          <a:solidFill>
+            <a:srgbClr val="FFFFFF"/>
+          </a:solidFill>
+          <a:ln>
+            <a:noFill/>
+          </a:ln>
+          <a:effectLst/>
+        </p:spPr>
+        <p:style>
+          <a:lnRef idx="1">
+            <a:schemeClr val="accent1"/>
+          </a:lnRef>
+          <a:fillRef idx="3">
+            <a:schemeClr val="accent1"/>
+          </a:fillRef>
+          <a:effectRef idx="2">
+            <a:schemeClr val="accent1"/>
+          </a:effectRef>
+          <a:fontRef idx="minor">
+            <a:schemeClr val="lt1"/>
+          </a:fontRef>
+        </p:style>
+        <p:txBody>
+          <a:bodyPr rtlCol="0" anchor="ctr"/>
+          <a:lstStyle/>
+          <a:p>
+            <a:pPr algn="ctr"/>
+          </a:p>
+        </p:txBody>
+      </p:sp>
+      <p:pic>
+        <p:nvPicPr>
+          <p:cNvPr id="26" name="Picture 25" descr="ndsu.png"/>
+          <p:cNvPicPr>
+            <a:picLocks noChangeAspect="1"/>
+          </p:cNvPicPr>
+          <p:nvPr/>
+        </p:nvPicPr>
+        <p:blipFill>
+          <a:blip r:embed="rId7"/>
+          <a:stretch>
+            <a:fillRect/>
+          </a:stretch>
+        </p:blipFill>
+        <p:spPr>
+          <a:xfrm>
+            <a:off x="1746504" y="3813047"/>
+            <a:ext cx="438912" cy="438912"/>
+          </a:xfrm>
+          <a:prstGeom prst="rect">
+            <a:avLst/>
+          </a:prstGeom>
+        </p:spPr>
+      </p:pic>
+      <p:sp>
+        <p:nvSpPr>
+          <p:cNvPr id="27" name="TextBox 26"/>
+          <p:cNvSpPr txBox="1"/>
+          <p:nvPr/>
+        </p:nvSpPr>
+        <p:spPr>
+          <a:xfrm>
+            <a:off x="2468880" y="3721607"/>
+            <a:ext cx="5394960" cy="365760"/>
+          </a:xfrm>
+          <a:prstGeom prst="rect">
+            <a:avLst/>
+          </a:prstGeom>
+          <a:noFill/>
+        </p:spPr>
+        <p:txBody>
+          <a:bodyPr wrap="square" lIns="0" rIns="0" tIns="0" bIns="0">
+            <a:spAutoFit/>
+          </a:bodyPr>
+          <a:lstStyle/>
+          <a:p>
+            <a:pPr algn="l"/>
+            <a:r>
+              <a:rPr sz="1450" b="1" i="0">
+                <a:solidFill>
+                  <a:srgbClr val="FFFFFF"/>
+                </a:solidFill>
+                <a:latin typeface="Arial"/>
+              </a:rPr>
               <a:t>Jacksonville State at North Dakota State</a:t>
             </a:r>
           </a:p>
@@ -4036,29 +7912,29 @@
         </p:nvSpPr>
         <p:spPr>
           <a:xfrm>
-            <a:off x="2697480" y="5486400"/>
-            <a:ext cx="5760720" cy="320040"/>
-          </a:xfrm>
-          <a:prstGeom prst="rect">
-            <a:avLst/>
-          </a:prstGeom>
-          <a:noFill/>
-        </p:spPr>
-        <p:txBody>
-          <a:bodyPr wrap="square" lIns="0" rIns="0" tIns="0" bIns="0">
-            <a:spAutoFit/>
-          </a:bodyPr>
-          <a:lstStyle/>
-          <a:p>
-            <a:pPr algn="l"/>
-            <a:r>
-              <a:rPr sz="1100" b="0" i="0">
+            <a:off x="2468880" y="4050791"/>
+            <a:ext cx="5760720" cy="347472"/>
+          </a:xfrm>
+          <a:prstGeom prst="rect">
+            <a:avLst/>
+          </a:prstGeom>
+          <a:noFill/>
+        </p:spPr>
+        <p:txBody>
+          <a:bodyPr wrap="square" lIns="0" rIns="0" tIns="0" bIns="0">
+            <a:spAutoFit/>
+          </a:bodyPr>
+          <a:lstStyle/>
+          <a:p>
+            <a:pPr algn="l"/>
+            <a:r>
+              <a:rPr sz="1000" b="0" i="0">
                 <a:solidFill>
                   <a:srgbClr val="CADCFC"/>
                 </a:solidFill>
                 <a:latin typeface="Arial"/>
               </a:rPr>
-              <a:t>Fargo · Fargodome</a:t>
+              <a:t>JSU at −7 or worse — already paid in line movement</a:t>
             </a:r>
           </a:p>
         </p:txBody>
@@ -4071,8 +7947,8 @@
         </p:nvSpPr>
         <p:spPr>
           <a:xfrm>
-            <a:off x="8503920" y="5102351"/>
-            <a:ext cx="2651760" cy="365760"/>
+            <a:off x="8229600" y="3721607"/>
+            <a:ext cx="2926080" cy="365760"/>
           </a:xfrm>
           <a:prstGeom prst="rect">
             <a:avLst/>
@@ -4087,13 +7963,13 @@
           <a:p>
             <a:pPr algn="r"/>
             <a:r>
-              <a:rPr sz="1600" b="1" i="0">
+              <a:rPr sz="1250" b="1" i="0">
                 <a:solidFill>
                   <a:srgbClr val="F47321"/>
                 </a:solidFill>
                 <a:latin typeface="Arial"/>
               </a:rPr>
-              <a:t>NDSU –2.7</a:t>
+              <a:t>NDSU –2.7   ·   –10 → –7</a:t>
             </a:r>
           </a:p>
         </p:txBody>
@@ -4106,8 +7982,8 @@
         </p:nvSpPr>
         <p:spPr>
           <a:xfrm>
-            <a:off x="8503920" y="5486400"/>
-            <a:ext cx="2651760" cy="320040"/>
+            <a:off x="8229600" y="4069080"/>
+            <a:ext cx="2926080" cy="274320"/>
           </a:xfrm>
           <a:prstGeom prst="rect">
             <a:avLst/>
@@ -4122,26 +7998,666 @@
           <a:p>
             <a:pPr algn="r"/>
             <a:r>
+              <a:rPr sz="900" b="0" i="0">
+                <a:solidFill>
+                  <a:srgbClr val="8FA5C4"/>
+                </a:solidFill>
+                <a:latin typeface="Arial"/>
+              </a:rPr>
+              <a:t>machine · market</a:t>
+            </a:r>
+          </a:p>
+        </p:txBody>
+      </p:sp>
+      <p:sp>
+        <p:nvSpPr>
+          <p:cNvPr id="31" name="Rounded Rectangle 30"/>
+          <p:cNvSpPr/>
+          <p:nvPr/>
+        </p:nvSpPr>
+        <p:spPr>
+          <a:xfrm>
+            <a:off x="822960" y="4489704"/>
+            <a:ext cx="10515600" cy="768096"/>
+          </a:xfrm>
+          <a:prstGeom prst="roundRect">
+            <a:avLst/>
+          </a:prstGeom>
+          <a:solidFill>
+            <a:srgbClr val="123568"/>
+          </a:solidFill>
+          <a:ln>
+            <a:noFill/>
+          </a:ln>
+          <a:effectLst/>
+        </p:spPr>
+        <p:style>
+          <a:lnRef idx="1">
+            <a:schemeClr val="accent1"/>
+          </a:lnRef>
+          <a:fillRef idx="3">
+            <a:schemeClr val="accent1"/>
+          </a:fillRef>
+          <a:effectRef idx="2">
+            <a:schemeClr val="accent1"/>
+          </a:effectRef>
+          <a:fontRef idx="minor">
+            <a:schemeClr val="lt1"/>
+          </a:fontRef>
+        </p:style>
+        <p:txBody>
+          <a:bodyPr rtlCol="0" anchor="ctr"/>
+          <a:lstStyle/>
+          <a:p>
+            <a:pPr algn="ctr"/>
+          </a:p>
+        </p:txBody>
+      </p:sp>
+      <p:sp>
+        <p:nvSpPr>
+          <p:cNvPr id="32" name="Oval 31"/>
+          <p:cNvSpPr/>
+          <p:nvPr/>
+        </p:nvSpPr>
+        <p:spPr>
+          <a:xfrm>
+            <a:off x="1005840" y="4599432"/>
+            <a:ext cx="548640" cy="548640"/>
+          </a:xfrm>
+          <a:prstGeom prst="ellipse">
+            <a:avLst/>
+          </a:prstGeom>
+          <a:solidFill>
+            <a:srgbClr val="FFFFFF"/>
+          </a:solidFill>
+          <a:ln>
+            <a:noFill/>
+          </a:ln>
+          <a:effectLst/>
+        </p:spPr>
+        <p:style>
+          <a:lnRef idx="1">
+            <a:schemeClr val="accent1"/>
+          </a:lnRef>
+          <a:fillRef idx="3">
+            <a:schemeClr val="accent1"/>
+          </a:fillRef>
+          <a:effectRef idx="2">
+            <a:schemeClr val="accent1"/>
+          </a:effectRef>
+          <a:fontRef idx="minor">
+            <a:schemeClr val="lt1"/>
+          </a:fontRef>
+        </p:style>
+        <p:txBody>
+          <a:bodyPr rtlCol="0" anchor="ctr"/>
+          <a:lstStyle/>
+          <a:p>
+            <a:pPr algn="ctr"/>
+          </a:p>
+        </p:txBody>
+      </p:sp>
+      <p:pic>
+        <p:nvPicPr>
+          <p:cNvPr id="33" name="Picture 32" descr="hawaii.png"/>
+          <p:cNvPicPr>
+            <a:picLocks noChangeAspect="1"/>
+          </p:cNvPicPr>
+          <p:nvPr/>
+        </p:nvPicPr>
+        <p:blipFill>
+          <a:blip r:embed="rId8"/>
+          <a:stretch>
+            <a:fillRect/>
+          </a:stretch>
+        </p:blipFill>
+        <p:spPr>
+          <a:xfrm>
+            <a:off x="1060704" y="4654296"/>
+            <a:ext cx="438912" cy="438912"/>
+          </a:xfrm>
+          <a:prstGeom prst="rect">
+            <a:avLst/>
+          </a:prstGeom>
+        </p:spPr>
+      </p:pic>
+      <p:sp>
+        <p:nvSpPr>
+          <p:cNvPr id="34" name="Oval 33"/>
+          <p:cNvSpPr/>
+          <p:nvPr/>
+        </p:nvSpPr>
+        <p:spPr>
+          <a:xfrm>
+            <a:off x="1691640" y="4599432"/>
+            <a:ext cx="548640" cy="548640"/>
+          </a:xfrm>
+          <a:prstGeom prst="ellipse">
+            <a:avLst/>
+          </a:prstGeom>
+          <a:solidFill>
+            <a:srgbClr val="FFFFFF"/>
+          </a:solidFill>
+          <a:ln>
+            <a:noFill/>
+          </a:ln>
+          <a:effectLst/>
+        </p:spPr>
+        <p:style>
+          <a:lnRef idx="1">
+            <a:schemeClr val="accent1"/>
+          </a:lnRef>
+          <a:fillRef idx="3">
+            <a:schemeClr val="accent1"/>
+          </a:fillRef>
+          <a:effectRef idx="2">
+            <a:schemeClr val="accent1"/>
+          </a:effectRef>
+          <a:fontRef idx="minor">
+            <a:schemeClr val="lt1"/>
+          </a:fontRef>
+        </p:style>
+        <p:txBody>
+          <a:bodyPr rtlCol="0" anchor="ctr"/>
+          <a:lstStyle/>
+          <a:p>
+            <a:pPr algn="ctr"/>
+          </a:p>
+        </p:txBody>
+      </p:sp>
+      <p:pic>
+        <p:nvPicPr>
+          <p:cNvPr id="35" name="Picture 34" descr="stanford.png"/>
+          <p:cNvPicPr>
+            <a:picLocks noChangeAspect="1"/>
+          </p:cNvPicPr>
+          <p:nvPr/>
+        </p:nvPicPr>
+        <p:blipFill>
+          <a:blip r:embed="rId9"/>
+          <a:stretch>
+            <a:fillRect/>
+          </a:stretch>
+        </p:blipFill>
+        <p:spPr>
+          <a:xfrm>
+            <a:off x="1746504" y="4654296"/>
+            <a:ext cx="438912" cy="438912"/>
+          </a:xfrm>
+          <a:prstGeom prst="rect">
+            <a:avLst/>
+          </a:prstGeom>
+        </p:spPr>
+      </p:pic>
+      <p:sp>
+        <p:nvSpPr>
+          <p:cNvPr id="36" name="TextBox 35"/>
+          <p:cNvSpPr txBox="1"/>
+          <p:nvPr/>
+        </p:nvSpPr>
+        <p:spPr>
+          <a:xfrm>
+            <a:off x="2468880" y="4562856"/>
+            <a:ext cx="5394960" cy="365760"/>
+          </a:xfrm>
+          <a:prstGeom prst="rect">
+            <a:avLst/>
+          </a:prstGeom>
+          <a:noFill/>
+        </p:spPr>
+        <p:txBody>
+          <a:bodyPr wrap="square" lIns="0" rIns="0" tIns="0" bIns="0">
+            <a:spAutoFit/>
+          </a:bodyPr>
+          <a:lstStyle/>
+          <a:p>
+            <a:pPr algn="l"/>
+            <a:r>
+              <a:rPr sz="1450" b="1" i="0">
+                <a:solidFill>
+                  <a:srgbClr val="FFFFFF"/>
+                </a:solidFill>
+                <a:latin typeface="Arial"/>
+              </a:rPr>
+              <a:t>Hawai'i at Stanford</a:t>
+            </a:r>
+          </a:p>
+        </p:txBody>
+      </p:sp>
+      <p:sp>
+        <p:nvSpPr>
+          <p:cNvPr id="37" name="TextBox 36"/>
+          <p:cNvSpPr txBox="1"/>
+          <p:nvPr/>
+        </p:nvSpPr>
+        <p:spPr>
+          <a:xfrm>
+            <a:off x="2468880" y="4892040"/>
+            <a:ext cx="5760720" cy="347472"/>
+          </a:xfrm>
+          <a:prstGeom prst="rect">
+            <a:avLst/>
+          </a:prstGeom>
+          <a:noFill/>
+        </p:spPr>
+        <p:txBody>
+          <a:bodyPr wrap="square" lIns="0" rIns="0" tIns="0" bIns="0">
+            <a:spAutoFit/>
+          </a:bodyPr>
+          <a:lstStyle/>
+          <a:p>
+            <a:pPr algn="l"/>
+            <a:r>
               <a:rPr sz="1000" b="0" i="0">
                 <a:solidFill>
                   <a:srgbClr val="CADCFC"/>
                 </a:solidFill>
                 <a:latin typeface="Arial"/>
               </a:rPr>
-              <a:t>machine</a:t>
-            </a:r>
-          </a:p>
-        </p:txBody>
-      </p:sp>
-      <p:sp>
-        <p:nvSpPr>
-          <p:cNvPr id="31" name="TextBox 30"/>
-          <p:cNvSpPr txBox="1"/>
-          <p:nvPr/>
-        </p:nvSpPr>
-        <p:spPr>
-          <a:xfrm>
-            <a:off x="822960" y="6172200"/>
+              <a:t>Hawai'i +5.5 — a 4-pt gap, not a conviction; the opener at +3 was the worse number</a:t>
+            </a:r>
+          </a:p>
+        </p:txBody>
+      </p:sp>
+      <p:sp>
+        <p:nvSpPr>
+          <p:cNvPr id="38" name="TextBox 37"/>
+          <p:cNvSpPr txBox="1"/>
+          <p:nvPr/>
+        </p:nvSpPr>
+        <p:spPr>
+          <a:xfrm>
+            <a:off x="8229600" y="4562856"/>
+            <a:ext cx="2926080" cy="365760"/>
+          </a:xfrm>
+          <a:prstGeom prst="rect">
+            <a:avLst/>
+          </a:prstGeom>
+          <a:noFill/>
+        </p:spPr>
+        <p:txBody>
+          <a:bodyPr wrap="square" lIns="0" rIns="0" tIns="0" bIns="0">
+            <a:spAutoFit/>
+          </a:bodyPr>
+          <a:lstStyle/>
+          <a:p>
+            <a:pPr algn="r"/>
+            <a:r>
+              <a:rPr sz="1250" b="1" i="0">
+                <a:solidFill>
+                  <a:srgbClr val="F47321"/>
+                </a:solidFill>
+                <a:latin typeface="Arial"/>
+              </a:rPr>
+              <a:t>Stanford –1.6   ·   –5.5 / –5.5</a:t>
+            </a:r>
+          </a:p>
+        </p:txBody>
+      </p:sp>
+      <p:sp>
+        <p:nvSpPr>
+          <p:cNvPr id="39" name="TextBox 38"/>
+          <p:cNvSpPr txBox="1"/>
+          <p:nvPr/>
+        </p:nvSpPr>
+        <p:spPr>
+          <a:xfrm>
+            <a:off x="8229600" y="4910328"/>
+            <a:ext cx="2926080" cy="274320"/>
+          </a:xfrm>
+          <a:prstGeom prst="rect">
+            <a:avLst/>
+          </a:prstGeom>
+          <a:noFill/>
+        </p:spPr>
+        <p:txBody>
+          <a:bodyPr wrap="square" lIns="0" rIns="0" tIns="0" bIns="0">
+            <a:spAutoFit/>
+          </a:bodyPr>
+          <a:lstStyle/>
+          <a:p>
+            <a:pPr algn="r"/>
+            <a:r>
+              <a:rPr sz="900" b="0" i="0">
+                <a:solidFill>
+                  <a:srgbClr val="8FA5C4"/>
+                </a:solidFill>
+                <a:latin typeface="Arial"/>
+              </a:rPr>
+              <a:t>machine · market</a:t>
+            </a:r>
+          </a:p>
+        </p:txBody>
+      </p:sp>
+      <p:sp>
+        <p:nvSpPr>
+          <p:cNvPr id="40" name="Rounded Rectangle 39"/>
+          <p:cNvSpPr/>
+          <p:nvPr/>
+        </p:nvSpPr>
+        <p:spPr>
+          <a:xfrm>
+            <a:off x="822960" y="5330952"/>
+            <a:ext cx="10515600" cy="768096"/>
+          </a:xfrm>
+          <a:prstGeom prst="roundRect">
+            <a:avLst/>
+          </a:prstGeom>
+          <a:solidFill>
+            <a:srgbClr val="123568"/>
+          </a:solidFill>
+          <a:ln>
+            <a:noFill/>
+          </a:ln>
+          <a:effectLst/>
+        </p:spPr>
+        <p:style>
+          <a:lnRef idx="1">
+            <a:schemeClr val="accent1"/>
+          </a:lnRef>
+          <a:fillRef idx="3">
+            <a:schemeClr val="accent1"/>
+          </a:fillRef>
+          <a:effectRef idx="2">
+            <a:schemeClr val="accent1"/>
+          </a:effectRef>
+          <a:fontRef idx="minor">
+            <a:schemeClr val="lt1"/>
+          </a:fontRef>
+        </p:style>
+        <p:txBody>
+          <a:bodyPr rtlCol="0" anchor="ctr"/>
+          <a:lstStyle/>
+          <a:p>
+            <a:pPr algn="ctr"/>
+          </a:p>
+        </p:txBody>
+      </p:sp>
+      <p:sp>
+        <p:nvSpPr>
+          <p:cNvPr id="41" name="Oval 40"/>
+          <p:cNvSpPr/>
+          <p:nvPr/>
+        </p:nvSpPr>
+        <p:spPr>
+          <a:xfrm>
+            <a:off x="1005840" y="5440680"/>
+            <a:ext cx="548640" cy="548640"/>
+          </a:xfrm>
+          <a:prstGeom prst="ellipse">
+            <a:avLst/>
+          </a:prstGeom>
+          <a:solidFill>
+            <a:srgbClr val="FFFFFF"/>
+          </a:solidFill>
+          <a:ln>
+            <a:noFill/>
+          </a:ln>
+          <a:effectLst/>
+        </p:spPr>
+        <p:style>
+          <a:lnRef idx="1">
+            <a:schemeClr val="accent1"/>
+          </a:lnRef>
+          <a:fillRef idx="3">
+            <a:schemeClr val="accent1"/>
+          </a:fillRef>
+          <a:effectRef idx="2">
+            <a:schemeClr val="accent1"/>
+          </a:effectRef>
+          <a:fontRef idx="minor">
+            <a:schemeClr val="lt1"/>
+          </a:fontRef>
+        </p:style>
+        <p:txBody>
+          <a:bodyPr rtlCol="0" anchor="ctr"/>
+          <a:lstStyle/>
+          <a:p>
+            <a:pPr algn="ctr"/>
+          </a:p>
+        </p:txBody>
+      </p:sp>
+      <p:pic>
+        <p:nvPicPr>
+          <p:cNvPr id="42" name="Picture 41" descr="memphis.png"/>
+          <p:cNvPicPr>
+            <a:picLocks noChangeAspect="1"/>
+          </p:cNvPicPr>
+          <p:nvPr/>
+        </p:nvPicPr>
+        <p:blipFill>
+          <a:blip r:embed="rId10"/>
+          <a:stretch>
+            <a:fillRect/>
+          </a:stretch>
+        </p:blipFill>
+        <p:spPr>
+          <a:xfrm>
+            <a:off x="1060704" y="5495544"/>
+            <a:ext cx="438912" cy="438912"/>
+          </a:xfrm>
+          <a:prstGeom prst="rect">
+            <a:avLst/>
+          </a:prstGeom>
+        </p:spPr>
+      </p:pic>
+      <p:sp>
+        <p:nvSpPr>
+          <p:cNvPr id="43" name="Oval 42"/>
+          <p:cNvSpPr/>
+          <p:nvPr/>
+        </p:nvSpPr>
+        <p:spPr>
+          <a:xfrm>
+            <a:off x="1691640" y="5440680"/>
+            <a:ext cx="548640" cy="548640"/>
+          </a:xfrm>
+          <a:prstGeom prst="ellipse">
+            <a:avLst/>
+          </a:prstGeom>
+          <a:solidFill>
+            <a:srgbClr val="FFFFFF"/>
+          </a:solidFill>
+          <a:ln>
+            <a:noFill/>
+          </a:ln>
+          <a:effectLst/>
+        </p:spPr>
+        <p:style>
+          <a:lnRef idx="1">
+            <a:schemeClr val="accent1"/>
+          </a:lnRef>
+          <a:fillRef idx="3">
+            <a:schemeClr val="accent1"/>
+          </a:fillRef>
+          <a:effectRef idx="2">
+            <a:schemeClr val="accent1"/>
+          </a:effectRef>
+          <a:fontRef idx="minor">
+            <a:schemeClr val="lt1"/>
+          </a:fontRef>
+        </p:style>
+        <p:txBody>
+          <a:bodyPr rtlCol="0" anchor="ctr"/>
+          <a:lstStyle/>
+          <a:p>
+            <a:pPr algn="ctr"/>
+          </a:p>
+        </p:txBody>
+      </p:sp>
+      <p:pic>
+        <p:nvPicPr>
+          <p:cNvPr id="44" name="Picture 43" descr="unlv.png"/>
+          <p:cNvPicPr>
+            <a:picLocks noChangeAspect="1"/>
+          </p:cNvPicPr>
+          <p:nvPr/>
+        </p:nvPicPr>
+        <p:blipFill>
+          <a:blip r:embed="rId11"/>
+          <a:stretch>
+            <a:fillRect/>
+          </a:stretch>
+        </p:blipFill>
+        <p:spPr>
+          <a:xfrm>
+            <a:off x="1746504" y="5495544"/>
+            <a:ext cx="438912" cy="438912"/>
+          </a:xfrm>
+          <a:prstGeom prst="rect">
+            <a:avLst/>
+          </a:prstGeom>
+        </p:spPr>
+      </p:pic>
+      <p:sp>
+        <p:nvSpPr>
+          <p:cNvPr id="45" name="TextBox 44"/>
+          <p:cNvSpPr txBox="1"/>
+          <p:nvPr/>
+        </p:nvSpPr>
+        <p:spPr>
+          <a:xfrm>
+            <a:off x="2468880" y="5404104"/>
+            <a:ext cx="5394960" cy="365760"/>
+          </a:xfrm>
+          <a:prstGeom prst="rect">
+            <a:avLst/>
+          </a:prstGeom>
+          <a:noFill/>
+        </p:spPr>
+        <p:txBody>
+          <a:bodyPr wrap="square" lIns="0" rIns="0" tIns="0" bIns="0">
+            <a:spAutoFit/>
+          </a:bodyPr>
+          <a:lstStyle/>
+          <a:p>
+            <a:pPr algn="l"/>
+            <a:r>
+              <a:rPr sz="1450" b="1" i="0">
+                <a:solidFill>
+                  <a:srgbClr val="FFFFFF"/>
+                </a:solidFill>
+                <a:latin typeface="Arial"/>
+              </a:rPr>
+              <a:t>Memphis at UNLV</a:t>
+            </a:r>
+          </a:p>
+        </p:txBody>
+      </p:sp>
+      <p:sp>
+        <p:nvSpPr>
+          <p:cNvPr id="46" name="TextBox 45"/>
+          <p:cNvSpPr txBox="1"/>
+          <p:nvPr/>
+        </p:nvSpPr>
+        <p:spPr>
+          <a:xfrm>
+            <a:off x="2468880" y="5733288"/>
+            <a:ext cx="5760720" cy="347472"/>
+          </a:xfrm>
+          <a:prstGeom prst="rect">
+            <a:avLst/>
+          </a:prstGeom>
+          <a:noFill/>
+        </p:spPr>
+        <p:txBody>
+          <a:bodyPr wrap="square" lIns="0" rIns="0" tIns="0" bIns="0">
+            <a:spAutoFit/>
+          </a:bodyPr>
+          <a:lstStyle/>
+          <a:p>
+            <a:pPr algn="l"/>
+            <a:r>
+              <a:rPr sz="1000" b="0" i="0">
+                <a:solidFill>
+                  <a:srgbClr val="CADCFC"/>
+                </a:solidFill>
+                <a:latin typeface="Arial"/>
+              </a:rPr>
+              <a:t>UNLV — the edge was at −3 and it's gone; at −5.5 this is a watch and the first film_study run, not a play</a:t>
+            </a:r>
+          </a:p>
+        </p:txBody>
+      </p:sp>
+      <p:sp>
+        <p:nvSpPr>
+          <p:cNvPr id="47" name="TextBox 46"/>
+          <p:cNvSpPr txBox="1"/>
+          <p:nvPr/>
+        </p:nvSpPr>
+        <p:spPr>
+          <a:xfrm>
+            <a:off x="8229600" y="5404104"/>
+            <a:ext cx="2926080" cy="365760"/>
+          </a:xfrm>
+          <a:prstGeom prst="rect">
+            <a:avLst/>
+          </a:prstGeom>
+          <a:noFill/>
+        </p:spPr>
+        <p:txBody>
+          <a:bodyPr wrap="square" lIns="0" rIns="0" tIns="0" bIns="0">
+            <a:spAutoFit/>
+          </a:bodyPr>
+          <a:lstStyle/>
+          <a:p>
+            <a:pPr algn="r"/>
+            <a:r>
+              <a:rPr sz="1250" b="1" i="0">
+                <a:solidFill>
+                  <a:srgbClr val="F47321"/>
+                </a:solidFill>
+                <a:latin typeface="Arial"/>
+              </a:rPr>
+              <a:t>UNLV –6.2   ·   –5.5 / –5.5</a:t>
+            </a:r>
+          </a:p>
+        </p:txBody>
+      </p:sp>
+      <p:sp>
+        <p:nvSpPr>
+          <p:cNvPr id="48" name="TextBox 47"/>
+          <p:cNvSpPr txBox="1"/>
+          <p:nvPr/>
+        </p:nvSpPr>
+        <p:spPr>
+          <a:xfrm>
+            <a:off x="8229600" y="5751576"/>
+            <a:ext cx="2926080" cy="274320"/>
+          </a:xfrm>
+          <a:prstGeom prst="rect">
+            <a:avLst/>
+          </a:prstGeom>
+          <a:noFill/>
+        </p:spPr>
+        <p:txBody>
+          <a:bodyPr wrap="square" lIns="0" rIns="0" tIns="0" bIns="0">
+            <a:spAutoFit/>
+          </a:bodyPr>
+          <a:lstStyle/>
+          <a:p>
+            <a:pPr algn="r"/>
+            <a:r>
+              <a:rPr sz="900" b="0" i="0">
+                <a:solidFill>
+                  <a:srgbClr val="8FA5C4"/>
+                </a:solidFill>
+                <a:latin typeface="Arial"/>
+              </a:rPr>
+              <a:t>machine · market</a:t>
+            </a:r>
+          </a:p>
+        </p:txBody>
+      </p:sp>
+      <p:sp>
+        <p:nvSpPr>
+          <p:cNvPr id="49" name="TextBox 48"/>
+          <p:cNvSpPr txBox="1"/>
+          <p:nvPr/>
+        </p:nvSpPr>
+        <p:spPr>
+          <a:xfrm>
+            <a:off x="822960" y="6263640"/>
             <a:ext cx="10515600" cy="457200"/>
           </a:xfrm>
           <a:prstGeom prst="rect">
@@ -4157,13 +8673,13 @@
           <a:p>
             <a:pPr algn="l"/>
             <a:r>
-              <a:rPr sz="1050" b="0" i="0">
+              <a:rPr sz="1100" b="0" i="1">
                 <a:solidFill>
                   <a:srgbClr val="8FA5C4"/>
                 </a:solidFill>
                 <a:latin typeface="Arial"/>
               </a:rPr>
-              <a:t>Machine = ESPN 2026 preseason FPI + 2.5 HFA, empirical margin curve (σ 17.9, 2021–25 fit) · lines as of Aug 18 · model plays graded vs first-seen lines</a:t>
+              <a:t>Paper record starts Week 0 — graded vs first-seen lines, never moved ones. Research, not picks.</a:t>
             </a:r>
           </a:p>
         </p:txBody>
@@ -4693,7 +9209,7 @@
                 </a:solidFill>
                 <a:latin typeface="Arial"/>
               </a:rPr>
-              <a:t>Hidden yards: special teams UNC #31 vs TCU #84</a:t>
+              <a:t>STRUCTURAL DISAGREEMENT: moneyline says TCU ~71%, machine says 54% — a 17-pt gap, not a spread quibble</a:t>
             </a:r>
           </a:p>
         </p:txBody>
@@ -4772,7 +9288,7 @@
                 </a:solidFill>
                 <a:latin typeface="Arial"/>
               </a:rPr>
-              <a:t>Honesty check: UNC's −12.1 residual was 2025's biggest ACC market-overrating — the skepticism premium is earned.</a:t>
+              <a:t>Honesty check: UNC's −12.1 residual was 2025's biggest ACC market-overrating — the skepticism premium is earned. Line moved from −6.5 to −7.5 since Aug 18: the market is leaning further into TCU, not toward us.</a:t>
             </a:r>
           </a:p>
         </p:txBody>
@@ -4956,7 +9472,7 @@
                 </a:solidFill>
                 <a:latin typeface="Arial"/>
               </a:rPr>
-              <a:t>–6.5 / –8.5</a:t>
+              <a:t>–7.5 / –8</a:t>
             </a:r>
           </a:p>
         </p:txBody>
@@ -5026,7 +9542,7 @@
                 </a:solidFill>
                 <a:latin typeface="Arial"/>
               </a:rPr>
-              <a:t>5–7 pts on UNC</a:t>
+              <a:t>6–6.5 pts on UNC</a:t>
             </a:r>
           </a:p>
         </p:txBody>
@@ -5289,7 +9805,7 @@
                 </a:solidFill>
                 <a:latin typeface="Arial"/>
               </a:rPr>
-              <a:t>Lean: UNC ATS at −6.5 or worse · O/U no lean</a:t>
+              <a:t>Lean: UNC ATS at −7.5 — research, not a play, while the win-prob gap is this wide · O/U no lean</a:t>
             </a:r>
           </a:p>
         </p:txBody>
@@ -6597,7 +11113,7 @@
                 </a:solidFill>
                 <a:latin typeface="Arial"/>
               </a:rPr>
-              <a:t>THE BOOKS DISAGREE BY A FULL FIELD GOAL — shop the number on air</a:t>
+              <a:t>The books converged: −3 / −6 on Aug 18 → −5.5 everywhere by Aug 22 — the edge we stated is gone</a:t>
             </a:r>
           </a:p>
         </p:txBody>
@@ -6913,7 +11429,7 @@
                 </a:solidFill>
                 <a:latin typeface="Arial"/>
               </a:rPr>
-              <a:t>UVA's card weakness: turnover-luck regression + a senior-driven pass rush now gone.</a:t>
+              <a:t>UVA's +11.7 residual (11th-highest in FBS) says ESPN rates them well above what public inputs explain — and the roster lost 6 of its top 7 receivers and its senior pass rush. The machine's −6.7 is the stalest number on this card.</a:t>
             </a:r>
           </a:p>
         </p:txBody>
@@ -7097,7 +11613,7 @@
                 </a:solidFill>
                 <a:latin typeface="Arial"/>
               </a:rPr>
-              <a:t>–3 / –6</a:t>
+              <a:t>–5.5 / –5.5</a:t>
             </a:r>
           </a:p>
         </p:txBody>
@@ -7167,7 +11683,7 @@
                 </a:solidFill>
                 <a:latin typeface="Arial"/>
               </a:rPr>
-              <a:t>3.7 pts on UVA at DK</a:t>
+              <a:t>EDGE GONE — market converged</a:t>
             </a:r>
           </a:p>
         </p:txBody>
@@ -7430,7 +11946,7 @@
                 </a:solidFill>
                 <a:latin typeface="Arial"/>
               </a:rPr>
-              <a:t>Lean: UVA — value at −3, fair at −6</a:t>
+              <a:t>No play: value was at −3, fair is −6, the market sits at −5.5 · machine still leans UVA</a:t>
             </a:r>
           </a:p>
         </p:txBody>
@@ -9054,7 +13570,7 @@
                 </a:solidFill>
                 <a:latin typeface="Arial"/>
               </a:rPr>
-              <a:t>July 14 YEL alert: JSU +10, edge 7.3 — the market has since moved 3+ points to the model's side.</a:t>
+              <a:t>July 14 YEL alert: JSU +10, edge 7.3 — the market has since moved 3 points to the model's side (−7 at both books Aug 23). MAX UNCERTAINTY: NDSU has zero FBS ratings history, so the 57% deserves a range, not a point.</a:t>
             </a:r>
           </a:p>
         </p:txBody>
@@ -10605,7 +15121,7 @@
     <p:bg>
       <p:bgPr>
         <a:solidFill>
-          <a:srgbClr val="0A2851"/>
+          <a:srgbClr val="FFFFFF"/>
         </a:solidFill>
         <a:effectLst/>
       </p:bgPr>
@@ -10617,167 +15133,9 @@
         <p:nvPr/>
       </p:nvGrpSpPr>
       <p:grpSpPr/>
-      <p:sp>
-        <p:nvSpPr>
-          <p:cNvPr id="2" name="TextBox 1"/>
-          <p:cNvSpPr txBox="1"/>
-          <p:nvPr/>
-        </p:nvSpPr>
-        <p:spPr>
-          <a:xfrm>
-            <a:off x="822960" y="640080"/>
-            <a:ext cx="10515600" cy="411480"/>
-          </a:xfrm>
-          <a:prstGeom prst="rect">
-            <a:avLst/>
-          </a:prstGeom>
-          <a:noFill/>
-        </p:spPr>
-        <p:txBody>
-          <a:bodyPr wrap="square" lIns="0" rIns="0" tIns="0" bIns="0">
-            <a:spAutoFit/>
-          </a:bodyPr>
-          <a:lstStyle/>
-          <a:p>
-            <a:pPr algn="l"/>
-            <a:r>
-              <a:rPr sz="1400" b="1" i="0">
-                <a:solidFill>
-                  <a:srgbClr val="F47321"/>
-                </a:solidFill>
-                <a:latin typeface="Arial"/>
-              </a:rPr>
-              <a:t>EPISODE 1 · THE CARD</a:t>
-            </a:r>
-          </a:p>
-        </p:txBody>
-      </p:sp>
-      <p:sp>
-        <p:nvSpPr>
-          <p:cNvPr id="3" name="TextBox 2"/>
-          <p:cNvSpPr txBox="1"/>
-          <p:nvPr/>
-        </p:nvSpPr>
-        <p:spPr>
-          <a:xfrm>
-            <a:off x="822960" y="1051560"/>
-            <a:ext cx="10515600" cy="822960"/>
-          </a:xfrm>
-          <a:prstGeom prst="rect">
-            <a:avLst/>
-          </a:prstGeom>
-          <a:noFill/>
-        </p:spPr>
-        <p:txBody>
-          <a:bodyPr wrap="square" lIns="0" rIns="0" tIns="0" bIns="0">
-            <a:spAutoFit/>
-          </a:bodyPr>
-          <a:lstStyle/>
-          <a:p>
-            <a:pPr algn="l"/>
-            <a:r>
-              <a:rPr sz="3800" b="1" i="0">
-                <a:solidFill>
-                  <a:srgbClr val="FFFFFF"/>
-                </a:solidFill>
-                <a:latin typeface="Arial"/>
-              </a:rPr>
-              <a:t>Where the machine stands</a:t>
-            </a:r>
-          </a:p>
-        </p:txBody>
-      </p:sp>
-      <p:sp>
-        <p:nvSpPr>
-          <p:cNvPr id="4" name="Rounded Rectangle 3"/>
-          <p:cNvSpPr/>
-          <p:nvPr/>
-        </p:nvSpPr>
-        <p:spPr>
-          <a:xfrm>
-            <a:off x="822960" y="2286000"/>
-            <a:ext cx="10515600" cy="1051560"/>
-          </a:xfrm>
-          <a:prstGeom prst="roundRect">
-            <a:avLst/>
-          </a:prstGeom>
-          <a:solidFill>
-            <a:srgbClr val="123568"/>
-          </a:solidFill>
-          <a:ln>
-            <a:noFill/>
-          </a:ln>
-          <a:effectLst/>
-        </p:spPr>
-        <p:style>
-          <a:lnRef idx="1">
-            <a:schemeClr val="accent1"/>
-          </a:lnRef>
-          <a:fillRef idx="3">
-            <a:schemeClr val="accent1"/>
-          </a:fillRef>
-          <a:effectRef idx="2">
-            <a:schemeClr val="accent1"/>
-          </a:effectRef>
-          <a:fontRef idx="minor">
-            <a:schemeClr val="lt1"/>
-          </a:fontRef>
-        </p:style>
-        <p:txBody>
-          <a:bodyPr rtlCol="0" anchor="ctr"/>
-          <a:lstStyle/>
-          <a:p>
-            <a:pPr algn="ctr"/>
-          </a:p>
-        </p:txBody>
-      </p:sp>
-      <p:sp>
-        <p:nvSpPr>
-          <p:cNvPr id="5" name="Oval 4"/>
-          <p:cNvSpPr/>
-          <p:nvPr/>
-        </p:nvSpPr>
-        <p:spPr>
-          <a:xfrm>
-            <a:off x="1051560" y="2505456"/>
-            <a:ext cx="621792" cy="621792"/>
-          </a:xfrm>
-          <a:prstGeom prst="ellipse">
-            <a:avLst/>
-          </a:prstGeom>
-          <a:solidFill>
-            <a:srgbClr val="FFFFFF"/>
-          </a:solidFill>
-          <a:ln>
-            <a:noFill/>
-          </a:ln>
-          <a:effectLst/>
-        </p:spPr>
-        <p:style>
-          <a:lnRef idx="1">
-            <a:schemeClr val="accent1"/>
-          </a:lnRef>
-          <a:fillRef idx="3">
-            <a:schemeClr val="accent1"/>
-          </a:fillRef>
-          <a:effectRef idx="2">
-            <a:schemeClr val="accent1"/>
-          </a:effectRef>
-          <a:fontRef idx="minor">
-            <a:schemeClr val="lt1"/>
-          </a:fontRef>
-        </p:style>
-        <p:txBody>
-          <a:bodyPr rtlCol="0" anchor="ctr"/>
-          <a:lstStyle/>
-          <a:p>
-            <a:pPr algn="ctr"/>
-          </a:p>
-        </p:txBody>
-      </p:sp>
       <p:pic>
         <p:nvPicPr>
-          <p:cNvPr id="6" name="Picture 5" descr="unc.png"/>
+          <p:cNvPr id="2" name="Picture 1" descr="hawaii.png"/>
           <p:cNvPicPr>
             <a:picLocks noChangeAspect="1"/>
           </p:cNvPicPr>
@@ -10791,8 +15149,8 @@
         </p:blipFill>
         <p:spPr>
           <a:xfrm>
-            <a:off x="1113739" y="2567635"/>
-            <a:ext cx="497433" cy="497433"/>
+            <a:off x="822960" y="384048"/>
+            <a:ext cx="731520" cy="731520"/>
           </a:xfrm>
           <a:prstGeom prst="rect">
             <a:avLst/>
@@ -10801,51 +15159,42 @@
       </p:pic>
       <p:sp>
         <p:nvSpPr>
-          <p:cNvPr id="7" name="Oval 6"/>
-          <p:cNvSpPr/>
-          <p:nvPr/>
-        </p:nvSpPr>
-        <p:spPr>
-          <a:xfrm>
-            <a:off x="1828800" y="2505456"/>
-            <a:ext cx="621792" cy="621792"/>
-          </a:xfrm>
-          <a:prstGeom prst="ellipse">
-            <a:avLst/>
-          </a:prstGeom>
-          <a:solidFill>
-            <a:srgbClr val="FFFFFF"/>
-          </a:solidFill>
-          <a:ln>
-            <a:noFill/>
-          </a:ln>
-          <a:effectLst/>
-        </p:spPr>
-        <p:style>
-          <a:lnRef idx="1">
-            <a:schemeClr val="accent1"/>
-          </a:lnRef>
-          <a:fillRef idx="3">
-            <a:schemeClr val="accent1"/>
-          </a:fillRef>
-          <a:effectRef idx="2">
-            <a:schemeClr val="accent1"/>
-          </a:effectRef>
-          <a:fontRef idx="minor">
-            <a:schemeClr val="lt1"/>
-          </a:fontRef>
-        </p:style>
-        <p:txBody>
-          <a:bodyPr rtlCol="0" anchor="ctr"/>
+          <p:cNvPr id="3" name="TextBox 2"/>
+          <p:cNvSpPr txBox="1"/>
+          <p:nvPr/>
+        </p:nvSpPr>
+        <p:spPr>
+          <a:xfrm>
+            <a:off x="1664208" y="475488"/>
+            <a:ext cx="457200" cy="457200"/>
+          </a:xfrm>
+          <a:prstGeom prst="rect">
+            <a:avLst/>
+          </a:prstGeom>
+          <a:noFill/>
+        </p:spPr>
+        <p:txBody>
+          <a:bodyPr wrap="square" lIns="0" rIns="0" tIns="0" bIns="0">
+            <a:spAutoFit/>
+          </a:bodyPr>
           <a:lstStyle/>
           <a:p>
             <a:pPr algn="ctr"/>
+            <a:r>
+              <a:rPr sz="1400" b="0" i="0">
+                <a:solidFill>
+                  <a:srgbClr val="5C6B7E"/>
+                </a:solidFill>
+                <a:latin typeface="Arial"/>
+              </a:rPr>
+              <a:t>at</a:t>
+            </a:r>
           </a:p>
         </p:txBody>
       </p:sp>
       <p:pic>
         <p:nvPicPr>
-          <p:cNvPr id="8" name="Picture 7" descr="tcu.png"/>
+          <p:cNvPr id="4" name="Picture 3" descr="stanford.png"/>
           <p:cNvPicPr>
             <a:picLocks noChangeAspect="1"/>
           </p:cNvPicPr>
@@ -10859,8 +15208,8 @@
         </p:blipFill>
         <p:spPr>
           <a:xfrm>
-            <a:off x="1890979" y="2567635"/>
-            <a:ext cx="497433" cy="497433"/>
+            <a:off x="2148840" y="384048"/>
+            <a:ext cx="731520" cy="731520"/>
           </a:xfrm>
           <a:prstGeom prst="rect">
             <a:avLst/>
@@ -10869,160 +15218,125 @@
       </p:pic>
       <p:sp>
         <p:nvSpPr>
-          <p:cNvPr id="9" name="TextBox 8"/>
-          <p:cNvSpPr txBox="1"/>
-          <p:nvPr/>
-        </p:nvSpPr>
-        <p:spPr>
-          <a:xfrm>
-            <a:off x="2697480" y="2432304"/>
-            <a:ext cx="5120640" cy="411480"/>
-          </a:xfrm>
-          <a:prstGeom prst="rect">
-            <a:avLst/>
-          </a:prstGeom>
-          <a:noFill/>
-        </p:spPr>
-        <p:txBody>
-          <a:bodyPr wrap="square" lIns="0" rIns="0" tIns="0" bIns="0">
-            <a:spAutoFit/>
-          </a:bodyPr>
-          <a:lstStyle/>
-          <a:p>
-            <a:pPr algn="l"/>
-            <a:r>
-              <a:rPr sz="1600" b="1" i="0">
-                <a:solidFill>
-                  <a:srgbClr val="FFFFFF"/>
-                </a:solidFill>
-                <a:latin typeface="Arial"/>
-              </a:rPr>
-              <a:t>North Carolina vs TCU</a:t>
-            </a:r>
-          </a:p>
-        </p:txBody>
-      </p:sp>
-      <p:sp>
-        <p:nvSpPr>
-          <p:cNvPr id="10" name="TextBox 9"/>
-          <p:cNvSpPr txBox="1"/>
-          <p:nvPr/>
-        </p:nvSpPr>
-        <p:spPr>
-          <a:xfrm>
-            <a:off x="2697480" y="2834640"/>
-            <a:ext cx="5120640" cy="365760"/>
-          </a:xfrm>
-          <a:prstGeom prst="rect">
-            <a:avLst/>
-          </a:prstGeom>
-          <a:noFill/>
-        </p:spPr>
-        <p:txBody>
-          <a:bodyPr wrap="square" lIns="0" rIns="0" tIns="0" bIns="0">
-            <a:spAutoFit/>
-          </a:bodyPr>
-          <a:lstStyle/>
-          <a:p>
-            <a:pPr algn="l"/>
-            <a:r>
-              <a:rPr sz="1200" b="0" i="0">
-                <a:solidFill>
-                  <a:srgbClr val="CADCFC"/>
-                </a:solidFill>
-                <a:latin typeface="Arial"/>
-              </a:rPr>
-              <a:t>UNC ATS at −6.5 or worse · O/U no lean</a:t>
-            </a:r>
-          </a:p>
-        </p:txBody>
-      </p:sp>
-      <p:sp>
-        <p:nvSpPr>
-          <p:cNvPr id="11" name="TextBox 10"/>
-          <p:cNvSpPr txBox="1"/>
-          <p:nvPr/>
-        </p:nvSpPr>
-        <p:spPr>
-          <a:xfrm>
-            <a:off x="7955279" y="2432304"/>
-            <a:ext cx="3200400" cy="365760"/>
-          </a:xfrm>
-          <a:prstGeom prst="rect">
-            <a:avLst/>
-          </a:prstGeom>
-          <a:noFill/>
-        </p:spPr>
-        <p:txBody>
-          <a:bodyPr wrap="square" lIns="0" rIns="0" tIns="0" bIns="0">
-            <a:spAutoFit/>
-          </a:bodyPr>
-          <a:lstStyle/>
-          <a:p>
-            <a:pPr algn="r"/>
-            <a:r>
-              <a:rPr sz="1400" b="1" i="0">
-                <a:solidFill>
-                  <a:srgbClr val="F47321"/>
-                </a:solidFill>
-                <a:latin typeface="Arial"/>
-              </a:rPr>
-              <a:t>TCU –1.5   ·   –6.5 / –8.5</a:t>
-            </a:r>
-          </a:p>
-        </p:txBody>
-      </p:sp>
-      <p:sp>
-        <p:nvSpPr>
-          <p:cNvPr id="12" name="TextBox 11"/>
-          <p:cNvSpPr txBox="1"/>
-          <p:nvPr/>
-        </p:nvSpPr>
-        <p:spPr>
-          <a:xfrm>
-            <a:off x="7955279" y="2834640"/>
-            <a:ext cx="3200400" cy="320040"/>
-          </a:xfrm>
-          <a:prstGeom prst="rect">
-            <a:avLst/>
-          </a:prstGeom>
-          <a:noFill/>
-        </p:spPr>
-        <p:txBody>
-          <a:bodyPr wrap="square" lIns="0" rIns="0" tIns="0" bIns="0">
-            <a:spAutoFit/>
-          </a:bodyPr>
-          <a:lstStyle/>
-          <a:p>
-            <a:pPr algn="r"/>
-            <a:r>
-              <a:rPr sz="950" b="0" i="0">
-                <a:solidFill>
-                  <a:srgbClr val="8FA5C4"/>
-                </a:solidFill>
-                <a:latin typeface="Arial"/>
-              </a:rPr>
-              <a:t>machine · market</a:t>
-            </a:r>
-          </a:p>
-        </p:txBody>
-      </p:sp>
-      <p:sp>
-        <p:nvSpPr>
-          <p:cNvPr id="13" name="Rounded Rectangle 12"/>
+          <p:cNvPr id="5" name="TextBox 4"/>
+          <p:cNvSpPr txBox="1"/>
+          <p:nvPr/>
+        </p:nvSpPr>
+        <p:spPr>
+          <a:xfrm>
+            <a:off x="3154680" y="347472"/>
+            <a:ext cx="8138160" cy="502920"/>
+          </a:xfrm>
+          <a:prstGeom prst="rect">
+            <a:avLst/>
+          </a:prstGeom>
+          <a:noFill/>
+        </p:spPr>
+        <p:txBody>
+          <a:bodyPr wrap="square" lIns="0" rIns="0" tIns="0" bIns="0">
+            <a:spAutoFit/>
+          </a:bodyPr>
+          <a:lstStyle/>
+          <a:p>
+            <a:pPr algn="l"/>
+            <a:r>
+              <a:rPr sz="2700" b="1" i="0">
+                <a:solidFill>
+                  <a:srgbClr val="0A2851"/>
+                </a:solidFill>
+                <a:latin typeface="Arial"/>
+              </a:rPr>
+              <a:t>Hawai'i at Stanford</a:t>
+            </a:r>
+          </a:p>
+        </p:txBody>
+      </p:sp>
+      <p:sp>
+        <p:nvSpPr>
+          <p:cNvPr id="6" name="TextBox 5"/>
+          <p:cNvSpPr txBox="1"/>
+          <p:nvPr/>
+        </p:nvSpPr>
+        <p:spPr>
+          <a:xfrm>
+            <a:off x="3154680" y="859536"/>
+            <a:ext cx="8138160" cy="320040"/>
+          </a:xfrm>
+          <a:prstGeom prst="rect">
+            <a:avLst/>
+          </a:prstGeom>
+          <a:noFill/>
+        </p:spPr>
+        <p:txBody>
+          <a:bodyPr wrap="square" lIns="0" rIns="0" tIns="0" bIns="0">
+            <a:spAutoFit/>
+          </a:bodyPr>
+          <a:lstStyle/>
+          <a:p>
+            <a:pPr algn="l"/>
+            <a:r>
+              <a:rPr sz="1100" b="0" i="1">
+                <a:solidFill>
+                  <a:srgbClr val="5C6B7E"/>
+                </a:solidFill>
+                <a:latin typeface="Arial"/>
+              </a:rPr>
+              <a:t>Sat Aug 29 · 7:00 ET · ACC Network · Pritchard's first game · the machine rates Hawai'i the better team</a:t>
+            </a:r>
+          </a:p>
+        </p:txBody>
+      </p:sp>
+      <p:sp>
+        <p:nvSpPr>
+          <p:cNvPr id="7" name="TextBox 6"/>
+          <p:cNvSpPr txBox="1"/>
+          <p:nvPr/>
+        </p:nvSpPr>
+        <p:spPr>
+          <a:xfrm>
+            <a:off x="822960" y="1600200"/>
+            <a:ext cx="6583680" cy="365760"/>
+          </a:xfrm>
+          <a:prstGeom prst="rect">
+            <a:avLst/>
+          </a:prstGeom>
+          <a:noFill/>
+        </p:spPr>
+        <p:txBody>
+          <a:bodyPr wrap="square" lIns="0" rIns="0" tIns="0" bIns="0">
+            <a:spAutoFit/>
+          </a:bodyPr>
+          <a:lstStyle/>
+          <a:p>
+            <a:pPr algn="l"/>
+            <a:r>
+              <a:rPr sz="1300" b="1" i="0">
+                <a:solidFill>
+                  <a:srgbClr val="0A2851"/>
+                </a:solidFill>
+                <a:latin typeface="Arial"/>
+              </a:rPr>
+              <a:t>WHAT DECIDES IT</a:t>
+            </a:r>
+          </a:p>
+        </p:txBody>
+      </p:sp>
+      <p:sp>
+        <p:nvSpPr>
+          <p:cNvPr id="8" name="Oval 7"/>
           <p:cNvSpPr/>
           <p:nvPr/>
         </p:nvSpPr>
         <p:spPr>
           <a:xfrm>
-            <a:off x="822960" y="3547872"/>
-            <a:ext cx="10515600" cy="1051560"/>
-          </a:xfrm>
-          <a:prstGeom prst="roundRect">
+            <a:off x="868680" y="2139696"/>
+            <a:ext cx="128016" cy="128016"/>
+          </a:xfrm>
+          <a:prstGeom prst="ellipse">
             <a:avLst/>
           </a:prstGeom>
           <a:solidFill>
-            <a:srgbClr val="123568"/>
+            <a:srgbClr val="F47321"/>
           </a:solidFill>
           <a:ln>
             <a:noFill/>
@@ -11053,20 +15367,55 @@
       </p:sp>
       <p:sp>
         <p:nvSpPr>
-          <p:cNvPr id="14" name="Oval 13"/>
+          <p:cNvPr id="9" name="TextBox 8"/>
+          <p:cNvSpPr txBox="1"/>
+          <p:nvPr/>
+        </p:nvSpPr>
+        <p:spPr>
+          <a:xfrm>
+            <a:off x="1188720" y="2057400"/>
+            <a:ext cx="6217920" cy="731520"/>
+          </a:xfrm>
+          <a:prstGeom prst="rect">
+            <a:avLst/>
+          </a:prstGeom>
+          <a:noFill/>
+        </p:spPr>
+        <p:txBody>
+          <a:bodyPr wrap="square" lIns="0" rIns="0" tIns="0" bIns="0">
+            <a:spAutoFit/>
+          </a:bodyPr>
+          <a:lstStyle/>
+          <a:p>
+            <a:pPr algn="l"/>
+            <a:r>
+              <a:rPr sz="1350" b="0" i="0">
+                <a:solidFill>
+                  <a:srgbClr val="16273D"/>
+                </a:solidFill>
+                <a:latin typeface="Arial"/>
+              </a:rPr>
+              <a:t>Neither side can run: Stanford rush offense #128 vs Hawai'i rush D #70; Hawai'i rush O #117 vs Stanford's #15 front</a:t>
+            </a:r>
+          </a:p>
+        </p:txBody>
+      </p:sp>
+      <p:sp>
+        <p:nvSpPr>
+          <p:cNvPr id="10" name="Oval 9"/>
           <p:cNvSpPr/>
           <p:nvPr/>
         </p:nvSpPr>
         <p:spPr>
           <a:xfrm>
-            <a:off x="1051560" y="3767328"/>
-            <a:ext cx="621792" cy="621792"/>
+            <a:off x="868680" y="2852928"/>
+            <a:ext cx="128016" cy="128016"/>
           </a:xfrm>
           <a:prstGeom prst="ellipse">
             <a:avLst/>
           </a:prstGeom>
           <a:solidFill>
-            <a:srgbClr val="FFFFFF"/>
+            <a:srgbClr val="F47321"/>
           </a:solidFill>
           <a:ln>
             <a:noFill/>
@@ -11095,46 +15444,57 @@
           </a:p>
         </p:txBody>
       </p:sp>
-      <p:pic>
-        <p:nvPicPr>
-          <p:cNvPr id="15" name="Picture 14" descr="ncsu.png"/>
-          <p:cNvPicPr>
-            <a:picLocks noChangeAspect="1"/>
-          </p:cNvPicPr>
-          <p:nvPr/>
-        </p:nvPicPr>
-        <p:blipFill>
-          <a:blip r:embed="rId4"/>
-          <a:stretch>
-            <a:fillRect/>
-          </a:stretch>
-        </p:blipFill>
-        <p:spPr>
-          <a:xfrm>
-            <a:off x="1113739" y="3829507"/>
-            <a:ext cx="497433" cy="497433"/>
-          </a:xfrm>
-          <a:prstGeom prst="rect">
-            <a:avLst/>
-          </a:prstGeom>
-        </p:spPr>
-      </p:pic>
-      <p:sp>
-        <p:nvSpPr>
-          <p:cNvPr id="16" name="Oval 15"/>
+      <p:sp>
+        <p:nvSpPr>
+          <p:cNvPr id="11" name="TextBox 10"/>
+          <p:cNvSpPr txBox="1"/>
+          <p:nvPr/>
+        </p:nvSpPr>
+        <p:spPr>
+          <a:xfrm>
+            <a:off x="1188720" y="2770632"/>
+            <a:ext cx="6217920" cy="731520"/>
+          </a:xfrm>
+          <a:prstGeom prst="rect">
+            <a:avLst/>
+          </a:prstGeom>
+          <a:noFill/>
+        </p:spPr>
+        <p:txBody>
+          <a:bodyPr wrap="square" lIns="0" rIns="0" tIns="0" bIns="0">
+            <a:spAutoFit/>
+          </a:bodyPr>
+          <a:lstStyle/>
+          <a:p>
+            <a:pPr algn="l"/>
+            <a:r>
+              <a:rPr sz="1350" b="0" i="0">
+                <a:solidFill>
+                  <a:srgbClr val="16273D"/>
+                </a:solidFill>
+                <a:latin typeface="Arial"/>
+              </a:rPr>
+              <a:t>So it's Alejado (#52 pass offense) at Stanford's #115 pass defense — the run-and-shoot's whole path</a:t>
+            </a:r>
+          </a:p>
+        </p:txBody>
+      </p:sp>
+      <p:sp>
+        <p:nvSpPr>
+          <p:cNvPr id="12" name="Oval 11"/>
           <p:cNvSpPr/>
           <p:nvPr/>
         </p:nvSpPr>
         <p:spPr>
           <a:xfrm>
-            <a:off x="1828800" y="3767328"/>
-            <a:ext cx="621792" cy="621792"/>
+            <a:off x="868680" y="3566160"/>
+            <a:ext cx="128016" cy="128016"/>
           </a:xfrm>
           <a:prstGeom prst="ellipse">
             <a:avLst/>
           </a:prstGeom>
           <a:solidFill>
-            <a:srgbClr val="FFFFFF"/>
+            <a:srgbClr val="F47321"/>
           </a:solidFill>
           <a:ln>
             <a:noFill/>
@@ -11163,186 +15523,57 @@
           </a:p>
         </p:txBody>
       </p:sp>
-      <p:pic>
-        <p:nvPicPr>
-          <p:cNvPr id="17" name="Picture 16" descr="uva.png"/>
-          <p:cNvPicPr>
-            <a:picLocks noChangeAspect="1"/>
-          </p:cNvPicPr>
-          <p:nvPr/>
-        </p:nvPicPr>
-        <p:blipFill>
-          <a:blip r:embed="rId5"/>
-          <a:stretch>
-            <a:fillRect/>
-          </a:stretch>
-        </p:blipFill>
-        <p:spPr>
-          <a:xfrm>
-            <a:off x="1890979" y="3829507"/>
-            <a:ext cx="497433" cy="497433"/>
-          </a:xfrm>
-          <a:prstGeom prst="rect">
-            <a:avLst/>
-          </a:prstGeom>
-        </p:spPr>
-      </p:pic>
-      <p:sp>
-        <p:nvSpPr>
-          <p:cNvPr id="18" name="TextBox 17"/>
-          <p:cNvSpPr txBox="1"/>
-          <p:nvPr/>
-        </p:nvSpPr>
-        <p:spPr>
-          <a:xfrm>
-            <a:off x="2697480" y="3694176"/>
-            <a:ext cx="5120640" cy="411480"/>
-          </a:xfrm>
-          <a:prstGeom prst="rect">
-            <a:avLst/>
-          </a:prstGeom>
-          <a:noFill/>
-        </p:spPr>
-        <p:txBody>
-          <a:bodyPr wrap="square" lIns="0" rIns="0" tIns="0" bIns="0">
-            <a:spAutoFit/>
-          </a:bodyPr>
-          <a:lstStyle/>
-          <a:p>
-            <a:pPr algn="l"/>
-            <a:r>
-              <a:rPr sz="1600" b="1" i="0">
-                <a:solidFill>
-                  <a:srgbClr val="FFFFFF"/>
-                </a:solidFill>
-                <a:latin typeface="Arial"/>
-              </a:rPr>
-              <a:t>NC State at Virginia</a:t>
-            </a:r>
-          </a:p>
-        </p:txBody>
-      </p:sp>
-      <p:sp>
-        <p:nvSpPr>
-          <p:cNvPr id="19" name="TextBox 18"/>
-          <p:cNvSpPr txBox="1"/>
-          <p:nvPr/>
-        </p:nvSpPr>
-        <p:spPr>
-          <a:xfrm>
-            <a:off x="2697480" y="4096511"/>
-            <a:ext cx="5120640" cy="365760"/>
-          </a:xfrm>
-          <a:prstGeom prst="rect">
-            <a:avLst/>
-          </a:prstGeom>
-          <a:noFill/>
-        </p:spPr>
-        <p:txBody>
-          <a:bodyPr wrap="square" lIns="0" rIns="0" tIns="0" bIns="0">
-            <a:spAutoFit/>
-          </a:bodyPr>
-          <a:lstStyle/>
-          <a:p>
-            <a:pPr algn="l"/>
-            <a:r>
-              <a:rPr sz="1200" b="0" i="0">
-                <a:solidFill>
-                  <a:srgbClr val="CADCFC"/>
-                </a:solidFill>
-                <a:latin typeface="Arial"/>
-              </a:rPr>
-              <a:t>UVA — value at −3, fair at −6</a:t>
-            </a:r>
-          </a:p>
-        </p:txBody>
-      </p:sp>
-      <p:sp>
-        <p:nvSpPr>
-          <p:cNvPr id="20" name="TextBox 19"/>
-          <p:cNvSpPr txBox="1"/>
-          <p:nvPr/>
-        </p:nvSpPr>
-        <p:spPr>
-          <a:xfrm>
-            <a:off x="7955279" y="3694176"/>
-            <a:ext cx="3200400" cy="365760"/>
-          </a:xfrm>
-          <a:prstGeom prst="rect">
-            <a:avLst/>
-          </a:prstGeom>
-          <a:noFill/>
-        </p:spPr>
-        <p:txBody>
-          <a:bodyPr wrap="square" lIns="0" rIns="0" tIns="0" bIns="0">
-            <a:spAutoFit/>
-          </a:bodyPr>
-          <a:lstStyle/>
-          <a:p>
-            <a:pPr algn="r"/>
-            <a:r>
-              <a:rPr sz="1400" b="1" i="0">
-                <a:solidFill>
-                  <a:srgbClr val="F47321"/>
-                </a:solidFill>
-                <a:latin typeface="Arial"/>
-              </a:rPr>
-              <a:t>UVA –6.7   ·   –3 / –6</a:t>
-            </a:r>
-          </a:p>
-        </p:txBody>
-      </p:sp>
-      <p:sp>
-        <p:nvSpPr>
-          <p:cNvPr id="21" name="TextBox 20"/>
-          <p:cNvSpPr txBox="1"/>
-          <p:nvPr/>
-        </p:nvSpPr>
-        <p:spPr>
-          <a:xfrm>
-            <a:off x="7955279" y="4096511"/>
-            <a:ext cx="3200400" cy="320040"/>
-          </a:xfrm>
-          <a:prstGeom prst="rect">
-            <a:avLst/>
-          </a:prstGeom>
-          <a:noFill/>
-        </p:spPr>
-        <p:txBody>
-          <a:bodyPr wrap="square" lIns="0" rIns="0" tIns="0" bIns="0">
-            <a:spAutoFit/>
-          </a:bodyPr>
-          <a:lstStyle/>
-          <a:p>
-            <a:pPr algn="r"/>
-            <a:r>
-              <a:rPr sz="950" b="0" i="0">
-                <a:solidFill>
-                  <a:srgbClr val="8FA5C4"/>
-                </a:solidFill>
-                <a:latin typeface="Arial"/>
-              </a:rPr>
-              <a:t>machine · market</a:t>
-            </a:r>
-          </a:p>
-        </p:txBody>
-      </p:sp>
-      <p:sp>
-        <p:nvSpPr>
-          <p:cNvPr id="22" name="Rounded Rectangle 21"/>
+      <p:sp>
+        <p:nvSpPr>
+          <p:cNvPr id="13" name="TextBox 12"/>
+          <p:cNvSpPr txBox="1"/>
+          <p:nvPr/>
+        </p:nvSpPr>
+        <p:spPr>
+          <a:xfrm>
+            <a:off x="1188720" y="3483864"/>
+            <a:ext cx="6217920" cy="731520"/>
+          </a:xfrm>
+          <a:prstGeom prst="rect">
+            <a:avLst/>
+          </a:prstGeom>
+          <a:noFill/>
+        </p:spPr>
+        <p:txBody>
+          <a:bodyPr wrap="square" lIns="0" rIns="0" tIns="0" bIns="0">
+            <a:spAutoFit/>
+          </a:bodyPr>
+          <a:lstStyle/>
+          <a:p>
+            <a:pPr algn="l"/>
+            <a:r>
+              <a:rPr sz="1350" b="0" i="0">
+                <a:solidFill>
+                  <a:srgbClr val="16273D"/>
+                </a:solidFill>
+                <a:latin typeface="Arial"/>
+              </a:rPr>
+              <a:t>Stanford QB Davis Warren: zero 2025 snaps at Michigan, career 7 TD–10 INT — unmodeled QB-tier risk</a:t>
+            </a:r>
+          </a:p>
+        </p:txBody>
+      </p:sp>
+      <p:sp>
+        <p:nvSpPr>
+          <p:cNvPr id="14" name="Oval 13"/>
           <p:cNvSpPr/>
           <p:nvPr/>
         </p:nvSpPr>
         <p:spPr>
           <a:xfrm>
-            <a:off x="822960" y="4809744"/>
-            <a:ext cx="10515600" cy="1051560"/>
-          </a:xfrm>
-          <a:prstGeom prst="roundRect">
+            <a:off x="868680" y="4279392"/>
+            <a:ext cx="128016" cy="128016"/>
+          </a:xfrm>
+          <a:prstGeom prst="ellipse">
             <a:avLst/>
           </a:prstGeom>
           <a:solidFill>
-            <a:srgbClr val="123568"/>
+            <a:srgbClr val="F47321"/>
           </a:solidFill>
           <a:ln>
             <a:noFill/>
@@ -11373,20 +15604,55 @@
       </p:sp>
       <p:sp>
         <p:nvSpPr>
-          <p:cNvPr id="23" name="Oval 22"/>
+          <p:cNvPr id="15" name="TextBox 14"/>
+          <p:cNvSpPr txBox="1"/>
+          <p:nvPr/>
+        </p:nvSpPr>
+        <p:spPr>
+          <a:xfrm>
+            <a:off x="1188720" y="4197096"/>
+            <a:ext cx="6217920" cy="731520"/>
+          </a:xfrm>
+          <a:prstGeom prst="rect">
+            <a:avLst/>
+          </a:prstGeom>
+          <a:noFill/>
+        </p:spPr>
+        <p:txBody>
+          <a:bodyPr wrap="square" lIns="0" rIns="0" tIns="0" bIns="0">
+            <a:spAutoFit/>
+          </a:bodyPr>
+          <a:lstStyle/>
+          <a:p>
+            <a:pPr algn="l"/>
+            <a:r>
+              <a:rPr sz="1350" b="0" i="0">
+                <a:solidFill>
+                  <a:srgbClr val="16273D"/>
+                </a:solidFill>
+                <a:latin typeface="Arial"/>
+              </a:rPr>
+              <a:t>Hawai'i's #8 special teams was Matsuzawa (27/29) + Barfield's return TD — the kicker is gone; unit rank overstates</a:t>
+            </a:r>
+          </a:p>
+        </p:txBody>
+      </p:sp>
+      <p:sp>
+        <p:nvSpPr>
+          <p:cNvPr id="16" name="Rounded Rectangle 15"/>
           <p:cNvSpPr/>
           <p:nvPr/>
         </p:nvSpPr>
         <p:spPr>
           <a:xfrm>
-            <a:off x="1051560" y="5029200"/>
-            <a:ext cx="621792" cy="621792"/>
-          </a:xfrm>
-          <a:prstGeom prst="ellipse">
+            <a:off x="822960" y="5047488"/>
+            <a:ext cx="6583680" cy="960120"/>
+          </a:xfrm>
+          <a:prstGeom prst="roundRect">
             <a:avLst/>
           </a:prstGeom>
           <a:solidFill>
-            <a:srgbClr val="FFFFFF"/>
+            <a:srgbClr val="EAF0F8"/>
           </a:solidFill>
           <a:ln>
             <a:noFill/>
@@ -11415,46 +15681,57 @@
           </a:p>
         </p:txBody>
       </p:sp>
-      <p:pic>
-        <p:nvPicPr>
-          <p:cNvPr id="24" name="Picture 23" descr="jsu.png"/>
-          <p:cNvPicPr>
-            <a:picLocks noChangeAspect="1"/>
-          </p:cNvPicPr>
-          <p:nvPr/>
-        </p:nvPicPr>
-        <p:blipFill>
-          <a:blip r:embed="rId6"/>
-          <a:stretch>
-            <a:fillRect/>
-          </a:stretch>
-        </p:blipFill>
-        <p:spPr>
-          <a:xfrm>
-            <a:off x="1113739" y="5091379"/>
-            <a:ext cx="497433" cy="497433"/>
-          </a:xfrm>
-          <a:prstGeom prst="rect">
-            <a:avLst/>
-          </a:prstGeom>
-        </p:spPr>
-      </p:pic>
-      <p:sp>
-        <p:nvSpPr>
-          <p:cNvPr id="25" name="Oval 24"/>
+      <p:sp>
+        <p:nvSpPr>
+          <p:cNvPr id="17" name="TextBox 16"/>
+          <p:cNvSpPr txBox="1"/>
+          <p:nvPr/>
+        </p:nvSpPr>
+        <p:spPr>
+          <a:xfrm>
+            <a:off x="1051560" y="5202936"/>
+            <a:ext cx="6126480" cy="685800"/>
+          </a:xfrm>
+          <a:prstGeom prst="rect">
+            <a:avLst/>
+          </a:prstGeom>
+          <a:noFill/>
+        </p:spPr>
+        <p:txBody>
+          <a:bodyPr wrap="square" lIns="0" rIns="0" tIns="0" bIns="0">
+            <a:spAutoFit/>
+          </a:bodyPr>
+          <a:lstStyle/>
+          <a:p>
+            <a:pPr algn="l"/>
+            <a:r>
+              <a:rPr sz="1150" b="0" i="1">
+                <a:solidFill>
+                  <a:srgbClr val="5C6B7E"/>
+                </a:solidFill>
+                <a:latin typeface="Arial"/>
+              </a:rPr>
+              <a:t>Hawai'i's +5.8 residual: ESPN's 2025 rating ran ahead of its inputs, and the two sack leaders left. The line moved −3 → −5.5 toward Stanford since it opened — the market is not buying the machine's Hawai'i lean.</a:t>
+            </a:r>
+          </a:p>
+        </p:txBody>
+      </p:sp>
+      <p:sp>
+        <p:nvSpPr>
+          <p:cNvPr id="18" name="Rounded Rectangle 17"/>
           <p:cNvSpPr/>
           <p:nvPr/>
         </p:nvSpPr>
         <p:spPr>
           <a:xfrm>
-            <a:off x="1828800" y="5029200"/>
-            <a:ext cx="621792" cy="621792"/>
-          </a:xfrm>
-          <a:prstGeom prst="ellipse">
+            <a:off x="7772400" y="1600200"/>
+            <a:ext cx="3566160" cy="4206240"/>
+          </a:xfrm>
+          <a:prstGeom prst="roundRect">
             <a:avLst/>
           </a:prstGeom>
           <a:solidFill>
-            <a:srgbClr val="FFFFFF"/>
+            <a:srgbClr val="0A2851"/>
           </a:solidFill>
           <a:ln>
             <a:noFill/>
@@ -11483,24 +15760,523 @@
           </a:p>
         </p:txBody>
       </p:sp>
+      <p:sp>
+        <p:nvSpPr>
+          <p:cNvPr id="19" name="TextBox 18"/>
+          <p:cNvSpPr txBox="1"/>
+          <p:nvPr/>
+        </p:nvSpPr>
+        <p:spPr>
+          <a:xfrm>
+            <a:off x="8046720" y="1828800"/>
+            <a:ext cx="3017520" cy="320040"/>
+          </a:xfrm>
+          <a:prstGeom prst="rect">
+            <a:avLst/>
+          </a:prstGeom>
+          <a:noFill/>
+        </p:spPr>
+        <p:txBody>
+          <a:bodyPr wrap="square" lIns="0" rIns="0" tIns="0" bIns="0">
+            <a:spAutoFit/>
+          </a:bodyPr>
+          <a:lstStyle/>
+          <a:p>
+            <a:pPr algn="l"/>
+            <a:r>
+              <a:rPr sz="1200" b="1" i="0">
+                <a:solidFill>
+                  <a:srgbClr val="F47321"/>
+                </a:solidFill>
+                <a:latin typeface="Arial"/>
+              </a:rPr>
+              <a:t>THE NUMBER</a:t>
+            </a:r>
+          </a:p>
+        </p:txBody>
+      </p:sp>
+      <p:sp>
+        <p:nvSpPr>
+          <p:cNvPr id="20" name="TextBox 19"/>
+          <p:cNvSpPr txBox="1"/>
+          <p:nvPr/>
+        </p:nvSpPr>
+        <p:spPr>
+          <a:xfrm>
+            <a:off x="8046720" y="2194560"/>
+            <a:ext cx="3017520" cy="640080"/>
+          </a:xfrm>
+          <a:prstGeom prst="rect">
+            <a:avLst/>
+          </a:prstGeom>
+          <a:noFill/>
+        </p:spPr>
+        <p:txBody>
+          <a:bodyPr wrap="square" lIns="0" rIns="0" tIns="0" bIns="0">
+            <a:spAutoFit/>
+          </a:bodyPr>
+          <a:lstStyle/>
+          <a:p>
+            <a:pPr algn="l"/>
+            <a:r>
+              <a:rPr sz="3000" b="1" i="0">
+                <a:solidFill>
+                  <a:srgbClr val="FFFFFF"/>
+                </a:solidFill>
+                <a:latin typeface="Arial"/>
+              </a:rPr>
+              <a:t>Stanford –1.6</a:t>
+            </a:r>
+          </a:p>
+        </p:txBody>
+      </p:sp>
+      <p:sp>
+        <p:nvSpPr>
+          <p:cNvPr id="21" name="TextBox 20"/>
+          <p:cNvSpPr txBox="1"/>
+          <p:nvPr/>
+        </p:nvSpPr>
+        <p:spPr>
+          <a:xfrm>
+            <a:off x="8046720" y="2788920"/>
+            <a:ext cx="3017520" cy="274320"/>
+          </a:xfrm>
+          <a:prstGeom prst="rect">
+            <a:avLst/>
+          </a:prstGeom>
+          <a:noFill/>
+        </p:spPr>
+        <p:txBody>
+          <a:bodyPr wrap="square" lIns="0" rIns="0" tIns="0" bIns="0">
+            <a:spAutoFit/>
+          </a:bodyPr>
+          <a:lstStyle/>
+          <a:p>
+            <a:pPr algn="l"/>
+            <a:r>
+              <a:rPr sz="1000" b="0" i="0">
+                <a:solidFill>
+                  <a:srgbClr val="CADCFC"/>
+                </a:solidFill>
+                <a:latin typeface="Arial"/>
+              </a:rPr>
+              <a:t>machine</a:t>
+            </a:r>
+          </a:p>
+        </p:txBody>
+      </p:sp>
+      <p:sp>
+        <p:nvSpPr>
+          <p:cNvPr id="22" name="TextBox 21"/>
+          <p:cNvSpPr txBox="1"/>
+          <p:nvPr/>
+        </p:nvSpPr>
+        <p:spPr>
+          <a:xfrm>
+            <a:off x="8046720" y="3154680"/>
+            <a:ext cx="3017520" cy="502920"/>
+          </a:xfrm>
+          <a:prstGeom prst="rect">
+            <a:avLst/>
+          </a:prstGeom>
+          <a:noFill/>
+        </p:spPr>
+        <p:txBody>
+          <a:bodyPr wrap="square" lIns="0" rIns="0" tIns="0" bIns="0">
+            <a:spAutoFit/>
+          </a:bodyPr>
+          <a:lstStyle/>
+          <a:p>
+            <a:pPr algn="l"/>
+            <a:r>
+              <a:rPr sz="2200" b="1" i="0">
+                <a:solidFill>
+                  <a:srgbClr val="FFFFFF"/>
+                </a:solidFill>
+                <a:latin typeface="Arial"/>
+              </a:rPr>
+              <a:t>–5.5 / –5.5</a:t>
+            </a:r>
+          </a:p>
+        </p:txBody>
+      </p:sp>
+      <p:sp>
+        <p:nvSpPr>
+          <p:cNvPr id="23" name="TextBox 22"/>
+          <p:cNvSpPr txBox="1"/>
+          <p:nvPr/>
+        </p:nvSpPr>
+        <p:spPr>
+          <a:xfrm>
+            <a:off x="8046720" y="3611880"/>
+            <a:ext cx="3017520" cy="274320"/>
+          </a:xfrm>
+          <a:prstGeom prst="rect">
+            <a:avLst/>
+          </a:prstGeom>
+          <a:noFill/>
+        </p:spPr>
+        <p:txBody>
+          <a:bodyPr wrap="square" lIns="0" rIns="0" tIns="0" bIns="0">
+            <a:spAutoFit/>
+          </a:bodyPr>
+          <a:lstStyle/>
+          <a:p>
+            <a:pPr algn="l"/>
+            <a:r>
+              <a:rPr sz="1000" b="0" i="0">
+                <a:solidFill>
+                  <a:srgbClr val="CADCFC"/>
+                </a:solidFill>
+                <a:latin typeface="Arial"/>
+              </a:rPr>
+              <a:t>market (DK / Bovada)</a:t>
+            </a:r>
+          </a:p>
+        </p:txBody>
+      </p:sp>
+      <p:sp>
+        <p:nvSpPr>
+          <p:cNvPr id="24" name="TextBox 23"/>
+          <p:cNvSpPr txBox="1"/>
+          <p:nvPr/>
+        </p:nvSpPr>
+        <p:spPr>
+          <a:xfrm>
+            <a:off x="8046720" y="3977639"/>
+            <a:ext cx="3017520" cy="411480"/>
+          </a:xfrm>
+          <a:prstGeom prst="rect">
+            <a:avLst/>
+          </a:prstGeom>
+          <a:noFill/>
+        </p:spPr>
+        <p:txBody>
+          <a:bodyPr wrap="square" lIns="0" rIns="0" tIns="0" bIns="0">
+            <a:spAutoFit/>
+          </a:bodyPr>
+          <a:lstStyle/>
+          <a:p>
+            <a:pPr algn="l"/>
+            <a:r>
+              <a:rPr sz="1600" b="1" i="0">
+                <a:solidFill>
+                  <a:srgbClr val="F47321"/>
+                </a:solidFill>
+                <a:latin typeface="Arial"/>
+              </a:rPr>
+              <a:t>3.9 pts on Hawai'i</a:t>
+            </a:r>
+          </a:p>
+        </p:txBody>
+      </p:sp>
+      <p:sp>
+        <p:nvSpPr>
+          <p:cNvPr id="25" name="TextBox 24"/>
+          <p:cNvSpPr txBox="1"/>
+          <p:nvPr/>
+        </p:nvSpPr>
+        <p:spPr>
+          <a:xfrm>
+            <a:off x="8046720" y="4370832"/>
+            <a:ext cx="3017520" cy="274320"/>
+          </a:xfrm>
+          <a:prstGeom prst="rect">
+            <a:avLst/>
+          </a:prstGeom>
+          <a:noFill/>
+        </p:spPr>
+        <p:txBody>
+          <a:bodyPr wrap="square" lIns="0" rIns="0" tIns="0" bIns="0">
+            <a:spAutoFit/>
+          </a:bodyPr>
+          <a:lstStyle/>
+          <a:p>
+            <a:pPr algn="l"/>
+            <a:r>
+              <a:rPr sz="1000" b="0" i="0">
+                <a:solidFill>
+                  <a:srgbClr val="CADCFC"/>
+                </a:solidFill>
+                <a:latin typeface="Arial"/>
+              </a:rPr>
+              <a:t>the gap</a:t>
+            </a:r>
+          </a:p>
+        </p:txBody>
+      </p:sp>
+      <p:sp>
+        <p:nvSpPr>
+          <p:cNvPr id="26" name="Rounded Rectangle 25"/>
+          <p:cNvSpPr/>
+          <p:nvPr/>
+        </p:nvSpPr>
+        <p:spPr>
+          <a:xfrm>
+            <a:off x="8046720" y="4892040"/>
+            <a:ext cx="3017520" cy="384048"/>
+          </a:xfrm>
+          <a:prstGeom prst="roundRect">
+            <a:avLst/>
+          </a:prstGeom>
+          <a:solidFill>
+            <a:srgbClr val="003420"/>
+          </a:solidFill>
+          <a:ln>
+            <a:noFill/>
+          </a:ln>
+          <a:effectLst/>
+        </p:spPr>
+        <p:style>
+          <a:lnRef idx="1">
+            <a:schemeClr val="accent1"/>
+          </a:lnRef>
+          <a:fillRef idx="3">
+            <a:schemeClr val="accent1"/>
+          </a:fillRef>
+          <a:effectRef idx="2">
+            <a:schemeClr val="accent1"/>
+          </a:effectRef>
+          <a:fontRef idx="minor">
+            <a:schemeClr val="lt1"/>
+          </a:fontRef>
+        </p:style>
+        <p:txBody>
+          <a:bodyPr rtlCol="0" anchor="ctr"/>
+          <a:lstStyle/>
+          <a:p>
+            <a:pPr algn="ctr"/>
+          </a:p>
+        </p:txBody>
+      </p:sp>
+      <p:sp>
+        <p:nvSpPr>
+          <p:cNvPr id="27" name="Rounded Rectangle 26"/>
+          <p:cNvSpPr/>
+          <p:nvPr/>
+        </p:nvSpPr>
+        <p:spPr>
+          <a:xfrm>
+            <a:off x="8046720" y="4892040"/>
+            <a:ext cx="1629460" cy="384048"/>
+          </a:xfrm>
+          <a:prstGeom prst="roundRect">
+            <a:avLst/>
+          </a:prstGeom>
+          <a:solidFill>
+            <a:srgbClr val="8C1515"/>
+          </a:solidFill>
+          <a:ln>
+            <a:noFill/>
+          </a:ln>
+          <a:effectLst/>
+        </p:spPr>
+        <p:style>
+          <a:lnRef idx="1">
+            <a:schemeClr val="accent1"/>
+          </a:lnRef>
+          <a:fillRef idx="3">
+            <a:schemeClr val="accent1"/>
+          </a:fillRef>
+          <a:effectRef idx="2">
+            <a:schemeClr val="accent1"/>
+          </a:effectRef>
+          <a:fontRef idx="minor">
+            <a:schemeClr val="lt1"/>
+          </a:fontRef>
+        </p:style>
+        <p:txBody>
+          <a:bodyPr rtlCol="0" anchor="ctr"/>
+          <a:lstStyle/>
+          <a:p>
+            <a:pPr algn="ctr"/>
+          </a:p>
+        </p:txBody>
+      </p:sp>
+      <p:sp>
+        <p:nvSpPr>
+          <p:cNvPr id="28" name="TextBox 27"/>
+          <p:cNvSpPr txBox="1"/>
+          <p:nvPr/>
+        </p:nvSpPr>
+        <p:spPr>
+          <a:xfrm>
+            <a:off x="8119872" y="4983479"/>
+            <a:ext cx="2194560" cy="228600"/>
+          </a:xfrm>
+          <a:prstGeom prst="rect">
+            <a:avLst/>
+          </a:prstGeom>
+          <a:noFill/>
+        </p:spPr>
+        <p:txBody>
+          <a:bodyPr wrap="square" lIns="0" rIns="0" tIns="0" bIns="0">
+            <a:spAutoFit/>
+          </a:bodyPr>
+          <a:lstStyle/>
+          <a:p>
+            <a:pPr algn="l"/>
+            <a:r>
+              <a:rPr sz="1050" b="1" i="0">
+                <a:solidFill>
+                  <a:srgbClr val="FFFFFF"/>
+                </a:solidFill>
+                <a:latin typeface="Arial"/>
+              </a:rPr>
+              <a:t>STAN 54%</a:t>
+            </a:r>
+          </a:p>
+        </p:txBody>
+      </p:sp>
+      <p:sp>
+        <p:nvSpPr>
+          <p:cNvPr id="29" name="TextBox 28"/>
+          <p:cNvSpPr txBox="1"/>
+          <p:nvPr/>
+        </p:nvSpPr>
+        <p:spPr>
+          <a:xfrm>
+            <a:off x="8796528" y="4983479"/>
+            <a:ext cx="2194560" cy="228600"/>
+          </a:xfrm>
+          <a:prstGeom prst="rect">
+            <a:avLst/>
+          </a:prstGeom>
+          <a:noFill/>
+        </p:spPr>
+        <p:txBody>
+          <a:bodyPr wrap="square" lIns="0" rIns="0" tIns="0" bIns="0">
+            <a:spAutoFit/>
+          </a:bodyPr>
+          <a:lstStyle/>
+          <a:p>
+            <a:pPr algn="r"/>
+            <a:r>
+              <a:rPr sz="1050" b="1" i="0">
+                <a:solidFill>
+                  <a:srgbClr val="FFFFFF"/>
+                </a:solidFill>
+                <a:latin typeface="Arial"/>
+              </a:rPr>
+              <a:t>46% HAW</a:t>
+            </a:r>
+          </a:p>
+        </p:txBody>
+      </p:sp>
+      <p:sp>
+        <p:nvSpPr>
+          <p:cNvPr id="30" name="TextBox 29"/>
+          <p:cNvSpPr txBox="1"/>
+          <p:nvPr/>
+        </p:nvSpPr>
+        <p:spPr>
+          <a:xfrm>
+            <a:off x="8046720" y="5349240"/>
+            <a:ext cx="3017520" cy="274320"/>
+          </a:xfrm>
+          <a:prstGeom prst="rect">
+            <a:avLst/>
+          </a:prstGeom>
+          <a:noFill/>
+        </p:spPr>
+        <p:txBody>
+          <a:bodyPr wrap="square" lIns="0" rIns="0" tIns="0" bIns="0">
+            <a:spAutoFit/>
+          </a:bodyPr>
+          <a:lstStyle/>
+          <a:p>
+            <a:pPr algn="l"/>
+            <a:r>
+              <a:rPr sz="950" b="0" i="0">
+                <a:solidFill>
+                  <a:srgbClr val="CADCFC"/>
+                </a:solidFill>
+                <a:latin typeface="Arial"/>
+              </a:rPr>
+              <a:t>win probability (machine)</a:t>
+            </a:r>
+          </a:p>
+        </p:txBody>
+      </p:sp>
+      <p:sp>
+        <p:nvSpPr>
+          <p:cNvPr id="31" name="TextBox 30"/>
+          <p:cNvSpPr txBox="1"/>
+          <p:nvPr/>
+        </p:nvSpPr>
+        <p:spPr>
+          <a:xfrm>
+            <a:off x="822960" y="6263640"/>
+            <a:ext cx="10515600" cy="365760"/>
+          </a:xfrm>
+          <a:prstGeom prst="rect">
+            <a:avLst/>
+          </a:prstGeom>
+          <a:noFill/>
+        </p:spPr>
+        <p:txBody>
+          <a:bodyPr wrap="square" lIns="0" rIns="0" tIns="0" bIns="0">
+            <a:spAutoFit/>
+          </a:bodyPr>
+          <a:lstStyle/>
+          <a:p>
+            <a:pPr algn="l"/>
+            <a:r>
+              <a:rPr sz="1300" b="1" i="0">
+                <a:solidFill>
+                  <a:srgbClr val="0A2851"/>
+                </a:solidFill>
+                <a:latin typeface="Arial"/>
+              </a:rPr>
+              <a:t>Lean: Hawai'i +5.5 — a 4-pt gap, not a conviction; the opener at +3 was the worse number</a:t>
+            </a:r>
+          </a:p>
+        </p:txBody>
+      </p:sp>
+    </p:spTree>
+  </p:cSld>
+  <p:clrMapOvr>
+    <a:masterClrMapping/>
+  </p:clrMapOvr>
+</p:sld>
+</file>
+
+<file path=ppt/slides/slide9.xml><?xml version="1.0" encoding="utf-8"?>
+<p:sld xmlns:a="http://schemas.openxmlformats.org/drawingml/2006/main" xmlns:p="http://schemas.openxmlformats.org/presentationml/2006/main" xmlns:r="http://schemas.openxmlformats.org/officeDocument/2006/relationships">
+  <p:cSld>
+    <p:bg>
+      <p:bgPr>
+        <a:solidFill>
+          <a:srgbClr val="FFFFFF"/>
+        </a:solidFill>
+        <a:effectLst/>
+      </p:bgPr>
+    </p:bg>
+    <p:spTree>
+      <p:nvGrpSpPr>
+        <p:cNvPr id="1" name=""/>
+        <p:cNvGrpSpPr/>
+        <p:nvPr/>
+      </p:nvGrpSpPr>
+      <p:grpSpPr/>
       <p:pic>
         <p:nvPicPr>
-          <p:cNvPr id="26" name="Picture 25" descr="ndsu.png"/>
+          <p:cNvPr id="2" name="Picture 1" descr="hawaii.png"/>
           <p:cNvPicPr>
             <a:picLocks noChangeAspect="1"/>
           </p:cNvPicPr>
           <p:nvPr/>
         </p:nvPicPr>
         <p:blipFill>
-          <a:blip r:embed="rId7"/>
+          <a:blip r:embed="rId2"/>
           <a:stretch>
             <a:fillRect/>
           </a:stretch>
         </p:blipFill>
         <p:spPr>
           <a:xfrm>
-            <a:off x="1890979" y="5091379"/>
-            <a:ext cx="497433" cy="497433"/>
+            <a:off x="822960" y="384048"/>
+            <a:ext cx="731520" cy="731520"/>
           </a:xfrm>
           <a:prstGeom prst="rect">
             <a:avLst/>
@@ -11509,35 +16285,860 @@
       </p:pic>
       <p:sp>
         <p:nvSpPr>
+          <p:cNvPr id="3" name="TextBox 2"/>
+          <p:cNvSpPr txBox="1"/>
+          <p:nvPr/>
+        </p:nvSpPr>
+        <p:spPr>
+          <a:xfrm>
+            <a:off x="1664208" y="475488"/>
+            <a:ext cx="457200" cy="457200"/>
+          </a:xfrm>
+          <a:prstGeom prst="rect">
+            <a:avLst/>
+          </a:prstGeom>
+          <a:noFill/>
+        </p:spPr>
+        <p:txBody>
+          <a:bodyPr wrap="square" lIns="0" rIns="0" tIns="0" bIns="0">
+            <a:spAutoFit/>
+          </a:bodyPr>
+          <a:lstStyle/>
+          <a:p>
+            <a:pPr algn="ctr"/>
+            <a:r>
+              <a:rPr sz="1400" b="0" i="0">
+                <a:solidFill>
+                  <a:srgbClr val="5C6B7E"/>
+                </a:solidFill>
+                <a:latin typeface="Arial"/>
+              </a:rPr>
+              <a:t>at</a:t>
+            </a:r>
+          </a:p>
+        </p:txBody>
+      </p:sp>
+      <p:pic>
+        <p:nvPicPr>
+          <p:cNvPr id="4" name="Picture 3" descr="stanford.png"/>
+          <p:cNvPicPr>
+            <a:picLocks noChangeAspect="1"/>
+          </p:cNvPicPr>
+          <p:nvPr/>
+        </p:nvPicPr>
+        <p:blipFill>
+          <a:blip r:embed="rId3"/>
+          <a:stretch>
+            <a:fillRect/>
+          </a:stretch>
+        </p:blipFill>
+        <p:spPr>
+          <a:xfrm>
+            <a:off x="2148840" y="384048"/>
+            <a:ext cx="731520" cy="731520"/>
+          </a:xfrm>
+          <a:prstGeom prst="rect">
+            <a:avLst/>
+          </a:prstGeom>
+        </p:spPr>
+      </p:pic>
+      <p:sp>
+        <p:nvSpPr>
+          <p:cNvPr id="5" name="TextBox 4"/>
+          <p:cNvSpPr txBox="1"/>
+          <p:nvPr/>
+        </p:nvSpPr>
+        <p:spPr>
+          <a:xfrm>
+            <a:off x="3154680" y="384048"/>
+            <a:ext cx="8138160" cy="502920"/>
+          </a:xfrm>
+          <a:prstGeom prst="rect">
+            <a:avLst/>
+          </a:prstGeom>
+          <a:noFill/>
+        </p:spPr>
+        <p:txBody>
+          <a:bodyPr wrap="square" lIns="0" rIns="0" tIns="0" bIns="0">
+            <a:spAutoFit/>
+          </a:bodyPr>
+          <a:lstStyle/>
+          <a:p>
+            <a:pPr algn="l"/>
+            <a:r>
+              <a:rPr sz="2700" b="1" i="0">
+                <a:solidFill>
+                  <a:srgbClr val="0A2851"/>
+                </a:solidFill>
+                <a:latin typeface="Arial"/>
+              </a:rPr>
+              <a:t>Players to watch</a:t>
+            </a:r>
+          </a:p>
+        </p:txBody>
+      </p:sp>
+      <p:sp>
+        <p:nvSpPr>
+          <p:cNvPr id="6" name="Rounded Rectangle 5"/>
+          <p:cNvSpPr/>
+          <p:nvPr/>
+        </p:nvSpPr>
+        <p:spPr>
+          <a:xfrm>
+            <a:off x="822960" y="1417320"/>
+            <a:ext cx="5166360" cy="4754880"/>
+          </a:xfrm>
+          <a:prstGeom prst="roundRect">
+            <a:avLst/>
+          </a:prstGeom>
+          <a:solidFill>
+            <a:srgbClr val="EAF0F8"/>
+          </a:solidFill>
+          <a:ln>
+            <a:noFill/>
+          </a:ln>
+          <a:effectLst/>
+        </p:spPr>
+        <p:style>
+          <a:lnRef idx="1">
+            <a:schemeClr val="accent1"/>
+          </a:lnRef>
+          <a:fillRef idx="3">
+            <a:schemeClr val="accent1"/>
+          </a:fillRef>
+          <a:effectRef idx="2">
+            <a:schemeClr val="accent1"/>
+          </a:effectRef>
+          <a:fontRef idx="minor">
+            <a:schemeClr val="lt1"/>
+          </a:fontRef>
+        </p:style>
+        <p:txBody>
+          <a:bodyPr rtlCol="0" anchor="ctr"/>
+          <a:lstStyle/>
+          <a:p>
+            <a:pPr algn="ctr"/>
+          </a:p>
+        </p:txBody>
+      </p:sp>
+      <p:pic>
+        <p:nvPicPr>
+          <p:cNvPr id="7" name="Picture 6" descr="hawaii.png"/>
+          <p:cNvPicPr>
+            <a:picLocks noChangeAspect="1"/>
+          </p:cNvPicPr>
+          <p:nvPr/>
+        </p:nvPicPr>
+        <p:blipFill>
+          <a:blip r:embed="rId2"/>
+          <a:stretch>
+            <a:fillRect/>
+          </a:stretch>
+        </p:blipFill>
+        <p:spPr>
+          <a:xfrm>
+            <a:off x="1097280" y="1691640"/>
+            <a:ext cx="566928" cy="566928"/>
+          </a:xfrm>
+          <a:prstGeom prst="rect">
+            <a:avLst/>
+          </a:prstGeom>
+        </p:spPr>
+      </p:pic>
+      <p:sp>
+        <p:nvSpPr>
+          <p:cNvPr id="8" name="TextBox 7"/>
+          <p:cNvSpPr txBox="1"/>
+          <p:nvPr/>
+        </p:nvSpPr>
+        <p:spPr>
+          <a:xfrm>
+            <a:off x="1828800" y="1783080"/>
+            <a:ext cx="3840480" cy="411480"/>
+          </a:xfrm>
+          <a:prstGeom prst="rect">
+            <a:avLst/>
+          </a:prstGeom>
+          <a:noFill/>
+        </p:spPr>
+        <p:txBody>
+          <a:bodyPr wrap="square" lIns="0" rIns="0" tIns="0" bIns="0">
+            <a:spAutoFit/>
+          </a:bodyPr>
+          <a:lstStyle/>
+          <a:p>
+            <a:pPr algn="l"/>
+            <a:r>
+              <a:rPr sz="100" b="0" i="0">
+                <a:solidFill>
+                  <a:srgbClr val="EAF0F8"/>
+                </a:solidFill>
+                <a:latin typeface="Arial"/>
+              </a:rPr>
+              <a:t>Hawai'i</a:t>
+            </a:r>
+          </a:p>
+        </p:txBody>
+      </p:sp>
+      <p:sp>
+        <p:nvSpPr>
+          <p:cNvPr id="9" name="TextBox 8"/>
+          <p:cNvSpPr txBox="1"/>
+          <p:nvPr/>
+        </p:nvSpPr>
+        <p:spPr>
+          <a:xfrm>
+            <a:off x="1828800" y="1755648"/>
+            <a:ext cx="3931920" cy="457200"/>
+          </a:xfrm>
+          <a:prstGeom prst="rect">
+            <a:avLst/>
+          </a:prstGeom>
+          <a:noFill/>
+        </p:spPr>
+        <p:txBody>
+          <a:bodyPr wrap="square" lIns="0" rIns="0" tIns="0" bIns="0">
+            <a:spAutoFit/>
+          </a:bodyPr>
+          <a:lstStyle/>
+          <a:p>
+            <a:pPr algn="l"/>
+            <a:r>
+              <a:rPr sz="1700" b="1" i="0">
+                <a:solidFill>
+                  <a:srgbClr val="16273D"/>
+                </a:solidFill>
+                <a:latin typeface="Arial"/>
+              </a:rPr>
+              <a:t>Hawai'i</a:t>
+            </a:r>
+          </a:p>
+        </p:txBody>
+      </p:sp>
+      <p:sp>
+        <p:nvSpPr>
+          <p:cNvPr id="10" name="TextBox 9"/>
+          <p:cNvSpPr txBox="1"/>
+          <p:nvPr/>
+        </p:nvSpPr>
+        <p:spPr>
+          <a:xfrm>
+            <a:off x="1143000" y="2514600"/>
+            <a:ext cx="4572000" cy="320040"/>
+          </a:xfrm>
+          <a:prstGeom prst="rect">
+            <a:avLst/>
+          </a:prstGeom>
+          <a:noFill/>
+        </p:spPr>
+        <p:txBody>
+          <a:bodyPr wrap="square" lIns="0" rIns="0" tIns="0" bIns="0">
+            <a:spAutoFit/>
+          </a:bodyPr>
+          <a:lstStyle/>
+          <a:p>
+            <a:pPr algn="l"/>
+            <a:r>
+              <a:rPr sz="1450" b="1" i="0">
+                <a:solidFill>
+                  <a:srgbClr val="16273D"/>
+                </a:solidFill>
+                <a:latin typeface="Arial"/>
+              </a:rPr>
+              <a:t>Micah Alejado</a:t>
+            </a:r>
+          </a:p>
+        </p:txBody>
+      </p:sp>
+      <p:sp>
+        <p:nvSpPr>
+          <p:cNvPr id="11" name="TextBox 10"/>
+          <p:cNvSpPr txBox="1"/>
+          <p:nvPr/>
+        </p:nvSpPr>
+        <p:spPr>
+          <a:xfrm>
+            <a:off x="1143000" y="2825496"/>
+            <a:ext cx="4572000" cy="502920"/>
+          </a:xfrm>
+          <a:prstGeom prst="rect">
+            <a:avLst/>
+          </a:prstGeom>
+          <a:noFill/>
+        </p:spPr>
+        <p:txBody>
+          <a:bodyPr wrap="square" lIns="0" rIns="0" tIns="0" bIns="0">
+            <a:spAutoFit/>
+          </a:bodyPr>
+          <a:lstStyle/>
+          <a:p>
+            <a:pPr algn="l"/>
+            <a:r>
+              <a:rPr sz="1150" b="0" i="0">
+                <a:solidFill>
+                  <a:srgbClr val="5C6B7E"/>
+                </a:solidFill>
+                <a:latin typeface="Arial"/>
+              </a:rPr>
+              <a:t>QB — MWC Preseason POY; 2025: 66.3%, 3,106 yds, 24-9</a:t>
+            </a:r>
+          </a:p>
+        </p:txBody>
+      </p:sp>
+      <p:sp>
+        <p:nvSpPr>
+          <p:cNvPr id="12" name="TextBox 11"/>
+          <p:cNvSpPr txBox="1"/>
+          <p:nvPr/>
+        </p:nvSpPr>
+        <p:spPr>
+          <a:xfrm>
+            <a:off x="1143000" y="3410712"/>
+            <a:ext cx="4572000" cy="320040"/>
+          </a:xfrm>
+          <a:prstGeom prst="rect">
+            <a:avLst/>
+          </a:prstGeom>
+          <a:noFill/>
+        </p:spPr>
+        <p:txBody>
+          <a:bodyPr wrap="square" lIns="0" rIns="0" tIns="0" bIns="0">
+            <a:spAutoFit/>
+          </a:bodyPr>
+          <a:lstStyle/>
+          <a:p>
+            <a:pPr algn="l"/>
+            <a:r>
+              <a:rPr sz="1450" b="1" i="0">
+                <a:solidFill>
+                  <a:srgbClr val="16273D"/>
+                </a:solidFill>
+                <a:latin typeface="Arial"/>
+              </a:rPr>
+              <a:t>Pofele Ashlock</a:t>
+            </a:r>
+          </a:p>
+        </p:txBody>
+      </p:sp>
+      <p:sp>
+        <p:nvSpPr>
+          <p:cNvPr id="13" name="TextBox 12"/>
+          <p:cNvSpPr txBox="1"/>
+          <p:nvPr/>
+        </p:nvSpPr>
+        <p:spPr>
+          <a:xfrm>
+            <a:off x="1143000" y="3721608"/>
+            <a:ext cx="4572000" cy="502920"/>
+          </a:xfrm>
+          <a:prstGeom prst="rect">
+            <a:avLst/>
+          </a:prstGeom>
+          <a:noFill/>
+        </p:spPr>
+        <p:txBody>
+          <a:bodyPr wrap="square" lIns="0" rIns="0" tIns="0" bIns="0">
+            <a:spAutoFit/>
+          </a:bodyPr>
+          <a:lstStyle/>
+          <a:p>
+            <a:pPr algn="l"/>
+            <a:r>
+              <a:rPr sz="1150" b="0" i="0">
+                <a:solidFill>
+                  <a:srgbClr val="5C6B7E"/>
+                </a:solidFill>
+                <a:latin typeface="Arial"/>
+              </a:rPr>
+              <a:t>WR — 2025: 76 rec, 827 yds, 8 TD; the top target left (Jackson Harris, 963 yds)</a:t>
+            </a:r>
+          </a:p>
+        </p:txBody>
+      </p:sp>
+      <p:sp>
+        <p:nvSpPr>
+          <p:cNvPr id="14" name="TextBox 13"/>
+          <p:cNvSpPr txBox="1"/>
+          <p:nvPr/>
+        </p:nvSpPr>
+        <p:spPr>
+          <a:xfrm>
+            <a:off x="1143000" y="4306824"/>
+            <a:ext cx="4572000" cy="320040"/>
+          </a:xfrm>
+          <a:prstGeom prst="rect">
+            <a:avLst/>
+          </a:prstGeom>
+          <a:noFill/>
+        </p:spPr>
+        <p:txBody>
+          <a:bodyPr wrap="square" lIns="0" rIns="0" tIns="0" bIns="0">
+            <a:spAutoFit/>
+          </a:bodyPr>
+          <a:lstStyle/>
+          <a:p>
+            <a:pPr algn="l"/>
+            <a:r>
+              <a:rPr sz="1450" b="1" i="0">
+                <a:solidFill>
+                  <a:srgbClr val="16273D"/>
+                </a:solidFill>
+                <a:latin typeface="Arial"/>
+              </a:rPr>
+              <a:t>Cam Barfield</a:t>
+            </a:r>
+          </a:p>
+        </p:txBody>
+      </p:sp>
+      <p:sp>
+        <p:nvSpPr>
+          <p:cNvPr id="15" name="TextBox 14"/>
+          <p:cNvSpPr txBox="1"/>
+          <p:nvPr/>
+        </p:nvSpPr>
+        <p:spPr>
+          <a:xfrm>
+            <a:off x="1143000" y="4617720"/>
+            <a:ext cx="4572000" cy="502920"/>
+          </a:xfrm>
+          <a:prstGeom prst="rect">
+            <a:avLst/>
+          </a:prstGeom>
+          <a:noFill/>
+        </p:spPr>
+        <p:txBody>
+          <a:bodyPr wrap="square" lIns="0" rIns="0" tIns="0" bIns="0">
+            <a:spAutoFit/>
+          </a:bodyPr>
+          <a:lstStyle/>
+          <a:p>
+            <a:pPr algn="l"/>
+            <a:r>
+              <a:rPr sz="1150" b="0" i="0">
+                <a:solidFill>
+                  <a:srgbClr val="5C6B7E"/>
+                </a:solidFill>
+                <a:latin typeface="Arial"/>
+              </a:rPr>
+              <a:t>RB/KR — 2025: 371 rush yds, 4 TD; 28.7 per kick return with an 86-yd TD</a:t>
+            </a:r>
+          </a:p>
+        </p:txBody>
+      </p:sp>
+      <p:sp>
+        <p:nvSpPr>
+          <p:cNvPr id="16" name="TextBox 15"/>
+          <p:cNvSpPr txBox="1"/>
+          <p:nvPr/>
+        </p:nvSpPr>
+        <p:spPr>
+          <a:xfrm>
+            <a:off x="1143000" y="5202936"/>
+            <a:ext cx="4572000" cy="320040"/>
+          </a:xfrm>
+          <a:prstGeom prst="rect">
+            <a:avLst/>
+          </a:prstGeom>
+          <a:noFill/>
+        </p:spPr>
+        <p:txBody>
+          <a:bodyPr wrap="square" lIns="0" rIns="0" tIns="0" bIns="0">
+            <a:spAutoFit/>
+          </a:bodyPr>
+          <a:lstStyle/>
+          <a:p>
+            <a:pPr algn="l"/>
+            <a:r>
+              <a:rPr sz="1450" b="1" i="0">
+                <a:solidFill>
+                  <a:srgbClr val="16273D"/>
+                </a:solidFill>
+                <a:latin typeface="Arial"/>
+              </a:rPr>
+              <a:t>Lesterlaisene Lagafuaina</a:t>
+            </a:r>
+          </a:p>
+        </p:txBody>
+      </p:sp>
+      <p:sp>
+        <p:nvSpPr>
+          <p:cNvPr id="17" name="TextBox 16"/>
+          <p:cNvSpPr txBox="1"/>
+          <p:nvPr/>
+        </p:nvSpPr>
+        <p:spPr>
+          <a:xfrm>
+            <a:off x="1143000" y="5513831"/>
+            <a:ext cx="4572000" cy="502920"/>
+          </a:xfrm>
+          <a:prstGeom prst="rect">
+            <a:avLst/>
+          </a:prstGeom>
+          <a:noFill/>
+        </p:spPr>
+        <p:txBody>
+          <a:bodyPr wrap="square" lIns="0" rIns="0" tIns="0" bIns="0">
+            <a:spAutoFit/>
+          </a:bodyPr>
+          <a:lstStyle/>
+          <a:p>
+            <a:pPr algn="l"/>
+            <a:r>
+              <a:rPr sz="1150" b="0" i="0">
+                <a:solidFill>
+                  <a:srgbClr val="5C6B7E"/>
+                </a:solidFill>
+                <a:latin typeface="Arial"/>
+              </a:rPr>
+              <a:t>DL — 2025: 7.5 TFL, 3.5 sacks; the returning piece of a front that lost both sack leaders</a:t>
+            </a:r>
+          </a:p>
+        </p:txBody>
+      </p:sp>
+      <p:sp>
+        <p:nvSpPr>
+          <p:cNvPr id="18" name="Rounded Rectangle 17"/>
+          <p:cNvSpPr/>
+          <p:nvPr/>
+        </p:nvSpPr>
+        <p:spPr>
+          <a:xfrm>
+            <a:off x="6309360" y="1417320"/>
+            <a:ext cx="5166360" cy="4754880"/>
+          </a:xfrm>
+          <a:prstGeom prst="roundRect">
+            <a:avLst/>
+          </a:prstGeom>
+          <a:solidFill>
+            <a:srgbClr val="EAF0F8"/>
+          </a:solidFill>
+          <a:ln>
+            <a:noFill/>
+          </a:ln>
+          <a:effectLst/>
+        </p:spPr>
+        <p:style>
+          <a:lnRef idx="1">
+            <a:schemeClr val="accent1"/>
+          </a:lnRef>
+          <a:fillRef idx="3">
+            <a:schemeClr val="accent1"/>
+          </a:fillRef>
+          <a:effectRef idx="2">
+            <a:schemeClr val="accent1"/>
+          </a:effectRef>
+          <a:fontRef idx="minor">
+            <a:schemeClr val="lt1"/>
+          </a:fontRef>
+        </p:style>
+        <p:txBody>
+          <a:bodyPr rtlCol="0" anchor="ctr"/>
+          <a:lstStyle/>
+          <a:p>
+            <a:pPr algn="ctr"/>
+          </a:p>
+        </p:txBody>
+      </p:sp>
+      <p:pic>
+        <p:nvPicPr>
+          <p:cNvPr id="19" name="Picture 18" descr="stanford.png"/>
+          <p:cNvPicPr>
+            <a:picLocks noChangeAspect="1"/>
+          </p:cNvPicPr>
+          <p:nvPr/>
+        </p:nvPicPr>
+        <p:blipFill>
+          <a:blip r:embed="rId3"/>
+          <a:stretch>
+            <a:fillRect/>
+          </a:stretch>
+        </p:blipFill>
+        <p:spPr>
+          <a:xfrm>
+            <a:off x="6583680" y="1691640"/>
+            <a:ext cx="566928" cy="566928"/>
+          </a:xfrm>
+          <a:prstGeom prst="rect">
+            <a:avLst/>
+          </a:prstGeom>
+        </p:spPr>
+      </p:pic>
+      <p:sp>
+        <p:nvSpPr>
+          <p:cNvPr id="20" name="TextBox 19"/>
+          <p:cNvSpPr txBox="1"/>
+          <p:nvPr/>
+        </p:nvSpPr>
+        <p:spPr>
+          <a:xfrm>
+            <a:off x="7315200" y="1783080"/>
+            <a:ext cx="3840480" cy="411480"/>
+          </a:xfrm>
+          <a:prstGeom prst="rect">
+            <a:avLst/>
+          </a:prstGeom>
+          <a:noFill/>
+        </p:spPr>
+        <p:txBody>
+          <a:bodyPr wrap="square" lIns="0" rIns="0" tIns="0" bIns="0">
+            <a:spAutoFit/>
+          </a:bodyPr>
+          <a:lstStyle/>
+          <a:p>
+            <a:pPr algn="l"/>
+            <a:r>
+              <a:rPr sz="100" b="0" i="0">
+                <a:solidFill>
+                  <a:srgbClr val="EAF0F8"/>
+                </a:solidFill>
+                <a:latin typeface="Arial"/>
+              </a:rPr>
+              <a:t>Stanford</a:t>
+            </a:r>
+          </a:p>
+        </p:txBody>
+      </p:sp>
+      <p:sp>
+        <p:nvSpPr>
+          <p:cNvPr id="21" name="TextBox 20"/>
+          <p:cNvSpPr txBox="1"/>
+          <p:nvPr/>
+        </p:nvSpPr>
+        <p:spPr>
+          <a:xfrm>
+            <a:off x="7315200" y="1755648"/>
+            <a:ext cx="3931920" cy="457200"/>
+          </a:xfrm>
+          <a:prstGeom prst="rect">
+            <a:avLst/>
+          </a:prstGeom>
+          <a:noFill/>
+        </p:spPr>
+        <p:txBody>
+          <a:bodyPr wrap="square" lIns="0" rIns="0" tIns="0" bIns="0">
+            <a:spAutoFit/>
+          </a:bodyPr>
+          <a:lstStyle/>
+          <a:p>
+            <a:pPr algn="l"/>
+            <a:r>
+              <a:rPr sz="1700" b="1" i="0">
+                <a:solidFill>
+                  <a:srgbClr val="16273D"/>
+                </a:solidFill>
+                <a:latin typeface="Arial"/>
+              </a:rPr>
+              <a:t>Stanford</a:t>
+            </a:r>
+          </a:p>
+        </p:txBody>
+      </p:sp>
+      <p:sp>
+        <p:nvSpPr>
+          <p:cNvPr id="22" name="TextBox 21"/>
+          <p:cNvSpPr txBox="1"/>
+          <p:nvPr/>
+        </p:nvSpPr>
+        <p:spPr>
+          <a:xfrm>
+            <a:off x="6629400" y="2514600"/>
+            <a:ext cx="4572000" cy="320040"/>
+          </a:xfrm>
+          <a:prstGeom prst="rect">
+            <a:avLst/>
+          </a:prstGeom>
+          <a:noFill/>
+        </p:spPr>
+        <p:txBody>
+          <a:bodyPr wrap="square" lIns="0" rIns="0" tIns="0" bIns="0">
+            <a:spAutoFit/>
+          </a:bodyPr>
+          <a:lstStyle/>
+          <a:p>
+            <a:pPr algn="l"/>
+            <a:r>
+              <a:rPr sz="1450" b="1" i="0">
+                <a:solidFill>
+                  <a:srgbClr val="16273D"/>
+                </a:solidFill>
+                <a:latin typeface="Arial"/>
+              </a:rPr>
+              <a:t>Davis Warren</a:t>
+            </a:r>
+          </a:p>
+        </p:txBody>
+      </p:sp>
+      <p:sp>
+        <p:nvSpPr>
+          <p:cNvPr id="23" name="TextBox 22"/>
+          <p:cNvSpPr txBox="1"/>
+          <p:nvPr/>
+        </p:nvSpPr>
+        <p:spPr>
+          <a:xfrm>
+            <a:off x="6629400" y="2825496"/>
+            <a:ext cx="4572000" cy="502920"/>
+          </a:xfrm>
+          <a:prstGeom prst="rect">
+            <a:avLst/>
+          </a:prstGeom>
+          <a:noFill/>
+        </p:spPr>
+        <p:txBody>
+          <a:bodyPr wrap="square" lIns="0" rIns="0" tIns="0" bIns="0">
+            <a:spAutoFit/>
+          </a:bodyPr>
+          <a:lstStyle/>
+          <a:p>
+            <a:pPr algn="l"/>
+            <a:r>
+              <a:rPr sz="1150" b="0" i="0">
+                <a:solidFill>
+                  <a:srgbClr val="5C6B7E"/>
+                </a:solidFill>
+                <a:latin typeface="Arial"/>
+              </a:rPr>
+              <a:t>QB — Michigan transfer; 2025: no stat line (backup); career 5.4 yds/dropback, 7 TD–10 INT</a:t>
+            </a:r>
+          </a:p>
+        </p:txBody>
+      </p:sp>
+      <p:sp>
+        <p:nvSpPr>
+          <p:cNvPr id="24" name="TextBox 23"/>
+          <p:cNvSpPr txBox="1"/>
+          <p:nvPr/>
+        </p:nvSpPr>
+        <p:spPr>
+          <a:xfrm>
+            <a:off x="6629400" y="3410712"/>
+            <a:ext cx="4572000" cy="320040"/>
+          </a:xfrm>
+          <a:prstGeom prst="rect">
+            <a:avLst/>
+          </a:prstGeom>
+          <a:noFill/>
+        </p:spPr>
+        <p:txBody>
+          <a:bodyPr wrap="square" lIns="0" rIns="0" tIns="0" bIns="0">
+            <a:spAutoFit/>
+          </a:bodyPr>
+          <a:lstStyle/>
+          <a:p>
+            <a:pPr algn="l"/>
+            <a:r>
+              <a:rPr sz="1450" b="1" i="0">
+                <a:solidFill>
+                  <a:srgbClr val="16273D"/>
+                </a:solidFill>
+                <a:latin typeface="Arial"/>
+              </a:rPr>
+              <a:t>Micah Ford</a:t>
+            </a:r>
+          </a:p>
+        </p:txBody>
+      </p:sp>
+      <p:sp>
+        <p:nvSpPr>
+          <p:cNvPr id="25" name="TextBox 24"/>
+          <p:cNvSpPr txBox="1"/>
+          <p:nvPr/>
+        </p:nvSpPr>
+        <p:spPr>
+          <a:xfrm>
+            <a:off x="6629400" y="3721608"/>
+            <a:ext cx="4572000" cy="502920"/>
+          </a:xfrm>
+          <a:prstGeom prst="rect">
+            <a:avLst/>
+          </a:prstGeom>
+          <a:noFill/>
+        </p:spPr>
+        <p:txBody>
+          <a:bodyPr wrap="square" lIns="0" rIns="0" tIns="0" bIns="0">
+            <a:spAutoFit/>
+          </a:bodyPr>
+          <a:lstStyle/>
+          <a:p>
+            <a:pPr algn="l"/>
+            <a:r>
+              <a:rPr sz="1150" b="0" i="0">
+                <a:solidFill>
+                  <a:srgbClr val="5C6B7E"/>
+                </a:solidFill>
+                <a:latin typeface="Arial"/>
+              </a:rPr>
+              <a:t>RB — 2025: 643 yds at 4.4/carry, 4 TD, plus 11 catches</a:t>
+            </a:r>
+          </a:p>
+        </p:txBody>
+      </p:sp>
+      <p:sp>
+        <p:nvSpPr>
+          <p:cNvPr id="26" name="TextBox 25"/>
+          <p:cNvSpPr txBox="1"/>
+          <p:nvPr/>
+        </p:nvSpPr>
+        <p:spPr>
+          <a:xfrm>
+            <a:off x="6629400" y="4306824"/>
+            <a:ext cx="4572000" cy="320040"/>
+          </a:xfrm>
+          <a:prstGeom prst="rect">
+            <a:avLst/>
+          </a:prstGeom>
+          <a:noFill/>
+        </p:spPr>
+        <p:txBody>
+          <a:bodyPr wrap="square" lIns="0" rIns="0" tIns="0" bIns="0">
+            <a:spAutoFit/>
+          </a:bodyPr>
+          <a:lstStyle/>
+          <a:p>
+            <a:pPr algn="l"/>
+            <a:r>
+              <a:rPr sz="1450" b="1" i="0">
+                <a:solidFill>
+                  <a:srgbClr val="16273D"/>
+                </a:solidFill>
+                <a:latin typeface="Arial"/>
+              </a:rPr>
+              <a:t>Nico Brown</a:t>
+            </a:r>
+          </a:p>
+        </p:txBody>
+      </p:sp>
+      <p:sp>
+        <p:nvSpPr>
           <p:cNvPr id="27" name="TextBox 26"/>
           <p:cNvSpPr txBox="1"/>
           <p:nvPr/>
         </p:nvSpPr>
         <p:spPr>
           <a:xfrm>
-            <a:off x="2697480" y="4956048"/>
-            <a:ext cx="5120640" cy="411480"/>
-          </a:xfrm>
-          <a:prstGeom prst="rect">
-            <a:avLst/>
-          </a:prstGeom>
-          <a:noFill/>
-        </p:spPr>
-        <p:txBody>
-          <a:bodyPr wrap="square" lIns="0" rIns="0" tIns="0" bIns="0">
-            <a:spAutoFit/>
-          </a:bodyPr>
-          <a:lstStyle/>
-          <a:p>
-            <a:pPr algn="l"/>
-            <a:r>
-              <a:rPr sz="1600" b="1" i="0">
-                <a:solidFill>
-                  <a:srgbClr val="FFFFFF"/>
-                </a:solidFill>
-                <a:latin typeface="Arial"/>
-              </a:rPr>
-              <a:t>Jacksonville State at North Dakota State</a:t>
+            <a:off x="6629400" y="4617720"/>
+            <a:ext cx="4572000" cy="502920"/>
+          </a:xfrm>
+          <a:prstGeom prst="rect">
+            <a:avLst/>
+          </a:prstGeom>
+          <a:noFill/>
+        </p:spPr>
+        <p:txBody>
+          <a:bodyPr wrap="square" lIns="0" rIns="0" tIns="0" bIns="0">
+            <a:spAutoFit/>
+          </a:bodyPr>
+          <a:lstStyle/>
+          <a:p>
+            <a:pPr algn="l"/>
+            <a:r>
+              <a:rPr sz="1150" b="0" i="0">
+                <a:solidFill>
+                  <a:srgbClr val="5C6B7E"/>
+                </a:solidFill>
+                <a:latin typeface="Arial"/>
+              </a:rPr>
+              <a:t>WR — Yale transfer; 2025: 71 rec, 1,085 yds, 11 TD in the Ivy</a:t>
             </a:r>
           </a:p>
         </p:txBody>
@@ -11550,29 +17151,29 @@
         </p:nvSpPr>
         <p:spPr>
           <a:xfrm>
-            <a:off x="2697480" y="5358383"/>
-            <a:ext cx="5120640" cy="365760"/>
-          </a:xfrm>
-          <a:prstGeom prst="rect">
-            <a:avLst/>
-          </a:prstGeom>
-          <a:noFill/>
-        </p:spPr>
-        <p:txBody>
-          <a:bodyPr wrap="square" lIns="0" rIns="0" tIns="0" bIns="0">
-            <a:spAutoFit/>
-          </a:bodyPr>
-          <a:lstStyle/>
-          <a:p>
-            <a:pPr algn="l"/>
-            <a:r>
-              <a:rPr sz="1200" b="0" i="0">
-                <a:solidFill>
-                  <a:srgbClr val="CADCFC"/>
-                </a:solidFill>
-                <a:latin typeface="Arial"/>
-              </a:rPr>
-              <a:t>JSU at −7 or worse — already paid in line movement</a:t>
+            <a:off x="6629400" y="5202936"/>
+            <a:ext cx="4572000" cy="320040"/>
+          </a:xfrm>
+          <a:prstGeom prst="rect">
+            <a:avLst/>
+          </a:prstGeom>
+          <a:noFill/>
+        </p:spPr>
+        <p:txBody>
+          <a:bodyPr wrap="square" lIns="0" rIns="0" tIns="0" bIns="0">
+            <a:spAutoFit/>
+          </a:bodyPr>
+          <a:lstStyle/>
+          <a:p>
+            <a:pPr algn="l"/>
+            <a:r>
+              <a:rPr sz="1450" b="1" i="0">
+                <a:solidFill>
+                  <a:srgbClr val="16273D"/>
+                </a:solidFill>
+                <a:latin typeface="Arial"/>
+              </a:rPr>
+              <a:t>Matt Rose</a:t>
             </a:r>
           </a:p>
         </p:txBody>
@@ -11585,29 +17186,29 @@
         </p:nvSpPr>
         <p:spPr>
           <a:xfrm>
-            <a:off x="7955279" y="4956048"/>
-            <a:ext cx="3200400" cy="365760"/>
-          </a:xfrm>
-          <a:prstGeom prst="rect">
-            <a:avLst/>
-          </a:prstGeom>
-          <a:noFill/>
-        </p:spPr>
-        <p:txBody>
-          <a:bodyPr wrap="square" lIns="0" rIns="0" tIns="0" bIns="0">
-            <a:spAutoFit/>
-          </a:bodyPr>
-          <a:lstStyle/>
-          <a:p>
-            <a:pPr algn="r"/>
-            <a:r>
-              <a:rPr sz="1400" b="1" i="0">
-                <a:solidFill>
-                  <a:srgbClr val="F47321"/>
-                </a:solidFill>
-                <a:latin typeface="Arial"/>
-              </a:rPr>
-              <a:t>NDSU –2.7   ·   –10 → –7</a:t>
+            <a:off x="6629400" y="5513831"/>
+            <a:ext cx="4572000" cy="502920"/>
+          </a:xfrm>
+          <a:prstGeom prst="rect">
+            <a:avLst/>
+          </a:prstGeom>
+          <a:noFill/>
+        </p:spPr>
+        <p:txBody>
+          <a:bodyPr wrap="square" lIns="0" rIns="0" tIns="0" bIns="0">
+            <a:spAutoFit/>
+          </a:bodyPr>
+          <a:lstStyle/>
+          <a:p>
+            <a:pPr algn="l"/>
+            <a:r>
+              <a:rPr sz="1150" b="0" i="0">
+                <a:solidFill>
+                  <a:srgbClr val="5C6B7E"/>
+                </a:solidFill>
+                <a:latin typeface="Arial"/>
+              </a:rPr>
+              <a:t>ILB — 2025: team-high 106 tkl, 8 TFL, 3 sacks</a:t>
             </a:r>
           </a:p>
         </p:txBody>
@@ -11620,64 +17221,29 @@
         </p:nvSpPr>
         <p:spPr>
           <a:xfrm>
-            <a:off x="7955279" y="5358383"/>
-            <a:ext cx="3200400" cy="320040"/>
-          </a:xfrm>
-          <a:prstGeom prst="rect">
-            <a:avLst/>
-          </a:prstGeom>
-          <a:noFill/>
-        </p:spPr>
-        <p:txBody>
-          <a:bodyPr wrap="square" lIns="0" rIns="0" tIns="0" bIns="0">
-            <a:spAutoFit/>
-          </a:bodyPr>
-          <a:lstStyle/>
-          <a:p>
-            <a:pPr algn="r"/>
+            <a:off x="822960" y="6355080"/>
+            <a:ext cx="10515600" cy="320040"/>
+          </a:xfrm>
+          <a:prstGeom prst="rect">
+            <a:avLst/>
+          </a:prstGeom>
+          <a:noFill/>
+        </p:spPr>
+        <p:txBody>
+          <a:bodyPr wrap="square" lIns="0" rIns="0" tIns="0" bIns="0">
+            <a:spAutoFit/>
+          </a:bodyPr>
+          <a:lstStyle/>
+          <a:p>
+            <a:pPr algn="l"/>
             <a:r>
               <a:rPr sz="950" b="0" i="0">
                 <a:solidFill>
-                  <a:srgbClr val="8FA5C4"/>
-                </a:solidFill>
-                <a:latin typeface="Arial"/>
-              </a:rPr>
-              <a:t>machine · market</a:t>
-            </a:r>
-          </a:p>
-        </p:txBody>
-      </p:sp>
-      <p:sp>
-        <p:nvSpPr>
-          <p:cNvPr id="31" name="TextBox 30"/>
-          <p:cNvSpPr txBox="1"/>
-          <p:nvPr/>
-        </p:nvSpPr>
-        <p:spPr>
-          <a:xfrm>
-            <a:off x="822960" y="6263640"/>
-            <a:ext cx="10515600" cy="457200"/>
-          </a:xfrm>
-          <a:prstGeom prst="rect">
-            <a:avLst/>
-          </a:prstGeom>
-          <a:noFill/>
-        </p:spPr>
-        <p:txBody>
-          <a:bodyPr wrap="square" lIns="0" rIns="0" tIns="0" bIns="0">
-            <a:spAutoFit/>
-          </a:bodyPr>
-          <a:lstStyle/>
-          <a:p>
-            <a:pPr algn="l"/>
-            <a:r>
-              <a:rPr sz="1100" b="0" i="1">
-                <a:solidFill>
-                  <a:srgbClr val="8FA5C4"/>
-                </a:solidFill>
-                <a:latin typeface="Arial"/>
-              </a:rPr>
-              <a:t>Paper record starts Week 0 — graded vs first-seen lines, never moved ones. Research, not picks.</a:t>
+                  <a:srgbClr val="5C6B7E"/>
+                </a:solidFill>
+                <a:latin typeface="Arial"/>
+              </a:rPr>
+              <a:t>EP 1 · WEEK 0 · Hawai'i at Stanford</a:t>
             </a:r>
           </a:p>
         </p:txBody>

--- a/decks/2026_Week0_Episode1.pptx
+++ b/decks/2026_Week0_Episode1.pptx
@@ -5664,7 +5664,7 @@
           <a:p>
             <a:pPr algn="l"/>
             <a:r>
-              <a:rPr sz="1600" b="1" i="0">
+              <a:rPr sz="1250" b="1" i="0">
                 <a:solidFill>
                   <a:srgbClr val="F47321"/>
                 </a:solidFill>
@@ -5906,6 +5906,76 @@
       <p:sp>
         <p:nvSpPr>
           <p:cNvPr id="31" name="TextBox 30"/>
+          <p:cNvSpPr txBox="1"/>
+          <p:nvPr/>
+        </p:nvSpPr>
+        <p:spPr>
+          <a:xfrm>
+            <a:off x="8046720" y="5532120"/>
+            <a:ext cx="3017520" cy="274320"/>
+          </a:xfrm>
+          <a:prstGeom prst="rect">
+            <a:avLst/>
+          </a:prstGeom>
+          <a:noFill/>
+        </p:spPr>
+        <p:txBody>
+          <a:bodyPr wrap="square" lIns="0" rIns="0" tIns="0" bIns="0">
+            <a:spAutoFit/>
+          </a:bodyPr>
+          <a:lstStyle/>
+          <a:p>
+            <a:pPr algn="l"/>
+            <a:r>
+              <a:rPr sz="950" b="1" i="0">
+                <a:solidFill>
+                  <a:srgbClr val="F47321"/>
+                </a:solidFill>
+                <a:latin typeface="Arial"/>
+              </a:rPr>
+              <a:t>FLAGS  EDGE_GONE · CLV+2.5</a:t>
+            </a:r>
+          </a:p>
+        </p:txBody>
+      </p:sp>
+      <p:sp>
+        <p:nvSpPr>
+          <p:cNvPr id="32" name="TextBox 31"/>
+          <p:cNvSpPr txBox="1"/>
+          <p:nvPr/>
+        </p:nvSpPr>
+        <p:spPr>
+          <a:xfrm>
+            <a:off x="822960" y="6053328"/>
+            <a:ext cx="10515600" cy="228600"/>
+          </a:xfrm>
+          <a:prstGeom prst="rect">
+            <a:avLst/>
+          </a:prstGeom>
+          <a:noFill/>
+        </p:spPr>
+        <p:txBody>
+          <a:bodyPr wrap="square" lIns="0" rIns="0" tIns="0" bIns="0">
+            <a:spAutoFit/>
+          </a:bodyPr>
+          <a:lstStyle/>
+          <a:p>
+            <a:pPr algn="l"/>
+            <a:r>
+              <a:rPr sz="900" b="0" i="0">
+                <a:solidFill>
+                  <a:srgbClr val="5C6B7E"/>
+                </a:solidFill>
+                <a:latin typeface="Arial"/>
+              </a:rPr>
+              <a:t>Line ledger: first-seen –3 (Aug 18) → now –5.5 · opened –3 · CLV +2.5 · market ML 66% UNLV</a:t>
+            </a:r>
+          </a:p>
+        </p:txBody>
+      </p:sp>
+      <p:sp>
+        <p:nvSpPr>
+          <p:cNvPr id="33" name="TextBox 32"/>
           <p:cNvSpPr txBox="1"/>
           <p:nvPr/>
         </p:nvSpPr>
@@ -7969,7 +8039,7 @@
                 </a:solidFill>
                 <a:latin typeface="Arial"/>
               </a:rPr>
-              <a:t>NDSU –2.7   ·   –10 → –7</a:t>
+              <a:t>NDSU –2.7   ·   –7 / –7</a:t>
             </a:r>
           </a:p>
         </p:txBody>
@@ -9209,7 +9279,7 @@
                 </a:solidFill>
                 <a:latin typeface="Arial"/>
               </a:rPr>
-              <a:t>STRUCTURAL DISAGREEMENT: moneyline says TCU ~71%, machine says 54% — a 17-pt gap, not a spread quibble</a:t>
+              <a:t>STRUCTURAL DISAGREEMENT: moneyline says TCU ~73%, machine says 54% — an 18-pt gap, not a spread quibble</a:t>
             </a:r>
           </a:p>
         </p:txBody>
@@ -9778,6 +9848,76 @@
       <p:sp>
         <p:nvSpPr>
           <p:cNvPr id="31" name="TextBox 30"/>
+          <p:cNvSpPr txBox="1"/>
+          <p:nvPr/>
+        </p:nvSpPr>
+        <p:spPr>
+          <a:xfrm>
+            <a:off x="8046720" y="5532120"/>
+            <a:ext cx="3017520" cy="274320"/>
+          </a:xfrm>
+          <a:prstGeom prst="rect">
+            <a:avLst/>
+          </a:prstGeom>
+          <a:noFill/>
+        </p:spPr>
+        <p:txBody>
+          <a:bodyPr wrap="square" lIns="0" rIns="0" tIns="0" bIns="0">
+            <a:spAutoFit/>
+          </a:bodyPr>
+          <a:lstStyle/>
+          <a:p>
+            <a:pPr algn="l"/>
+            <a:r>
+              <a:rPr sz="950" b="1" i="0">
+                <a:solidFill>
+                  <a:srgbClr val="F47321"/>
+                </a:solidFill>
+                <a:latin typeface="Arial"/>
+              </a:rPr>
+              <a:t>FLAGS  YEL · STRUCT</a:t>
+            </a:r>
+          </a:p>
+        </p:txBody>
+      </p:sp>
+      <p:sp>
+        <p:nvSpPr>
+          <p:cNvPr id="32" name="TextBox 31"/>
+          <p:cNvSpPr txBox="1"/>
+          <p:nvPr/>
+        </p:nvSpPr>
+        <p:spPr>
+          <a:xfrm>
+            <a:off x="822960" y="6053328"/>
+            <a:ext cx="10515600" cy="228600"/>
+          </a:xfrm>
+          <a:prstGeom prst="rect">
+            <a:avLst/>
+          </a:prstGeom>
+          <a:noFill/>
+        </p:spPr>
+        <p:txBody>
+          <a:bodyPr wrap="square" lIns="0" rIns="0" tIns="0" bIns="0">
+            <a:spAutoFit/>
+          </a:bodyPr>
+          <a:lstStyle/>
+          <a:p>
+            <a:pPr algn="l"/>
+            <a:r>
+              <a:rPr sz="900" b="0" i="0">
+                <a:solidFill>
+                  <a:srgbClr val="5C6B7E"/>
+                </a:solidFill>
+                <a:latin typeface="Arial"/>
+              </a:rPr>
+              <a:t>Line ledger: first-seen –6.5 (Aug 18) → now –7.5 · opened –7.5 · CLV -1 · market ML 73% TCU</a:t>
+            </a:r>
+          </a:p>
+        </p:txBody>
+      </p:sp>
+      <p:sp>
+        <p:nvSpPr>
+          <p:cNvPr id="33" name="TextBox 32"/>
           <p:cNvSpPr txBox="1"/>
           <p:nvPr/>
         </p:nvSpPr>
@@ -11677,7 +11817,7 @@
           <a:p>
             <a:pPr algn="l"/>
             <a:r>
-              <a:rPr sz="1600" b="1" i="0">
+              <a:rPr sz="1250" b="1" i="0">
                 <a:solidFill>
                   <a:srgbClr val="F47321"/>
                 </a:solidFill>
@@ -11919,6 +12059,76 @@
       <p:sp>
         <p:nvSpPr>
           <p:cNvPr id="31" name="TextBox 30"/>
+          <p:cNvSpPr txBox="1"/>
+          <p:nvPr/>
+        </p:nvSpPr>
+        <p:spPr>
+          <a:xfrm>
+            <a:off x="8046720" y="5532120"/>
+            <a:ext cx="3017520" cy="274320"/>
+          </a:xfrm>
+          <a:prstGeom prst="rect">
+            <a:avLst/>
+          </a:prstGeom>
+          <a:noFill/>
+        </p:spPr>
+        <p:txBody>
+          <a:bodyPr wrap="square" lIns="0" rIns="0" tIns="0" bIns="0">
+            <a:spAutoFit/>
+          </a:bodyPr>
+          <a:lstStyle/>
+          <a:p>
+            <a:pPr algn="l"/>
+            <a:r>
+              <a:rPr sz="950" b="1" i="0">
+                <a:solidFill>
+                  <a:srgbClr val="F47321"/>
+                </a:solidFill>
+                <a:latin typeface="Arial"/>
+              </a:rPr>
+              <a:t>FLAGS  EDGE_GONE · CLV+2.5</a:t>
+            </a:r>
+          </a:p>
+        </p:txBody>
+      </p:sp>
+      <p:sp>
+        <p:nvSpPr>
+          <p:cNvPr id="32" name="TextBox 31"/>
+          <p:cNvSpPr txBox="1"/>
+          <p:nvPr/>
+        </p:nvSpPr>
+        <p:spPr>
+          <a:xfrm>
+            <a:off x="822960" y="6053328"/>
+            <a:ext cx="10515600" cy="228600"/>
+          </a:xfrm>
+          <a:prstGeom prst="rect">
+            <a:avLst/>
+          </a:prstGeom>
+          <a:noFill/>
+        </p:spPr>
+        <p:txBody>
+          <a:bodyPr wrap="square" lIns="0" rIns="0" tIns="0" bIns="0">
+            <a:spAutoFit/>
+          </a:bodyPr>
+          <a:lstStyle/>
+          <a:p>
+            <a:pPr algn="l"/>
+            <a:r>
+              <a:rPr sz="900" b="0" i="0">
+                <a:solidFill>
+                  <a:srgbClr val="5C6B7E"/>
+                </a:solidFill>
+                <a:latin typeface="Arial"/>
+              </a:rPr>
+              <a:t>Line ledger: first-seen –3 (Aug 18) → now –5.5 · opened –3.5 · CLV +2.5 · market ML 66% UVA</a:t>
+            </a:r>
+          </a:p>
+        </p:txBody>
+      </p:sp>
+      <p:sp>
+        <p:nvSpPr>
+          <p:cNvPr id="33" name="TextBox 32"/>
           <p:cNvSpPr txBox="1"/>
           <p:nvPr/>
         </p:nvSpPr>
@@ -13754,7 +13964,7 @@
                 </a:solidFill>
                 <a:latin typeface="Arial"/>
               </a:rPr>
-              <a:t>–10 → –7</a:t>
+              <a:t>–7 / –7</a:t>
             </a:r>
           </a:p>
         </p:txBody>
@@ -14060,6 +14270,76 @@
       <p:sp>
         <p:nvSpPr>
           <p:cNvPr id="31" name="TextBox 30"/>
+          <p:cNvSpPr txBox="1"/>
+          <p:nvPr/>
+        </p:nvSpPr>
+        <p:spPr>
+          <a:xfrm>
+            <a:off x="8046720" y="5532120"/>
+            <a:ext cx="3017520" cy="274320"/>
+          </a:xfrm>
+          <a:prstGeom prst="rect">
+            <a:avLst/>
+          </a:prstGeom>
+          <a:noFill/>
+        </p:spPr>
+        <p:txBody>
+          <a:bodyPr wrap="square" lIns="0" rIns="0" tIns="0" bIns="0">
+            <a:spAutoFit/>
+          </a:bodyPr>
+          <a:lstStyle/>
+          <a:p>
+            <a:pPr algn="l"/>
+            <a:r>
+              <a:rPr sz="950" b="1" i="0">
+                <a:solidFill>
+                  <a:srgbClr val="F47321"/>
+                </a:solidFill>
+                <a:latin typeface="Arial"/>
+              </a:rPr>
+              <a:t>FLAGS  CLV+3</a:t>
+            </a:r>
+          </a:p>
+        </p:txBody>
+      </p:sp>
+      <p:sp>
+        <p:nvSpPr>
+          <p:cNvPr id="32" name="TextBox 31"/>
+          <p:cNvSpPr txBox="1"/>
+          <p:nvPr/>
+        </p:nvSpPr>
+        <p:spPr>
+          <a:xfrm>
+            <a:off x="822960" y="6053328"/>
+            <a:ext cx="10515600" cy="228600"/>
+          </a:xfrm>
+          <a:prstGeom prst="rect">
+            <a:avLst/>
+          </a:prstGeom>
+          <a:noFill/>
+        </p:spPr>
+        <p:txBody>
+          <a:bodyPr wrap="square" lIns="0" rIns="0" tIns="0" bIns="0">
+            <a:spAutoFit/>
+          </a:bodyPr>
+          <a:lstStyle/>
+          <a:p>
+            <a:pPr algn="l"/>
+            <a:r>
+              <a:rPr sz="900" b="0" i="0">
+                <a:solidFill>
+                  <a:srgbClr val="5C6B7E"/>
+                </a:solidFill>
+                <a:latin typeface="Arial"/>
+              </a:rPr>
+              <a:t>Line ledger: first-seen –10 (Jul 14) → now –7 · opened –10 · CLV +3 · market ML 70% NDSU</a:t>
+            </a:r>
+          </a:p>
+        </p:txBody>
+      </p:sp>
+      <p:sp>
+        <p:nvSpPr>
+          <p:cNvPr id="33" name="TextBox 32"/>
           <p:cNvSpPr txBox="1"/>
           <p:nvPr/>
         </p:nvSpPr>
@@ -16201,6 +16481,76 @@
       <p:sp>
         <p:nvSpPr>
           <p:cNvPr id="31" name="TextBox 30"/>
+          <p:cNvSpPr txBox="1"/>
+          <p:nvPr/>
+        </p:nvSpPr>
+        <p:spPr>
+          <a:xfrm>
+            <a:off x="8046720" y="5532120"/>
+            <a:ext cx="3017520" cy="274320"/>
+          </a:xfrm>
+          <a:prstGeom prst="rect">
+            <a:avLst/>
+          </a:prstGeom>
+          <a:noFill/>
+        </p:spPr>
+        <p:txBody>
+          <a:bodyPr wrap="square" lIns="0" rIns="0" tIns="0" bIns="0">
+            <a:spAutoFit/>
+          </a:bodyPr>
+          <a:lstStyle/>
+          <a:p>
+            <a:pPr algn="l"/>
+            <a:r>
+              <a:rPr sz="950" b="1" i="0">
+                <a:solidFill>
+                  <a:srgbClr val="F47321"/>
+                </a:solidFill>
+                <a:latin typeface="Arial"/>
+              </a:rPr>
+              <a:t>FLAGS  CLV-2.5</a:t>
+            </a:r>
+          </a:p>
+        </p:txBody>
+      </p:sp>
+      <p:sp>
+        <p:nvSpPr>
+          <p:cNvPr id="32" name="TextBox 31"/>
+          <p:cNvSpPr txBox="1"/>
+          <p:nvPr/>
+        </p:nvSpPr>
+        <p:spPr>
+          <a:xfrm>
+            <a:off x="822960" y="6053328"/>
+            <a:ext cx="10515600" cy="228600"/>
+          </a:xfrm>
+          <a:prstGeom prst="rect">
+            <a:avLst/>
+          </a:prstGeom>
+          <a:noFill/>
+        </p:spPr>
+        <p:txBody>
+          <a:bodyPr wrap="square" lIns="0" rIns="0" tIns="0" bIns="0">
+            <a:spAutoFit/>
+          </a:bodyPr>
+          <a:lstStyle/>
+          <a:p>
+            <a:pPr algn="l"/>
+            <a:r>
+              <a:rPr sz="900" b="0" i="0">
+                <a:solidFill>
+                  <a:srgbClr val="5C6B7E"/>
+                </a:solidFill>
+                <a:latin typeface="Arial"/>
+              </a:rPr>
+              <a:t>Line ledger: first-seen –3 (Aug 18) → now –5.5 · opened –3 · CLV -2.5 · market ML 66% STAN</a:t>
+            </a:r>
+          </a:p>
+        </p:txBody>
+      </p:sp>
+      <p:sp>
+        <p:nvSpPr>
+          <p:cNvPr id="33" name="TextBox 32"/>
           <p:cNvSpPr txBox="1"/>
           <p:nvPr/>
         </p:nvSpPr>

--- a/decks/2026_Week0_Episode1.pptx
+++ b/decks/2026_Week0_Episode1.pptx
@@ -3777,7 +3777,7 @@
                 </a:solidFill>
                 <a:latin typeface="Arial"/>
               </a:rPr>
-              <a:t>UVA –6.7</a:t>
+              <a:t>UVA –6.5</a:t>
             </a:r>
           </a:p>
         </p:txBody>
@@ -4097,7 +4097,7 @@
                 </a:solidFill>
                 <a:latin typeface="Arial"/>
               </a:rPr>
-              <a:t>NDSU –2.7</a:t>
+              <a:t>NDSU –2.5</a:t>
             </a:r>
           </a:p>
         </p:txBody>
@@ -4417,7 +4417,7 @@
                 </a:solidFill>
                 <a:latin typeface="Arial"/>
               </a:rPr>
-              <a:t>Stanford –1.6</a:t>
+              <a:t>Stanford –1.5</a:t>
             </a:r>
           </a:p>
         </p:txBody>
@@ -4737,7 +4737,7 @@
                 </a:solidFill>
                 <a:latin typeface="Arial"/>
               </a:rPr>
-              <a:t>UNLV –6.2</a:t>
+              <a:t>UNLV –6</a:t>
             </a:r>
           </a:p>
         </p:txBody>
@@ -5429,8 +5429,8 @@
         </p:nvSpPr>
         <p:spPr>
           <a:xfrm>
-            <a:off x="7772400" y="1600200"/>
-            <a:ext cx="3566160" cy="4206240"/>
+            <a:off x="7772400" y="1554480"/>
+            <a:ext cx="3566160" cy="4370832"/>
           </a:xfrm>
           <a:prstGeom prst="roundRect">
             <a:avLst/>
@@ -5473,7 +5473,287 @@
         </p:nvSpPr>
         <p:spPr>
           <a:xfrm>
-            <a:off x="8046720" y="1828800"/>
+            <a:off x="8046720" y="1737360"/>
+            <a:ext cx="3017520" cy="274320"/>
+          </a:xfrm>
+          <a:prstGeom prst="rect">
+            <a:avLst/>
+          </a:prstGeom>
+          <a:noFill/>
+        </p:spPr>
+        <p:txBody>
+          <a:bodyPr wrap="square" lIns="0" rIns="0" tIns="0" bIns="0">
+            <a:spAutoFit/>
+          </a:bodyPr>
+          <a:lstStyle/>
+          <a:p>
+            <a:pPr algn="l"/>
+            <a:r>
+              <a:rPr sz="1200" b="1" i="0">
+                <a:solidFill>
+                  <a:srgbClr val="F47321"/>
+                </a:solidFill>
+                <a:latin typeface="Arial"/>
+              </a:rPr>
+              <a:t>THE NUMBER</a:t>
+            </a:r>
+          </a:p>
+        </p:txBody>
+      </p:sp>
+      <p:sp>
+        <p:nvSpPr>
+          <p:cNvPr id="20" name="TextBox 19"/>
+          <p:cNvSpPr txBox="1"/>
+          <p:nvPr/>
+        </p:nvSpPr>
+        <p:spPr>
+          <a:xfrm>
+            <a:off x="8046720" y="2011680"/>
+            <a:ext cx="3017520" cy="457200"/>
+          </a:xfrm>
+          <a:prstGeom prst="rect">
+            <a:avLst/>
+          </a:prstGeom>
+          <a:noFill/>
+        </p:spPr>
+        <p:txBody>
+          <a:bodyPr wrap="square" lIns="0" rIns="0" tIns="0" bIns="0">
+            <a:spAutoFit/>
+          </a:bodyPr>
+          <a:lstStyle/>
+          <a:p>
+            <a:pPr algn="l"/>
+            <a:r>
+              <a:rPr sz="2600" b="1" i="0">
+                <a:solidFill>
+                  <a:srgbClr val="FFFFFF"/>
+                </a:solidFill>
+                <a:latin typeface="Arial"/>
+              </a:rPr>
+              <a:t>UNLV –6</a:t>
+            </a:r>
+          </a:p>
+        </p:txBody>
+      </p:sp>
+      <p:sp>
+        <p:nvSpPr>
+          <p:cNvPr id="21" name="TextBox 20"/>
+          <p:cNvSpPr txBox="1"/>
+          <p:nvPr/>
+        </p:nvSpPr>
+        <p:spPr>
+          <a:xfrm>
+            <a:off x="8046720" y="2450592"/>
+            <a:ext cx="3017520" cy="274320"/>
+          </a:xfrm>
+          <a:prstGeom prst="rect">
+            <a:avLst/>
+          </a:prstGeom>
+          <a:noFill/>
+        </p:spPr>
+        <p:txBody>
+          <a:bodyPr wrap="square" lIns="0" rIns="0" tIns="0" bIns="0">
+            <a:spAutoFit/>
+          </a:bodyPr>
+          <a:lstStyle/>
+          <a:p>
+            <a:pPr algn="l"/>
+            <a:r>
+              <a:rPr sz="1150" b="1" i="0">
+                <a:solidFill>
+                  <a:srgbClr val="FFFFFF"/>
+                </a:solidFill>
+                <a:latin typeface="Arial"/>
+              </a:rPr>
+              <a:t>UNLV –179 · MEM +179</a:t>
+            </a:r>
+          </a:p>
+        </p:txBody>
+      </p:sp>
+      <p:sp>
+        <p:nvSpPr>
+          <p:cNvPr id="22" name="TextBox 21"/>
+          <p:cNvSpPr txBox="1"/>
+          <p:nvPr/>
+        </p:nvSpPr>
+        <p:spPr>
+          <a:xfrm>
+            <a:off x="8046720" y="2688336"/>
+            <a:ext cx="3017520" cy="256032"/>
+          </a:xfrm>
+          <a:prstGeom prst="rect">
+            <a:avLst/>
+          </a:prstGeom>
+          <a:noFill/>
+        </p:spPr>
+        <p:txBody>
+          <a:bodyPr wrap="square" lIns="0" rIns="0" tIns="0" bIns="0">
+            <a:spAutoFit/>
+          </a:bodyPr>
+          <a:lstStyle/>
+          <a:p>
+            <a:pPr algn="l"/>
+            <a:r>
+              <a:rPr sz="850" b="0" i="0">
+                <a:solidFill>
+                  <a:srgbClr val="CADCFC"/>
+                </a:solidFill>
+                <a:latin typeface="Arial"/>
+              </a:rPr>
+              <a:t>machine line · fair odds, no vig · raw margin UNLV +6.2</a:t>
+            </a:r>
+          </a:p>
+        </p:txBody>
+      </p:sp>
+      <p:sp>
+        <p:nvSpPr>
+          <p:cNvPr id="23" name="TextBox 22"/>
+          <p:cNvSpPr txBox="1"/>
+          <p:nvPr/>
+        </p:nvSpPr>
+        <p:spPr>
+          <a:xfrm>
+            <a:off x="8046720" y="3017520"/>
+            <a:ext cx="3017520" cy="365760"/>
+          </a:xfrm>
+          <a:prstGeom prst="rect">
+            <a:avLst/>
+          </a:prstGeom>
+          <a:noFill/>
+        </p:spPr>
+        <p:txBody>
+          <a:bodyPr wrap="square" lIns="0" rIns="0" tIns="0" bIns="0">
+            <a:spAutoFit/>
+          </a:bodyPr>
+          <a:lstStyle/>
+          <a:p>
+            <a:pPr algn="l"/>
+            <a:r>
+              <a:rPr sz="1700" b="1" i="0">
+                <a:solidFill>
+                  <a:srgbClr val="FFFFFF"/>
+                </a:solidFill>
+                <a:latin typeface="Arial"/>
+              </a:rPr>
+              <a:t>UNLV 32 – MEM 26</a:t>
+            </a:r>
+          </a:p>
+        </p:txBody>
+      </p:sp>
+      <p:sp>
+        <p:nvSpPr>
+          <p:cNvPr id="24" name="TextBox 23"/>
+          <p:cNvSpPr txBox="1"/>
+          <p:nvPr/>
+        </p:nvSpPr>
+        <p:spPr>
+          <a:xfrm>
+            <a:off x="8046720" y="3328416"/>
+            <a:ext cx="3017520" cy="256032"/>
+          </a:xfrm>
+          <a:prstGeom prst="rect">
+            <a:avLst/>
+          </a:prstGeom>
+          <a:noFill/>
+        </p:spPr>
+        <p:txBody>
+          <a:bodyPr wrap="square" lIns="0" rIns="0" tIns="0" bIns="0">
+            <a:spAutoFit/>
+          </a:bodyPr>
+          <a:lstStyle/>
+          <a:p>
+            <a:pPr algn="l"/>
+            <a:r>
+              <a:rPr sz="850" b="0" i="0">
+                <a:solidFill>
+                  <a:srgbClr val="CADCFC"/>
+                </a:solidFill>
+                <a:latin typeface="Arial"/>
+              </a:rPr>
+              <a:t>projected score · machine margin on the 57.5 market total</a:t>
+            </a:r>
+          </a:p>
+        </p:txBody>
+      </p:sp>
+      <p:sp>
+        <p:nvSpPr>
+          <p:cNvPr id="25" name="TextBox 24"/>
+          <p:cNvSpPr txBox="1"/>
+          <p:nvPr/>
+        </p:nvSpPr>
+        <p:spPr>
+          <a:xfrm>
+            <a:off x="8046720" y="3639312"/>
+            <a:ext cx="3017520" cy="365760"/>
+          </a:xfrm>
+          <a:prstGeom prst="rect">
+            <a:avLst/>
+          </a:prstGeom>
+          <a:noFill/>
+        </p:spPr>
+        <p:txBody>
+          <a:bodyPr wrap="square" lIns="0" rIns="0" tIns="0" bIns="0">
+            <a:spAutoFit/>
+          </a:bodyPr>
+          <a:lstStyle/>
+          <a:p>
+            <a:pPr algn="l"/>
+            <a:r>
+              <a:rPr sz="1700" b="1" i="0">
+                <a:solidFill>
+                  <a:srgbClr val="FFFFFF"/>
+                </a:solidFill>
+                <a:latin typeface="Arial"/>
+              </a:rPr>
+              <a:t>–5.5 / –5.5</a:t>
+            </a:r>
+          </a:p>
+        </p:txBody>
+      </p:sp>
+      <p:sp>
+        <p:nvSpPr>
+          <p:cNvPr id="26" name="TextBox 25"/>
+          <p:cNvSpPr txBox="1"/>
+          <p:nvPr/>
+        </p:nvSpPr>
+        <p:spPr>
+          <a:xfrm>
+            <a:off x="8046720" y="3950208"/>
+            <a:ext cx="3017520" cy="365760"/>
+          </a:xfrm>
+          <a:prstGeom prst="rect">
+            <a:avLst/>
+          </a:prstGeom>
+          <a:noFill/>
+        </p:spPr>
+        <p:txBody>
+          <a:bodyPr wrap="square" lIns="0" rIns="0" tIns="0" bIns="0">
+            <a:spAutoFit/>
+          </a:bodyPr>
+          <a:lstStyle/>
+          <a:p>
+            <a:pPr algn="l"/>
+            <a:r>
+              <a:rPr sz="850" b="0" i="0">
+                <a:solidFill>
+                  <a:srgbClr val="CADCFC"/>
+                </a:solidFill>
+                <a:latin typeface="Arial"/>
+              </a:rPr>
+              <a:t>market (DK / Bovada) · DK UNLV -225 / MEM +185 · Bov UNLV -170 / MEM +145</a:t>
+            </a:r>
+          </a:p>
+        </p:txBody>
+      </p:sp>
+      <p:sp>
+        <p:nvSpPr>
+          <p:cNvPr id="27" name="TextBox 26"/>
+          <p:cNvSpPr txBox="1"/>
+          <p:nvPr/>
+        </p:nvSpPr>
+        <p:spPr>
+          <a:xfrm>
+            <a:off x="8046720" y="4315968"/>
             <a:ext cx="3017520" cy="320040"/>
           </a:xfrm>
           <a:prstGeom prst="rect">
@@ -5489,222 +5769,47 @@
           <a:p>
             <a:pPr algn="l"/>
             <a:r>
-              <a:rPr sz="1200" b="1" i="0">
+              <a:rPr sz="1150" b="1" i="0">
                 <a:solidFill>
                   <a:srgbClr val="F47321"/>
                 </a:solidFill>
                 <a:latin typeface="Arial"/>
               </a:rPr>
-              <a:t>THE NUMBER</a:t>
-            </a:r>
-          </a:p>
-        </p:txBody>
-      </p:sp>
-      <p:sp>
-        <p:nvSpPr>
-          <p:cNvPr id="20" name="TextBox 19"/>
-          <p:cNvSpPr txBox="1"/>
-          <p:nvPr/>
-        </p:nvSpPr>
-        <p:spPr>
-          <a:xfrm>
-            <a:off x="8046720" y="2194560"/>
-            <a:ext cx="3017520" cy="640080"/>
-          </a:xfrm>
-          <a:prstGeom prst="rect">
-            <a:avLst/>
-          </a:prstGeom>
-          <a:noFill/>
-        </p:spPr>
-        <p:txBody>
-          <a:bodyPr wrap="square" lIns="0" rIns="0" tIns="0" bIns="0">
-            <a:spAutoFit/>
-          </a:bodyPr>
-          <a:lstStyle/>
-          <a:p>
-            <a:pPr algn="l"/>
-            <a:r>
-              <a:rPr sz="3000" b="1" i="0">
-                <a:solidFill>
-                  <a:srgbClr val="FFFFFF"/>
-                </a:solidFill>
-                <a:latin typeface="Arial"/>
-              </a:rPr>
-              <a:t>UNLV –6.2</a:t>
-            </a:r>
-          </a:p>
-        </p:txBody>
-      </p:sp>
-      <p:sp>
-        <p:nvSpPr>
-          <p:cNvPr id="21" name="TextBox 20"/>
-          <p:cNvSpPr txBox="1"/>
-          <p:nvPr/>
-        </p:nvSpPr>
-        <p:spPr>
-          <a:xfrm>
-            <a:off x="8046720" y="2788920"/>
-            <a:ext cx="3017520" cy="274320"/>
-          </a:xfrm>
-          <a:prstGeom prst="rect">
-            <a:avLst/>
-          </a:prstGeom>
-          <a:noFill/>
-        </p:spPr>
-        <p:txBody>
-          <a:bodyPr wrap="square" lIns="0" rIns="0" tIns="0" bIns="0">
-            <a:spAutoFit/>
-          </a:bodyPr>
-          <a:lstStyle/>
-          <a:p>
-            <a:pPr algn="l"/>
-            <a:r>
-              <a:rPr sz="1000" b="0" i="0">
+              <a:t>market came to us: –3 → –5.5</a:t>
+            </a:r>
+          </a:p>
+        </p:txBody>
+      </p:sp>
+      <p:sp>
+        <p:nvSpPr>
+          <p:cNvPr id="28" name="TextBox 27"/>
+          <p:cNvSpPr txBox="1"/>
+          <p:nvPr/>
+        </p:nvSpPr>
+        <p:spPr>
+          <a:xfrm>
+            <a:off x="8046720" y="4590288"/>
+            <a:ext cx="3017520" cy="228600"/>
+          </a:xfrm>
+          <a:prstGeom prst="rect">
+            <a:avLst/>
+          </a:prstGeom>
+          <a:noFill/>
+        </p:spPr>
+        <p:txBody>
+          <a:bodyPr wrap="square" lIns="0" rIns="0" tIns="0" bIns="0">
+            <a:spAutoFit/>
+          </a:bodyPr>
+          <a:lstStyle/>
+          <a:p>
+            <a:pPr algn="l"/>
+            <a:r>
+              <a:rPr sz="850" b="0" i="0">
                 <a:solidFill>
                   <a:srgbClr val="CADCFC"/>
                 </a:solidFill>
                 <a:latin typeface="Arial"/>
               </a:rPr>
-              <a:t>machine</a:t>
-            </a:r>
-          </a:p>
-        </p:txBody>
-      </p:sp>
-      <p:sp>
-        <p:nvSpPr>
-          <p:cNvPr id="22" name="TextBox 21"/>
-          <p:cNvSpPr txBox="1"/>
-          <p:nvPr/>
-        </p:nvSpPr>
-        <p:spPr>
-          <a:xfrm>
-            <a:off x="8046720" y="3154680"/>
-            <a:ext cx="3017520" cy="502920"/>
-          </a:xfrm>
-          <a:prstGeom prst="rect">
-            <a:avLst/>
-          </a:prstGeom>
-          <a:noFill/>
-        </p:spPr>
-        <p:txBody>
-          <a:bodyPr wrap="square" lIns="0" rIns="0" tIns="0" bIns="0">
-            <a:spAutoFit/>
-          </a:bodyPr>
-          <a:lstStyle/>
-          <a:p>
-            <a:pPr algn="l"/>
-            <a:r>
-              <a:rPr sz="2200" b="1" i="0">
-                <a:solidFill>
-                  <a:srgbClr val="FFFFFF"/>
-                </a:solidFill>
-                <a:latin typeface="Arial"/>
-              </a:rPr>
-              <a:t>–5.5 / –5.5</a:t>
-            </a:r>
-          </a:p>
-        </p:txBody>
-      </p:sp>
-      <p:sp>
-        <p:nvSpPr>
-          <p:cNvPr id="23" name="TextBox 22"/>
-          <p:cNvSpPr txBox="1"/>
-          <p:nvPr/>
-        </p:nvSpPr>
-        <p:spPr>
-          <a:xfrm>
-            <a:off x="8046720" y="3611880"/>
-            <a:ext cx="3017520" cy="274320"/>
-          </a:xfrm>
-          <a:prstGeom prst="rect">
-            <a:avLst/>
-          </a:prstGeom>
-          <a:noFill/>
-        </p:spPr>
-        <p:txBody>
-          <a:bodyPr wrap="square" lIns="0" rIns="0" tIns="0" bIns="0">
-            <a:spAutoFit/>
-          </a:bodyPr>
-          <a:lstStyle/>
-          <a:p>
-            <a:pPr algn="l"/>
-            <a:r>
-              <a:rPr sz="1000" b="0" i="0">
-                <a:solidFill>
-                  <a:srgbClr val="CADCFC"/>
-                </a:solidFill>
-                <a:latin typeface="Arial"/>
-              </a:rPr>
-              <a:t>market (DK / Bovada)</a:t>
-            </a:r>
-          </a:p>
-        </p:txBody>
-      </p:sp>
-      <p:sp>
-        <p:nvSpPr>
-          <p:cNvPr id="24" name="TextBox 23"/>
-          <p:cNvSpPr txBox="1"/>
-          <p:nvPr/>
-        </p:nvSpPr>
-        <p:spPr>
-          <a:xfrm>
-            <a:off x="8046720" y="3977639"/>
-            <a:ext cx="3017520" cy="411480"/>
-          </a:xfrm>
-          <a:prstGeom prst="rect">
-            <a:avLst/>
-          </a:prstGeom>
-          <a:noFill/>
-        </p:spPr>
-        <p:txBody>
-          <a:bodyPr wrap="square" lIns="0" rIns="0" tIns="0" bIns="0">
-            <a:spAutoFit/>
-          </a:bodyPr>
-          <a:lstStyle/>
-          <a:p>
-            <a:pPr algn="l"/>
-            <a:r>
-              <a:rPr sz="1250" b="1" i="0">
-                <a:solidFill>
-                  <a:srgbClr val="F47321"/>
-                </a:solidFill>
-                <a:latin typeface="Arial"/>
-              </a:rPr>
-              <a:t>market came to us: –3 → –5.5</a:t>
-            </a:r>
-          </a:p>
-        </p:txBody>
-      </p:sp>
-      <p:sp>
-        <p:nvSpPr>
-          <p:cNvPr id="25" name="TextBox 24"/>
-          <p:cNvSpPr txBox="1"/>
-          <p:nvPr/>
-        </p:nvSpPr>
-        <p:spPr>
-          <a:xfrm>
-            <a:off x="8046720" y="4370832"/>
-            <a:ext cx="3017520" cy="274320"/>
-          </a:xfrm>
-          <a:prstGeom prst="rect">
-            <a:avLst/>
-          </a:prstGeom>
-          <a:noFill/>
-        </p:spPr>
-        <p:txBody>
-          <a:bodyPr wrap="square" lIns="0" rIns="0" tIns="0" bIns="0">
-            <a:spAutoFit/>
-          </a:bodyPr>
-          <a:lstStyle/>
-          <a:p>
-            <a:pPr algn="l"/>
-            <a:r>
-              <a:rPr sz="1000" b="0" i="0">
-                <a:solidFill>
-                  <a:srgbClr val="CADCFC"/>
-                </a:solidFill>
-                <a:latin typeface="Arial"/>
-              </a:rPr>
               <a:t>the gap</a:t>
             </a:r>
           </a:p>
@@ -5712,14 +5817,14 @@
       </p:sp>
       <p:sp>
         <p:nvSpPr>
-          <p:cNvPr id="26" name="Rounded Rectangle 25"/>
+          <p:cNvPr id="29" name="Rounded Rectangle 28"/>
           <p:cNvSpPr/>
           <p:nvPr/>
         </p:nvSpPr>
         <p:spPr>
           <a:xfrm>
-            <a:off x="8046720" y="4892040"/>
-            <a:ext cx="3017520" cy="384048"/>
+            <a:off x="8046720" y="4882896"/>
+            <a:ext cx="3017520" cy="365760"/>
           </a:xfrm>
           <a:prstGeom prst="roundRect">
             <a:avLst/>
@@ -5756,14 +5861,14 @@
       </p:sp>
       <p:sp>
         <p:nvSpPr>
-          <p:cNvPr id="27" name="Rounded Rectangle 26"/>
+          <p:cNvPr id="30" name="Rounded Rectangle 29"/>
           <p:cNvSpPr/>
           <p:nvPr/>
         </p:nvSpPr>
         <p:spPr>
           <a:xfrm>
-            <a:off x="8046720" y="4892040"/>
-            <a:ext cx="1931212" cy="384048"/>
+            <a:off x="8046720" y="4882896"/>
+            <a:ext cx="1931212" cy="365760"/>
           </a:xfrm>
           <a:prstGeom prst="roundRect">
             <a:avLst/>
@@ -5800,13 +5905,13 @@
       </p:sp>
       <p:sp>
         <p:nvSpPr>
-          <p:cNvPr id="28" name="TextBox 27"/>
-          <p:cNvSpPr txBox="1"/>
-          <p:nvPr/>
-        </p:nvSpPr>
-        <p:spPr>
-          <a:xfrm>
-            <a:off x="8119872" y="4983479"/>
+          <p:cNvPr id="31" name="TextBox 30"/>
+          <p:cNvSpPr txBox="1"/>
+          <p:nvPr/>
+        </p:nvSpPr>
+        <p:spPr>
+          <a:xfrm>
+            <a:off x="8119872" y="4965192"/>
             <a:ext cx="2194560" cy="228600"/>
           </a:xfrm>
           <a:prstGeom prst="rect">
@@ -5835,13 +5940,13 @@
       </p:sp>
       <p:sp>
         <p:nvSpPr>
-          <p:cNvPr id="29" name="TextBox 28"/>
-          <p:cNvSpPr txBox="1"/>
-          <p:nvPr/>
-        </p:nvSpPr>
-        <p:spPr>
-          <a:xfrm>
-            <a:off x="8796528" y="4983479"/>
+          <p:cNvPr id="32" name="TextBox 31"/>
+          <p:cNvSpPr txBox="1"/>
+          <p:nvPr/>
+        </p:nvSpPr>
+        <p:spPr>
+          <a:xfrm>
+            <a:off x="8796528" y="4965192"/>
             <a:ext cx="2194560" cy="228600"/>
           </a:xfrm>
           <a:prstGeom prst="rect">
@@ -5870,13 +5975,48 @@
       </p:sp>
       <p:sp>
         <p:nvSpPr>
-          <p:cNvPr id="30" name="TextBox 29"/>
-          <p:cNvSpPr txBox="1"/>
-          <p:nvPr/>
-        </p:nvSpPr>
-        <p:spPr>
-          <a:xfrm>
-            <a:off x="8046720" y="5349240"/>
+          <p:cNvPr id="33" name="TextBox 32"/>
+          <p:cNvSpPr txBox="1"/>
+          <p:nvPr/>
+        </p:nvSpPr>
+        <p:spPr>
+          <a:xfrm>
+            <a:off x="8046720" y="5303520"/>
+            <a:ext cx="3017520" cy="228600"/>
+          </a:xfrm>
+          <a:prstGeom prst="rect">
+            <a:avLst/>
+          </a:prstGeom>
+          <a:noFill/>
+        </p:spPr>
+        <p:txBody>
+          <a:bodyPr wrap="square" lIns="0" rIns="0" tIns="0" bIns="0">
+            <a:spAutoFit/>
+          </a:bodyPr>
+          <a:lstStyle/>
+          <a:p>
+            <a:pPr algn="l"/>
+            <a:r>
+              <a:rPr sz="850" b="0" i="0">
+                <a:solidFill>
+                  <a:srgbClr val="CADCFC"/>
+                </a:solidFill>
+                <a:latin typeface="Arial"/>
+              </a:rPr>
+              <a:t>win probability (machine)</a:t>
+            </a:r>
+          </a:p>
+        </p:txBody>
+      </p:sp>
+      <p:sp>
+        <p:nvSpPr>
+          <p:cNvPr id="34" name="TextBox 33"/>
+          <p:cNvSpPr txBox="1"/>
+          <p:nvPr/>
+        </p:nvSpPr>
+        <p:spPr>
+          <a:xfrm>
+            <a:off x="8046720" y="5550408"/>
             <a:ext cx="3017520" cy="274320"/>
           </a:xfrm>
           <a:prstGeom prst="rect">
@@ -5892,41 +6032,6 @@
           <a:p>
             <a:pPr algn="l"/>
             <a:r>
-              <a:rPr sz="950" b="0" i="0">
-                <a:solidFill>
-                  <a:srgbClr val="CADCFC"/>
-                </a:solidFill>
-                <a:latin typeface="Arial"/>
-              </a:rPr>
-              <a:t>win probability (machine)</a:t>
-            </a:r>
-          </a:p>
-        </p:txBody>
-      </p:sp>
-      <p:sp>
-        <p:nvSpPr>
-          <p:cNvPr id="31" name="TextBox 30"/>
-          <p:cNvSpPr txBox="1"/>
-          <p:nvPr/>
-        </p:nvSpPr>
-        <p:spPr>
-          <a:xfrm>
-            <a:off x="8046720" y="5532120"/>
-            <a:ext cx="3017520" cy="274320"/>
-          </a:xfrm>
-          <a:prstGeom prst="rect">
-            <a:avLst/>
-          </a:prstGeom>
-          <a:noFill/>
-        </p:spPr>
-        <p:txBody>
-          <a:bodyPr wrap="square" lIns="0" rIns="0" tIns="0" bIns="0">
-            <a:spAutoFit/>
-          </a:bodyPr>
-          <a:lstStyle/>
-          <a:p>
-            <a:pPr algn="l"/>
-            <a:r>
               <a:rPr sz="950" b="1" i="0">
                 <a:solidFill>
                   <a:srgbClr val="F47321"/>
@@ -5940,7 +6045,7 @@
       </p:sp>
       <p:sp>
         <p:nvSpPr>
-          <p:cNvPr id="32" name="TextBox 31"/>
+          <p:cNvPr id="35" name="TextBox 34"/>
           <p:cNvSpPr txBox="1"/>
           <p:nvPr/>
         </p:nvSpPr>
@@ -5975,7 +6080,7 @@
       </p:sp>
       <p:sp>
         <p:nvSpPr>
-          <p:cNvPr id="33" name="TextBox 32"/>
+          <p:cNvPr id="36" name="TextBox 35"/>
           <p:cNvSpPr txBox="1"/>
           <p:nvPr/>
         </p:nvSpPr>
@@ -7719,7 +7824,7 @@
                 </a:solidFill>
                 <a:latin typeface="Arial"/>
               </a:rPr>
-              <a:t>UVA –6.7   ·   –5.5 / –5.5</a:t>
+              <a:t>UVA –6.5   ·   –5.5 / –5.5</a:t>
             </a:r>
           </a:p>
         </p:txBody>
@@ -8039,7 +8144,7 @@
                 </a:solidFill>
                 <a:latin typeface="Arial"/>
               </a:rPr>
-              <a:t>NDSU –2.7   ·   –7 / –7</a:t>
+              <a:t>NDSU –2.5   ·   –7 / –7</a:t>
             </a:r>
           </a:p>
         </p:txBody>
@@ -8359,7 +8464,7 @@
                 </a:solidFill>
                 <a:latin typeface="Arial"/>
               </a:rPr>
-              <a:t>Stanford –1.6   ·   –5.5 / –5.5</a:t>
+              <a:t>Stanford –1.5   ·   –5.5 / –5.5</a:t>
             </a:r>
           </a:p>
         </p:txBody>
@@ -8679,7 +8784,7 @@
                 </a:solidFill>
                 <a:latin typeface="Arial"/>
               </a:rPr>
-              <a:t>UNLV –6.2   ·   –5.5 / –5.5</a:t>
+              <a:t>UNLV –6   ·   –5.5 / –5.5</a:t>
             </a:r>
           </a:p>
         </p:txBody>
@@ -9371,8 +9476,8 @@
         </p:nvSpPr>
         <p:spPr>
           <a:xfrm>
-            <a:off x="7772400" y="1600200"/>
-            <a:ext cx="3566160" cy="4206240"/>
+            <a:off x="7772400" y="1554480"/>
+            <a:ext cx="3566160" cy="4370832"/>
           </a:xfrm>
           <a:prstGeom prst="roundRect">
             <a:avLst/>
@@ -9415,7 +9520,287 @@
         </p:nvSpPr>
         <p:spPr>
           <a:xfrm>
-            <a:off x="8046720" y="1828800"/>
+            <a:off x="8046720" y="1737360"/>
+            <a:ext cx="3017520" cy="274320"/>
+          </a:xfrm>
+          <a:prstGeom prst="rect">
+            <a:avLst/>
+          </a:prstGeom>
+          <a:noFill/>
+        </p:spPr>
+        <p:txBody>
+          <a:bodyPr wrap="square" lIns="0" rIns="0" tIns="0" bIns="0">
+            <a:spAutoFit/>
+          </a:bodyPr>
+          <a:lstStyle/>
+          <a:p>
+            <a:pPr algn="l"/>
+            <a:r>
+              <a:rPr sz="1200" b="1" i="0">
+                <a:solidFill>
+                  <a:srgbClr val="F47321"/>
+                </a:solidFill>
+                <a:latin typeface="Arial"/>
+              </a:rPr>
+              <a:t>THE NUMBER</a:t>
+            </a:r>
+          </a:p>
+        </p:txBody>
+      </p:sp>
+      <p:sp>
+        <p:nvSpPr>
+          <p:cNvPr id="20" name="TextBox 19"/>
+          <p:cNvSpPr txBox="1"/>
+          <p:nvPr/>
+        </p:nvSpPr>
+        <p:spPr>
+          <a:xfrm>
+            <a:off x="8046720" y="2011680"/>
+            <a:ext cx="3017520" cy="457200"/>
+          </a:xfrm>
+          <a:prstGeom prst="rect">
+            <a:avLst/>
+          </a:prstGeom>
+          <a:noFill/>
+        </p:spPr>
+        <p:txBody>
+          <a:bodyPr wrap="square" lIns="0" rIns="0" tIns="0" bIns="0">
+            <a:spAutoFit/>
+          </a:bodyPr>
+          <a:lstStyle/>
+          <a:p>
+            <a:pPr algn="l"/>
+            <a:r>
+              <a:rPr sz="2600" b="1" i="0">
+                <a:solidFill>
+                  <a:srgbClr val="FFFFFF"/>
+                </a:solidFill>
+                <a:latin typeface="Arial"/>
+              </a:rPr>
+              <a:t>TCU –1.5</a:t>
+            </a:r>
+          </a:p>
+        </p:txBody>
+      </p:sp>
+      <p:sp>
+        <p:nvSpPr>
+          <p:cNvPr id="21" name="TextBox 20"/>
+          <p:cNvSpPr txBox="1"/>
+          <p:nvPr/>
+        </p:nvSpPr>
+        <p:spPr>
+          <a:xfrm>
+            <a:off x="8046720" y="2450592"/>
+            <a:ext cx="3017520" cy="274320"/>
+          </a:xfrm>
+          <a:prstGeom prst="rect">
+            <a:avLst/>
+          </a:prstGeom>
+          <a:noFill/>
+        </p:spPr>
+        <p:txBody>
+          <a:bodyPr wrap="square" lIns="0" rIns="0" tIns="0" bIns="0">
+            <a:spAutoFit/>
+          </a:bodyPr>
+          <a:lstStyle/>
+          <a:p>
+            <a:pPr algn="l"/>
+            <a:r>
+              <a:rPr sz="1150" b="1" i="0">
+                <a:solidFill>
+                  <a:srgbClr val="FFFFFF"/>
+                </a:solidFill>
+                <a:latin typeface="Arial"/>
+              </a:rPr>
+              <a:t>TCU –118 · UNC +118</a:t>
+            </a:r>
+          </a:p>
+        </p:txBody>
+      </p:sp>
+      <p:sp>
+        <p:nvSpPr>
+          <p:cNvPr id="22" name="TextBox 21"/>
+          <p:cNvSpPr txBox="1"/>
+          <p:nvPr/>
+        </p:nvSpPr>
+        <p:spPr>
+          <a:xfrm>
+            <a:off x="8046720" y="2688336"/>
+            <a:ext cx="3017520" cy="256032"/>
+          </a:xfrm>
+          <a:prstGeom prst="rect">
+            <a:avLst/>
+          </a:prstGeom>
+          <a:noFill/>
+        </p:spPr>
+        <p:txBody>
+          <a:bodyPr wrap="square" lIns="0" rIns="0" tIns="0" bIns="0">
+            <a:spAutoFit/>
+          </a:bodyPr>
+          <a:lstStyle/>
+          <a:p>
+            <a:pPr algn="l"/>
+            <a:r>
+              <a:rPr sz="850" b="0" i="0">
+                <a:solidFill>
+                  <a:srgbClr val="CADCFC"/>
+                </a:solidFill>
+                <a:latin typeface="Arial"/>
+              </a:rPr>
+              <a:t>machine line · fair odds, no vig · raw margin TCU +1.5</a:t>
+            </a:r>
+          </a:p>
+        </p:txBody>
+      </p:sp>
+      <p:sp>
+        <p:nvSpPr>
+          <p:cNvPr id="23" name="TextBox 22"/>
+          <p:cNvSpPr txBox="1"/>
+          <p:nvPr/>
+        </p:nvSpPr>
+        <p:spPr>
+          <a:xfrm>
+            <a:off x="8046720" y="3017520"/>
+            <a:ext cx="3017520" cy="365760"/>
+          </a:xfrm>
+          <a:prstGeom prst="rect">
+            <a:avLst/>
+          </a:prstGeom>
+          <a:noFill/>
+        </p:spPr>
+        <p:txBody>
+          <a:bodyPr wrap="square" lIns="0" rIns="0" tIns="0" bIns="0">
+            <a:spAutoFit/>
+          </a:bodyPr>
+          <a:lstStyle/>
+          <a:p>
+            <a:pPr algn="l"/>
+            <a:r>
+              <a:rPr sz="1700" b="1" i="0">
+                <a:solidFill>
+                  <a:srgbClr val="FFFFFF"/>
+                </a:solidFill>
+                <a:latin typeface="Arial"/>
+              </a:rPr>
+              <a:t>TCU 24 – UNC 23</a:t>
+            </a:r>
+          </a:p>
+        </p:txBody>
+      </p:sp>
+      <p:sp>
+        <p:nvSpPr>
+          <p:cNvPr id="24" name="TextBox 23"/>
+          <p:cNvSpPr txBox="1"/>
+          <p:nvPr/>
+        </p:nvSpPr>
+        <p:spPr>
+          <a:xfrm>
+            <a:off x="8046720" y="3328416"/>
+            <a:ext cx="3017520" cy="256032"/>
+          </a:xfrm>
+          <a:prstGeom prst="rect">
+            <a:avLst/>
+          </a:prstGeom>
+          <a:noFill/>
+        </p:spPr>
+        <p:txBody>
+          <a:bodyPr wrap="square" lIns="0" rIns="0" tIns="0" bIns="0">
+            <a:spAutoFit/>
+          </a:bodyPr>
+          <a:lstStyle/>
+          <a:p>
+            <a:pPr algn="l"/>
+            <a:r>
+              <a:rPr sz="850" b="0" i="0">
+                <a:solidFill>
+                  <a:srgbClr val="CADCFC"/>
+                </a:solidFill>
+                <a:latin typeface="Arial"/>
+              </a:rPr>
+              <a:t>projected score · machine margin on the 47.5 market total</a:t>
+            </a:r>
+          </a:p>
+        </p:txBody>
+      </p:sp>
+      <p:sp>
+        <p:nvSpPr>
+          <p:cNvPr id="25" name="TextBox 24"/>
+          <p:cNvSpPr txBox="1"/>
+          <p:nvPr/>
+        </p:nvSpPr>
+        <p:spPr>
+          <a:xfrm>
+            <a:off x="8046720" y="3639312"/>
+            <a:ext cx="3017520" cy="365760"/>
+          </a:xfrm>
+          <a:prstGeom prst="rect">
+            <a:avLst/>
+          </a:prstGeom>
+          <a:noFill/>
+        </p:spPr>
+        <p:txBody>
+          <a:bodyPr wrap="square" lIns="0" rIns="0" tIns="0" bIns="0">
+            <a:spAutoFit/>
+          </a:bodyPr>
+          <a:lstStyle/>
+          <a:p>
+            <a:pPr algn="l"/>
+            <a:r>
+              <a:rPr sz="1700" b="1" i="0">
+                <a:solidFill>
+                  <a:srgbClr val="FFFFFF"/>
+                </a:solidFill>
+                <a:latin typeface="Arial"/>
+              </a:rPr>
+              <a:t>–7.5 / –8</a:t>
+            </a:r>
+          </a:p>
+        </p:txBody>
+      </p:sp>
+      <p:sp>
+        <p:nvSpPr>
+          <p:cNvPr id="26" name="TextBox 25"/>
+          <p:cNvSpPr txBox="1"/>
+          <p:nvPr/>
+        </p:nvSpPr>
+        <p:spPr>
+          <a:xfrm>
+            <a:off x="8046720" y="3950208"/>
+            <a:ext cx="3017520" cy="365760"/>
+          </a:xfrm>
+          <a:prstGeom prst="rect">
+            <a:avLst/>
+          </a:prstGeom>
+          <a:noFill/>
+        </p:spPr>
+        <p:txBody>
+          <a:bodyPr wrap="square" lIns="0" rIns="0" tIns="0" bIns="0">
+            <a:spAutoFit/>
+          </a:bodyPr>
+          <a:lstStyle/>
+          <a:p>
+            <a:pPr algn="l"/>
+            <a:r>
+              <a:rPr sz="850" b="0" i="0">
+                <a:solidFill>
+                  <a:srgbClr val="CADCFC"/>
+                </a:solidFill>
+                <a:latin typeface="Arial"/>
+              </a:rPr>
+              <a:t>market (DK / Bovada) · DK TCU -310 / UNC +250 · Bov TCU -235 / UNC +195</a:t>
+            </a:r>
+          </a:p>
+        </p:txBody>
+      </p:sp>
+      <p:sp>
+        <p:nvSpPr>
+          <p:cNvPr id="27" name="TextBox 26"/>
+          <p:cNvSpPr txBox="1"/>
+          <p:nvPr/>
+        </p:nvSpPr>
+        <p:spPr>
+          <a:xfrm>
+            <a:off x="8046720" y="4315968"/>
             <a:ext cx="3017520" cy="320040"/>
           </a:xfrm>
           <a:prstGeom prst="rect">
@@ -9431,222 +9816,47 @@
           <a:p>
             <a:pPr algn="l"/>
             <a:r>
-              <a:rPr sz="1200" b="1" i="0">
+              <a:rPr sz="1400" b="1" i="0">
                 <a:solidFill>
                   <a:srgbClr val="F47321"/>
                 </a:solidFill>
                 <a:latin typeface="Arial"/>
               </a:rPr>
-              <a:t>THE NUMBER</a:t>
-            </a:r>
-          </a:p>
-        </p:txBody>
-      </p:sp>
-      <p:sp>
-        <p:nvSpPr>
-          <p:cNvPr id="20" name="TextBox 19"/>
-          <p:cNvSpPr txBox="1"/>
-          <p:nvPr/>
-        </p:nvSpPr>
-        <p:spPr>
-          <a:xfrm>
-            <a:off x="8046720" y="2194560"/>
-            <a:ext cx="3017520" cy="640080"/>
-          </a:xfrm>
-          <a:prstGeom prst="rect">
-            <a:avLst/>
-          </a:prstGeom>
-          <a:noFill/>
-        </p:spPr>
-        <p:txBody>
-          <a:bodyPr wrap="square" lIns="0" rIns="0" tIns="0" bIns="0">
-            <a:spAutoFit/>
-          </a:bodyPr>
-          <a:lstStyle/>
-          <a:p>
-            <a:pPr algn="l"/>
-            <a:r>
-              <a:rPr sz="3000" b="1" i="0">
-                <a:solidFill>
-                  <a:srgbClr val="FFFFFF"/>
-                </a:solidFill>
-                <a:latin typeface="Arial"/>
-              </a:rPr>
-              <a:t>TCU –1.5</a:t>
-            </a:r>
-          </a:p>
-        </p:txBody>
-      </p:sp>
-      <p:sp>
-        <p:nvSpPr>
-          <p:cNvPr id="21" name="TextBox 20"/>
-          <p:cNvSpPr txBox="1"/>
-          <p:nvPr/>
-        </p:nvSpPr>
-        <p:spPr>
-          <a:xfrm>
-            <a:off x="8046720" y="2788920"/>
-            <a:ext cx="3017520" cy="274320"/>
-          </a:xfrm>
-          <a:prstGeom prst="rect">
-            <a:avLst/>
-          </a:prstGeom>
-          <a:noFill/>
-        </p:spPr>
-        <p:txBody>
-          <a:bodyPr wrap="square" lIns="0" rIns="0" tIns="0" bIns="0">
-            <a:spAutoFit/>
-          </a:bodyPr>
-          <a:lstStyle/>
-          <a:p>
-            <a:pPr algn="l"/>
-            <a:r>
-              <a:rPr sz="1000" b="0" i="0">
+              <a:t>6–6.5 pts on UNC</a:t>
+            </a:r>
+          </a:p>
+        </p:txBody>
+      </p:sp>
+      <p:sp>
+        <p:nvSpPr>
+          <p:cNvPr id="28" name="TextBox 27"/>
+          <p:cNvSpPr txBox="1"/>
+          <p:nvPr/>
+        </p:nvSpPr>
+        <p:spPr>
+          <a:xfrm>
+            <a:off x="8046720" y="4590288"/>
+            <a:ext cx="3017520" cy="228600"/>
+          </a:xfrm>
+          <a:prstGeom prst="rect">
+            <a:avLst/>
+          </a:prstGeom>
+          <a:noFill/>
+        </p:spPr>
+        <p:txBody>
+          <a:bodyPr wrap="square" lIns="0" rIns="0" tIns="0" bIns="0">
+            <a:spAutoFit/>
+          </a:bodyPr>
+          <a:lstStyle/>
+          <a:p>
+            <a:pPr algn="l"/>
+            <a:r>
+              <a:rPr sz="850" b="0" i="0">
                 <a:solidFill>
                   <a:srgbClr val="CADCFC"/>
                 </a:solidFill>
                 <a:latin typeface="Arial"/>
               </a:rPr>
-              <a:t>machine</a:t>
-            </a:r>
-          </a:p>
-        </p:txBody>
-      </p:sp>
-      <p:sp>
-        <p:nvSpPr>
-          <p:cNvPr id="22" name="TextBox 21"/>
-          <p:cNvSpPr txBox="1"/>
-          <p:nvPr/>
-        </p:nvSpPr>
-        <p:spPr>
-          <a:xfrm>
-            <a:off x="8046720" y="3154680"/>
-            <a:ext cx="3017520" cy="502920"/>
-          </a:xfrm>
-          <a:prstGeom prst="rect">
-            <a:avLst/>
-          </a:prstGeom>
-          <a:noFill/>
-        </p:spPr>
-        <p:txBody>
-          <a:bodyPr wrap="square" lIns="0" rIns="0" tIns="0" bIns="0">
-            <a:spAutoFit/>
-          </a:bodyPr>
-          <a:lstStyle/>
-          <a:p>
-            <a:pPr algn="l"/>
-            <a:r>
-              <a:rPr sz="2200" b="1" i="0">
-                <a:solidFill>
-                  <a:srgbClr val="FFFFFF"/>
-                </a:solidFill>
-                <a:latin typeface="Arial"/>
-              </a:rPr>
-              <a:t>–7.5 / –8</a:t>
-            </a:r>
-          </a:p>
-        </p:txBody>
-      </p:sp>
-      <p:sp>
-        <p:nvSpPr>
-          <p:cNvPr id="23" name="TextBox 22"/>
-          <p:cNvSpPr txBox="1"/>
-          <p:nvPr/>
-        </p:nvSpPr>
-        <p:spPr>
-          <a:xfrm>
-            <a:off x="8046720" y="3611880"/>
-            <a:ext cx="3017520" cy="274320"/>
-          </a:xfrm>
-          <a:prstGeom prst="rect">
-            <a:avLst/>
-          </a:prstGeom>
-          <a:noFill/>
-        </p:spPr>
-        <p:txBody>
-          <a:bodyPr wrap="square" lIns="0" rIns="0" tIns="0" bIns="0">
-            <a:spAutoFit/>
-          </a:bodyPr>
-          <a:lstStyle/>
-          <a:p>
-            <a:pPr algn="l"/>
-            <a:r>
-              <a:rPr sz="1000" b="0" i="0">
-                <a:solidFill>
-                  <a:srgbClr val="CADCFC"/>
-                </a:solidFill>
-                <a:latin typeface="Arial"/>
-              </a:rPr>
-              <a:t>market (DK / Bovada)</a:t>
-            </a:r>
-          </a:p>
-        </p:txBody>
-      </p:sp>
-      <p:sp>
-        <p:nvSpPr>
-          <p:cNvPr id="24" name="TextBox 23"/>
-          <p:cNvSpPr txBox="1"/>
-          <p:nvPr/>
-        </p:nvSpPr>
-        <p:spPr>
-          <a:xfrm>
-            <a:off x="8046720" y="3977639"/>
-            <a:ext cx="3017520" cy="411480"/>
-          </a:xfrm>
-          <a:prstGeom prst="rect">
-            <a:avLst/>
-          </a:prstGeom>
-          <a:noFill/>
-        </p:spPr>
-        <p:txBody>
-          <a:bodyPr wrap="square" lIns="0" rIns="0" tIns="0" bIns="0">
-            <a:spAutoFit/>
-          </a:bodyPr>
-          <a:lstStyle/>
-          <a:p>
-            <a:pPr algn="l"/>
-            <a:r>
-              <a:rPr sz="1600" b="1" i="0">
-                <a:solidFill>
-                  <a:srgbClr val="F47321"/>
-                </a:solidFill>
-                <a:latin typeface="Arial"/>
-              </a:rPr>
-              <a:t>6–6.5 pts on UNC</a:t>
-            </a:r>
-          </a:p>
-        </p:txBody>
-      </p:sp>
-      <p:sp>
-        <p:nvSpPr>
-          <p:cNvPr id="25" name="TextBox 24"/>
-          <p:cNvSpPr txBox="1"/>
-          <p:nvPr/>
-        </p:nvSpPr>
-        <p:spPr>
-          <a:xfrm>
-            <a:off x="8046720" y="4370832"/>
-            <a:ext cx="3017520" cy="274320"/>
-          </a:xfrm>
-          <a:prstGeom prst="rect">
-            <a:avLst/>
-          </a:prstGeom>
-          <a:noFill/>
-        </p:spPr>
-        <p:txBody>
-          <a:bodyPr wrap="square" lIns="0" rIns="0" tIns="0" bIns="0">
-            <a:spAutoFit/>
-          </a:bodyPr>
-          <a:lstStyle/>
-          <a:p>
-            <a:pPr algn="l"/>
-            <a:r>
-              <a:rPr sz="1000" b="0" i="0">
-                <a:solidFill>
-                  <a:srgbClr val="CADCFC"/>
-                </a:solidFill>
-                <a:latin typeface="Arial"/>
-              </a:rPr>
               <a:t>the gap</a:t>
             </a:r>
           </a:p>
@@ -9654,14 +9864,14 @@
       </p:sp>
       <p:sp>
         <p:nvSpPr>
-          <p:cNvPr id="26" name="Rounded Rectangle 25"/>
+          <p:cNvPr id="29" name="Rounded Rectangle 28"/>
           <p:cNvSpPr/>
           <p:nvPr/>
         </p:nvSpPr>
         <p:spPr>
           <a:xfrm>
-            <a:off x="8046720" y="4892040"/>
-            <a:ext cx="3017520" cy="384048"/>
+            <a:off x="8046720" y="4882896"/>
+            <a:ext cx="3017520" cy="365760"/>
           </a:xfrm>
           <a:prstGeom prst="roundRect">
             <a:avLst/>
@@ -9698,14 +9908,14 @@
       </p:sp>
       <p:sp>
         <p:nvSpPr>
-          <p:cNvPr id="27" name="Rounded Rectangle 26"/>
+          <p:cNvPr id="30" name="Rounded Rectangle 29"/>
           <p:cNvSpPr/>
           <p:nvPr/>
         </p:nvSpPr>
         <p:spPr>
           <a:xfrm>
-            <a:off x="8046720" y="4892040"/>
-            <a:ext cx="1629460" cy="384048"/>
+            <a:off x="8046720" y="4882896"/>
+            <a:ext cx="1629460" cy="365760"/>
           </a:xfrm>
           <a:prstGeom prst="roundRect">
             <a:avLst/>
@@ -9742,13 +9952,13 @@
       </p:sp>
       <p:sp>
         <p:nvSpPr>
-          <p:cNvPr id="28" name="TextBox 27"/>
-          <p:cNvSpPr txBox="1"/>
-          <p:nvPr/>
-        </p:nvSpPr>
-        <p:spPr>
-          <a:xfrm>
-            <a:off x="8119872" y="4983479"/>
+          <p:cNvPr id="31" name="TextBox 30"/>
+          <p:cNvSpPr txBox="1"/>
+          <p:nvPr/>
+        </p:nvSpPr>
+        <p:spPr>
+          <a:xfrm>
+            <a:off x="8119872" y="4965192"/>
             <a:ext cx="2194560" cy="228600"/>
           </a:xfrm>
           <a:prstGeom prst="rect">
@@ -9777,13 +9987,13 @@
       </p:sp>
       <p:sp>
         <p:nvSpPr>
-          <p:cNvPr id="29" name="TextBox 28"/>
-          <p:cNvSpPr txBox="1"/>
-          <p:nvPr/>
-        </p:nvSpPr>
-        <p:spPr>
-          <a:xfrm>
-            <a:off x="8796528" y="4983479"/>
+          <p:cNvPr id="32" name="TextBox 31"/>
+          <p:cNvSpPr txBox="1"/>
+          <p:nvPr/>
+        </p:nvSpPr>
+        <p:spPr>
+          <a:xfrm>
+            <a:off x="8796528" y="4965192"/>
             <a:ext cx="2194560" cy="228600"/>
           </a:xfrm>
           <a:prstGeom prst="rect">
@@ -9812,13 +10022,48 @@
       </p:sp>
       <p:sp>
         <p:nvSpPr>
-          <p:cNvPr id="30" name="TextBox 29"/>
-          <p:cNvSpPr txBox="1"/>
-          <p:nvPr/>
-        </p:nvSpPr>
-        <p:spPr>
-          <a:xfrm>
-            <a:off x="8046720" y="5349240"/>
+          <p:cNvPr id="33" name="TextBox 32"/>
+          <p:cNvSpPr txBox="1"/>
+          <p:nvPr/>
+        </p:nvSpPr>
+        <p:spPr>
+          <a:xfrm>
+            <a:off x="8046720" y="5303520"/>
+            <a:ext cx="3017520" cy="228600"/>
+          </a:xfrm>
+          <a:prstGeom prst="rect">
+            <a:avLst/>
+          </a:prstGeom>
+          <a:noFill/>
+        </p:spPr>
+        <p:txBody>
+          <a:bodyPr wrap="square" lIns="0" rIns="0" tIns="0" bIns="0">
+            <a:spAutoFit/>
+          </a:bodyPr>
+          <a:lstStyle/>
+          <a:p>
+            <a:pPr algn="l"/>
+            <a:r>
+              <a:rPr sz="850" b="0" i="0">
+                <a:solidFill>
+                  <a:srgbClr val="CADCFC"/>
+                </a:solidFill>
+                <a:latin typeface="Arial"/>
+              </a:rPr>
+              <a:t>win probability (machine)</a:t>
+            </a:r>
+          </a:p>
+        </p:txBody>
+      </p:sp>
+      <p:sp>
+        <p:nvSpPr>
+          <p:cNvPr id="34" name="TextBox 33"/>
+          <p:cNvSpPr txBox="1"/>
+          <p:nvPr/>
+        </p:nvSpPr>
+        <p:spPr>
+          <a:xfrm>
+            <a:off x="8046720" y="5550408"/>
             <a:ext cx="3017520" cy="274320"/>
           </a:xfrm>
           <a:prstGeom prst="rect">
@@ -9834,41 +10079,6 @@
           <a:p>
             <a:pPr algn="l"/>
             <a:r>
-              <a:rPr sz="950" b="0" i="0">
-                <a:solidFill>
-                  <a:srgbClr val="CADCFC"/>
-                </a:solidFill>
-                <a:latin typeface="Arial"/>
-              </a:rPr>
-              <a:t>win probability (machine)</a:t>
-            </a:r>
-          </a:p>
-        </p:txBody>
-      </p:sp>
-      <p:sp>
-        <p:nvSpPr>
-          <p:cNvPr id="31" name="TextBox 30"/>
-          <p:cNvSpPr txBox="1"/>
-          <p:nvPr/>
-        </p:nvSpPr>
-        <p:spPr>
-          <a:xfrm>
-            <a:off x="8046720" y="5532120"/>
-            <a:ext cx="3017520" cy="274320"/>
-          </a:xfrm>
-          <a:prstGeom prst="rect">
-            <a:avLst/>
-          </a:prstGeom>
-          <a:noFill/>
-        </p:spPr>
-        <p:txBody>
-          <a:bodyPr wrap="square" lIns="0" rIns="0" tIns="0" bIns="0">
-            <a:spAutoFit/>
-          </a:bodyPr>
-          <a:lstStyle/>
-          <a:p>
-            <a:pPr algn="l"/>
-            <a:r>
               <a:rPr sz="950" b="1" i="0">
                 <a:solidFill>
                   <a:srgbClr val="F47321"/>
@@ -9882,7 +10092,7 @@
       </p:sp>
       <p:sp>
         <p:nvSpPr>
-          <p:cNvPr id="32" name="TextBox 31"/>
+          <p:cNvPr id="35" name="TextBox 34"/>
           <p:cNvSpPr txBox="1"/>
           <p:nvPr/>
         </p:nvSpPr>
@@ -9917,7 +10127,7 @@
       </p:sp>
       <p:sp>
         <p:nvSpPr>
-          <p:cNvPr id="33" name="TextBox 32"/>
+          <p:cNvPr id="36" name="TextBox 35"/>
           <p:cNvSpPr txBox="1"/>
           <p:nvPr/>
         </p:nvSpPr>
@@ -11582,8 +11792,8 @@
         </p:nvSpPr>
         <p:spPr>
           <a:xfrm>
-            <a:off x="7772400" y="1600200"/>
-            <a:ext cx="3566160" cy="4206240"/>
+            <a:off x="7772400" y="1554480"/>
+            <a:ext cx="3566160" cy="4370832"/>
           </a:xfrm>
           <a:prstGeom prst="roundRect">
             <a:avLst/>
@@ -11626,7 +11836,287 @@
         </p:nvSpPr>
         <p:spPr>
           <a:xfrm>
-            <a:off x="8046720" y="1828800"/>
+            <a:off x="8046720" y="1737360"/>
+            <a:ext cx="3017520" cy="274320"/>
+          </a:xfrm>
+          <a:prstGeom prst="rect">
+            <a:avLst/>
+          </a:prstGeom>
+          <a:noFill/>
+        </p:spPr>
+        <p:txBody>
+          <a:bodyPr wrap="square" lIns="0" rIns="0" tIns="0" bIns="0">
+            <a:spAutoFit/>
+          </a:bodyPr>
+          <a:lstStyle/>
+          <a:p>
+            <a:pPr algn="l"/>
+            <a:r>
+              <a:rPr sz="1200" b="1" i="0">
+                <a:solidFill>
+                  <a:srgbClr val="F47321"/>
+                </a:solidFill>
+                <a:latin typeface="Arial"/>
+              </a:rPr>
+              <a:t>THE NUMBER</a:t>
+            </a:r>
+          </a:p>
+        </p:txBody>
+      </p:sp>
+      <p:sp>
+        <p:nvSpPr>
+          <p:cNvPr id="20" name="TextBox 19"/>
+          <p:cNvSpPr txBox="1"/>
+          <p:nvPr/>
+        </p:nvSpPr>
+        <p:spPr>
+          <a:xfrm>
+            <a:off x="8046720" y="2011680"/>
+            <a:ext cx="3017520" cy="457200"/>
+          </a:xfrm>
+          <a:prstGeom prst="rect">
+            <a:avLst/>
+          </a:prstGeom>
+          <a:noFill/>
+        </p:spPr>
+        <p:txBody>
+          <a:bodyPr wrap="square" lIns="0" rIns="0" tIns="0" bIns="0">
+            <a:spAutoFit/>
+          </a:bodyPr>
+          <a:lstStyle/>
+          <a:p>
+            <a:pPr algn="l"/>
+            <a:r>
+              <a:rPr sz="2600" b="1" i="0">
+                <a:solidFill>
+                  <a:srgbClr val="FFFFFF"/>
+                </a:solidFill>
+                <a:latin typeface="Arial"/>
+              </a:rPr>
+              <a:t>UVA –6.5</a:t>
+            </a:r>
+          </a:p>
+        </p:txBody>
+      </p:sp>
+      <p:sp>
+        <p:nvSpPr>
+          <p:cNvPr id="21" name="TextBox 20"/>
+          <p:cNvSpPr txBox="1"/>
+          <p:nvPr/>
+        </p:nvSpPr>
+        <p:spPr>
+          <a:xfrm>
+            <a:off x="8046720" y="2450592"/>
+            <a:ext cx="3017520" cy="274320"/>
+          </a:xfrm>
+          <a:prstGeom prst="rect">
+            <a:avLst/>
+          </a:prstGeom>
+          <a:noFill/>
+        </p:spPr>
+        <p:txBody>
+          <a:bodyPr wrap="square" lIns="0" rIns="0" tIns="0" bIns="0">
+            <a:spAutoFit/>
+          </a:bodyPr>
+          <a:lstStyle/>
+          <a:p>
+            <a:pPr algn="l"/>
+            <a:r>
+              <a:rPr sz="1150" b="1" i="0">
+                <a:solidFill>
+                  <a:srgbClr val="FFFFFF"/>
+                </a:solidFill>
+                <a:latin typeface="Arial"/>
+              </a:rPr>
+              <a:t>UVA –187 · NCSU +187</a:t>
+            </a:r>
+          </a:p>
+        </p:txBody>
+      </p:sp>
+      <p:sp>
+        <p:nvSpPr>
+          <p:cNvPr id="22" name="TextBox 21"/>
+          <p:cNvSpPr txBox="1"/>
+          <p:nvPr/>
+        </p:nvSpPr>
+        <p:spPr>
+          <a:xfrm>
+            <a:off x="8046720" y="2688336"/>
+            <a:ext cx="3017520" cy="256032"/>
+          </a:xfrm>
+          <a:prstGeom prst="rect">
+            <a:avLst/>
+          </a:prstGeom>
+          <a:noFill/>
+        </p:spPr>
+        <p:txBody>
+          <a:bodyPr wrap="square" lIns="0" rIns="0" tIns="0" bIns="0">
+            <a:spAutoFit/>
+          </a:bodyPr>
+          <a:lstStyle/>
+          <a:p>
+            <a:pPr algn="l"/>
+            <a:r>
+              <a:rPr sz="850" b="0" i="0">
+                <a:solidFill>
+                  <a:srgbClr val="CADCFC"/>
+                </a:solidFill>
+                <a:latin typeface="Arial"/>
+              </a:rPr>
+              <a:t>machine line · fair odds, no vig · raw margin UVA +6.7</a:t>
+            </a:r>
+          </a:p>
+        </p:txBody>
+      </p:sp>
+      <p:sp>
+        <p:nvSpPr>
+          <p:cNvPr id="23" name="TextBox 22"/>
+          <p:cNvSpPr txBox="1"/>
+          <p:nvPr/>
+        </p:nvSpPr>
+        <p:spPr>
+          <a:xfrm>
+            <a:off x="8046720" y="3017520"/>
+            <a:ext cx="3017520" cy="365760"/>
+          </a:xfrm>
+          <a:prstGeom prst="rect">
+            <a:avLst/>
+          </a:prstGeom>
+          <a:noFill/>
+        </p:spPr>
+        <p:txBody>
+          <a:bodyPr wrap="square" lIns="0" rIns="0" tIns="0" bIns="0">
+            <a:spAutoFit/>
+          </a:bodyPr>
+          <a:lstStyle/>
+          <a:p>
+            <a:pPr algn="l"/>
+            <a:r>
+              <a:rPr sz="1700" b="1" i="0">
+                <a:solidFill>
+                  <a:srgbClr val="FFFFFF"/>
+                </a:solidFill>
+                <a:latin typeface="Arial"/>
+              </a:rPr>
+              <a:t>UVA 30 – NCSU 23</a:t>
+            </a:r>
+          </a:p>
+        </p:txBody>
+      </p:sp>
+      <p:sp>
+        <p:nvSpPr>
+          <p:cNvPr id="24" name="TextBox 23"/>
+          <p:cNvSpPr txBox="1"/>
+          <p:nvPr/>
+        </p:nvSpPr>
+        <p:spPr>
+          <a:xfrm>
+            <a:off x="8046720" y="3328416"/>
+            <a:ext cx="3017520" cy="256032"/>
+          </a:xfrm>
+          <a:prstGeom prst="rect">
+            <a:avLst/>
+          </a:prstGeom>
+          <a:noFill/>
+        </p:spPr>
+        <p:txBody>
+          <a:bodyPr wrap="square" lIns="0" rIns="0" tIns="0" bIns="0">
+            <a:spAutoFit/>
+          </a:bodyPr>
+          <a:lstStyle/>
+          <a:p>
+            <a:pPr algn="l"/>
+            <a:r>
+              <a:rPr sz="850" b="0" i="0">
+                <a:solidFill>
+                  <a:srgbClr val="CADCFC"/>
+                </a:solidFill>
+                <a:latin typeface="Arial"/>
+              </a:rPr>
+              <a:t>projected score · machine margin on the 53.5 market total</a:t>
+            </a:r>
+          </a:p>
+        </p:txBody>
+      </p:sp>
+      <p:sp>
+        <p:nvSpPr>
+          <p:cNvPr id="25" name="TextBox 24"/>
+          <p:cNvSpPr txBox="1"/>
+          <p:nvPr/>
+        </p:nvSpPr>
+        <p:spPr>
+          <a:xfrm>
+            <a:off x="8046720" y="3639312"/>
+            <a:ext cx="3017520" cy="365760"/>
+          </a:xfrm>
+          <a:prstGeom prst="rect">
+            <a:avLst/>
+          </a:prstGeom>
+          <a:noFill/>
+        </p:spPr>
+        <p:txBody>
+          <a:bodyPr wrap="square" lIns="0" rIns="0" tIns="0" bIns="0">
+            <a:spAutoFit/>
+          </a:bodyPr>
+          <a:lstStyle/>
+          <a:p>
+            <a:pPr algn="l"/>
+            <a:r>
+              <a:rPr sz="1700" b="1" i="0">
+                <a:solidFill>
+                  <a:srgbClr val="FFFFFF"/>
+                </a:solidFill>
+                <a:latin typeface="Arial"/>
+              </a:rPr>
+              <a:t>–5.5 / –5.5</a:t>
+            </a:r>
+          </a:p>
+        </p:txBody>
+      </p:sp>
+      <p:sp>
+        <p:nvSpPr>
+          <p:cNvPr id="26" name="TextBox 25"/>
+          <p:cNvSpPr txBox="1"/>
+          <p:nvPr/>
+        </p:nvSpPr>
+        <p:spPr>
+          <a:xfrm>
+            <a:off x="8046720" y="3950208"/>
+            <a:ext cx="3017520" cy="365760"/>
+          </a:xfrm>
+          <a:prstGeom prst="rect">
+            <a:avLst/>
+          </a:prstGeom>
+          <a:noFill/>
+        </p:spPr>
+        <p:txBody>
+          <a:bodyPr wrap="square" lIns="0" rIns="0" tIns="0" bIns="0">
+            <a:spAutoFit/>
+          </a:bodyPr>
+          <a:lstStyle/>
+          <a:p>
+            <a:pPr algn="l"/>
+            <a:r>
+              <a:rPr sz="850" b="0" i="0">
+                <a:solidFill>
+                  <a:srgbClr val="CADCFC"/>
+                </a:solidFill>
+                <a:latin typeface="Arial"/>
+              </a:rPr>
+              <a:t>market (DK / Bovada) · DK UVA -218 / NCSU +180 · Bov UVA -145 / NCSU +125</a:t>
+            </a:r>
+          </a:p>
+        </p:txBody>
+      </p:sp>
+      <p:sp>
+        <p:nvSpPr>
+          <p:cNvPr id="27" name="TextBox 26"/>
+          <p:cNvSpPr txBox="1"/>
+          <p:nvPr/>
+        </p:nvSpPr>
+        <p:spPr>
+          <a:xfrm>
+            <a:off x="8046720" y="4315968"/>
             <a:ext cx="3017520" cy="320040"/>
           </a:xfrm>
           <a:prstGeom prst="rect">
@@ -11642,222 +12132,47 @@
           <a:p>
             <a:pPr algn="l"/>
             <a:r>
-              <a:rPr sz="1200" b="1" i="0">
+              <a:rPr sz="1150" b="1" i="0">
                 <a:solidFill>
                   <a:srgbClr val="F47321"/>
                 </a:solidFill>
                 <a:latin typeface="Arial"/>
               </a:rPr>
-              <a:t>THE NUMBER</a:t>
-            </a:r>
-          </a:p>
-        </p:txBody>
-      </p:sp>
-      <p:sp>
-        <p:nvSpPr>
-          <p:cNvPr id="20" name="TextBox 19"/>
-          <p:cNvSpPr txBox="1"/>
-          <p:nvPr/>
-        </p:nvSpPr>
-        <p:spPr>
-          <a:xfrm>
-            <a:off x="8046720" y="2194560"/>
-            <a:ext cx="3017520" cy="640080"/>
-          </a:xfrm>
-          <a:prstGeom prst="rect">
-            <a:avLst/>
-          </a:prstGeom>
-          <a:noFill/>
-        </p:spPr>
-        <p:txBody>
-          <a:bodyPr wrap="square" lIns="0" rIns="0" tIns="0" bIns="0">
-            <a:spAutoFit/>
-          </a:bodyPr>
-          <a:lstStyle/>
-          <a:p>
-            <a:pPr algn="l"/>
-            <a:r>
-              <a:rPr sz="3000" b="1" i="0">
-                <a:solidFill>
-                  <a:srgbClr val="FFFFFF"/>
-                </a:solidFill>
-                <a:latin typeface="Arial"/>
-              </a:rPr>
-              <a:t>UVA –6.7</a:t>
-            </a:r>
-          </a:p>
-        </p:txBody>
-      </p:sp>
-      <p:sp>
-        <p:nvSpPr>
-          <p:cNvPr id="21" name="TextBox 20"/>
-          <p:cNvSpPr txBox="1"/>
-          <p:nvPr/>
-        </p:nvSpPr>
-        <p:spPr>
-          <a:xfrm>
-            <a:off x="8046720" y="2788920"/>
-            <a:ext cx="3017520" cy="274320"/>
-          </a:xfrm>
-          <a:prstGeom prst="rect">
-            <a:avLst/>
-          </a:prstGeom>
-          <a:noFill/>
-        </p:spPr>
-        <p:txBody>
-          <a:bodyPr wrap="square" lIns="0" rIns="0" tIns="0" bIns="0">
-            <a:spAutoFit/>
-          </a:bodyPr>
-          <a:lstStyle/>
-          <a:p>
-            <a:pPr algn="l"/>
-            <a:r>
-              <a:rPr sz="1000" b="0" i="0">
+              <a:t>EDGE GONE — market converged</a:t>
+            </a:r>
+          </a:p>
+        </p:txBody>
+      </p:sp>
+      <p:sp>
+        <p:nvSpPr>
+          <p:cNvPr id="28" name="TextBox 27"/>
+          <p:cNvSpPr txBox="1"/>
+          <p:nvPr/>
+        </p:nvSpPr>
+        <p:spPr>
+          <a:xfrm>
+            <a:off x="8046720" y="4590288"/>
+            <a:ext cx="3017520" cy="228600"/>
+          </a:xfrm>
+          <a:prstGeom prst="rect">
+            <a:avLst/>
+          </a:prstGeom>
+          <a:noFill/>
+        </p:spPr>
+        <p:txBody>
+          <a:bodyPr wrap="square" lIns="0" rIns="0" tIns="0" bIns="0">
+            <a:spAutoFit/>
+          </a:bodyPr>
+          <a:lstStyle/>
+          <a:p>
+            <a:pPr algn="l"/>
+            <a:r>
+              <a:rPr sz="850" b="0" i="0">
                 <a:solidFill>
                   <a:srgbClr val="CADCFC"/>
                 </a:solidFill>
                 <a:latin typeface="Arial"/>
               </a:rPr>
-              <a:t>machine</a:t>
-            </a:r>
-          </a:p>
-        </p:txBody>
-      </p:sp>
-      <p:sp>
-        <p:nvSpPr>
-          <p:cNvPr id="22" name="TextBox 21"/>
-          <p:cNvSpPr txBox="1"/>
-          <p:nvPr/>
-        </p:nvSpPr>
-        <p:spPr>
-          <a:xfrm>
-            <a:off x="8046720" y="3154680"/>
-            <a:ext cx="3017520" cy="502920"/>
-          </a:xfrm>
-          <a:prstGeom prst="rect">
-            <a:avLst/>
-          </a:prstGeom>
-          <a:noFill/>
-        </p:spPr>
-        <p:txBody>
-          <a:bodyPr wrap="square" lIns="0" rIns="0" tIns="0" bIns="0">
-            <a:spAutoFit/>
-          </a:bodyPr>
-          <a:lstStyle/>
-          <a:p>
-            <a:pPr algn="l"/>
-            <a:r>
-              <a:rPr sz="2200" b="1" i="0">
-                <a:solidFill>
-                  <a:srgbClr val="FFFFFF"/>
-                </a:solidFill>
-                <a:latin typeface="Arial"/>
-              </a:rPr>
-              <a:t>–5.5 / –5.5</a:t>
-            </a:r>
-          </a:p>
-        </p:txBody>
-      </p:sp>
-      <p:sp>
-        <p:nvSpPr>
-          <p:cNvPr id="23" name="TextBox 22"/>
-          <p:cNvSpPr txBox="1"/>
-          <p:nvPr/>
-        </p:nvSpPr>
-        <p:spPr>
-          <a:xfrm>
-            <a:off x="8046720" y="3611880"/>
-            <a:ext cx="3017520" cy="274320"/>
-          </a:xfrm>
-          <a:prstGeom prst="rect">
-            <a:avLst/>
-          </a:prstGeom>
-          <a:noFill/>
-        </p:spPr>
-        <p:txBody>
-          <a:bodyPr wrap="square" lIns="0" rIns="0" tIns="0" bIns="0">
-            <a:spAutoFit/>
-          </a:bodyPr>
-          <a:lstStyle/>
-          <a:p>
-            <a:pPr algn="l"/>
-            <a:r>
-              <a:rPr sz="1000" b="0" i="0">
-                <a:solidFill>
-                  <a:srgbClr val="CADCFC"/>
-                </a:solidFill>
-                <a:latin typeface="Arial"/>
-              </a:rPr>
-              <a:t>market (DK / Bovada)</a:t>
-            </a:r>
-          </a:p>
-        </p:txBody>
-      </p:sp>
-      <p:sp>
-        <p:nvSpPr>
-          <p:cNvPr id="24" name="TextBox 23"/>
-          <p:cNvSpPr txBox="1"/>
-          <p:nvPr/>
-        </p:nvSpPr>
-        <p:spPr>
-          <a:xfrm>
-            <a:off x="8046720" y="3977639"/>
-            <a:ext cx="3017520" cy="411480"/>
-          </a:xfrm>
-          <a:prstGeom prst="rect">
-            <a:avLst/>
-          </a:prstGeom>
-          <a:noFill/>
-        </p:spPr>
-        <p:txBody>
-          <a:bodyPr wrap="square" lIns="0" rIns="0" tIns="0" bIns="0">
-            <a:spAutoFit/>
-          </a:bodyPr>
-          <a:lstStyle/>
-          <a:p>
-            <a:pPr algn="l"/>
-            <a:r>
-              <a:rPr sz="1250" b="1" i="0">
-                <a:solidFill>
-                  <a:srgbClr val="F47321"/>
-                </a:solidFill>
-                <a:latin typeface="Arial"/>
-              </a:rPr>
-              <a:t>EDGE GONE — market converged</a:t>
-            </a:r>
-          </a:p>
-        </p:txBody>
-      </p:sp>
-      <p:sp>
-        <p:nvSpPr>
-          <p:cNvPr id="25" name="TextBox 24"/>
-          <p:cNvSpPr txBox="1"/>
-          <p:nvPr/>
-        </p:nvSpPr>
-        <p:spPr>
-          <a:xfrm>
-            <a:off x="8046720" y="4370832"/>
-            <a:ext cx="3017520" cy="274320"/>
-          </a:xfrm>
-          <a:prstGeom prst="rect">
-            <a:avLst/>
-          </a:prstGeom>
-          <a:noFill/>
-        </p:spPr>
-        <p:txBody>
-          <a:bodyPr wrap="square" lIns="0" rIns="0" tIns="0" bIns="0">
-            <a:spAutoFit/>
-          </a:bodyPr>
-          <a:lstStyle/>
-          <a:p>
-            <a:pPr algn="l"/>
-            <a:r>
-              <a:rPr sz="1000" b="0" i="0">
-                <a:solidFill>
-                  <a:srgbClr val="CADCFC"/>
-                </a:solidFill>
-                <a:latin typeface="Arial"/>
-              </a:rPr>
               <a:t>the gap</a:t>
             </a:r>
           </a:p>
@@ -11865,14 +12180,14 @@
       </p:sp>
       <p:sp>
         <p:nvSpPr>
-          <p:cNvPr id="26" name="Rounded Rectangle 25"/>
+          <p:cNvPr id="29" name="Rounded Rectangle 28"/>
           <p:cNvSpPr/>
           <p:nvPr/>
         </p:nvSpPr>
         <p:spPr>
           <a:xfrm>
-            <a:off x="8046720" y="4892040"/>
-            <a:ext cx="3017520" cy="384048"/>
+            <a:off x="8046720" y="4882896"/>
+            <a:ext cx="3017520" cy="365760"/>
           </a:xfrm>
           <a:prstGeom prst="roundRect">
             <a:avLst/>
@@ -11909,14 +12224,14 @@
       </p:sp>
       <p:sp>
         <p:nvSpPr>
-          <p:cNvPr id="27" name="Rounded Rectangle 26"/>
+          <p:cNvPr id="30" name="Rounded Rectangle 29"/>
           <p:cNvSpPr/>
           <p:nvPr/>
         </p:nvSpPr>
         <p:spPr>
           <a:xfrm>
-            <a:off x="8046720" y="4892040"/>
-            <a:ext cx="1961388" cy="384048"/>
+            <a:off x="8046720" y="4882896"/>
+            <a:ext cx="1961388" cy="365760"/>
           </a:xfrm>
           <a:prstGeom prst="roundRect">
             <a:avLst/>
@@ -11953,13 +12268,13 @@
       </p:sp>
       <p:sp>
         <p:nvSpPr>
-          <p:cNvPr id="28" name="TextBox 27"/>
-          <p:cNvSpPr txBox="1"/>
-          <p:nvPr/>
-        </p:nvSpPr>
-        <p:spPr>
-          <a:xfrm>
-            <a:off x="8119872" y="4983479"/>
+          <p:cNvPr id="31" name="TextBox 30"/>
+          <p:cNvSpPr txBox="1"/>
+          <p:nvPr/>
+        </p:nvSpPr>
+        <p:spPr>
+          <a:xfrm>
+            <a:off x="8119872" y="4965192"/>
             <a:ext cx="2194560" cy="228600"/>
           </a:xfrm>
           <a:prstGeom prst="rect">
@@ -11988,13 +12303,13 @@
       </p:sp>
       <p:sp>
         <p:nvSpPr>
-          <p:cNvPr id="29" name="TextBox 28"/>
-          <p:cNvSpPr txBox="1"/>
-          <p:nvPr/>
-        </p:nvSpPr>
-        <p:spPr>
-          <a:xfrm>
-            <a:off x="8796528" y="4983479"/>
+          <p:cNvPr id="32" name="TextBox 31"/>
+          <p:cNvSpPr txBox="1"/>
+          <p:nvPr/>
+        </p:nvSpPr>
+        <p:spPr>
+          <a:xfrm>
+            <a:off x="8796528" y="4965192"/>
             <a:ext cx="2194560" cy="228600"/>
           </a:xfrm>
           <a:prstGeom prst="rect">
@@ -12023,13 +12338,48 @@
       </p:sp>
       <p:sp>
         <p:nvSpPr>
-          <p:cNvPr id="30" name="TextBox 29"/>
-          <p:cNvSpPr txBox="1"/>
-          <p:nvPr/>
-        </p:nvSpPr>
-        <p:spPr>
-          <a:xfrm>
-            <a:off x="8046720" y="5349240"/>
+          <p:cNvPr id="33" name="TextBox 32"/>
+          <p:cNvSpPr txBox="1"/>
+          <p:nvPr/>
+        </p:nvSpPr>
+        <p:spPr>
+          <a:xfrm>
+            <a:off x="8046720" y="5303520"/>
+            <a:ext cx="3017520" cy="228600"/>
+          </a:xfrm>
+          <a:prstGeom prst="rect">
+            <a:avLst/>
+          </a:prstGeom>
+          <a:noFill/>
+        </p:spPr>
+        <p:txBody>
+          <a:bodyPr wrap="square" lIns="0" rIns="0" tIns="0" bIns="0">
+            <a:spAutoFit/>
+          </a:bodyPr>
+          <a:lstStyle/>
+          <a:p>
+            <a:pPr algn="l"/>
+            <a:r>
+              <a:rPr sz="850" b="0" i="0">
+                <a:solidFill>
+                  <a:srgbClr val="CADCFC"/>
+                </a:solidFill>
+                <a:latin typeface="Arial"/>
+              </a:rPr>
+              <a:t>win probability (machine)</a:t>
+            </a:r>
+          </a:p>
+        </p:txBody>
+      </p:sp>
+      <p:sp>
+        <p:nvSpPr>
+          <p:cNvPr id="34" name="TextBox 33"/>
+          <p:cNvSpPr txBox="1"/>
+          <p:nvPr/>
+        </p:nvSpPr>
+        <p:spPr>
+          <a:xfrm>
+            <a:off x="8046720" y="5550408"/>
             <a:ext cx="3017520" cy="274320"/>
           </a:xfrm>
           <a:prstGeom prst="rect">
@@ -12045,41 +12395,6 @@
           <a:p>
             <a:pPr algn="l"/>
             <a:r>
-              <a:rPr sz="950" b="0" i="0">
-                <a:solidFill>
-                  <a:srgbClr val="CADCFC"/>
-                </a:solidFill>
-                <a:latin typeface="Arial"/>
-              </a:rPr>
-              <a:t>win probability (machine)</a:t>
-            </a:r>
-          </a:p>
-        </p:txBody>
-      </p:sp>
-      <p:sp>
-        <p:nvSpPr>
-          <p:cNvPr id="31" name="TextBox 30"/>
-          <p:cNvSpPr txBox="1"/>
-          <p:nvPr/>
-        </p:nvSpPr>
-        <p:spPr>
-          <a:xfrm>
-            <a:off x="8046720" y="5532120"/>
-            <a:ext cx="3017520" cy="274320"/>
-          </a:xfrm>
-          <a:prstGeom prst="rect">
-            <a:avLst/>
-          </a:prstGeom>
-          <a:noFill/>
-        </p:spPr>
-        <p:txBody>
-          <a:bodyPr wrap="square" lIns="0" rIns="0" tIns="0" bIns="0">
-            <a:spAutoFit/>
-          </a:bodyPr>
-          <a:lstStyle/>
-          <a:p>
-            <a:pPr algn="l"/>
-            <a:r>
               <a:rPr sz="950" b="1" i="0">
                 <a:solidFill>
                   <a:srgbClr val="F47321"/>
@@ -12093,7 +12408,7 @@
       </p:sp>
       <p:sp>
         <p:nvSpPr>
-          <p:cNvPr id="32" name="TextBox 31"/>
+          <p:cNvPr id="35" name="TextBox 34"/>
           <p:cNvSpPr txBox="1"/>
           <p:nvPr/>
         </p:nvSpPr>
@@ -12128,7 +12443,7 @@
       </p:sp>
       <p:sp>
         <p:nvSpPr>
-          <p:cNvPr id="33" name="TextBox 32"/>
+          <p:cNvPr id="36" name="TextBox 35"/>
           <p:cNvSpPr txBox="1"/>
           <p:nvPr/>
         </p:nvSpPr>
@@ -13793,8 +14108,8 @@
         </p:nvSpPr>
         <p:spPr>
           <a:xfrm>
-            <a:off x="7772400" y="1600200"/>
-            <a:ext cx="3566160" cy="4206240"/>
+            <a:off x="7772400" y="1554480"/>
+            <a:ext cx="3566160" cy="4370832"/>
           </a:xfrm>
           <a:prstGeom prst="roundRect">
             <a:avLst/>
@@ -13837,7 +14152,287 @@
         </p:nvSpPr>
         <p:spPr>
           <a:xfrm>
-            <a:off x="8046720" y="1828800"/>
+            <a:off x="8046720" y="1737360"/>
+            <a:ext cx="3017520" cy="274320"/>
+          </a:xfrm>
+          <a:prstGeom prst="rect">
+            <a:avLst/>
+          </a:prstGeom>
+          <a:noFill/>
+        </p:spPr>
+        <p:txBody>
+          <a:bodyPr wrap="square" lIns="0" rIns="0" tIns="0" bIns="0">
+            <a:spAutoFit/>
+          </a:bodyPr>
+          <a:lstStyle/>
+          <a:p>
+            <a:pPr algn="l"/>
+            <a:r>
+              <a:rPr sz="1200" b="1" i="0">
+                <a:solidFill>
+                  <a:srgbClr val="F47321"/>
+                </a:solidFill>
+                <a:latin typeface="Arial"/>
+              </a:rPr>
+              <a:t>THE NUMBER</a:t>
+            </a:r>
+          </a:p>
+        </p:txBody>
+      </p:sp>
+      <p:sp>
+        <p:nvSpPr>
+          <p:cNvPr id="20" name="TextBox 19"/>
+          <p:cNvSpPr txBox="1"/>
+          <p:nvPr/>
+        </p:nvSpPr>
+        <p:spPr>
+          <a:xfrm>
+            <a:off x="8046720" y="2011680"/>
+            <a:ext cx="3017520" cy="457200"/>
+          </a:xfrm>
+          <a:prstGeom prst="rect">
+            <a:avLst/>
+          </a:prstGeom>
+          <a:noFill/>
+        </p:spPr>
+        <p:txBody>
+          <a:bodyPr wrap="square" lIns="0" rIns="0" tIns="0" bIns="0">
+            <a:spAutoFit/>
+          </a:bodyPr>
+          <a:lstStyle/>
+          <a:p>
+            <a:pPr algn="l"/>
+            <a:r>
+              <a:rPr sz="2600" b="1" i="0">
+                <a:solidFill>
+                  <a:srgbClr val="FFFFFF"/>
+                </a:solidFill>
+                <a:latin typeface="Arial"/>
+              </a:rPr>
+              <a:t>NDSU –2.5</a:t>
+            </a:r>
+          </a:p>
+        </p:txBody>
+      </p:sp>
+      <p:sp>
+        <p:nvSpPr>
+          <p:cNvPr id="21" name="TextBox 20"/>
+          <p:cNvSpPr txBox="1"/>
+          <p:nvPr/>
+        </p:nvSpPr>
+        <p:spPr>
+          <a:xfrm>
+            <a:off x="8046720" y="2450592"/>
+            <a:ext cx="3017520" cy="274320"/>
+          </a:xfrm>
+          <a:prstGeom prst="rect">
+            <a:avLst/>
+          </a:prstGeom>
+          <a:noFill/>
+        </p:spPr>
+        <p:txBody>
+          <a:bodyPr wrap="square" lIns="0" rIns="0" tIns="0" bIns="0">
+            <a:spAutoFit/>
+          </a:bodyPr>
+          <a:lstStyle/>
+          <a:p>
+            <a:pPr algn="l"/>
+            <a:r>
+              <a:rPr sz="1150" b="1" i="0">
+                <a:solidFill>
+                  <a:srgbClr val="FFFFFF"/>
+                </a:solidFill>
+                <a:latin typeface="Arial"/>
+              </a:rPr>
+              <a:t>NDSU –131 · JSU +131</a:t>
+            </a:r>
+          </a:p>
+        </p:txBody>
+      </p:sp>
+      <p:sp>
+        <p:nvSpPr>
+          <p:cNvPr id="22" name="TextBox 21"/>
+          <p:cNvSpPr txBox="1"/>
+          <p:nvPr/>
+        </p:nvSpPr>
+        <p:spPr>
+          <a:xfrm>
+            <a:off x="8046720" y="2688336"/>
+            <a:ext cx="3017520" cy="256032"/>
+          </a:xfrm>
+          <a:prstGeom prst="rect">
+            <a:avLst/>
+          </a:prstGeom>
+          <a:noFill/>
+        </p:spPr>
+        <p:txBody>
+          <a:bodyPr wrap="square" lIns="0" rIns="0" tIns="0" bIns="0">
+            <a:spAutoFit/>
+          </a:bodyPr>
+          <a:lstStyle/>
+          <a:p>
+            <a:pPr algn="l"/>
+            <a:r>
+              <a:rPr sz="850" b="0" i="0">
+                <a:solidFill>
+                  <a:srgbClr val="CADCFC"/>
+                </a:solidFill>
+                <a:latin typeface="Arial"/>
+              </a:rPr>
+              <a:t>machine line · fair odds, no vig · raw margin NDSU +2.7</a:t>
+            </a:r>
+          </a:p>
+        </p:txBody>
+      </p:sp>
+      <p:sp>
+        <p:nvSpPr>
+          <p:cNvPr id="23" name="TextBox 22"/>
+          <p:cNvSpPr txBox="1"/>
+          <p:nvPr/>
+        </p:nvSpPr>
+        <p:spPr>
+          <a:xfrm>
+            <a:off x="8046720" y="3017520"/>
+            <a:ext cx="3017520" cy="365760"/>
+          </a:xfrm>
+          <a:prstGeom prst="rect">
+            <a:avLst/>
+          </a:prstGeom>
+          <a:noFill/>
+        </p:spPr>
+        <p:txBody>
+          <a:bodyPr wrap="square" lIns="0" rIns="0" tIns="0" bIns="0">
+            <a:spAutoFit/>
+          </a:bodyPr>
+          <a:lstStyle/>
+          <a:p>
+            <a:pPr algn="l"/>
+            <a:r>
+              <a:rPr sz="1700" b="1" i="0">
+                <a:solidFill>
+                  <a:srgbClr val="FFFFFF"/>
+                </a:solidFill>
+                <a:latin typeface="Arial"/>
+              </a:rPr>
+              <a:t>NDSU 25 – JSU 22</a:t>
+            </a:r>
+          </a:p>
+        </p:txBody>
+      </p:sp>
+      <p:sp>
+        <p:nvSpPr>
+          <p:cNvPr id="24" name="TextBox 23"/>
+          <p:cNvSpPr txBox="1"/>
+          <p:nvPr/>
+        </p:nvSpPr>
+        <p:spPr>
+          <a:xfrm>
+            <a:off x="8046720" y="3328416"/>
+            <a:ext cx="3017520" cy="256032"/>
+          </a:xfrm>
+          <a:prstGeom prst="rect">
+            <a:avLst/>
+          </a:prstGeom>
+          <a:noFill/>
+        </p:spPr>
+        <p:txBody>
+          <a:bodyPr wrap="square" lIns="0" rIns="0" tIns="0" bIns="0">
+            <a:spAutoFit/>
+          </a:bodyPr>
+          <a:lstStyle/>
+          <a:p>
+            <a:pPr algn="l"/>
+            <a:r>
+              <a:rPr sz="850" b="0" i="0">
+                <a:solidFill>
+                  <a:srgbClr val="CADCFC"/>
+                </a:solidFill>
+                <a:latin typeface="Arial"/>
+              </a:rPr>
+              <a:t>projected score · machine margin on the 46.5 market total</a:t>
+            </a:r>
+          </a:p>
+        </p:txBody>
+      </p:sp>
+      <p:sp>
+        <p:nvSpPr>
+          <p:cNvPr id="25" name="TextBox 24"/>
+          <p:cNvSpPr txBox="1"/>
+          <p:nvPr/>
+        </p:nvSpPr>
+        <p:spPr>
+          <a:xfrm>
+            <a:off x="8046720" y="3639312"/>
+            <a:ext cx="3017520" cy="365760"/>
+          </a:xfrm>
+          <a:prstGeom prst="rect">
+            <a:avLst/>
+          </a:prstGeom>
+          <a:noFill/>
+        </p:spPr>
+        <p:txBody>
+          <a:bodyPr wrap="square" lIns="0" rIns="0" tIns="0" bIns="0">
+            <a:spAutoFit/>
+          </a:bodyPr>
+          <a:lstStyle/>
+          <a:p>
+            <a:pPr algn="l"/>
+            <a:r>
+              <a:rPr sz="1700" b="1" i="0">
+                <a:solidFill>
+                  <a:srgbClr val="FFFFFF"/>
+                </a:solidFill>
+                <a:latin typeface="Arial"/>
+              </a:rPr>
+              <a:t>–7 / –7</a:t>
+            </a:r>
+          </a:p>
+        </p:txBody>
+      </p:sp>
+      <p:sp>
+        <p:nvSpPr>
+          <p:cNvPr id="26" name="TextBox 25"/>
+          <p:cNvSpPr txBox="1"/>
+          <p:nvPr/>
+        </p:nvSpPr>
+        <p:spPr>
+          <a:xfrm>
+            <a:off x="8046720" y="3950208"/>
+            <a:ext cx="3017520" cy="365760"/>
+          </a:xfrm>
+          <a:prstGeom prst="rect">
+            <a:avLst/>
+          </a:prstGeom>
+          <a:noFill/>
+        </p:spPr>
+        <p:txBody>
+          <a:bodyPr wrap="square" lIns="0" rIns="0" tIns="0" bIns="0">
+            <a:spAutoFit/>
+          </a:bodyPr>
+          <a:lstStyle/>
+          <a:p>
+            <a:pPr algn="l"/>
+            <a:r>
+              <a:rPr sz="850" b="0" i="0">
+                <a:solidFill>
+                  <a:srgbClr val="CADCFC"/>
+                </a:solidFill>
+                <a:latin typeface="Arial"/>
+              </a:rPr>
+              <a:t>market (DK / Bovada) · DK NDSU -270 / JSU +220 · Bov NDSU -330 / JSU +265</a:t>
+            </a:r>
+          </a:p>
+        </p:txBody>
+      </p:sp>
+      <p:sp>
+        <p:nvSpPr>
+          <p:cNvPr id="27" name="TextBox 26"/>
+          <p:cNvSpPr txBox="1"/>
+          <p:nvPr/>
+        </p:nvSpPr>
+        <p:spPr>
+          <a:xfrm>
+            <a:off x="8046720" y="4315968"/>
             <a:ext cx="3017520" cy="320040"/>
           </a:xfrm>
           <a:prstGeom prst="rect">
@@ -13853,222 +14448,47 @@
           <a:p>
             <a:pPr algn="l"/>
             <a:r>
-              <a:rPr sz="1200" b="1" i="0">
+              <a:rPr sz="1400" b="1" i="0">
                 <a:solidFill>
                   <a:srgbClr val="F47321"/>
                 </a:solidFill>
                 <a:latin typeface="Arial"/>
               </a:rPr>
-              <a:t>THE NUMBER</a:t>
-            </a:r>
-          </a:p>
-        </p:txBody>
-      </p:sp>
-      <p:sp>
-        <p:nvSpPr>
-          <p:cNvPr id="20" name="TextBox 19"/>
-          <p:cNvSpPr txBox="1"/>
-          <p:nvPr/>
-        </p:nvSpPr>
-        <p:spPr>
-          <a:xfrm>
-            <a:off x="8046720" y="2194560"/>
-            <a:ext cx="3017520" cy="640080"/>
-          </a:xfrm>
-          <a:prstGeom prst="rect">
-            <a:avLst/>
-          </a:prstGeom>
-          <a:noFill/>
-        </p:spPr>
-        <p:txBody>
-          <a:bodyPr wrap="square" lIns="0" rIns="0" tIns="0" bIns="0">
-            <a:spAutoFit/>
-          </a:bodyPr>
-          <a:lstStyle/>
-          <a:p>
-            <a:pPr algn="l"/>
-            <a:r>
-              <a:rPr sz="3000" b="1" i="0">
-                <a:solidFill>
-                  <a:srgbClr val="FFFFFF"/>
-                </a:solidFill>
-                <a:latin typeface="Arial"/>
-              </a:rPr>
-              <a:t>NDSU –2.7</a:t>
-            </a:r>
-          </a:p>
-        </p:txBody>
-      </p:sp>
-      <p:sp>
-        <p:nvSpPr>
-          <p:cNvPr id="21" name="TextBox 20"/>
-          <p:cNvSpPr txBox="1"/>
-          <p:nvPr/>
-        </p:nvSpPr>
-        <p:spPr>
-          <a:xfrm>
-            <a:off x="8046720" y="2788920"/>
-            <a:ext cx="3017520" cy="274320"/>
-          </a:xfrm>
-          <a:prstGeom prst="rect">
-            <a:avLst/>
-          </a:prstGeom>
-          <a:noFill/>
-        </p:spPr>
-        <p:txBody>
-          <a:bodyPr wrap="square" lIns="0" rIns="0" tIns="0" bIns="0">
-            <a:spAutoFit/>
-          </a:bodyPr>
-          <a:lstStyle/>
-          <a:p>
-            <a:pPr algn="l"/>
-            <a:r>
-              <a:rPr sz="1000" b="0" i="0">
+              <a:t>+3 CLV banked</a:t>
+            </a:r>
+          </a:p>
+        </p:txBody>
+      </p:sp>
+      <p:sp>
+        <p:nvSpPr>
+          <p:cNvPr id="28" name="TextBox 27"/>
+          <p:cNvSpPr txBox="1"/>
+          <p:nvPr/>
+        </p:nvSpPr>
+        <p:spPr>
+          <a:xfrm>
+            <a:off x="8046720" y="4590288"/>
+            <a:ext cx="3017520" cy="228600"/>
+          </a:xfrm>
+          <a:prstGeom prst="rect">
+            <a:avLst/>
+          </a:prstGeom>
+          <a:noFill/>
+        </p:spPr>
+        <p:txBody>
+          <a:bodyPr wrap="square" lIns="0" rIns="0" tIns="0" bIns="0">
+            <a:spAutoFit/>
+          </a:bodyPr>
+          <a:lstStyle/>
+          <a:p>
+            <a:pPr algn="l"/>
+            <a:r>
+              <a:rPr sz="850" b="0" i="0">
                 <a:solidFill>
                   <a:srgbClr val="CADCFC"/>
                 </a:solidFill>
                 <a:latin typeface="Arial"/>
               </a:rPr>
-              <a:t>machine</a:t>
-            </a:r>
-          </a:p>
-        </p:txBody>
-      </p:sp>
-      <p:sp>
-        <p:nvSpPr>
-          <p:cNvPr id="22" name="TextBox 21"/>
-          <p:cNvSpPr txBox="1"/>
-          <p:nvPr/>
-        </p:nvSpPr>
-        <p:spPr>
-          <a:xfrm>
-            <a:off x="8046720" y="3154680"/>
-            <a:ext cx="3017520" cy="502920"/>
-          </a:xfrm>
-          <a:prstGeom prst="rect">
-            <a:avLst/>
-          </a:prstGeom>
-          <a:noFill/>
-        </p:spPr>
-        <p:txBody>
-          <a:bodyPr wrap="square" lIns="0" rIns="0" tIns="0" bIns="0">
-            <a:spAutoFit/>
-          </a:bodyPr>
-          <a:lstStyle/>
-          <a:p>
-            <a:pPr algn="l"/>
-            <a:r>
-              <a:rPr sz="2200" b="1" i="0">
-                <a:solidFill>
-                  <a:srgbClr val="FFFFFF"/>
-                </a:solidFill>
-                <a:latin typeface="Arial"/>
-              </a:rPr>
-              <a:t>–7 / –7</a:t>
-            </a:r>
-          </a:p>
-        </p:txBody>
-      </p:sp>
-      <p:sp>
-        <p:nvSpPr>
-          <p:cNvPr id="23" name="TextBox 22"/>
-          <p:cNvSpPr txBox="1"/>
-          <p:nvPr/>
-        </p:nvSpPr>
-        <p:spPr>
-          <a:xfrm>
-            <a:off x="8046720" y="3611880"/>
-            <a:ext cx="3017520" cy="274320"/>
-          </a:xfrm>
-          <a:prstGeom prst="rect">
-            <a:avLst/>
-          </a:prstGeom>
-          <a:noFill/>
-        </p:spPr>
-        <p:txBody>
-          <a:bodyPr wrap="square" lIns="0" rIns="0" tIns="0" bIns="0">
-            <a:spAutoFit/>
-          </a:bodyPr>
-          <a:lstStyle/>
-          <a:p>
-            <a:pPr algn="l"/>
-            <a:r>
-              <a:rPr sz="1000" b="0" i="0">
-                <a:solidFill>
-                  <a:srgbClr val="CADCFC"/>
-                </a:solidFill>
-                <a:latin typeface="Arial"/>
-              </a:rPr>
-              <a:t>market (DK / Bovada)</a:t>
-            </a:r>
-          </a:p>
-        </p:txBody>
-      </p:sp>
-      <p:sp>
-        <p:nvSpPr>
-          <p:cNvPr id="24" name="TextBox 23"/>
-          <p:cNvSpPr txBox="1"/>
-          <p:nvPr/>
-        </p:nvSpPr>
-        <p:spPr>
-          <a:xfrm>
-            <a:off x="8046720" y="3977639"/>
-            <a:ext cx="3017520" cy="411480"/>
-          </a:xfrm>
-          <a:prstGeom prst="rect">
-            <a:avLst/>
-          </a:prstGeom>
-          <a:noFill/>
-        </p:spPr>
-        <p:txBody>
-          <a:bodyPr wrap="square" lIns="0" rIns="0" tIns="0" bIns="0">
-            <a:spAutoFit/>
-          </a:bodyPr>
-          <a:lstStyle/>
-          <a:p>
-            <a:pPr algn="l"/>
-            <a:r>
-              <a:rPr sz="1600" b="1" i="0">
-                <a:solidFill>
-                  <a:srgbClr val="F47321"/>
-                </a:solidFill>
-                <a:latin typeface="Arial"/>
-              </a:rPr>
-              <a:t>+3 CLV banked</a:t>
-            </a:r>
-          </a:p>
-        </p:txBody>
-      </p:sp>
-      <p:sp>
-        <p:nvSpPr>
-          <p:cNvPr id="25" name="TextBox 24"/>
-          <p:cNvSpPr txBox="1"/>
-          <p:nvPr/>
-        </p:nvSpPr>
-        <p:spPr>
-          <a:xfrm>
-            <a:off x="8046720" y="4370832"/>
-            <a:ext cx="3017520" cy="274320"/>
-          </a:xfrm>
-          <a:prstGeom prst="rect">
-            <a:avLst/>
-          </a:prstGeom>
-          <a:noFill/>
-        </p:spPr>
-        <p:txBody>
-          <a:bodyPr wrap="square" lIns="0" rIns="0" tIns="0" bIns="0">
-            <a:spAutoFit/>
-          </a:bodyPr>
-          <a:lstStyle/>
-          <a:p>
-            <a:pPr algn="l"/>
-            <a:r>
-              <a:rPr sz="1000" b="0" i="0">
-                <a:solidFill>
-                  <a:srgbClr val="CADCFC"/>
-                </a:solidFill>
-                <a:latin typeface="Arial"/>
-              </a:rPr>
               <a:t>the gap</a:t>
             </a:r>
           </a:p>
@@ -14076,14 +14496,14 @@
       </p:sp>
       <p:sp>
         <p:nvSpPr>
-          <p:cNvPr id="26" name="Rounded Rectangle 25"/>
+          <p:cNvPr id="29" name="Rounded Rectangle 28"/>
           <p:cNvSpPr/>
           <p:nvPr/>
         </p:nvSpPr>
         <p:spPr>
           <a:xfrm>
-            <a:off x="8046720" y="4892040"/>
-            <a:ext cx="3017520" cy="384048"/>
+            <a:off x="8046720" y="4882896"/>
+            <a:ext cx="3017520" cy="365760"/>
           </a:xfrm>
           <a:prstGeom prst="roundRect">
             <a:avLst/>
@@ -14120,14 +14540,14 @@
       </p:sp>
       <p:sp>
         <p:nvSpPr>
-          <p:cNvPr id="27" name="Rounded Rectangle 26"/>
+          <p:cNvPr id="30" name="Rounded Rectangle 29"/>
           <p:cNvSpPr/>
           <p:nvPr/>
         </p:nvSpPr>
         <p:spPr>
           <a:xfrm>
-            <a:off x="8046720" y="4892040"/>
-            <a:ext cx="1719986" cy="384048"/>
+            <a:off x="8046720" y="4882896"/>
+            <a:ext cx="1719986" cy="365760"/>
           </a:xfrm>
           <a:prstGeom prst="roundRect">
             <a:avLst/>
@@ -14164,13 +14584,13 @@
       </p:sp>
       <p:sp>
         <p:nvSpPr>
-          <p:cNvPr id="28" name="TextBox 27"/>
-          <p:cNvSpPr txBox="1"/>
-          <p:nvPr/>
-        </p:nvSpPr>
-        <p:spPr>
-          <a:xfrm>
-            <a:off x="8119872" y="4983479"/>
+          <p:cNvPr id="31" name="TextBox 30"/>
+          <p:cNvSpPr txBox="1"/>
+          <p:nvPr/>
+        </p:nvSpPr>
+        <p:spPr>
+          <a:xfrm>
+            <a:off x="8119872" y="4965192"/>
             <a:ext cx="2194560" cy="228600"/>
           </a:xfrm>
           <a:prstGeom prst="rect">
@@ -14199,13 +14619,13 @@
       </p:sp>
       <p:sp>
         <p:nvSpPr>
-          <p:cNvPr id="29" name="TextBox 28"/>
-          <p:cNvSpPr txBox="1"/>
-          <p:nvPr/>
-        </p:nvSpPr>
-        <p:spPr>
-          <a:xfrm>
-            <a:off x="8796528" y="4983479"/>
+          <p:cNvPr id="32" name="TextBox 31"/>
+          <p:cNvSpPr txBox="1"/>
+          <p:nvPr/>
+        </p:nvSpPr>
+        <p:spPr>
+          <a:xfrm>
+            <a:off x="8796528" y="4965192"/>
             <a:ext cx="2194560" cy="228600"/>
           </a:xfrm>
           <a:prstGeom prst="rect">
@@ -14234,13 +14654,48 @@
       </p:sp>
       <p:sp>
         <p:nvSpPr>
-          <p:cNvPr id="30" name="TextBox 29"/>
-          <p:cNvSpPr txBox="1"/>
-          <p:nvPr/>
-        </p:nvSpPr>
-        <p:spPr>
-          <a:xfrm>
-            <a:off x="8046720" y="5349240"/>
+          <p:cNvPr id="33" name="TextBox 32"/>
+          <p:cNvSpPr txBox="1"/>
+          <p:nvPr/>
+        </p:nvSpPr>
+        <p:spPr>
+          <a:xfrm>
+            <a:off x="8046720" y="5303520"/>
+            <a:ext cx="3017520" cy="228600"/>
+          </a:xfrm>
+          <a:prstGeom prst="rect">
+            <a:avLst/>
+          </a:prstGeom>
+          <a:noFill/>
+        </p:spPr>
+        <p:txBody>
+          <a:bodyPr wrap="square" lIns="0" rIns="0" tIns="0" bIns="0">
+            <a:spAutoFit/>
+          </a:bodyPr>
+          <a:lstStyle/>
+          <a:p>
+            <a:pPr algn="l"/>
+            <a:r>
+              <a:rPr sz="850" b="0" i="0">
+                <a:solidFill>
+                  <a:srgbClr val="CADCFC"/>
+                </a:solidFill>
+                <a:latin typeface="Arial"/>
+              </a:rPr>
+              <a:t>win probability (machine)</a:t>
+            </a:r>
+          </a:p>
+        </p:txBody>
+      </p:sp>
+      <p:sp>
+        <p:nvSpPr>
+          <p:cNvPr id="34" name="TextBox 33"/>
+          <p:cNvSpPr txBox="1"/>
+          <p:nvPr/>
+        </p:nvSpPr>
+        <p:spPr>
+          <a:xfrm>
+            <a:off x="8046720" y="5550408"/>
             <a:ext cx="3017520" cy="274320"/>
           </a:xfrm>
           <a:prstGeom prst="rect">
@@ -14256,41 +14711,6 @@
           <a:p>
             <a:pPr algn="l"/>
             <a:r>
-              <a:rPr sz="950" b="0" i="0">
-                <a:solidFill>
-                  <a:srgbClr val="CADCFC"/>
-                </a:solidFill>
-                <a:latin typeface="Arial"/>
-              </a:rPr>
-              <a:t>win probability (machine)</a:t>
-            </a:r>
-          </a:p>
-        </p:txBody>
-      </p:sp>
-      <p:sp>
-        <p:nvSpPr>
-          <p:cNvPr id="31" name="TextBox 30"/>
-          <p:cNvSpPr txBox="1"/>
-          <p:nvPr/>
-        </p:nvSpPr>
-        <p:spPr>
-          <a:xfrm>
-            <a:off x="8046720" y="5532120"/>
-            <a:ext cx="3017520" cy="274320"/>
-          </a:xfrm>
-          <a:prstGeom prst="rect">
-            <a:avLst/>
-          </a:prstGeom>
-          <a:noFill/>
-        </p:spPr>
-        <p:txBody>
-          <a:bodyPr wrap="square" lIns="0" rIns="0" tIns="0" bIns="0">
-            <a:spAutoFit/>
-          </a:bodyPr>
-          <a:lstStyle/>
-          <a:p>
-            <a:pPr algn="l"/>
-            <a:r>
               <a:rPr sz="950" b="1" i="0">
                 <a:solidFill>
                   <a:srgbClr val="F47321"/>
@@ -14304,7 +14724,7 @@
       </p:sp>
       <p:sp>
         <p:nvSpPr>
-          <p:cNvPr id="32" name="TextBox 31"/>
+          <p:cNvPr id="35" name="TextBox 34"/>
           <p:cNvSpPr txBox="1"/>
           <p:nvPr/>
         </p:nvSpPr>
@@ -14339,7 +14759,7 @@
       </p:sp>
       <p:sp>
         <p:nvSpPr>
-          <p:cNvPr id="33" name="TextBox 32"/>
+          <p:cNvPr id="36" name="TextBox 35"/>
           <p:cNvSpPr txBox="1"/>
           <p:nvPr/>
         </p:nvSpPr>
@@ -16004,8 +16424,8 @@
         </p:nvSpPr>
         <p:spPr>
           <a:xfrm>
-            <a:off x="7772400" y="1600200"/>
-            <a:ext cx="3566160" cy="4206240"/>
+            <a:off x="7772400" y="1554480"/>
+            <a:ext cx="3566160" cy="4370832"/>
           </a:xfrm>
           <a:prstGeom prst="roundRect">
             <a:avLst/>
@@ -16048,7 +16468,287 @@
         </p:nvSpPr>
         <p:spPr>
           <a:xfrm>
-            <a:off x="8046720" y="1828800"/>
+            <a:off x="8046720" y="1737360"/>
+            <a:ext cx="3017520" cy="274320"/>
+          </a:xfrm>
+          <a:prstGeom prst="rect">
+            <a:avLst/>
+          </a:prstGeom>
+          <a:noFill/>
+        </p:spPr>
+        <p:txBody>
+          <a:bodyPr wrap="square" lIns="0" rIns="0" tIns="0" bIns="0">
+            <a:spAutoFit/>
+          </a:bodyPr>
+          <a:lstStyle/>
+          <a:p>
+            <a:pPr algn="l"/>
+            <a:r>
+              <a:rPr sz="1200" b="1" i="0">
+                <a:solidFill>
+                  <a:srgbClr val="F47321"/>
+                </a:solidFill>
+                <a:latin typeface="Arial"/>
+              </a:rPr>
+              <a:t>THE NUMBER</a:t>
+            </a:r>
+          </a:p>
+        </p:txBody>
+      </p:sp>
+      <p:sp>
+        <p:nvSpPr>
+          <p:cNvPr id="20" name="TextBox 19"/>
+          <p:cNvSpPr txBox="1"/>
+          <p:nvPr/>
+        </p:nvSpPr>
+        <p:spPr>
+          <a:xfrm>
+            <a:off x="8046720" y="2011680"/>
+            <a:ext cx="3017520" cy="457200"/>
+          </a:xfrm>
+          <a:prstGeom prst="rect">
+            <a:avLst/>
+          </a:prstGeom>
+          <a:noFill/>
+        </p:spPr>
+        <p:txBody>
+          <a:bodyPr wrap="square" lIns="0" rIns="0" tIns="0" bIns="0">
+            <a:spAutoFit/>
+          </a:bodyPr>
+          <a:lstStyle/>
+          <a:p>
+            <a:pPr algn="l"/>
+            <a:r>
+              <a:rPr sz="2600" b="1" i="0">
+                <a:solidFill>
+                  <a:srgbClr val="FFFFFF"/>
+                </a:solidFill>
+                <a:latin typeface="Arial"/>
+              </a:rPr>
+              <a:t>Stanford –1.5</a:t>
+            </a:r>
+          </a:p>
+        </p:txBody>
+      </p:sp>
+      <p:sp>
+        <p:nvSpPr>
+          <p:cNvPr id="21" name="TextBox 20"/>
+          <p:cNvSpPr txBox="1"/>
+          <p:nvPr/>
+        </p:nvSpPr>
+        <p:spPr>
+          <a:xfrm>
+            <a:off x="8046720" y="2450592"/>
+            <a:ext cx="3017520" cy="274320"/>
+          </a:xfrm>
+          <a:prstGeom prst="rect">
+            <a:avLst/>
+          </a:prstGeom>
+          <a:noFill/>
+        </p:spPr>
+        <p:txBody>
+          <a:bodyPr wrap="square" lIns="0" rIns="0" tIns="0" bIns="0">
+            <a:spAutoFit/>
+          </a:bodyPr>
+          <a:lstStyle/>
+          <a:p>
+            <a:pPr algn="l"/>
+            <a:r>
+              <a:rPr sz="1150" b="1" i="0">
+                <a:solidFill>
+                  <a:srgbClr val="FFFFFF"/>
+                </a:solidFill>
+                <a:latin typeface="Arial"/>
+              </a:rPr>
+              <a:t>Stanford –119 · HAW +119</a:t>
+            </a:r>
+          </a:p>
+        </p:txBody>
+      </p:sp>
+      <p:sp>
+        <p:nvSpPr>
+          <p:cNvPr id="22" name="TextBox 21"/>
+          <p:cNvSpPr txBox="1"/>
+          <p:nvPr/>
+        </p:nvSpPr>
+        <p:spPr>
+          <a:xfrm>
+            <a:off x="8046720" y="2688336"/>
+            <a:ext cx="3017520" cy="256032"/>
+          </a:xfrm>
+          <a:prstGeom prst="rect">
+            <a:avLst/>
+          </a:prstGeom>
+          <a:noFill/>
+        </p:spPr>
+        <p:txBody>
+          <a:bodyPr wrap="square" lIns="0" rIns="0" tIns="0" bIns="0">
+            <a:spAutoFit/>
+          </a:bodyPr>
+          <a:lstStyle/>
+          <a:p>
+            <a:pPr algn="l"/>
+            <a:r>
+              <a:rPr sz="850" b="0" i="0">
+                <a:solidFill>
+                  <a:srgbClr val="CADCFC"/>
+                </a:solidFill>
+                <a:latin typeface="Arial"/>
+              </a:rPr>
+              <a:t>machine line · fair odds, no vig · raw margin Stanford +1.6</a:t>
+            </a:r>
+          </a:p>
+        </p:txBody>
+      </p:sp>
+      <p:sp>
+        <p:nvSpPr>
+          <p:cNvPr id="23" name="TextBox 22"/>
+          <p:cNvSpPr txBox="1"/>
+          <p:nvPr/>
+        </p:nvSpPr>
+        <p:spPr>
+          <a:xfrm>
+            <a:off x="8046720" y="3017520"/>
+            <a:ext cx="3017520" cy="365760"/>
+          </a:xfrm>
+          <a:prstGeom prst="rect">
+            <a:avLst/>
+          </a:prstGeom>
+          <a:noFill/>
+        </p:spPr>
+        <p:txBody>
+          <a:bodyPr wrap="square" lIns="0" rIns="0" tIns="0" bIns="0">
+            <a:spAutoFit/>
+          </a:bodyPr>
+          <a:lstStyle/>
+          <a:p>
+            <a:pPr algn="l"/>
+            <a:r>
+              <a:rPr sz="1700" b="1" i="0">
+                <a:solidFill>
+                  <a:srgbClr val="FFFFFF"/>
+                </a:solidFill>
+                <a:latin typeface="Arial"/>
+              </a:rPr>
+              <a:t>Stanford 26 – HAW 24</a:t>
+            </a:r>
+          </a:p>
+        </p:txBody>
+      </p:sp>
+      <p:sp>
+        <p:nvSpPr>
+          <p:cNvPr id="24" name="TextBox 23"/>
+          <p:cNvSpPr txBox="1"/>
+          <p:nvPr/>
+        </p:nvSpPr>
+        <p:spPr>
+          <a:xfrm>
+            <a:off x="8046720" y="3328416"/>
+            <a:ext cx="3017520" cy="256032"/>
+          </a:xfrm>
+          <a:prstGeom prst="rect">
+            <a:avLst/>
+          </a:prstGeom>
+          <a:noFill/>
+        </p:spPr>
+        <p:txBody>
+          <a:bodyPr wrap="square" lIns="0" rIns="0" tIns="0" bIns="0">
+            <a:spAutoFit/>
+          </a:bodyPr>
+          <a:lstStyle/>
+          <a:p>
+            <a:pPr algn="l"/>
+            <a:r>
+              <a:rPr sz="850" b="0" i="0">
+                <a:solidFill>
+                  <a:srgbClr val="CADCFC"/>
+                </a:solidFill>
+                <a:latin typeface="Arial"/>
+              </a:rPr>
+              <a:t>projected score · machine margin on the 49.5 market total</a:t>
+            </a:r>
+          </a:p>
+        </p:txBody>
+      </p:sp>
+      <p:sp>
+        <p:nvSpPr>
+          <p:cNvPr id="25" name="TextBox 24"/>
+          <p:cNvSpPr txBox="1"/>
+          <p:nvPr/>
+        </p:nvSpPr>
+        <p:spPr>
+          <a:xfrm>
+            <a:off x="8046720" y="3639312"/>
+            <a:ext cx="3017520" cy="365760"/>
+          </a:xfrm>
+          <a:prstGeom prst="rect">
+            <a:avLst/>
+          </a:prstGeom>
+          <a:noFill/>
+        </p:spPr>
+        <p:txBody>
+          <a:bodyPr wrap="square" lIns="0" rIns="0" tIns="0" bIns="0">
+            <a:spAutoFit/>
+          </a:bodyPr>
+          <a:lstStyle/>
+          <a:p>
+            <a:pPr algn="l"/>
+            <a:r>
+              <a:rPr sz="1700" b="1" i="0">
+                <a:solidFill>
+                  <a:srgbClr val="FFFFFF"/>
+                </a:solidFill>
+                <a:latin typeface="Arial"/>
+              </a:rPr>
+              <a:t>–5.5 / –5.5</a:t>
+            </a:r>
+          </a:p>
+        </p:txBody>
+      </p:sp>
+      <p:sp>
+        <p:nvSpPr>
+          <p:cNvPr id="26" name="TextBox 25"/>
+          <p:cNvSpPr txBox="1"/>
+          <p:nvPr/>
+        </p:nvSpPr>
+        <p:spPr>
+          <a:xfrm>
+            <a:off x="8046720" y="3950208"/>
+            <a:ext cx="3017520" cy="365760"/>
+          </a:xfrm>
+          <a:prstGeom prst="rect">
+            <a:avLst/>
+          </a:prstGeom>
+          <a:noFill/>
+        </p:spPr>
+        <p:txBody>
+          <a:bodyPr wrap="square" lIns="0" rIns="0" tIns="0" bIns="0">
+            <a:spAutoFit/>
+          </a:bodyPr>
+          <a:lstStyle/>
+          <a:p>
+            <a:pPr algn="l"/>
+            <a:r>
+              <a:rPr sz="850" b="0" i="0">
+                <a:solidFill>
+                  <a:srgbClr val="CADCFC"/>
+                </a:solidFill>
+                <a:latin typeface="Arial"/>
+              </a:rPr>
+              <a:t>market (DK / Bovada) · DK Stanford -218 / HAW +180 · Bov Stanford -170 / HAW +145</a:t>
+            </a:r>
+          </a:p>
+        </p:txBody>
+      </p:sp>
+      <p:sp>
+        <p:nvSpPr>
+          <p:cNvPr id="27" name="TextBox 26"/>
+          <p:cNvSpPr txBox="1"/>
+          <p:nvPr/>
+        </p:nvSpPr>
+        <p:spPr>
+          <a:xfrm>
+            <a:off x="8046720" y="4315968"/>
             <a:ext cx="3017520" cy="320040"/>
           </a:xfrm>
           <a:prstGeom prst="rect">
@@ -16064,222 +16764,47 @@
           <a:p>
             <a:pPr algn="l"/>
             <a:r>
-              <a:rPr sz="1200" b="1" i="0">
+              <a:rPr sz="1400" b="1" i="0">
                 <a:solidFill>
                   <a:srgbClr val="F47321"/>
                 </a:solidFill>
                 <a:latin typeface="Arial"/>
               </a:rPr>
-              <a:t>THE NUMBER</a:t>
-            </a:r>
-          </a:p>
-        </p:txBody>
-      </p:sp>
-      <p:sp>
-        <p:nvSpPr>
-          <p:cNvPr id="20" name="TextBox 19"/>
-          <p:cNvSpPr txBox="1"/>
-          <p:nvPr/>
-        </p:nvSpPr>
-        <p:spPr>
-          <a:xfrm>
-            <a:off x="8046720" y="2194560"/>
-            <a:ext cx="3017520" cy="640080"/>
-          </a:xfrm>
-          <a:prstGeom prst="rect">
-            <a:avLst/>
-          </a:prstGeom>
-          <a:noFill/>
-        </p:spPr>
-        <p:txBody>
-          <a:bodyPr wrap="square" lIns="0" rIns="0" tIns="0" bIns="0">
-            <a:spAutoFit/>
-          </a:bodyPr>
-          <a:lstStyle/>
-          <a:p>
-            <a:pPr algn="l"/>
-            <a:r>
-              <a:rPr sz="3000" b="1" i="0">
-                <a:solidFill>
-                  <a:srgbClr val="FFFFFF"/>
-                </a:solidFill>
-                <a:latin typeface="Arial"/>
-              </a:rPr>
-              <a:t>Stanford –1.6</a:t>
-            </a:r>
-          </a:p>
-        </p:txBody>
-      </p:sp>
-      <p:sp>
-        <p:nvSpPr>
-          <p:cNvPr id="21" name="TextBox 20"/>
-          <p:cNvSpPr txBox="1"/>
-          <p:nvPr/>
-        </p:nvSpPr>
-        <p:spPr>
-          <a:xfrm>
-            <a:off x="8046720" y="2788920"/>
-            <a:ext cx="3017520" cy="274320"/>
-          </a:xfrm>
-          <a:prstGeom prst="rect">
-            <a:avLst/>
-          </a:prstGeom>
-          <a:noFill/>
-        </p:spPr>
-        <p:txBody>
-          <a:bodyPr wrap="square" lIns="0" rIns="0" tIns="0" bIns="0">
-            <a:spAutoFit/>
-          </a:bodyPr>
-          <a:lstStyle/>
-          <a:p>
-            <a:pPr algn="l"/>
-            <a:r>
-              <a:rPr sz="1000" b="0" i="0">
+              <a:t>3.9 pts on Hawai'i</a:t>
+            </a:r>
+          </a:p>
+        </p:txBody>
+      </p:sp>
+      <p:sp>
+        <p:nvSpPr>
+          <p:cNvPr id="28" name="TextBox 27"/>
+          <p:cNvSpPr txBox="1"/>
+          <p:nvPr/>
+        </p:nvSpPr>
+        <p:spPr>
+          <a:xfrm>
+            <a:off x="8046720" y="4590288"/>
+            <a:ext cx="3017520" cy="228600"/>
+          </a:xfrm>
+          <a:prstGeom prst="rect">
+            <a:avLst/>
+          </a:prstGeom>
+          <a:noFill/>
+        </p:spPr>
+        <p:txBody>
+          <a:bodyPr wrap="square" lIns="0" rIns="0" tIns="0" bIns="0">
+            <a:spAutoFit/>
+          </a:bodyPr>
+          <a:lstStyle/>
+          <a:p>
+            <a:pPr algn="l"/>
+            <a:r>
+              <a:rPr sz="850" b="0" i="0">
                 <a:solidFill>
                   <a:srgbClr val="CADCFC"/>
                 </a:solidFill>
                 <a:latin typeface="Arial"/>
               </a:rPr>
-              <a:t>machine</a:t>
-            </a:r>
-          </a:p>
-        </p:txBody>
-      </p:sp>
-      <p:sp>
-        <p:nvSpPr>
-          <p:cNvPr id="22" name="TextBox 21"/>
-          <p:cNvSpPr txBox="1"/>
-          <p:nvPr/>
-        </p:nvSpPr>
-        <p:spPr>
-          <a:xfrm>
-            <a:off x="8046720" y="3154680"/>
-            <a:ext cx="3017520" cy="502920"/>
-          </a:xfrm>
-          <a:prstGeom prst="rect">
-            <a:avLst/>
-          </a:prstGeom>
-          <a:noFill/>
-        </p:spPr>
-        <p:txBody>
-          <a:bodyPr wrap="square" lIns="0" rIns="0" tIns="0" bIns="0">
-            <a:spAutoFit/>
-          </a:bodyPr>
-          <a:lstStyle/>
-          <a:p>
-            <a:pPr algn="l"/>
-            <a:r>
-              <a:rPr sz="2200" b="1" i="0">
-                <a:solidFill>
-                  <a:srgbClr val="FFFFFF"/>
-                </a:solidFill>
-                <a:latin typeface="Arial"/>
-              </a:rPr>
-              <a:t>–5.5 / –5.5</a:t>
-            </a:r>
-          </a:p>
-        </p:txBody>
-      </p:sp>
-      <p:sp>
-        <p:nvSpPr>
-          <p:cNvPr id="23" name="TextBox 22"/>
-          <p:cNvSpPr txBox="1"/>
-          <p:nvPr/>
-        </p:nvSpPr>
-        <p:spPr>
-          <a:xfrm>
-            <a:off x="8046720" y="3611880"/>
-            <a:ext cx="3017520" cy="274320"/>
-          </a:xfrm>
-          <a:prstGeom prst="rect">
-            <a:avLst/>
-          </a:prstGeom>
-          <a:noFill/>
-        </p:spPr>
-        <p:txBody>
-          <a:bodyPr wrap="square" lIns="0" rIns="0" tIns="0" bIns="0">
-            <a:spAutoFit/>
-          </a:bodyPr>
-          <a:lstStyle/>
-          <a:p>
-            <a:pPr algn="l"/>
-            <a:r>
-              <a:rPr sz="1000" b="0" i="0">
-                <a:solidFill>
-                  <a:srgbClr val="CADCFC"/>
-                </a:solidFill>
-                <a:latin typeface="Arial"/>
-              </a:rPr>
-              <a:t>market (DK / Bovada)</a:t>
-            </a:r>
-          </a:p>
-        </p:txBody>
-      </p:sp>
-      <p:sp>
-        <p:nvSpPr>
-          <p:cNvPr id="24" name="TextBox 23"/>
-          <p:cNvSpPr txBox="1"/>
-          <p:nvPr/>
-        </p:nvSpPr>
-        <p:spPr>
-          <a:xfrm>
-            <a:off x="8046720" y="3977639"/>
-            <a:ext cx="3017520" cy="411480"/>
-          </a:xfrm>
-          <a:prstGeom prst="rect">
-            <a:avLst/>
-          </a:prstGeom>
-          <a:noFill/>
-        </p:spPr>
-        <p:txBody>
-          <a:bodyPr wrap="square" lIns="0" rIns="0" tIns="0" bIns="0">
-            <a:spAutoFit/>
-          </a:bodyPr>
-          <a:lstStyle/>
-          <a:p>
-            <a:pPr algn="l"/>
-            <a:r>
-              <a:rPr sz="1600" b="1" i="0">
-                <a:solidFill>
-                  <a:srgbClr val="F47321"/>
-                </a:solidFill>
-                <a:latin typeface="Arial"/>
-              </a:rPr>
-              <a:t>3.9 pts on Hawai'i</a:t>
-            </a:r>
-          </a:p>
-        </p:txBody>
-      </p:sp>
-      <p:sp>
-        <p:nvSpPr>
-          <p:cNvPr id="25" name="TextBox 24"/>
-          <p:cNvSpPr txBox="1"/>
-          <p:nvPr/>
-        </p:nvSpPr>
-        <p:spPr>
-          <a:xfrm>
-            <a:off x="8046720" y="4370832"/>
-            <a:ext cx="3017520" cy="274320"/>
-          </a:xfrm>
-          <a:prstGeom prst="rect">
-            <a:avLst/>
-          </a:prstGeom>
-          <a:noFill/>
-        </p:spPr>
-        <p:txBody>
-          <a:bodyPr wrap="square" lIns="0" rIns="0" tIns="0" bIns="0">
-            <a:spAutoFit/>
-          </a:bodyPr>
-          <a:lstStyle/>
-          <a:p>
-            <a:pPr algn="l"/>
-            <a:r>
-              <a:rPr sz="1000" b="0" i="0">
-                <a:solidFill>
-                  <a:srgbClr val="CADCFC"/>
-                </a:solidFill>
-                <a:latin typeface="Arial"/>
-              </a:rPr>
               <a:t>the gap</a:t>
             </a:r>
           </a:p>
@@ -16287,14 +16812,14 @@
       </p:sp>
       <p:sp>
         <p:nvSpPr>
-          <p:cNvPr id="26" name="Rounded Rectangle 25"/>
+          <p:cNvPr id="29" name="Rounded Rectangle 28"/>
           <p:cNvSpPr/>
           <p:nvPr/>
         </p:nvSpPr>
         <p:spPr>
           <a:xfrm>
-            <a:off x="8046720" y="4892040"/>
-            <a:ext cx="3017520" cy="384048"/>
+            <a:off x="8046720" y="4882896"/>
+            <a:ext cx="3017520" cy="365760"/>
           </a:xfrm>
           <a:prstGeom prst="roundRect">
             <a:avLst/>
@@ -16331,14 +16856,14 @@
       </p:sp>
       <p:sp>
         <p:nvSpPr>
-          <p:cNvPr id="27" name="Rounded Rectangle 26"/>
+          <p:cNvPr id="30" name="Rounded Rectangle 29"/>
           <p:cNvSpPr/>
           <p:nvPr/>
         </p:nvSpPr>
         <p:spPr>
           <a:xfrm>
-            <a:off x="8046720" y="4892040"/>
-            <a:ext cx="1629460" cy="384048"/>
+            <a:off x="8046720" y="4882896"/>
+            <a:ext cx="1629460" cy="365760"/>
           </a:xfrm>
           <a:prstGeom prst="roundRect">
             <a:avLst/>
@@ -16375,13 +16900,13 @@
       </p:sp>
       <p:sp>
         <p:nvSpPr>
-          <p:cNvPr id="28" name="TextBox 27"/>
-          <p:cNvSpPr txBox="1"/>
-          <p:nvPr/>
-        </p:nvSpPr>
-        <p:spPr>
-          <a:xfrm>
-            <a:off x="8119872" y="4983479"/>
+          <p:cNvPr id="31" name="TextBox 30"/>
+          <p:cNvSpPr txBox="1"/>
+          <p:nvPr/>
+        </p:nvSpPr>
+        <p:spPr>
+          <a:xfrm>
+            <a:off x="8119872" y="4965192"/>
             <a:ext cx="2194560" cy="228600"/>
           </a:xfrm>
           <a:prstGeom prst="rect">
@@ -16410,13 +16935,13 @@
       </p:sp>
       <p:sp>
         <p:nvSpPr>
-          <p:cNvPr id="29" name="TextBox 28"/>
-          <p:cNvSpPr txBox="1"/>
-          <p:nvPr/>
-        </p:nvSpPr>
-        <p:spPr>
-          <a:xfrm>
-            <a:off x="8796528" y="4983479"/>
+          <p:cNvPr id="32" name="TextBox 31"/>
+          <p:cNvSpPr txBox="1"/>
+          <p:nvPr/>
+        </p:nvSpPr>
+        <p:spPr>
+          <a:xfrm>
+            <a:off x="8796528" y="4965192"/>
             <a:ext cx="2194560" cy="228600"/>
           </a:xfrm>
           <a:prstGeom prst="rect">
@@ -16445,13 +16970,48 @@
       </p:sp>
       <p:sp>
         <p:nvSpPr>
-          <p:cNvPr id="30" name="TextBox 29"/>
-          <p:cNvSpPr txBox="1"/>
-          <p:nvPr/>
-        </p:nvSpPr>
-        <p:spPr>
-          <a:xfrm>
-            <a:off x="8046720" y="5349240"/>
+          <p:cNvPr id="33" name="TextBox 32"/>
+          <p:cNvSpPr txBox="1"/>
+          <p:nvPr/>
+        </p:nvSpPr>
+        <p:spPr>
+          <a:xfrm>
+            <a:off x="8046720" y="5303520"/>
+            <a:ext cx="3017520" cy="228600"/>
+          </a:xfrm>
+          <a:prstGeom prst="rect">
+            <a:avLst/>
+          </a:prstGeom>
+          <a:noFill/>
+        </p:spPr>
+        <p:txBody>
+          <a:bodyPr wrap="square" lIns="0" rIns="0" tIns="0" bIns="0">
+            <a:spAutoFit/>
+          </a:bodyPr>
+          <a:lstStyle/>
+          <a:p>
+            <a:pPr algn="l"/>
+            <a:r>
+              <a:rPr sz="850" b="0" i="0">
+                <a:solidFill>
+                  <a:srgbClr val="CADCFC"/>
+                </a:solidFill>
+                <a:latin typeface="Arial"/>
+              </a:rPr>
+              <a:t>win probability (machine)</a:t>
+            </a:r>
+          </a:p>
+        </p:txBody>
+      </p:sp>
+      <p:sp>
+        <p:nvSpPr>
+          <p:cNvPr id="34" name="TextBox 33"/>
+          <p:cNvSpPr txBox="1"/>
+          <p:nvPr/>
+        </p:nvSpPr>
+        <p:spPr>
+          <a:xfrm>
+            <a:off x="8046720" y="5550408"/>
             <a:ext cx="3017520" cy="274320"/>
           </a:xfrm>
           <a:prstGeom prst="rect">
@@ -16467,41 +17027,6 @@
           <a:p>
             <a:pPr algn="l"/>
             <a:r>
-              <a:rPr sz="950" b="0" i="0">
-                <a:solidFill>
-                  <a:srgbClr val="CADCFC"/>
-                </a:solidFill>
-                <a:latin typeface="Arial"/>
-              </a:rPr>
-              <a:t>win probability (machine)</a:t>
-            </a:r>
-          </a:p>
-        </p:txBody>
-      </p:sp>
-      <p:sp>
-        <p:nvSpPr>
-          <p:cNvPr id="31" name="TextBox 30"/>
-          <p:cNvSpPr txBox="1"/>
-          <p:nvPr/>
-        </p:nvSpPr>
-        <p:spPr>
-          <a:xfrm>
-            <a:off x="8046720" y="5532120"/>
-            <a:ext cx="3017520" cy="274320"/>
-          </a:xfrm>
-          <a:prstGeom prst="rect">
-            <a:avLst/>
-          </a:prstGeom>
-          <a:noFill/>
-        </p:spPr>
-        <p:txBody>
-          <a:bodyPr wrap="square" lIns="0" rIns="0" tIns="0" bIns="0">
-            <a:spAutoFit/>
-          </a:bodyPr>
-          <a:lstStyle/>
-          <a:p>
-            <a:pPr algn="l"/>
-            <a:r>
               <a:rPr sz="950" b="1" i="0">
                 <a:solidFill>
                   <a:srgbClr val="F47321"/>
@@ -16515,7 +17040,7 @@
       </p:sp>
       <p:sp>
         <p:nvSpPr>
-          <p:cNvPr id="32" name="TextBox 31"/>
+          <p:cNvPr id="35" name="TextBox 34"/>
           <p:cNvSpPr txBox="1"/>
           <p:nvPr/>
         </p:nvSpPr>
@@ -16550,7 +17075,7 @@
       </p:sp>
       <p:sp>
         <p:nvSpPr>
-          <p:cNvPr id="33" name="TextBox 32"/>
+          <p:cNvPr id="36" name="TextBox 35"/>
           <p:cNvSpPr txBox="1"/>
           <p:nvPr/>
         </p:nvSpPr>

--- a/decks/2026_Week0_Episode1.pptx
+++ b/decks/2026_Week0_Episode1.pptx
@@ -6266,7 +6266,7 @@
         <p:spPr>
           <a:xfrm>
             <a:off x="822960" y="1417320"/>
-            <a:ext cx="5166360" cy="4754880"/>
+            <a:ext cx="5166360" cy="5029200"/>
           </a:xfrm>
           <a:prstGeom prst="roundRect">
             <a:avLst/>
@@ -6473,7 +6473,7 @@
         </p:nvSpPr>
         <p:spPr>
           <a:xfrm>
-            <a:off x="1143000" y="3410712"/>
+            <a:off x="1143000" y="3282696"/>
             <a:ext cx="4572000" cy="320040"/>
           </a:xfrm>
           <a:prstGeom prst="rect">
@@ -6508,7 +6508,7 @@
         </p:nvSpPr>
         <p:spPr>
           <a:xfrm>
-            <a:off x="1143000" y="3721608"/>
+            <a:off x="1143000" y="3593591"/>
             <a:ext cx="4572000" cy="502920"/>
           </a:xfrm>
           <a:prstGeom prst="rect">
@@ -6543,7 +6543,7 @@
         </p:nvSpPr>
         <p:spPr>
           <a:xfrm>
-            <a:off x="1143000" y="4306824"/>
+            <a:off x="1143000" y="4050791"/>
             <a:ext cx="4572000" cy="320040"/>
           </a:xfrm>
           <a:prstGeom prst="rect">
@@ -6578,7 +6578,7 @@
         </p:nvSpPr>
         <p:spPr>
           <a:xfrm>
-            <a:off x="1143000" y="4617720"/>
+            <a:off x="1143000" y="4361688"/>
             <a:ext cx="4572000" cy="502920"/>
           </a:xfrm>
           <a:prstGeom prst="rect">
@@ -6613,7 +6613,7 @@
         </p:nvSpPr>
         <p:spPr>
           <a:xfrm>
-            <a:off x="1143000" y="5202936"/>
+            <a:off x="1143000" y="4818888"/>
             <a:ext cx="4572000" cy="320040"/>
           </a:xfrm>
           <a:prstGeom prst="rect">
@@ -6648,7 +6648,7 @@
         </p:nvSpPr>
         <p:spPr>
           <a:xfrm>
-            <a:off x="1143000" y="5513831"/>
+            <a:off x="1143000" y="5129783"/>
             <a:ext cx="4572000" cy="502920"/>
           </a:xfrm>
           <a:prstGeom prst="rect">
@@ -6677,14 +6677,93 @@
       </p:sp>
       <p:sp>
         <p:nvSpPr>
-          <p:cNvPr id="18" name="Rounded Rectangle 17"/>
+          <p:cNvPr id="18" name="Rectangle 17"/>
           <p:cNvSpPr/>
           <p:nvPr/>
         </p:nvSpPr>
         <p:spPr>
           <a:xfrm>
+            <a:off x="1143000" y="5605271"/>
+            <a:ext cx="4572000" cy="10972"/>
+          </a:xfrm>
+          <a:prstGeom prst="rect">
+            <a:avLst/>
+          </a:prstGeom>
+          <a:solidFill>
+            <a:srgbClr val="F47321"/>
+          </a:solidFill>
+          <a:ln>
+            <a:noFill/>
+          </a:ln>
+          <a:effectLst/>
+        </p:spPr>
+        <p:style>
+          <a:lnRef idx="1">
+            <a:schemeClr val="accent1"/>
+          </a:lnRef>
+          <a:fillRef idx="3">
+            <a:schemeClr val="accent1"/>
+          </a:fillRef>
+          <a:effectRef idx="2">
+            <a:schemeClr val="accent1"/>
+          </a:effectRef>
+          <a:fontRef idx="minor">
+            <a:schemeClr val="lt1"/>
+          </a:fontRef>
+        </p:style>
+        <p:txBody>
+          <a:bodyPr rtlCol="0" anchor="ctr"/>
+          <a:lstStyle/>
+          <a:p>
+            <a:pPr algn="ctr"/>
+          </a:p>
+        </p:txBody>
+      </p:sp>
+      <p:sp>
+        <p:nvSpPr>
+          <p:cNvPr id="19" name="TextBox 18"/>
+          <p:cNvSpPr txBox="1"/>
+          <p:nvPr/>
+        </p:nvSpPr>
+        <p:spPr>
+          <a:xfrm>
+            <a:off x="1143000" y="5650992"/>
+            <a:ext cx="4572000" cy="640080"/>
+          </a:xfrm>
+          <a:prstGeom prst="rect">
+            <a:avLst/>
+          </a:prstGeom>
+          <a:noFill/>
+        </p:spPr>
+        <p:txBody>
+          <a:bodyPr wrap="square" lIns="0" rIns="0" tIns="0" bIns="0">
+            <a:spAutoFit/>
+          </a:bodyPr>
+          <a:lstStyle/>
+          <a:p>
+            <a:pPr algn="l"/>
+            <a:r>
+              <a:rPr sz="950" b="1" i="0">
+                <a:solidFill>
+                  <a:srgbClr val="B64F0F"/>
+                </a:solidFill>
+                <a:latin typeface="Arial"/>
+              </a:rPr>
+              <a:t>FLAGS  Huff picks Stokes vs Noland internally Aug 23 but won't announce until kickoff · Charles Huff's first game as Memphis HC (hired Dec 8, 2025); 75 new players</a:t>
+            </a:r>
+          </a:p>
+        </p:txBody>
+      </p:sp>
+      <p:sp>
+        <p:nvSpPr>
+          <p:cNvPr id="20" name="Rounded Rectangle 19"/>
+          <p:cNvSpPr/>
+          <p:nvPr/>
+        </p:nvSpPr>
+        <p:spPr>
+          <a:xfrm>
             <a:off x="6309360" y="1417320"/>
-            <a:ext cx="5166360" cy="4754880"/>
+            <a:ext cx="5166360" cy="5029200"/>
           </a:xfrm>
           <a:prstGeom prst="roundRect">
             <a:avLst/>
@@ -6721,7 +6800,7 @@
       </p:sp>
       <p:pic>
         <p:nvPicPr>
-          <p:cNvPr id="19" name="Picture 18" descr="unlv.png"/>
+          <p:cNvPr id="21" name="Picture 20" descr="unlv.png"/>
           <p:cNvPicPr>
             <a:picLocks noChangeAspect="1"/>
           </p:cNvPicPr>
@@ -6745,7 +6824,7 @@
       </p:pic>
       <p:sp>
         <p:nvSpPr>
-          <p:cNvPr id="20" name="TextBox 19"/>
+          <p:cNvPr id="22" name="TextBox 21"/>
           <p:cNvSpPr txBox="1"/>
           <p:nvPr/>
         </p:nvSpPr>
@@ -6780,7 +6859,7 @@
       </p:sp>
       <p:sp>
         <p:nvSpPr>
-          <p:cNvPr id="21" name="TextBox 20"/>
+          <p:cNvPr id="23" name="TextBox 22"/>
           <p:cNvSpPr txBox="1"/>
           <p:nvPr/>
         </p:nvSpPr>
@@ -6815,7 +6894,7 @@
       </p:sp>
       <p:sp>
         <p:nvSpPr>
-          <p:cNvPr id="22" name="TextBox 21"/>
+          <p:cNvPr id="24" name="TextBox 23"/>
           <p:cNvSpPr txBox="1"/>
           <p:nvPr/>
         </p:nvSpPr>
@@ -6850,7 +6929,7 @@
       </p:sp>
       <p:sp>
         <p:nvSpPr>
-          <p:cNvPr id="23" name="TextBox 22"/>
+          <p:cNvPr id="25" name="TextBox 24"/>
           <p:cNvSpPr txBox="1"/>
           <p:nvPr/>
         </p:nvSpPr>
@@ -6885,13 +6964,13 @@
       </p:sp>
       <p:sp>
         <p:nvSpPr>
-          <p:cNvPr id="24" name="TextBox 23"/>
-          <p:cNvSpPr txBox="1"/>
-          <p:nvPr/>
-        </p:nvSpPr>
-        <p:spPr>
-          <a:xfrm>
-            <a:off x="6629400" y="3410712"/>
+          <p:cNvPr id="26" name="TextBox 25"/>
+          <p:cNvSpPr txBox="1"/>
+          <p:nvPr/>
+        </p:nvSpPr>
+        <p:spPr>
+          <a:xfrm>
+            <a:off x="6629400" y="3282696"/>
             <a:ext cx="4572000" cy="320040"/>
           </a:xfrm>
           <a:prstGeom prst="rect">
@@ -6920,13 +6999,13 @@
       </p:sp>
       <p:sp>
         <p:nvSpPr>
-          <p:cNvPr id="25" name="TextBox 24"/>
-          <p:cNvSpPr txBox="1"/>
-          <p:nvPr/>
-        </p:nvSpPr>
-        <p:spPr>
-          <a:xfrm>
-            <a:off x="6629400" y="3721608"/>
+          <p:cNvPr id="27" name="TextBox 26"/>
+          <p:cNvSpPr txBox="1"/>
+          <p:nvPr/>
+        </p:nvSpPr>
+        <p:spPr>
+          <a:xfrm>
+            <a:off x="6629400" y="3593591"/>
             <a:ext cx="4572000" cy="502920"/>
           </a:xfrm>
           <a:prstGeom prst="rect">
@@ -6955,13 +7034,13 @@
       </p:sp>
       <p:sp>
         <p:nvSpPr>
-          <p:cNvPr id="26" name="TextBox 25"/>
-          <p:cNvSpPr txBox="1"/>
-          <p:nvPr/>
-        </p:nvSpPr>
-        <p:spPr>
-          <a:xfrm>
-            <a:off x="6629400" y="4306824"/>
+          <p:cNvPr id="28" name="TextBox 27"/>
+          <p:cNvSpPr txBox="1"/>
+          <p:nvPr/>
+        </p:nvSpPr>
+        <p:spPr>
+          <a:xfrm>
+            <a:off x="6629400" y="4050791"/>
             <a:ext cx="4572000" cy="320040"/>
           </a:xfrm>
           <a:prstGeom prst="rect">
@@ -6990,13 +7069,13 @@
       </p:sp>
       <p:sp>
         <p:nvSpPr>
-          <p:cNvPr id="27" name="TextBox 26"/>
-          <p:cNvSpPr txBox="1"/>
-          <p:nvPr/>
-        </p:nvSpPr>
-        <p:spPr>
-          <a:xfrm>
-            <a:off x="6629400" y="4617720"/>
+          <p:cNvPr id="29" name="TextBox 28"/>
+          <p:cNvSpPr txBox="1"/>
+          <p:nvPr/>
+        </p:nvSpPr>
+        <p:spPr>
+          <a:xfrm>
+            <a:off x="6629400" y="4361688"/>
             <a:ext cx="4572000" cy="502920"/>
           </a:xfrm>
           <a:prstGeom prst="rect">
@@ -7025,13 +7104,13 @@
       </p:sp>
       <p:sp>
         <p:nvSpPr>
-          <p:cNvPr id="28" name="TextBox 27"/>
-          <p:cNvSpPr txBox="1"/>
-          <p:nvPr/>
-        </p:nvSpPr>
-        <p:spPr>
-          <a:xfrm>
-            <a:off x="6629400" y="5202936"/>
+          <p:cNvPr id="30" name="TextBox 29"/>
+          <p:cNvSpPr txBox="1"/>
+          <p:nvPr/>
+        </p:nvSpPr>
+        <p:spPr>
+          <a:xfrm>
+            <a:off x="6629400" y="4818888"/>
             <a:ext cx="4572000" cy="320040"/>
           </a:xfrm>
           <a:prstGeom prst="rect">
@@ -7060,13 +7139,13 @@
       </p:sp>
       <p:sp>
         <p:nvSpPr>
-          <p:cNvPr id="29" name="TextBox 28"/>
-          <p:cNvSpPr txBox="1"/>
-          <p:nvPr/>
-        </p:nvSpPr>
-        <p:spPr>
-          <a:xfrm>
-            <a:off x="6629400" y="5513831"/>
+          <p:cNvPr id="31" name="TextBox 30"/>
+          <p:cNvSpPr txBox="1"/>
+          <p:nvPr/>
+        </p:nvSpPr>
+        <p:spPr>
+          <a:xfrm>
+            <a:off x="6629400" y="5129783"/>
             <a:ext cx="4572000" cy="502920"/>
           </a:xfrm>
           <a:prstGeom prst="rect">
@@ -7095,29 +7174,108 @@
       </p:sp>
       <p:sp>
         <p:nvSpPr>
-          <p:cNvPr id="30" name="TextBox 29"/>
-          <p:cNvSpPr txBox="1"/>
-          <p:nvPr/>
-        </p:nvSpPr>
-        <p:spPr>
-          <a:xfrm>
-            <a:off x="822960" y="6355080"/>
-            <a:ext cx="10515600" cy="320040"/>
-          </a:xfrm>
-          <a:prstGeom prst="rect">
-            <a:avLst/>
-          </a:prstGeom>
-          <a:noFill/>
-        </p:spPr>
-        <p:txBody>
-          <a:bodyPr wrap="square" lIns="0" rIns="0" tIns="0" bIns="0">
-            <a:spAutoFit/>
-          </a:bodyPr>
-          <a:lstStyle/>
-          <a:p>
-            <a:pPr algn="l"/>
-            <a:r>
-              <a:rPr sz="950" b="0" i="0">
+          <p:cNvPr id="32" name="Rectangle 31"/>
+          <p:cNvSpPr/>
+          <p:nvPr/>
+        </p:nvSpPr>
+        <p:spPr>
+          <a:xfrm>
+            <a:off x="6629400" y="5605271"/>
+            <a:ext cx="4572000" cy="10972"/>
+          </a:xfrm>
+          <a:prstGeom prst="rect">
+            <a:avLst/>
+          </a:prstGeom>
+          <a:solidFill>
+            <a:srgbClr val="F47321"/>
+          </a:solidFill>
+          <a:ln>
+            <a:noFill/>
+          </a:ln>
+          <a:effectLst/>
+        </p:spPr>
+        <p:style>
+          <a:lnRef idx="1">
+            <a:schemeClr val="accent1"/>
+          </a:lnRef>
+          <a:fillRef idx="3">
+            <a:schemeClr val="accent1"/>
+          </a:fillRef>
+          <a:effectRef idx="2">
+            <a:schemeClr val="accent1"/>
+          </a:effectRef>
+          <a:fontRef idx="minor">
+            <a:schemeClr val="lt1"/>
+          </a:fontRef>
+        </p:style>
+        <p:txBody>
+          <a:bodyPr rtlCol="0" anchor="ctr"/>
+          <a:lstStyle/>
+          <a:p>
+            <a:pPr algn="ctr"/>
+          </a:p>
+        </p:txBody>
+      </p:sp>
+      <p:sp>
+        <p:nvSpPr>
+          <p:cNvPr id="33" name="TextBox 32"/>
+          <p:cNvSpPr txBox="1"/>
+          <p:nvPr/>
+        </p:nvSpPr>
+        <p:spPr>
+          <a:xfrm>
+            <a:off x="6629400" y="5650992"/>
+            <a:ext cx="4572000" cy="640080"/>
+          </a:xfrm>
+          <a:prstGeom prst="rect">
+            <a:avLst/>
+          </a:prstGeom>
+          <a:noFill/>
+        </p:spPr>
+        <p:txBody>
+          <a:bodyPr wrap="square" lIns="0" rIns="0" tIns="0" bIns="0">
+            <a:spAutoFit/>
+          </a:bodyPr>
+          <a:lstStyle/>
+          <a:p>
+            <a:pPr algn="l"/>
+            <a:r>
+              <a:rPr sz="950" b="1" i="0">
+                <a:solidFill>
+                  <a:srgbClr val="B64F0F"/>
+                </a:solidFill>
+                <a:latin typeface="Arial"/>
+              </a:rPr>
+              <a:t>FLAGS  Mullen: no starter named, Arnold and Orji may both play vs Memphis · DT Fuller, DB Welch, LB Spellman regained eligibility via Colorado ruling (NCAA appealing)</a:t>
+            </a:r>
+          </a:p>
+        </p:txBody>
+      </p:sp>
+      <p:sp>
+        <p:nvSpPr>
+          <p:cNvPr id="34" name="TextBox 33"/>
+          <p:cNvSpPr txBox="1"/>
+          <p:nvPr/>
+        </p:nvSpPr>
+        <p:spPr>
+          <a:xfrm>
+            <a:off x="822960" y="6519672"/>
+            <a:ext cx="10515600" cy="274320"/>
+          </a:xfrm>
+          <a:prstGeom prst="rect">
+            <a:avLst/>
+          </a:prstGeom>
+          <a:noFill/>
+        </p:spPr>
+        <p:txBody>
+          <a:bodyPr wrap="square" lIns="0" rIns="0" tIns="0" bIns="0">
+            <a:spAutoFit/>
+          </a:bodyPr>
+          <a:lstStyle/>
+          <a:p>
+            <a:pPr algn="l"/>
+            <a:r>
+              <a:rPr sz="900" b="0" i="0">
                 <a:solidFill>
                   <a:srgbClr val="5C6B7E"/>
                 </a:solidFill>
@@ -10313,7 +10471,7 @@
         <p:spPr>
           <a:xfrm>
             <a:off x="822960" y="1417320"/>
-            <a:ext cx="5166360" cy="4754880"/>
+            <a:ext cx="5166360" cy="5029200"/>
           </a:xfrm>
           <a:prstGeom prst="roundRect">
             <a:avLst/>
@@ -10520,7 +10678,7 @@
         </p:nvSpPr>
         <p:spPr>
           <a:xfrm>
-            <a:off x="1143000" y="3410712"/>
+            <a:off x="1143000" y="3282696"/>
             <a:ext cx="4572000" cy="320040"/>
           </a:xfrm>
           <a:prstGeom prst="rect">
@@ -10555,7 +10713,7 @@
         </p:nvSpPr>
         <p:spPr>
           <a:xfrm>
-            <a:off x="1143000" y="3721608"/>
+            <a:off x="1143000" y="3593591"/>
             <a:ext cx="4572000" cy="502920"/>
           </a:xfrm>
           <a:prstGeom prst="rect">
@@ -10590,7 +10748,7 @@
         </p:nvSpPr>
         <p:spPr>
           <a:xfrm>
-            <a:off x="1143000" y="4306824"/>
+            <a:off x="1143000" y="4050791"/>
             <a:ext cx="4572000" cy="320040"/>
           </a:xfrm>
           <a:prstGeom prst="rect">
@@ -10625,7 +10783,7 @@
         </p:nvSpPr>
         <p:spPr>
           <a:xfrm>
-            <a:off x="1143000" y="4617720"/>
+            <a:off x="1143000" y="4361688"/>
             <a:ext cx="4572000" cy="502920"/>
           </a:xfrm>
           <a:prstGeom prst="rect">
@@ -10660,7 +10818,7 @@
         </p:nvSpPr>
         <p:spPr>
           <a:xfrm>
-            <a:off x="1143000" y="5202936"/>
+            <a:off x="1143000" y="4818888"/>
             <a:ext cx="4572000" cy="320040"/>
           </a:xfrm>
           <a:prstGeom prst="rect">
@@ -10695,7 +10853,7 @@
         </p:nvSpPr>
         <p:spPr>
           <a:xfrm>
-            <a:off x="1143000" y="5513831"/>
+            <a:off x="1143000" y="5129783"/>
             <a:ext cx="4572000" cy="502920"/>
           </a:xfrm>
           <a:prstGeom prst="rect">
@@ -10724,14 +10882,93 @@
       </p:sp>
       <p:sp>
         <p:nvSpPr>
-          <p:cNvPr id="18" name="Rounded Rectangle 17"/>
+          <p:cNvPr id="18" name="Rectangle 17"/>
           <p:cNvSpPr/>
           <p:nvPr/>
         </p:nvSpPr>
         <p:spPr>
           <a:xfrm>
+            <a:off x="1143000" y="5605271"/>
+            <a:ext cx="4572000" cy="10972"/>
+          </a:xfrm>
+          <a:prstGeom prst="rect">
+            <a:avLst/>
+          </a:prstGeom>
+          <a:solidFill>
+            <a:srgbClr val="F47321"/>
+          </a:solidFill>
+          <a:ln>
+            <a:noFill/>
+          </a:ln>
+          <a:effectLst/>
+        </p:spPr>
+        <p:style>
+          <a:lnRef idx="1">
+            <a:schemeClr val="accent1"/>
+          </a:lnRef>
+          <a:fillRef idx="3">
+            <a:schemeClr val="accent1"/>
+          </a:fillRef>
+          <a:effectRef idx="2">
+            <a:schemeClr val="accent1"/>
+          </a:effectRef>
+          <a:fontRef idx="minor">
+            <a:schemeClr val="lt1"/>
+          </a:fontRef>
+        </p:style>
+        <p:txBody>
+          <a:bodyPr rtlCol="0" anchor="ctr"/>
+          <a:lstStyle/>
+          <a:p>
+            <a:pPr algn="ctr"/>
+          </a:p>
+        </p:txBody>
+      </p:sp>
+      <p:sp>
+        <p:nvSpPr>
+          <p:cNvPr id="19" name="TextBox 18"/>
+          <p:cNvSpPr txBox="1"/>
+          <p:nvPr/>
+        </p:nvSpPr>
+        <p:spPr>
+          <a:xfrm>
+            <a:off x="1143000" y="5650992"/>
+            <a:ext cx="4572000" cy="640080"/>
+          </a:xfrm>
+          <a:prstGeom prst="rect">
+            <a:avLst/>
+          </a:prstGeom>
+          <a:noFill/>
+        </p:spPr>
+        <p:txBody>
+          <a:bodyPr wrap="square" lIns="0" rIns="0" tIns="0" bIns="0">
+            <a:spAutoFit/>
+          </a:bodyPr>
+          <a:lstStyle/>
+          <a:p>
+            <a:pPr algn="l"/>
+            <a:r>
+              <a:rPr sz="950" b="1" i="0">
+                <a:solidFill>
+                  <a:srgbClr val="B64F0F"/>
+                </a:solidFill>
+                <a:latin typeface="Arial"/>
+              </a:rPr>
+              <a:t>FLAGS  DC Steve Belichick on indefinite medical leave since Aug 6; no return timeline · No interim DC named; Belichick says defense coached 'collectively' - play-caller unknown · GM Michael Lombardi on paid admin leave since Jul 27 (HR complaint); open-ended</a:t>
+            </a:r>
+          </a:p>
+        </p:txBody>
+      </p:sp>
+      <p:sp>
+        <p:nvSpPr>
+          <p:cNvPr id="20" name="Rounded Rectangle 19"/>
+          <p:cNvSpPr/>
+          <p:nvPr/>
+        </p:nvSpPr>
+        <p:spPr>
+          <a:xfrm>
             <a:off x="6309360" y="1417320"/>
-            <a:ext cx="5166360" cy="4754880"/>
+            <a:ext cx="5166360" cy="5029200"/>
           </a:xfrm>
           <a:prstGeom prst="roundRect">
             <a:avLst/>
@@ -10768,7 +11005,7 @@
       </p:sp>
       <p:pic>
         <p:nvPicPr>
-          <p:cNvPr id="19" name="Picture 18" descr="tcu.png"/>
+          <p:cNvPr id="21" name="Picture 20" descr="tcu.png"/>
           <p:cNvPicPr>
             <a:picLocks noChangeAspect="1"/>
           </p:cNvPicPr>
@@ -10792,7 +11029,7 @@
       </p:pic>
       <p:sp>
         <p:nvSpPr>
-          <p:cNvPr id="20" name="TextBox 19"/>
+          <p:cNvPr id="22" name="TextBox 21"/>
           <p:cNvSpPr txBox="1"/>
           <p:nvPr/>
         </p:nvSpPr>
@@ -10827,7 +11064,7 @@
       </p:sp>
       <p:sp>
         <p:nvSpPr>
-          <p:cNvPr id="21" name="TextBox 20"/>
+          <p:cNvPr id="23" name="TextBox 22"/>
           <p:cNvSpPr txBox="1"/>
           <p:nvPr/>
         </p:nvSpPr>
@@ -10862,7 +11099,7 @@
       </p:sp>
       <p:sp>
         <p:nvSpPr>
-          <p:cNvPr id="22" name="TextBox 21"/>
+          <p:cNvPr id="24" name="TextBox 23"/>
           <p:cNvSpPr txBox="1"/>
           <p:nvPr/>
         </p:nvSpPr>
@@ -10897,7 +11134,7 @@
       </p:sp>
       <p:sp>
         <p:nvSpPr>
-          <p:cNvPr id="23" name="TextBox 22"/>
+          <p:cNvPr id="25" name="TextBox 24"/>
           <p:cNvSpPr txBox="1"/>
           <p:nvPr/>
         </p:nvSpPr>
@@ -10932,13 +11169,13 @@
       </p:sp>
       <p:sp>
         <p:nvSpPr>
-          <p:cNvPr id="24" name="TextBox 23"/>
-          <p:cNvSpPr txBox="1"/>
-          <p:nvPr/>
-        </p:nvSpPr>
-        <p:spPr>
-          <a:xfrm>
-            <a:off x="6629400" y="3410712"/>
+          <p:cNvPr id="26" name="TextBox 25"/>
+          <p:cNvSpPr txBox="1"/>
+          <p:nvPr/>
+        </p:nvSpPr>
+        <p:spPr>
+          <a:xfrm>
+            <a:off x="6629400" y="3282696"/>
             <a:ext cx="4572000" cy="320040"/>
           </a:xfrm>
           <a:prstGeom prst="rect">
@@ -10967,13 +11204,13 @@
       </p:sp>
       <p:sp>
         <p:nvSpPr>
-          <p:cNvPr id="25" name="TextBox 24"/>
-          <p:cNvSpPr txBox="1"/>
-          <p:nvPr/>
-        </p:nvSpPr>
-        <p:spPr>
-          <a:xfrm>
-            <a:off x="6629400" y="3721608"/>
+          <p:cNvPr id="27" name="TextBox 26"/>
+          <p:cNvSpPr txBox="1"/>
+          <p:nvPr/>
+        </p:nvSpPr>
+        <p:spPr>
+          <a:xfrm>
+            <a:off x="6629400" y="3593591"/>
             <a:ext cx="4572000" cy="502920"/>
           </a:xfrm>
           <a:prstGeom prst="rect">
@@ -11002,13 +11239,13 @@
       </p:sp>
       <p:sp>
         <p:nvSpPr>
-          <p:cNvPr id="26" name="TextBox 25"/>
-          <p:cNvSpPr txBox="1"/>
-          <p:nvPr/>
-        </p:nvSpPr>
-        <p:spPr>
-          <a:xfrm>
-            <a:off x="6629400" y="4306824"/>
+          <p:cNvPr id="28" name="TextBox 27"/>
+          <p:cNvSpPr txBox="1"/>
+          <p:nvPr/>
+        </p:nvSpPr>
+        <p:spPr>
+          <a:xfrm>
+            <a:off x="6629400" y="4050791"/>
             <a:ext cx="4572000" cy="320040"/>
           </a:xfrm>
           <a:prstGeom prst="rect">
@@ -11037,13 +11274,13 @@
       </p:sp>
       <p:sp>
         <p:nvSpPr>
-          <p:cNvPr id="27" name="TextBox 26"/>
-          <p:cNvSpPr txBox="1"/>
-          <p:nvPr/>
-        </p:nvSpPr>
-        <p:spPr>
-          <a:xfrm>
-            <a:off x="6629400" y="4617720"/>
+          <p:cNvPr id="29" name="TextBox 28"/>
+          <p:cNvSpPr txBox="1"/>
+          <p:nvPr/>
+        </p:nvSpPr>
+        <p:spPr>
+          <a:xfrm>
+            <a:off x="6629400" y="4361688"/>
             <a:ext cx="4572000" cy="502920"/>
           </a:xfrm>
           <a:prstGeom prst="rect">
@@ -11072,13 +11309,13 @@
       </p:sp>
       <p:sp>
         <p:nvSpPr>
-          <p:cNvPr id="28" name="TextBox 27"/>
-          <p:cNvSpPr txBox="1"/>
-          <p:nvPr/>
-        </p:nvSpPr>
-        <p:spPr>
-          <a:xfrm>
-            <a:off x="6629400" y="5202936"/>
+          <p:cNvPr id="30" name="TextBox 29"/>
+          <p:cNvSpPr txBox="1"/>
+          <p:nvPr/>
+        </p:nvSpPr>
+        <p:spPr>
+          <a:xfrm>
+            <a:off x="6629400" y="4818888"/>
             <a:ext cx="4572000" cy="320040"/>
           </a:xfrm>
           <a:prstGeom prst="rect">
@@ -11107,13 +11344,13 @@
       </p:sp>
       <p:sp>
         <p:nvSpPr>
-          <p:cNvPr id="29" name="TextBox 28"/>
-          <p:cNvSpPr txBox="1"/>
-          <p:nvPr/>
-        </p:nvSpPr>
-        <p:spPr>
-          <a:xfrm>
-            <a:off x="6629400" y="5513831"/>
+          <p:cNvPr id="31" name="TextBox 30"/>
+          <p:cNvSpPr txBox="1"/>
+          <p:nvPr/>
+        </p:nvSpPr>
+        <p:spPr>
+          <a:xfrm>
+            <a:off x="6629400" y="5129783"/>
             <a:ext cx="4572000" cy="502920"/>
           </a:xfrm>
           <a:prstGeom prst="rect">
@@ -11142,29 +11379,108 @@
       </p:sp>
       <p:sp>
         <p:nvSpPr>
-          <p:cNvPr id="30" name="TextBox 29"/>
-          <p:cNvSpPr txBox="1"/>
-          <p:nvPr/>
-        </p:nvSpPr>
-        <p:spPr>
-          <a:xfrm>
-            <a:off x="822960" y="6355080"/>
-            <a:ext cx="10515600" cy="320040"/>
-          </a:xfrm>
-          <a:prstGeom prst="rect">
-            <a:avLst/>
-          </a:prstGeom>
-          <a:noFill/>
-        </p:spPr>
-        <p:txBody>
-          <a:bodyPr wrap="square" lIns="0" rIns="0" tIns="0" bIns="0">
-            <a:spAutoFit/>
-          </a:bodyPr>
-          <a:lstStyle/>
-          <a:p>
-            <a:pPr algn="l"/>
-            <a:r>
-              <a:rPr sz="950" b="0" i="0">
+          <p:cNvPr id="32" name="Rectangle 31"/>
+          <p:cNvSpPr/>
+          <p:nvPr/>
+        </p:nvSpPr>
+        <p:spPr>
+          <a:xfrm>
+            <a:off x="6629400" y="5605271"/>
+            <a:ext cx="4572000" cy="10972"/>
+          </a:xfrm>
+          <a:prstGeom prst="rect">
+            <a:avLst/>
+          </a:prstGeom>
+          <a:solidFill>
+            <a:srgbClr val="F47321"/>
+          </a:solidFill>
+          <a:ln>
+            <a:noFill/>
+          </a:ln>
+          <a:effectLst/>
+        </p:spPr>
+        <p:style>
+          <a:lnRef idx="1">
+            <a:schemeClr val="accent1"/>
+          </a:lnRef>
+          <a:fillRef idx="3">
+            <a:schemeClr val="accent1"/>
+          </a:fillRef>
+          <a:effectRef idx="2">
+            <a:schemeClr val="accent1"/>
+          </a:effectRef>
+          <a:fontRef idx="minor">
+            <a:schemeClr val="lt1"/>
+          </a:fontRef>
+        </p:style>
+        <p:txBody>
+          <a:bodyPr rtlCol="0" anchor="ctr"/>
+          <a:lstStyle/>
+          <a:p>
+            <a:pPr algn="ctr"/>
+          </a:p>
+        </p:txBody>
+      </p:sp>
+      <p:sp>
+        <p:nvSpPr>
+          <p:cNvPr id="33" name="TextBox 32"/>
+          <p:cNvSpPr txBox="1"/>
+          <p:nvPr/>
+        </p:nvSpPr>
+        <p:spPr>
+          <a:xfrm>
+            <a:off x="6629400" y="5650992"/>
+            <a:ext cx="4572000" cy="640080"/>
+          </a:xfrm>
+          <a:prstGeom prst="rect">
+            <a:avLst/>
+          </a:prstGeom>
+          <a:noFill/>
+        </p:spPr>
+        <p:txBody>
+          <a:bodyPr wrap="square" lIns="0" rIns="0" tIns="0" bIns="0">
+            <a:spAutoFit/>
+          </a:bodyPr>
+          <a:lstStyle/>
+          <a:p>
+            <a:pPr algn="l"/>
+            <a:r>
+              <a:rPr sz="950" b="1" i="0">
+                <a:solidFill>
+                  <a:srgbClr val="B64F0F"/>
+                </a:solidFill>
+                <a:latin typeface="Arial"/>
+              </a:rPr>
+              <a:t>FLAGS  Jaden Craig (Harvard, 0 FBS snaps) is working QB1; no formal Dykes announcement found · Projected starting S Jacob Fields dismissed Aug 18 (locker-room altercation Aug 13) · Jamel Johnson (5 INT in 2025) takes bigger safety role after Fields dismissal</a:t>
+            </a:r>
+          </a:p>
+        </p:txBody>
+      </p:sp>
+      <p:sp>
+        <p:nvSpPr>
+          <p:cNvPr id="34" name="TextBox 33"/>
+          <p:cNvSpPr txBox="1"/>
+          <p:nvPr/>
+        </p:nvSpPr>
+        <p:spPr>
+          <a:xfrm>
+            <a:off x="822960" y="6519672"/>
+            <a:ext cx="10515600" cy="274320"/>
+          </a:xfrm>
+          <a:prstGeom prst="rect">
+            <a:avLst/>
+          </a:prstGeom>
+          <a:noFill/>
+        </p:spPr>
+        <p:txBody>
+          <a:bodyPr wrap="square" lIns="0" rIns="0" tIns="0" bIns="0">
+            <a:spAutoFit/>
+          </a:bodyPr>
+          <a:lstStyle/>
+          <a:p>
+            <a:pPr algn="l"/>
+            <a:r>
+              <a:rPr sz="900" b="0" i="0">
                 <a:solidFill>
                   <a:srgbClr val="5C6B7E"/>
                 </a:solidFill>
@@ -12629,7 +12945,7 @@
         <p:spPr>
           <a:xfrm>
             <a:off x="822960" y="1417320"/>
-            <a:ext cx="5166360" cy="4754880"/>
+            <a:ext cx="5166360" cy="5029200"/>
           </a:xfrm>
           <a:prstGeom prst="roundRect">
             <a:avLst/>
@@ -12836,7 +13152,7 @@
         </p:nvSpPr>
         <p:spPr>
           <a:xfrm>
-            <a:off x="1143000" y="3410712"/>
+            <a:off x="1143000" y="3282696"/>
             <a:ext cx="4572000" cy="320040"/>
           </a:xfrm>
           <a:prstGeom prst="rect">
@@ -12871,7 +13187,7 @@
         </p:nvSpPr>
         <p:spPr>
           <a:xfrm>
-            <a:off x="1143000" y="3721608"/>
+            <a:off x="1143000" y="3593591"/>
             <a:ext cx="4572000" cy="502920"/>
           </a:xfrm>
           <a:prstGeom prst="rect">
@@ -12906,7 +13222,7 @@
         </p:nvSpPr>
         <p:spPr>
           <a:xfrm>
-            <a:off x="1143000" y="4306824"/>
+            <a:off x="1143000" y="4050791"/>
             <a:ext cx="4572000" cy="320040"/>
           </a:xfrm>
           <a:prstGeom prst="rect">
@@ -12941,7 +13257,7 @@
         </p:nvSpPr>
         <p:spPr>
           <a:xfrm>
-            <a:off x="1143000" y="4617720"/>
+            <a:off x="1143000" y="4361688"/>
             <a:ext cx="4572000" cy="502920"/>
           </a:xfrm>
           <a:prstGeom prst="rect">
@@ -12976,7 +13292,7 @@
         </p:nvSpPr>
         <p:spPr>
           <a:xfrm>
-            <a:off x="1143000" y="5202936"/>
+            <a:off x="1143000" y="4818888"/>
             <a:ext cx="4572000" cy="320040"/>
           </a:xfrm>
           <a:prstGeom prst="rect">
@@ -13011,7 +13327,7 @@
         </p:nvSpPr>
         <p:spPr>
           <a:xfrm>
-            <a:off x="1143000" y="5513831"/>
+            <a:off x="1143000" y="5129783"/>
             <a:ext cx="4572000" cy="502920"/>
           </a:xfrm>
           <a:prstGeom prst="rect">
@@ -13040,14 +13356,93 @@
       </p:sp>
       <p:sp>
         <p:nvSpPr>
-          <p:cNvPr id="18" name="Rounded Rectangle 17"/>
+          <p:cNvPr id="18" name="Rectangle 17"/>
           <p:cNvSpPr/>
           <p:nvPr/>
         </p:nvSpPr>
         <p:spPr>
           <a:xfrm>
+            <a:off x="1143000" y="5605271"/>
+            <a:ext cx="4572000" cy="10972"/>
+          </a:xfrm>
+          <a:prstGeom prst="rect">
+            <a:avLst/>
+          </a:prstGeom>
+          <a:solidFill>
+            <a:srgbClr val="F47321"/>
+          </a:solidFill>
+          <a:ln>
+            <a:noFill/>
+          </a:ln>
+          <a:effectLst/>
+        </p:spPr>
+        <p:style>
+          <a:lnRef idx="1">
+            <a:schemeClr val="accent1"/>
+          </a:lnRef>
+          <a:fillRef idx="3">
+            <a:schemeClr val="accent1"/>
+          </a:fillRef>
+          <a:effectRef idx="2">
+            <a:schemeClr val="accent1"/>
+          </a:effectRef>
+          <a:fontRef idx="minor">
+            <a:schemeClr val="lt1"/>
+          </a:fontRef>
+        </p:style>
+        <p:txBody>
+          <a:bodyPr rtlCol="0" anchor="ctr"/>
+          <a:lstStyle/>
+          <a:p>
+            <a:pPr algn="ctr"/>
+          </a:p>
+        </p:txBody>
+      </p:sp>
+      <p:sp>
+        <p:nvSpPr>
+          <p:cNvPr id="19" name="TextBox 18"/>
+          <p:cNvSpPr txBox="1"/>
+          <p:nvPr/>
+        </p:nvSpPr>
+        <p:spPr>
+          <a:xfrm>
+            <a:off x="1143000" y="5650992"/>
+            <a:ext cx="4572000" cy="640080"/>
+          </a:xfrm>
+          <a:prstGeom prst="rect">
+            <a:avLst/>
+          </a:prstGeom>
+          <a:noFill/>
+        </p:spPr>
+        <p:txBody>
+          <a:bodyPr wrap="square" lIns="0" rIns="0" tIns="0" bIns="0">
+            <a:spAutoFit/>
+          </a:bodyPr>
+          <a:lstStyle/>
+          <a:p>
+            <a:pPr algn="l"/>
+            <a:r>
+              <a:rPr sz="950" b="1" i="0">
+                <a:solidFill>
+                  <a:srgbClr val="B64F0F"/>
+                </a:solidFill>
+                <a:latin typeface="Arial"/>
+              </a:rPr>
+              <a:t>FLAGS  CJ Bailey (3rd-yr starter) healthy; no injury reports through camp · WR Teddy Hoffmann (top returning WR) suspended all of 2026 - PED positive · Doeren: eligibility situations pending for Jamel Johnson, KaTron Evans (details paywalled)</a:t>
+            </a:r>
+          </a:p>
+        </p:txBody>
+      </p:sp>
+      <p:sp>
+        <p:nvSpPr>
+          <p:cNvPr id="20" name="Rounded Rectangle 19"/>
+          <p:cNvSpPr/>
+          <p:nvPr/>
+        </p:nvSpPr>
+        <p:spPr>
+          <a:xfrm>
             <a:off x="6309360" y="1417320"/>
-            <a:ext cx="5166360" cy="4754880"/>
+            <a:ext cx="5166360" cy="5029200"/>
           </a:xfrm>
           <a:prstGeom prst="roundRect">
             <a:avLst/>
@@ -13084,7 +13479,7 @@
       </p:sp>
       <p:pic>
         <p:nvPicPr>
-          <p:cNvPr id="19" name="Picture 18" descr="uva.png"/>
+          <p:cNvPr id="21" name="Picture 20" descr="uva.png"/>
           <p:cNvPicPr>
             <a:picLocks noChangeAspect="1"/>
           </p:cNvPicPr>
@@ -13108,7 +13503,7 @@
       </p:pic>
       <p:sp>
         <p:nvSpPr>
-          <p:cNvPr id="20" name="TextBox 19"/>
+          <p:cNvPr id="22" name="TextBox 21"/>
           <p:cNvSpPr txBox="1"/>
           <p:nvPr/>
         </p:nvSpPr>
@@ -13143,7 +13538,7 @@
       </p:sp>
       <p:sp>
         <p:nvSpPr>
-          <p:cNvPr id="21" name="TextBox 20"/>
+          <p:cNvPr id="23" name="TextBox 22"/>
           <p:cNvSpPr txBox="1"/>
           <p:nvPr/>
         </p:nvSpPr>
@@ -13178,7 +13573,7 @@
       </p:sp>
       <p:sp>
         <p:nvSpPr>
-          <p:cNvPr id="22" name="TextBox 21"/>
+          <p:cNvPr id="24" name="TextBox 23"/>
           <p:cNvSpPr txBox="1"/>
           <p:nvPr/>
         </p:nvSpPr>
@@ -13213,7 +13608,7 @@
       </p:sp>
       <p:sp>
         <p:nvSpPr>
-          <p:cNvPr id="23" name="TextBox 22"/>
+          <p:cNvPr id="25" name="TextBox 24"/>
           <p:cNvSpPr txBox="1"/>
           <p:nvPr/>
         </p:nvSpPr>
@@ -13241,20 +13636,20 @@
                 </a:solidFill>
                 <a:latin typeface="Arial"/>
               </a:rPr>
-              <a:t>QB — Missouri transfer; 2025: 67.4%, 1,946 yds, 11-9 TD-INT (+6 rush TD); named starter Jul 19</a:t>
-            </a:r>
-          </a:p>
-        </p:txBody>
-      </p:sp>
-      <p:sp>
-        <p:nvSpPr>
-          <p:cNvPr id="24" name="TextBox 23"/>
-          <p:cNvSpPr txBox="1"/>
-          <p:nvPr/>
-        </p:nvSpPr>
-        <p:spPr>
-          <a:xfrm>
-            <a:off x="6629400" y="3410712"/>
+              <a:t>QB — Missouri transfer; 2025: 67.4%, 1,946 yds, 11-9 TD-INT (+6 rush TD); named starter Jul 15 at ACC Kickoff</a:t>
+            </a:r>
+          </a:p>
+        </p:txBody>
+      </p:sp>
+      <p:sp>
+        <p:nvSpPr>
+          <p:cNvPr id="26" name="TextBox 25"/>
+          <p:cNvSpPr txBox="1"/>
+          <p:nvPr/>
+        </p:nvSpPr>
+        <p:spPr>
+          <a:xfrm>
+            <a:off x="6629400" y="3282696"/>
             <a:ext cx="4572000" cy="320040"/>
           </a:xfrm>
           <a:prstGeom prst="rect">
@@ -13283,13 +13678,13 @@
       </p:sp>
       <p:sp>
         <p:nvSpPr>
-          <p:cNvPr id="25" name="TextBox 24"/>
-          <p:cNvSpPr txBox="1"/>
-          <p:nvPr/>
-        </p:nvSpPr>
-        <p:spPr>
-          <a:xfrm>
-            <a:off x="6629400" y="3721608"/>
+          <p:cNvPr id="27" name="TextBox 26"/>
+          <p:cNvSpPr txBox="1"/>
+          <p:nvPr/>
+        </p:nvSpPr>
+        <p:spPr>
+          <a:xfrm>
+            <a:off x="6629400" y="3593591"/>
             <a:ext cx="4572000" cy="502920"/>
           </a:xfrm>
           <a:prstGeom prst="rect">
@@ -13318,13 +13713,13 @@
       </p:sp>
       <p:sp>
         <p:nvSpPr>
-          <p:cNvPr id="26" name="TextBox 25"/>
-          <p:cNvSpPr txBox="1"/>
-          <p:nvPr/>
-        </p:nvSpPr>
-        <p:spPr>
-          <a:xfrm>
-            <a:off x="6629400" y="4306824"/>
+          <p:cNvPr id="28" name="TextBox 27"/>
+          <p:cNvSpPr txBox="1"/>
+          <p:nvPr/>
+        </p:nvSpPr>
+        <p:spPr>
+          <a:xfrm>
+            <a:off x="6629400" y="4050791"/>
             <a:ext cx="4572000" cy="320040"/>
           </a:xfrm>
           <a:prstGeom prst="rect">
@@ -13353,13 +13748,13 @@
       </p:sp>
       <p:sp>
         <p:nvSpPr>
-          <p:cNvPr id="27" name="TextBox 26"/>
-          <p:cNvSpPr txBox="1"/>
-          <p:nvPr/>
-        </p:nvSpPr>
-        <p:spPr>
-          <a:xfrm>
-            <a:off x="6629400" y="4617720"/>
+          <p:cNvPr id="29" name="TextBox 28"/>
+          <p:cNvSpPr txBox="1"/>
+          <p:nvPr/>
+        </p:nvSpPr>
+        <p:spPr>
+          <a:xfrm>
+            <a:off x="6629400" y="4361688"/>
             <a:ext cx="4572000" cy="502920"/>
           </a:xfrm>
           <a:prstGeom prst="rect">
@@ -13388,13 +13783,13 @@
       </p:sp>
       <p:sp>
         <p:nvSpPr>
-          <p:cNvPr id="28" name="TextBox 27"/>
-          <p:cNvSpPr txBox="1"/>
-          <p:nvPr/>
-        </p:nvSpPr>
-        <p:spPr>
-          <a:xfrm>
-            <a:off x="6629400" y="5202936"/>
+          <p:cNvPr id="30" name="TextBox 29"/>
+          <p:cNvSpPr txBox="1"/>
+          <p:nvPr/>
+        </p:nvSpPr>
+        <p:spPr>
+          <a:xfrm>
+            <a:off x="6629400" y="4818888"/>
             <a:ext cx="4572000" cy="320040"/>
           </a:xfrm>
           <a:prstGeom prst="rect">
@@ -13423,13 +13818,13 @@
       </p:sp>
       <p:sp>
         <p:nvSpPr>
-          <p:cNvPr id="29" name="TextBox 28"/>
-          <p:cNvSpPr txBox="1"/>
-          <p:nvPr/>
-        </p:nvSpPr>
-        <p:spPr>
-          <a:xfrm>
-            <a:off x="6629400" y="5513831"/>
+          <p:cNvPr id="31" name="TextBox 30"/>
+          <p:cNvSpPr txBox="1"/>
+          <p:nvPr/>
+        </p:nvSpPr>
+        <p:spPr>
+          <a:xfrm>
+            <a:off x="6629400" y="5129783"/>
             <a:ext cx="4572000" cy="502920"/>
           </a:xfrm>
           <a:prstGeom prst="rect">
@@ -13458,29 +13853,108 @@
       </p:sp>
       <p:sp>
         <p:nvSpPr>
-          <p:cNvPr id="30" name="TextBox 29"/>
-          <p:cNvSpPr txBox="1"/>
-          <p:nvPr/>
-        </p:nvSpPr>
-        <p:spPr>
-          <a:xfrm>
-            <a:off x="822960" y="6355080"/>
-            <a:ext cx="10515600" cy="320040"/>
-          </a:xfrm>
-          <a:prstGeom prst="rect">
-            <a:avLst/>
-          </a:prstGeom>
-          <a:noFill/>
-        </p:spPr>
-        <p:txBody>
-          <a:bodyPr wrap="square" lIns="0" rIns="0" tIns="0" bIns="0">
-            <a:spAutoFit/>
-          </a:bodyPr>
-          <a:lstStyle/>
-          <a:p>
-            <a:pPr algn="l"/>
-            <a:r>
-              <a:rPr sz="950" b="0" i="0">
+          <p:cNvPr id="32" name="Rectangle 31"/>
+          <p:cNvSpPr/>
+          <p:nvPr/>
+        </p:nvSpPr>
+        <p:spPr>
+          <a:xfrm>
+            <a:off x="6629400" y="5605271"/>
+            <a:ext cx="4572000" cy="10972"/>
+          </a:xfrm>
+          <a:prstGeom prst="rect">
+            <a:avLst/>
+          </a:prstGeom>
+          <a:solidFill>
+            <a:srgbClr val="F47321"/>
+          </a:solidFill>
+          <a:ln>
+            <a:noFill/>
+          </a:ln>
+          <a:effectLst/>
+        </p:spPr>
+        <p:style>
+          <a:lnRef idx="1">
+            <a:schemeClr val="accent1"/>
+          </a:lnRef>
+          <a:fillRef idx="3">
+            <a:schemeClr val="accent1"/>
+          </a:fillRef>
+          <a:effectRef idx="2">
+            <a:schemeClr val="accent1"/>
+          </a:effectRef>
+          <a:fontRef idx="minor">
+            <a:schemeClr val="lt1"/>
+          </a:fontRef>
+        </p:style>
+        <p:txBody>
+          <a:bodyPr rtlCol="0" anchor="ctr"/>
+          <a:lstStyle/>
+          <a:p>
+            <a:pPr algn="ctr"/>
+          </a:p>
+        </p:txBody>
+      </p:sp>
+      <p:sp>
+        <p:nvSpPr>
+          <p:cNvPr id="33" name="TextBox 32"/>
+          <p:cNvSpPr txBox="1"/>
+          <p:nvPr/>
+        </p:nvSpPr>
+        <p:spPr>
+          <a:xfrm>
+            <a:off x="6629400" y="5650992"/>
+            <a:ext cx="4572000" cy="640080"/>
+          </a:xfrm>
+          <a:prstGeom prst="rect">
+            <a:avLst/>
+          </a:prstGeom>
+          <a:noFill/>
+        </p:spPr>
+        <p:txBody>
+          <a:bodyPr wrap="square" lIns="0" rIns="0" tIns="0" bIns="0">
+            <a:spAutoFit/>
+          </a:bodyPr>
+          <a:lstStyle/>
+          <a:p>
+            <a:pPr algn="l"/>
+            <a:r>
+              <a:rPr sz="950" b="1" i="0">
+                <a:solidFill>
+                  <a:srgbClr val="B64F0F"/>
+                </a:solidFill>
+                <a:latin typeface="Arial"/>
+              </a:rPr>
+              <a:t>FLAGS  Beau Pribula (Missouri) named starter Jul 15 at ACC Kickoff over Eli Holstein · RB/KR Solomon Beebe arrested Aug 17, 3 animal-cruelty misdemeanors; no team action yet · Beebe was primary KR and rotation back behind Lewis/Middlebrook (RB3, not RB2)</a:t>
+            </a:r>
+          </a:p>
+        </p:txBody>
+      </p:sp>
+      <p:sp>
+        <p:nvSpPr>
+          <p:cNvPr id="34" name="TextBox 33"/>
+          <p:cNvSpPr txBox="1"/>
+          <p:nvPr/>
+        </p:nvSpPr>
+        <p:spPr>
+          <a:xfrm>
+            <a:off x="822960" y="6519672"/>
+            <a:ext cx="10515600" cy="274320"/>
+          </a:xfrm>
+          <a:prstGeom prst="rect">
+            <a:avLst/>
+          </a:prstGeom>
+          <a:noFill/>
+        </p:spPr>
+        <p:txBody>
+          <a:bodyPr wrap="square" lIns="0" rIns="0" tIns="0" bIns="0">
+            <a:spAutoFit/>
+          </a:bodyPr>
+          <a:lstStyle/>
+          <a:p>
+            <a:pPr algn="l"/>
+            <a:r>
+              <a:rPr sz="900" b="0" i="0">
                 <a:solidFill>
                   <a:srgbClr val="5C6B7E"/>
                 </a:solidFill>
@@ -14945,7 +15419,7 @@
         <p:spPr>
           <a:xfrm>
             <a:off x="822960" y="1417320"/>
-            <a:ext cx="5166360" cy="4754880"/>
+            <a:ext cx="5166360" cy="5029200"/>
           </a:xfrm>
           <a:prstGeom prst="roundRect">
             <a:avLst/>
@@ -15152,7 +15626,7 @@
         </p:nvSpPr>
         <p:spPr>
           <a:xfrm>
-            <a:off x="1143000" y="3410712"/>
+            <a:off x="1143000" y="3282696"/>
             <a:ext cx="4572000" cy="320040"/>
           </a:xfrm>
           <a:prstGeom prst="rect">
@@ -15187,7 +15661,7 @@
         </p:nvSpPr>
         <p:spPr>
           <a:xfrm>
-            <a:off x="1143000" y="3721608"/>
+            <a:off x="1143000" y="3593591"/>
             <a:ext cx="4572000" cy="502920"/>
           </a:xfrm>
           <a:prstGeom prst="rect">
@@ -15222,7 +15696,7 @@
         </p:nvSpPr>
         <p:spPr>
           <a:xfrm>
-            <a:off x="1143000" y="4306824"/>
+            <a:off x="1143000" y="4050791"/>
             <a:ext cx="4572000" cy="320040"/>
           </a:xfrm>
           <a:prstGeom prst="rect">
@@ -15257,7 +15731,7 @@
         </p:nvSpPr>
         <p:spPr>
           <a:xfrm>
-            <a:off x="1143000" y="4617720"/>
+            <a:off x="1143000" y="4361688"/>
             <a:ext cx="4572000" cy="502920"/>
           </a:xfrm>
           <a:prstGeom prst="rect">
@@ -15292,7 +15766,7 @@
         </p:nvSpPr>
         <p:spPr>
           <a:xfrm>
-            <a:off x="1143000" y="5202936"/>
+            <a:off x="1143000" y="4818888"/>
             <a:ext cx="4572000" cy="320040"/>
           </a:xfrm>
           <a:prstGeom prst="rect">
@@ -15327,7 +15801,7 @@
         </p:nvSpPr>
         <p:spPr>
           <a:xfrm>
-            <a:off x="1143000" y="5513831"/>
+            <a:off x="1143000" y="5129783"/>
             <a:ext cx="4572000" cy="502920"/>
           </a:xfrm>
           <a:prstGeom prst="rect">
@@ -15356,14 +15830,93 @@
       </p:sp>
       <p:sp>
         <p:nvSpPr>
-          <p:cNvPr id="18" name="Rounded Rectangle 17"/>
+          <p:cNvPr id="18" name="Rectangle 17"/>
           <p:cNvSpPr/>
           <p:nvPr/>
         </p:nvSpPr>
         <p:spPr>
           <a:xfrm>
+            <a:off x="1143000" y="5605271"/>
+            <a:ext cx="4572000" cy="10972"/>
+          </a:xfrm>
+          <a:prstGeom prst="rect">
+            <a:avLst/>
+          </a:prstGeom>
+          <a:solidFill>
+            <a:srgbClr val="F47321"/>
+          </a:solidFill>
+          <a:ln>
+            <a:noFill/>
+          </a:ln>
+          <a:effectLst/>
+        </p:spPr>
+        <p:style>
+          <a:lnRef idx="1">
+            <a:schemeClr val="accent1"/>
+          </a:lnRef>
+          <a:fillRef idx="3">
+            <a:schemeClr val="accent1"/>
+          </a:fillRef>
+          <a:effectRef idx="2">
+            <a:schemeClr val="accent1"/>
+          </a:effectRef>
+          <a:fontRef idx="minor">
+            <a:schemeClr val="lt1"/>
+          </a:fontRef>
+        </p:style>
+        <p:txBody>
+          <a:bodyPr rtlCol="0" anchor="ctr"/>
+          <a:lstStyle/>
+          <a:p>
+            <a:pPr algn="ctr"/>
+          </a:p>
+        </p:txBody>
+      </p:sp>
+      <p:sp>
+        <p:nvSpPr>
+          <p:cNvPr id="19" name="TextBox 18"/>
+          <p:cNvSpPr txBox="1"/>
+          <p:nvPr/>
+        </p:nvSpPr>
+        <p:spPr>
+          <a:xfrm>
+            <a:off x="1143000" y="5650992"/>
+            <a:ext cx="4572000" cy="640080"/>
+          </a:xfrm>
+          <a:prstGeom prst="rect">
+            <a:avLst/>
+          </a:prstGeom>
+          <a:noFill/>
+        </p:spPr>
+        <p:txBody>
+          <a:bodyPr wrap="square" lIns="0" rIns="0" tIns="0" bIns="0">
+            <a:spAutoFit/>
+          </a:bodyPr>
+          <a:lstStyle/>
+          <a:p>
+            <a:pPr algn="l"/>
+            <a:r>
+              <a:rPr sz="950" b="1" i="0">
+                <a:solidFill>
+                  <a:srgbClr val="B64F0F"/>
+                </a:solidFill>
+                <a:latin typeface="Arial"/>
+              </a:rPr>
+              <a:t>FLAGS  Caden Creel returns as starter (1,076 rush yds / 1,514 pass yds in 2025); no injury news · RB1 Tre Cook transferred to WVU; Lando/Paul/Savage compete for carries · No JSU football injuries, suspensions, or arrests found as of Aug 23</a:t>
+            </a:r>
+          </a:p>
+        </p:txBody>
+      </p:sp>
+      <p:sp>
+        <p:nvSpPr>
+          <p:cNvPr id="20" name="Rounded Rectangle 19"/>
+          <p:cNvSpPr/>
+          <p:nvPr/>
+        </p:nvSpPr>
+        <p:spPr>
+          <a:xfrm>
             <a:off x="6309360" y="1417320"/>
-            <a:ext cx="5166360" cy="4754880"/>
+            <a:ext cx="5166360" cy="5029200"/>
           </a:xfrm>
           <a:prstGeom prst="roundRect">
             <a:avLst/>
@@ -15400,7 +15953,7 @@
       </p:sp>
       <p:pic>
         <p:nvPicPr>
-          <p:cNvPr id="19" name="Picture 18" descr="ndsu.png"/>
+          <p:cNvPr id="21" name="Picture 20" descr="ndsu.png"/>
           <p:cNvPicPr>
             <a:picLocks noChangeAspect="1"/>
           </p:cNvPicPr>
@@ -15424,7 +15977,7 @@
       </p:pic>
       <p:sp>
         <p:nvSpPr>
-          <p:cNvPr id="20" name="TextBox 19"/>
+          <p:cNvPr id="22" name="TextBox 21"/>
           <p:cNvSpPr txBox="1"/>
           <p:nvPr/>
         </p:nvSpPr>
@@ -15459,7 +16012,7 @@
       </p:sp>
       <p:sp>
         <p:nvSpPr>
-          <p:cNvPr id="21" name="TextBox 20"/>
+          <p:cNvPr id="23" name="TextBox 22"/>
           <p:cNvSpPr txBox="1"/>
           <p:nvPr/>
         </p:nvSpPr>
@@ -15494,7 +16047,7 @@
       </p:sp>
       <p:sp>
         <p:nvSpPr>
-          <p:cNvPr id="22" name="TextBox 21"/>
+          <p:cNvPr id="24" name="TextBox 23"/>
           <p:cNvSpPr txBox="1"/>
           <p:nvPr/>
         </p:nvSpPr>
@@ -15529,7 +16082,7 @@
       </p:sp>
       <p:sp>
         <p:nvSpPr>
-          <p:cNvPr id="23" name="TextBox 22"/>
+          <p:cNvPr id="25" name="TextBox 24"/>
           <p:cNvSpPr txBox="1"/>
           <p:nvPr/>
         </p:nvSpPr>
@@ -15564,13 +16117,13 @@
       </p:sp>
       <p:sp>
         <p:nvSpPr>
-          <p:cNvPr id="24" name="TextBox 23"/>
-          <p:cNvSpPr txBox="1"/>
-          <p:nvPr/>
-        </p:nvSpPr>
-        <p:spPr>
-          <a:xfrm>
-            <a:off x="6629400" y="3410712"/>
+          <p:cNvPr id="26" name="TextBox 25"/>
+          <p:cNvSpPr txBox="1"/>
+          <p:nvPr/>
+        </p:nvSpPr>
+        <p:spPr>
+          <a:xfrm>
+            <a:off x="6629400" y="3282696"/>
             <a:ext cx="4572000" cy="320040"/>
           </a:xfrm>
           <a:prstGeom prst="rect">
@@ -15599,13 +16152,13 @@
       </p:sp>
       <p:sp>
         <p:nvSpPr>
-          <p:cNvPr id="25" name="TextBox 24"/>
-          <p:cNvSpPr txBox="1"/>
-          <p:nvPr/>
-        </p:nvSpPr>
-        <p:spPr>
-          <a:xfrm>
-            <a:off x="6629400" y="3721608"/>
+          <p:cNvPr id="27" name="TextBox 26"/>
+          <p:cNvSpPr txBox="1"/>
+          <p:nvPr/>
+        </p:nvSpPr>
+        <p:spPr>
+          <a:xfrm>
+            <a:off x="6629400" y="3593591"/>
             <a:ext cx="4572000" cy="502920"/>
           </a:xfrm>
           <a:prstGeom prst="rect">
@@ -15634,13 +16187,13 @@
       </p:sp>
       <p:sp>
         <p:nvSpPr>
-          <p:cNvPr id="26" name="TextBox 25"/>
-          <p:cNvSpPr txBox="1"/>
-          <p:nvPr/>
-        </p:nvSpPr>
-        <p:spPr>
-          <a:xfrm>
-            <a:off x="6629400" y="4306824"/>
+          <p:cNvPr id="28" name="TextBox 27"/>
+          <p:cNvSpPr txBox="1"/>
+          <p:nvPr/>
+        </p:nvSpPr>
+        <p:spPr>
+          <a:xfrm>
+            <a:off x="6629400" y="4050791"/>
             <a:ext cx="4572000" cy="320040"/>
           </a:xfrm>
           <a:prstGeom prst="rect">
@@ -15669,13 +16222,13 @@
       </p:sp>
       <p:sp>
         <p:nvSpPr>
-          <p:cNvPr id="27" name="TextBox 26"/>
-          <p:cNvSpPr txBox="1"/>
-          <p:nvPr/>
-        </p:nvSpPr>
-        <p:spPr>
-          <a:xfrm>
-            <a:off x="6629400" y="4617720"/>
+          <p:cNvPr id="29" name="TextBox 28"/>
+          <p:cNvSpPr txBox="1"/>
+          <p:nvPr/>
+        </p:nvSpPr>
+        <p:spPr>
+          <a:xfrm>
+            <a:off x="6629400" y="4361688"/>
             <a:ext cx="4572000" cy="502920"/>
           </a:xfrm>
           <a:prstGeom prst="rect">
@@ -15704,13 +16257,13 @@
       </p:sp>
       <p:sp>
         <p:nvSpPr>
-          <p:cNvPr id="28" name="TextBox 27"/>
-          <p:cNvSpPr txBox="1"/>
-          <p:nvPr/>
-        </p:nvSpPr>
-        <p:spPr>
-          <a:xfrm>
-            <a:off x="6629400" y="5202936"/>
+          <p:cNvPr id="30" name="TextBox 29"/>
+          <p:cNvSpPr txBox="1"/>
+          <p:nvPr/>
+        </p:nvSpPr>
+        <p:spPr>
+          <a:xfrm>
+            <a:off x="6629400" y="4818888"/>
             <a:ext cx="4572000" cy="320040"/>
           </a:xfrm>
           <a:prstGeom prst="rect">
@@ -15739,13 +16292,13 @@
       </p:sp>
       <p:sp>
         <p:nvSpPr>
-          <p:cNvPr id="29" name="TextBox 28"/>
-          <p:cNvSpPr txBox="1"/>
-          <p:nvPr/>
-        </p:nvSpPr>
-        <p:spPr>
-          <a:xfrm>
-            <a:off x="6629400" y="5513831"/>
+          <p:cNvPr id="31" name="TextBox 30"/>
+          <p:cNvSpPr txBox="1"/>
+          <p:nvPr/>
+        </p:nvSpPr>
+        <p:spPr>
+          <a:xfrm>
+            <a:off x="6629400" y="5129783"/>
             <a:ext cx="4572000" cy="502920"/>
           </a:xfrm>
           <a:prstGeom prst="rect">
@@ -15774,29 +16327,108 @@
       </p:sp>
       <p:sp>
         <p:nvSpPr>
-          <p:cNvPr id="30" name="TextBox 29"/>
-          <p:cNvSpPr txBox="1"/>
-          <p:nvPr/>
-        </p:nvSpPr>
-        <p:spPr>
-          <a:xfrm>
-            <a:off x="822960" y="6355080"/>
-            <a:ext cx="10515600" cy="320040"/>
-          </a:xfrm>
-          <a:prstGeom prst="rect">
-            <a:avLst/>
-          </a:prstGeom>
-          <a:noFill/>
-        </p:spPr>
-        <p:txBody>
-          <a:bodyPr wrap="square" lIns="0" rIns="0" tIns="0" bIns="0">
-            <a:spAutoFit/>
-          </a:bodyPr>
-          <a:lstStyle/>
-          <a:p>
-            <a:pPr algn="l"/>
-            <a:r>
-              <a:rPr sz="950" b="0" i="0">
+          <p:cNvPr id="32" name="Rectangle 31"/>
+          <p:cNvSpPr/>
+          <p:nvPr/>
+        </p:nvSpPr>
+        <p:spPr>
+          <a:xfrm>
+            <a:off x="6629400" y="5605271"/>
+            <a:ext cx="4572000" cy="10972"/>
+          </a:xfrm>
+          <a:prstGeom prst="rect">
+            <a:avLst/>
+          </a:prstGeom>
+          <a:solidFill>
+            <a:srgbClr val="F47321"/>
+          </a:solidFill>
+          <a:ln>
+            <a:noFill/>
+          </a:ln>
+          <a:effectLst/>
+        </p:spPr>
+        <p:style>
+          <a:lnRef idx="1">
+            <a:schemeClr val="accent1"/>
+          </a:lnRef>
+          <a:fillRef idx="3">
+            <a:schemeClr val="accent1"/>
+          </a:fillRef>
+          <a:effectRef idx="2">
+            <a:schemeClr val="accent1"/>
+          </a:effectRef>
+          <a:fontRef idx="minor">
+            <a:schemeClr val="lt1"/>
+          </a:fontRef>
+        </p:style>
+        <p:txBody>
+          <a:bodyPr rtlCol="0" anchor="ctr"/>
+          <a:lstStyle/>
+          <a:p>
+            <a:pPr algn="ctr"/>
+          </a:p>
+        </p:txBody>
+      </p:sp>
+      <p:sp>
+        <p:nvSpPr>
+          <p:cNvPr id="33" name="TextBox 32"/>
+          <p:cNvSpPr txBox="1"/>
+          <p:nvPr/>
+        </p:nvSpPr>
+        <p:spPr>
+          <a:xfrm>
+            <a:off x="6629400" y="5650992"/>
+            <a:ext cx="4572000" cy="640080"/>
+          </a:xfrm>
+          <a:prstGeom prst="rect">
+            <a:avLst/>
+          </a:prstGeom>
+          <a:noFill/>
+        </p:spPr>
+        <p:txBody>
+          <a:bodyPr wrap="square" lIns="0" rIns="0" tIns="0" bIns="0">
+            <a:spAutoFit/>
+          </a:bodyPr>
+          <a:lstStyle/>
+          <a:p>
+            <a:pPr algn="l"/>
+            <a:r>
+              <a:rPr sz="950" b="1" i="0">
+                <a:solidFill>
+                  <a:srgbClr val="B64F0F"/>
+                </a:solidFill>
+                <a:latin typeface="Arial"/>
+              </a:rPr>
+              <a:t>FLAGS  Nathan Hayes (5th-yr Sr, captain) confirmed QB1; first career start vs JSU · NOT title-ineligible: NCAA repealed 2-yr ban Jun 24 - bowl, MWC title game, CFP all open · DT Zach Vanderpool back at practice Aug 19 after slight knee tweak</a:t>
+            </a:r>
+          </a:p>
+        </p:txBody>
+      </p:sp>
+      <p:sp>
+        <p:nvSpPr>
+          <p:cNvPr id="34" name="TextBox 33"/>
+          <p:cNvSpPr txBox="1"/>
+          <p:nvPr/>
+        </p:nvSpPr>
+        <p:spPr>
+          <a:xfrm>
+            <a:off x="822960" y="6519672"/>
+            <a:ext cx="10515600" cy="274320"/>
+          </a:xfrm>
+          <a:prstGeom prst="rect">
+            <a:avLst/>
+          </a:prstGeom>
+          <a:noFill/>
+        </p:spPr>
+        <p:txBody>
+          <a:bodyPr wrap="square" lIns="0" rIns="0" tIns="0" bIns="0">
+            <a:spAutoFit/>
+          </a:bodyPr>
+          <a:lstStyle/>
+          <a:p>
+            <a:pPr algn="l"/>
+            <a:r>
+              <a:rPr sz="900" b="0" i="0">
                 <a:solidFill>
                   <a:srgbClr val="5C6B7E"/>
                 </a:solidFill>
@@ -17261,7 +17893,7 @@
         <p:spPr>
           <a:xfrm>
             <a:off x="822960" y="1417320"/>
-            <a:ext cx="5166360" cy="4754880"/>
+            <a:ext cx="5166360" cy="5029200"/>
           </a:xfrm>
           <a:prstGeom prst="roundRect">
             <a:avLst/>
@@ -17468,7 +18100,7 @@
         </p:nvSpPr>
         <p:spPr>
           <a:xfrm>
-            <a:off x="1143000" y="3410712"/>
+            <a:off x="1143000" y="3282696"/>
             <a:ext cx="4572000" cy="320040"/>
           </a:xfrm>
           <a:prstGeom prst="rect">
@@ -17503,7 +18135,7 @@
         </p:nvSpPr>
         <p:spPr>
           <a:xfrm>
-            <a:off x="1143000" y="3721608"/>
+            <a:off x="1143000" y="3593591"/>
             <a:ext cx="4572000" cy="502920"/>
           </a:xfrm>
           <a:prstGeom prst="rect">
@@ -17538,7 +18170,7 @@
         </p:nvSpPr>
         <p:spPr>
           <a:xfrm>
-            <a:off x="1143000" y="4306824"/>
+            <a:off x="1143000" y="4050791"/>
             <a:ext cx="4572000" cy="320040"/>
           </a:xfrm>
           <a:prstGeom prst="rect">
@@ -17573,7 +18205,7 @@
         </p:nvSpPr>
         <p:spPr>
           <a:xfrm>
-            <a:off x="1143000" y="4617720"/>
+            <a:off x="1143000" y="4361688"/>
             <a:ext cx="4572000" cy="502920"/>
           </a:xfrm>
           <a:prstGeom prst="rect">
@@ -17608,7 +18240,7 @@
         </p:nvSpPr>
         <p:spPr>
           <a:xfrm>
-            <a:off x="1143000" y="5202936"/>
+            <a:off x="1143000" y="4818888"/>
             <a:ext cx="4572000" cy="320040"/>
           </a:xfrm>
           <a:prstGeom prst="rect">
@@ -17643,7 +18275,7 @@
         </p:nvSpPr>
         <p:spPr>
           <a:xfrm>
-            <a:off x="1143000" y="5513831"/>
+            <a:off x="1143000" y="5129783"/>
             <a:ext cx="4572000" cy="502920"/>
           </a:xfrm>
           <a:prstGeom prst="rect">
@@ -17672,14 +18304,93 @@
       </p:sp>
       <p:sp>
         <p:nvSpPr>
-          <p:cNvPr id="18" name="Rounded Rectangle 17"/>
+          <p:cNvPr id="18" name="Rectangle 17"/>
           <p:cNvSpPr/>
           <p:nvPr/>
         </p:nvSpPr>
         <p:spPr>
           <a:xfrm>
+            <a:off x="1143000" y="5605271"/>
+            <a:ext cx="4572000" cy="10972"/>
+          </a:xfrm>
+          <a:prstGeom prst="rect">
+            <a:avLst/>
+          </a:prstGeom>
+          <a:solidFill>
+            <a:srgbClr val="F47321"/>
+          </a:solidFill>
+          <a:ln>
+            <a:noFill/>
+          </a:ln>
+          <a:effectLst/>
+        </p:spPr>
+        <p:style>
+          <a:lnRef idx="1">
+            <a:schemeClr val="accent1"/>
+          </a:lnRef>
+          <a:fillRef idx="3">
+            <a:schemeClr val="accent1"/>
+          </a:fillRef>
+          <a:effectRef idx="2">
+            <a:schemeClr val="accent1"/>
+          </a:effectRef>
+          <a:fontRef idx="minor">
+            <a:schemeClr val="lt1"/>
+          </a:fontRef>
+        </p:style>
+        <p:txBody>
+          <a:bodyPr rtlCol="0" anchor="ctr"/>
+          <a:lstStyle/>
+          <a:p>
+            <a:pPr algn="ctr"/>
+          </a:p>
+        </p:txBody>
+      </p:sp>
+      <p:sp>
+        <p:nvSpPr>
+          <p:cNvPr id="19" name="TextBox 18"/>
+          <p:cNvSpPr txBox="1"/>
+          <p:nvPr/>
+        </p:nvSpPr>
+        <p:spPr>
+          <a:xfrm>
+            <a:off x="1143000" y="5650992"/>
+            <a:ext cx="4572000" cy="640080"/>
+          </a:xfrm>
+          <a:prstGeom prst="rect">
+            <a:avLst/>
+          </a:prstGeom>
+          <a:noFill/>
+        </p:spPr>
+        <p:txBody>
+          <a:bodyPr wrap="square" lIns="0" rIns="0" tIns="0" bIns="0">
+            <a:spAutoFit/>
+          </a:bodyPr>
+          <a:lstStyle/>
+          <a:p>
+            <a:pPr algn="l"/>
+            <a:r>
+              <a:rPr sz="950" b="1" i="0">
+                <a:solidFill>
+                  <a:srgbClr val="B64F0F"/>
+                </a:solidFill>
+                <a:latin typeface="Arial"/>
+              </a:rPr>
+              <a:t>FLAGS  Backup QB Maika Eugenio off roster Jul 23 ('personal and team' issues per Chang) · Micah Alejado starts (MWC pre OPOY); Bjorn Jurgensen (Virginia) cemented QB2 · WR1 Pofele Ashlock (knee) sidelined all camp; return timeline unclear as of Aug 11</a:t>
+            </a:r>
+          </a:p>
+        </p:txBody>
+      </p:sp>
+      <p:sp>
+        <p:nvSpPr>
+          <p:cNvPr id="20" name="Rounded Rectangle 19"/>
+          <p:cNvSpPr/>
+          <p:nvPr/>
+        </p:nvSpPr>
+        <p:spPr>
+          <a:xfrm>
             <a:off x="6309360" y="1417320"/>
-            <a:ext cx="5166360" cy="4754880"/>
+            <a:ext cx="5166360" cy="5029200"/>
           </a:xfrm>
           <a:prstGeom prst="roundRect">
             <a:avLst/>
@@ -17716,7 +18427,7 @@
       </p:sp>
       <p:pic>
         <p:nvPicPr>
-          <p:cNvPr id="19" name="Picture 18" descr="stanford.png"/>
+          <p:cNvPr id="21" name="Picture 20" descr="stanford.png"/>
           <p:cNvPicPr>
             <a:picLocks noChangeAspect="1"/>
           </p:cNvPicPr>
@@ -17740,7 +18451,7 @@
       </p:pic>
       <p:sp>
         <p:nvSpPr>
-          <p:cNvPr id="20" name="TextBox 19"/>
+          <p:cNvPr id="22" name="TextBox 21"/>
           <p:cNvSpPr txBox="1"/>
           <p:nvPr/>
         </p:nvSpPr>
@@ -17775,7 +18486,7 @@
       </p:sp>
       <p:sp>
         <p:nvSpPr>
-          <p:cNvPr id="21" name="TextBox 20"/>
+          <p:cNvPr id="23" name="TextBox 22"/>
           <p:cNvSpPr txBox="1"/>
           <p:nvPr/>
         </p:nvSpPr>
@@ -17810,7 +18521,7 @@
       </p:sp>
       <p:sp>
         <p:nvSpPr>
-          <p:cNvPr id="22" name="TextBox 21"/>
+          <p:cNvPr id="24" name="TextBox 23"/>
           <p:cNvSpPr txBox="1"/>
           <p:nvPr/>
         </p:nvSpPr>
@@ -17845,7 +18556,7 @@
       </p:sp>
       <p:sp>
         <p:nvSpPr>
-          <p:cNvPr id="23" name="TextBox 22"/>
+          <p:cNvPr id="25" name="TextBox 24"/>
           <p:cNvSpPr txBox="1"/>
           <p:nvPr/>
         </p:nvSpPr>
@@ -17880,13 +18591,13 @@
       </p:sp>
       <p:sp>
         <p:nvSpPr>
-          <p:cNvPr id="24" name="TextBox 23"/>
-          <p:cNvSpPr txBox="1"/>
-          <p:nvPr/>
-        </p:nvSpPr>
-        <p:spPr>
-          <a:xfrm>
-            <a:off x="6629400" y="3410712"/>
+          <p:cNvPr id="26" name="TextBox 25"/>
+          <p:cNvSpPr txBox="1"/>
+          <p:nvPr/>
+        </p:nvSpPr>
+        <p:spPr>
+          <a:xfrm>
+            <a:off x="6629400" y="3282696"/>
             <a:ext cx="4572000" cy="320040"/>
           </a:xfrm>
           <a:prstGeom prst="rect">
@@ -17915,13 +18626,13 @@
       </p:sp>
       <p:sp>
         <p:nvSpPr>
-          <p:cNvPr id="25" name="TextBox 24"/>
-          <p:cNvSpPr txBox="1"/>
-          <p:nvPr/>
-        </p:nvSpPr>
-        <p:spPr>
-          <a:xfrm>
-            <a:off x="6629400" y="3721608"/>
+          <p:cNvPr id="27" name="TextBox 26"/>
+          <p:cNvSpPr txBox="1"/>
+          <p:nvPr/>
+        </p:nvSpPr>
+        <p:spPr>
+          <a:xfrm>
+            <a:off x="6629400" y="3593591"/>
             <a:ext cx="4572000" cy="502920"/>
           </a:xfrm>
           <a:prstGeom prst="rect">
@@ -17950,13 +18661,13 @@
       </p:sp>
       <p:sp>
         <p:nvSpPr>
-          <p:cNvPr id="26" name="TextBox 25"/>
-          <p:cNvSpPr txBox="1"/>
-          <p:nvPr/>
-        </p:nvSpPr>
-        <p:spPr>
-          <a:xfrm>
-            <a:off x="6629400" y="4306824"/>
+          <p:cNvPr id="28" name="TextBox 27"/>
+          <p:cNvSpPr txBox="1"/>
+          <p:nvPr/>
+        </p:nvSpPr>
+        <p:spPr>
+          <a:xfrm>
+            <a:off x="6629400" y="4050791"/>
             <a:ext cx="4572000" cy="320040"/>
           </a:xfrm>
           <a:prstGeom prst="rect">
@@ -17985,13 +18696,13 @@
       </p:sp>
       <p:sp>
         <p:nvSpPr>
-          <p:cNvPr id="27" name="TextBox 26"/>
-          <p:cNvSpPr txBox="1"/>
-          <p:nvPr/>
-        </p:nvSpPr>
-        <p:spPr>
-          <a:xfrm>
-            <a:off x="6629400" y="4617720"/>
+          <p:cNvPr id="29" name="TextBox 28"/>
+          <p:cNvSpPr txBox="1"/>
+          <p:nvPr/>
+        </p:nvSpPr>
+        <p:spPr>
+          <a:xfrm>
+            <a:off x="6629400" y="4361688"/>
             <a:ext cx="4572000" cy="502920"/>
           </a:xfrm>
           <a:prstGeom prst="rect">
@@ -18020,13 +18731,13 @@
       </p:sp>
       <p:sp>
         <p:nvSpPr>
-          <p:cNvPr id="28" name="TextBox 27"/>
-          <p:cNvSpPr txBox="1"/>
-          <p:nvPr/>
-        </p:nvSpPr>
-        <p:spPr>
-          <a:xfrm>
-            <a:off x="6629400" y="5202936"/>
+          <p:cNvPr id="30" name="TextBox 29"/>
+          <p:cNvSpPr txBox="1"/>
+          <p:nvPr/>
+        </p:nvSpPr>
+        <p:spPr>
+          <a:xfrm>
+            <a:off x="6629400" y="4818888"/>
             <a:ext cx="4572000" cy="320040"/>
           </a:xfrm>
           <a:prstGeom prst="rect">
@@ -18055,13 +18766,13 @@
       </p:sp>
       <p:sp>
         <p:nvSpPr>
-          <p:cNvPr id="29" name="TextBox 28"/>
-          <p:cNvSpPr txBox="1"/>
-          <p:nvPr/>
-        </p:nvSpPr>
-        <p:spPr>
-          <a:xfrm>
-            <a:off x="6629400" y="5513831"/>
+          <p:cNvPr id="31" name="TextBox 30"/>
+          <p:cNvSpPr txBox="1"/>
+          <p:nvPr/>
+        </p:nvSpPr>
+        <p:spPr>
+          <a:xfrm>
+            <a:off x="6629400" y="5129783"/>
             <a:ext cx="4572000" cy="502920"/>
           </a:xfrm>
           <a:prstGeom prst="rect">
@@ -18090,29 +18801,108 @@
       </p:sp>
       <p:sp>
         <p:nvSpPr>
-          <p:cNvPr id="30" name="TextBox 29"/>
-          <p:cNvSpPr txBox="1"/>
-          <p:nvPr/>
-        </p:nvSpPr>
-        <p:spPr>
-          <a:xfrm>
-            <a:off x="822960" y="6355080"/>
-            <a:ext cx="10515600" cy="320040"/>
-          </a:xfrm>
-          <a:prstGeom prst="rect">
-            <a:avLst/>
-          </a:prstGeom>
-          <a:noFill/>
-        </p:spPr>
-        <p:txBody>
-          <a:bodyPr wrap="square" lIns="0" rIns="0" tIns="0" bIns="0">
-            <a:spAutoFit/>
-          </a:bodyPr>
-          <a:lstStyle/>
-          <a:p>
-            <a:pPr algn="l"/>
-            <a:r>
-              <a:rPr sz="950" b="0" i="0">
+          <p:cNvPr id="32" name="Rectangle 31"/>
+          <p:cNvSpPr/>
+          <p:nvPr/>
+        </p:nvSpPr>
+        <p:spPr>
+          <a:xfrm>
+            <a:off x="6629400" y="5605271"/>
+            <a:ext cx="4572000" cy="10972"/>
+          </a:xfrm>
+          <a:prstGeom prst="rect">
+            <a:avLst/>
+          </a:prstGeom>
+          <a:solidFill>
+            <a:srgbClr val="F47321"/>
+          </a:solidFill>
+          <a:ln>
+            <a:noFill/>
+          </a:ln>
+          <a:effectLst/>
+        </p:spPr>
+        <p:style>
+          <a:lnRef idx="1">
+            <a:schemeClr val="accent1"/>
+          </a:lnRef>
+          <a:fillRef idx="3">
+            <a:schemeClr val="accent1"/>
+          </a:fillRef>
+          <a:effectRef idx="2">
+            <a:schemeClr val="accent1"/>
+          </a:effectRef>
+          <a:fontRef idx="minor">
+            <a:schemeClr val="lt1"/>
+          </a:fontRef>
+        </p:style>
+        <p:txBody>
+          <a:bodyPr rtlCol="0" anchor="ctr"/>
+          <a:lstStyle/>
+          <a:p>
+            <a:pPr algn="ctr"/>
+          </a:p>
+        </p:txBody>
+      </p:sp>
+      <p:sp>
+        <p:nvSpPr>
+          <p:cNvPr id="33" name="TextBox 32"/>
+          <p:cNvSpPr txBox="1"/>
+          <p:nvPr/>
+        </p:nvSpPr>
+        <p:spPr>
+          <a:xfrm>
+            <a:off x="6629400" y="5650992"/>
+            <a:ext cx="4572000" cy="640080"/>
+          </a:xfrm>
+          <a:prstGeom prst="rect">
+            <a:avLst/>
+          </a:prstGeom>
+          <a:noFill/>
+        </p:spPr>
+        <p:txBody>
+          <a:bodyPr wrap="square" lIns="0" rIns="0" tIns="0" bIns="0">
+            <a:spAutoFit/>
+          </a:bodyPr>
+          <a:lstStyle/>
+          <a:p>
+            <a:pPr algn="l"/>
+            <a:r>
+              <a:rPr sz="950" b="1" i="0">
+                <a:solidFill>
+                  <a:srgbClr val="B64F0F"/>
+                </a:solidFill>
+                <a:latin typeface="Arial"/>
+              </a:rPr>
+              <a:t>FLAGS  Davis Warren (Michigan) named starter Aug 18 over Dylan Rizk, Michael Mitchell Jr. · Warren tore right ACL in Dec 2024 bowl, missed all of 2025; first game back · Tavita Pritchard's first game as HC (hired Nov 28, 2025); Andrew Luck GM, year 2</a:t>
+            </a:r>
+          </a:p>
+        </p:txBody>
+      </p:sp>
+      <p:sp>
+        <p:nvSpPr>
+          <p:cNvPr id="34" name="TextBox 33"/>
+          <p:cNvSpPr txBox="1"/>
+          <p:nvPr/>
+        </p:nvSpPr>
+        <p:spPr>
+          <a:xfrm>
+            <a:off x="822960" y="6519672"/>
+            <a:ext cx="10515600" cy="274320"/>
+          </a:xfrm>
+          <a:prstGeom prst="rect">
+            <a:avLst/>
+          </a:prstGeom>
+          <a:noFill/>
+        </p:spPr>
+        <p:txBody>
+          <a:bodyPr wrap="square" lIns="0" rIns="0" tIns="0" bIns="0">
+            <a:spAutoFit/>
+          </a:bodyPr>
+          <a:lstStyle/>
+          <a:p>
+            <a:pPr algn="l"/>
+            <a:r>
+              <a:rPr sz="900" b="0" i="0">
                 <a:solidFill>
                   <a:srgbClr val="5C6B7E"/>
                 </a:solidFill>

--- a/decks/2026_Week0_Episode1.pptx
+++ b/decks/2026_Week0_Episode1.pptx
@@ -14548,7 +14548,7 @@
                 </a:solidFill>
                 <a:latin typeface="Arial"/>
               </a:rPr>
-              <a:t>July 14 YEL alert: JSU +10, edge 7.3 — the market has since moved 3 points to the model's side (−7 at both books Aug 23). MAX UNCERTAINTY: NDSU has zero FBS ratings history, so the 57% deserves a range, not a point.</a:t>
+              <a:t>July 14 YEL alert: JSU +10, edge 7.3 — the market has since moved 3 points to our side (−7 at both books). MAX UNCERTAINTY: zero FBS ratings history, so the 57% deserves a range, not a point. And NDSU is FULLY ELIGIBLE — the NCAA repealed the transition ban Jun 24: MWC title game, bowls and the CFP are all open in year one.</a:t>
             </a:r>
           </a:p>
         </p:txBody>

--- a/decks/2026_Week0_Episode1.pptx
+++ b/decks/2026_Week0_Episode1.pptx
@@ -5968,7 +5968,7 @@
                 </a:solidFill>
                 <a:latin typeface="Arial"/>
               </a:rPr>
-              <a:t>FLAGS  EDGE_GONE · CLV+2.5</a:t>
+              <a:t>LINE MOVE  –3 → –5.5 · CLV +2.5</a:t>
             </a:r>
           </a:p>
         </p:txBody>
@@ -5981,64 +5981,29 @@
         </p:nvSpPr>
         <p:spPr>
           <a:xfrm>
-            <a:off x="822960" y="6053328"/>
-            <a:ext cx="10515600" cy="228600"/>
-          </a:xfrm>
-          <a:prstGeom prst="rect">
-            <a:avLst/>
-          </a:prstGeom>
-          <a:noFill/>
-        </p:spPr>
-        <p:txBody>
-          <a:bodyPr wrap="square" lIns="0" rIns="0" tIns="0" bIns="0">
-            <a:spAutoFit/>
-          </a:bodyPr>
-          <a:lstStyle/>
-          <a:p>
-            <a:pPr algn="l"/>
-            <a:r>
-              <a:rPr sz="900" b="0" i="0">
+            <a:off x="822960" y="6236208"/>
+            <a:ext cx="10515600" cy="274320"/>
+          </a:xfrm>
+          <a:prstGeom prst="rect">
+            <a:avLst/>
+          </a:prstGeom>
+          <a:noFill/>
+        </p:spPr>
+        <p:txBody>
+          <a:bodyPr wrap="square" lIns="0" rIns="0" tIns="0" bIns="0">
+            <a:spAutoFit/>
+          </a:bodyPr>
+          <a:lstStyle/>
+          <a:p>
+            <a:pPr algn="l"/>
+            <a:r>
+              <a:rPr sz="1050" b="0" i="0">
                 <a:solidFill>
                   <a:srgbClr val="5C6B7E"/>
                 </a:solidFill>
                 <a:latin typeface="Arial"/>
               </a:rPr>
-              <a:t>Line ledger: first-seen –3 (Aug 18) → now –5.5 · opened –3 · CLV +2.5 · market ML 66% UNLV</a:t>
-            </a:r>
-          </a:p>
-        </p:txBody>
-      </p:sp>
-      <p:sp>
-        <p:nvSpPr>
-          <p:cNvPr id="34" name="TextBox 33"/>
-          <p:cNvSpPr txBox="1"/>
-          <p:nvPr/>
-        </p:nvSpPr>
-        <p:spPr>
-          <a:xfrm>
-            <a:off x="822960" y="6263640"/>
-            <a:ext cx="10515600" cy="365760"/>
-          </a:xfrm>
-          <a:prstGeom prst="rect">
-            <a:avLst/>
-          </a:prstGeom>
-          <a:noFill/>
-        </p:spPr>
-        <p:txBody>
-          <a:bodyPr wrap="square" lIns="0" rIns="0" tIns="0" bIns="0">
-            <a:spAutoFit/>
-          </a:bodyPr>
-          <a:lstStyle/>
-          <a:p>
-            <a:pPr algn="l"/>
-            <a:r>
-              <a:rPr sz="1300" b="1" i="0">
-                <a:solidFill>
-                  <a:srgbClr val="0A2851"/>
-                </a:solidFill>
-                <a:latin typeface="Arial"/>
-              </a:rPr>
-              <a:t>Model side UNLV — the edge was at −3 and it's gone; at −5.5 this is a watch and the first film_study run, not a play</a:t>
+              <a:t>Line movement: first-seen –3 (Aug 18) → now –5.5 · opened –3 · CLV +2.5</a:t>
             </a:r>
           </a:p>
         </p:txBody>
@@ -6196,7 +6161,7 @@
         <p:spPr>
           <a:xfrm>
             <a:off x="822960" y="1417320"/>
-            <a:ext cx="5166360" cy="4160520"/>
+            <a:ext cx="5166360" cy="3977639"/>
           </a:xfrm>
           <a:prstGeom prst="roundRect">
             <a:avLst/>
@@ -6608,49 +6573,14 @@
       </p:sp>
       <p:sp>
         <p:nvSpPr>
-          <p:cNvPr id="17" name="TextBox 16"/>
-          <p:cNvSpPr txBox="1"/>
-          <p:nvPr/>
-        </p:nvSpPr>
-        <p:spPr>
-          <a:xfrm>
-            <a:off x="1143000" y="5074920"/>
-            <a:ext cx="4572000" cy="457200"/>
-          </a:xfrm>
-          <a:prstGeom prst="rect">
-            <a:avLst/>
-          </a:prstGeom>
-          <a:noFill/>
-        </p:spPr>
-        <p:txBody>
-          <a:bodyPr wrap="square" lIns="0" rIns="0" tIns="0" bIns="0">
-            <a:spAutoFit/>
-          </a:bodyPr>
-          <a:lstStyle/>
-          <a:p>
-            <a:pPr algn="l"/>
-            <a:r>
-              <a:rPr sz="900" b="1" i="0">
-                <a:solidFill>
-                  <a:srgbClr val="B64F0F"/>
-                </a:solidFill>
-                <a:latin typeface="Arial"/>
-              </a:rPr>
-              <a:t>FLAGS  Huff picks Stokes vs Noland internally Aug 23 but won't announce until kickoff · Charles Huff's first game as Memphis HC (hired Dec 8, 2025); 75 new players</a:t>
-            </a:r>
-          </a:p>
-        </p:txBody>
-      </p:sp>
-      <p:sp>
-        <p:nvSpPr>
-          <p:cNvPr id="18" name="Rounded Rectangle 17"/>
+          <p:cNvPr id="17" name="Rounded Rectangle 16"/>
           <p:cNvSpPr/>
           <p:nvPr/>
         </p:nvSpPr>
         <p:spPr>
           <a:xfrm>
             <a:off x="6309360" y="1417320"/>
-            <a:ext cx="5166360" cy="4160520"/>
+            <a:ext cx="5166360" cy="3977639"/>
           </a:xfrm>
           <a:prstGeom prst="roundRect">
             <a:avLst/>
@@ -6687,7 +6617,7 @@
       </p:sp>
       <p:pic>
         <p:nvPicPr>
-          <p:cNvPr id="19" name="Picture 18" descr="unlv.png"/>
+          <p:cNvPr id="18" name="Picture 17" descr="unlv.png"/>
           <p:cNvPicPr>
             <a:picLocks noChangeAspect="1"/>
           </p:cNvPicPr>
@@ -6711,7 +6641,7 @@
       </p:pic>
       <p:sp>
         <p:nvSpPr>
-          <p:cNvPr id="20" name="TextBox 19"/>
+          <p:cNvPr id="19" name="TextBox 18"/>
           <p:cNvSpPr txBox="1"/>
           <p:nvPr/>
         </p:nvSpPr>
@@ -6746,7 +6676,7 @@
       </p:sp>
       <p:sp>
         <p:nvSpPr>
-          <p:cNvPr id="21" name="Oval 20"/>
+          <p:cNvPr id="20" name="Oval 19"/>
           <p:cNvSpPr/>
           <p:nvPr/>
         </p:nvSpPr>
@@ -6790,7 +6720,7 @@
       </p:sp>
       <p:sp>
         <p:nvSpPr>
-          <p:cNvPr id="22" name="TextBox 21"/>
+          <p:cNvPr id="21" name="TextBox 20"/>
           <p:cNvSpPr txBox="1"/>
           <p:nvPr/>
         </p:nvSpPr>
@@ -6825,7 +6755,7 @@
       </p:sp>
       <p:sp>
         <p:nvSpPr>
-          <p:cNvPr id="23" name="Oval 22"/>
+          <p:cNvPr id="22" name="Oval 21"/>
           <p:cNvSpPr/>
           <p:nvPr/>
         </p:nvSpPr>
@@ -6869,7 +6799,7 @@
       </p:sp>
       <p:sp>
         <p:nvSpPr>
-          <p:cNvPr id="24" name="TextBox 23"/>
+          <p:cNvPr id="23" name="TextBox 22"/>
           <p:cNvSpPr txBox="1"/>
           <p:nvPr/>
         </p:nvSpPr>
@@ -6904,7 +6834,7 @@
       </p:sp>
       <p:sp>
         <p:nvSpPr>
-          <p:cNvPr id="25" name="Oval 24"/>
+          <p:cNvPr id="24" name="Oval 23"/>
           <p:cNvSpPr/>
           <p:nvPr/>
         </p:nvSpPr>
@@ -6948,7 +6878,7 @@
       </p:sp>
       <p:sp>
         <p:nvSpPr>
-          <p:cNvPr id="26" name="TextBox 25"/>
+          <p:cNvPr id="25" name="TextBox 24"/>
           <p:cNvSpPr txBox="1"/>
           <p:nvPr/>
         </p:nvSpPr>
@@ -6983,7 +6913,7 @@
       </p:sp>
       <p:sp>
         <p:nvSpPr>
-          <p:cNvPr id="27" name="Oval 26"/>
+          <p:cNvPr id="26" name="Oval 25"/>
           <p:cNvSpPr/>
           <p:nvPr/>
         </p:nvSpPr>
@@ -7027,7 +6957,7 @@
       </p:sp>
       <p:sp>
         <p:nvSpPr>
-          <p:cNvPr id="28" name="TextBox 27"/>
+          <p:cNvPr id="27" name="TextBox 26"/>
           <p:cNvSpPr txBox="1"/>
           <p:nvPr/>
         </p:nvSpPr>
@@ -7062,42 +6992,7 @@
       </p:sp>
       <p:sp>
         <p:nvSpPr>
-          <p:cNvPr id="29" name="TextBox 28"/>
-          <p:cNvSpPr txBox="1"/>
-          <p:nvPr/>
-        </p:nvSpPr>
-        <p:spPr>
-          <a:xfrm>
-            <a:off x="6629400" y="5074920"/>
-            <a:ext cx="4572000" cy="457200"/>
-          </a:xfrm>
-          <a:prstGeom prst="rect">
-            <a:avLst/>
-          </a:prstGeom>
-          <a:noFill/>
-        </p:spPr>
-        <p:txBody>
-          <a:bodyPr wrap="square" lIns="0" rIns="0" tIns="0" bIns="0">
-            <a:spAutoFit/>
-          </a:bodyPr>
-          <a:lstStyle/>
-          <a:p>
-            <a:pPr algn="l"/>
-            <a:r>
-              <a:rPr sz="900" b="1" i="0">
-                <a:solidFill>
-                  <a:srgbClr val="B64F0F"/>
-                </a:solidFill>
-                <a:latin typeface="Arial"/>
-              </a:rPr>
-              <a:t>FLAGS  Mullen: no starter named, Arnold and Orji may both play vs Memphis · DT Fuller, DB Welch, LB Spellman regained eligibility via Colorado ruling (NCAA appealing)</a:t>
-            </a:r>
-          </a:p>
-        </p:txBody>
-      </p:sp>
-      <p:sp>
-        <p:nvSpPr>
-          <p:cNvPr id="30" name="Rounded Rectangle 29"/>
+          <p:cNvPr id="28" name="Rounded Rectangle 27"/>
           <p:cNvSpPr/>
           <p:nvPr/>
         </p:nvSpPr>
@@ -7141,7 +7036,7 @@
       </p:sp>
       <p:sp>
         <p:nvSpPr>
-          <p:cNvPr id="31" name="TextBox 30"/>
+          <p:cNvPr id="29" name="TextBox 28"/>
           <p:cNvSpPr txBox="1"/>
           <p:nvPr/>
         </p:nvSpPr>
@@ -7176,7 +7071,7 @@
       </p:sp>
       <p:sp>
         <p:nvSpPr>
-          <p:cNvPr id="32" name="TextBox 31"/>
+          <p:cNvPr id="30" name="TextBox 29"/>
           <p:cNvSpPr txBox="1"/>
           <p:nvPr/>
         </p:nvSpPr>
@@ -7211,7 +7106,7 @@
       </p:sp>
       <p:sp>
         <p:nvSpPr>
-          <p:cNvPr id="33" name="TextBox 32"/>
+          <p:cNvPr id="31" name="TextBox 30"/>
           <p:cNvSpPr txBox="1"/>
           <p:nvPr/>
         </p:nvSpPr>
@@ -7246,7 +7141,7 @@
       </p:sp>
       <p:sp>
         <p:nvSpPr>
-          <p:cNvPr id="34" name="TextBox 33"/>
+          <p:cNvPr id="32" name="TextBox 31"/>
           <p:cNvSpPr txBox="1"/>
           <p:nvPr/>
         </p:nvSpPr>
@@ -7620,7 +7515,7 @@
                 </a:solidFill>
                 <a:latin typeface="Arial"/>
               </a:rPr>
-              <a:t>UNC ATS at −7.5 — research, not a play, while the win-prob gap is this wide · O/U no lean</a:t>
+              <a:t>first-seen –6.5 (Aug 18) → now –7.5 · opened –7.5 · CLV -1</a:t>
             </a:r>
           </a:p>
         </p:txBody>
@@ -7940,7 +7835,7 @@
                 </a:solidFill>
                 <a:latin typeface="Arial"/>
               </a:rPr>
-              <a:t>No play: value was at −3, fair is −6, the market sits at −5.5 · machine still leans UVA</a:t>
+              <a:t>first-seen –3 (Aug 18) → now –5.5 · opened –3.5 · CLV +2.5</a:t>
             </a:r>
           </a:p>
         </p:txBody>
@@ -8260,7 +8155,7 @@
                 </a:solidFill>
                 <a:latin typeface="Arial"/>
               </a:rPr>
-              <a:t>JSU at −7 or worse — already paid in line movement</a:t>
+              <a:t>first-seen –10 (Jul 14) → now –7 · opened –10 · CLV +3</a:t>
             </a:r>
           </a:p>
         </p:txBody>
@@ -8580,7 +8475,7 @@
                 </a:solidFill>
                 <a:latin typeface="Arial"/>
               </a:rPr>
-              <a:t>Hawai'i +5.5 — a 4-pt gap, not a conviction; the opener at +3 was the worse number</a:t>
+              <a:t>first-seen –3 (Aug 18) → now –5.5 · opened –3 · CLV -2.5</a:t>
             </a:r>
           </a:p>
         </p:txBody>
@@ -8900,7 +8795,7 @@
                 </a:solidFill>
                 <a:latin typeface="Arial"/>
               </a:rPr>
-              <a:t>UNLV — the edge was at −3 and it's gone; at −5.5 this is a watch and the first film_study run, not a play</a:t>
+              <a:t>first-seen –3 (Aug 18) → now –5.5 · opened –3 · CLV +2.5</a:t>
             </a:r>
           </a:p>
         </p:txBody>
@@ -10166,7 +10061,7 @@
                 </a:solidFill>
                 <a:latin typeface="Arial"/>
               </a:rPr>
-              <a:t>FLAGS  YEL · STRUCT</a:t>
+              <a:t>LINE MOVE  –6.5 → –7.5 · CLV -1</a:t>
             </a:r>
           </a:p>
         </p:txBody>
@@ -10179,64 +10074,29 @@
         </p:nvSpPr>
         <p:spPr>
           <a:xfrm>
-            <a:off x="822960" y="6053328"/>
-            <a:ext cx="10515600" cy="228600"/>
-          </a:xfrm>
-          <a:prstGeom prst="rect">
-            <a:avLst/>
-          </a:prstGeom>
-          <a:noFill/>
-        </p:spPr>
-        <p:txBody>
-          <a:bodyPr wrap="square" lIns="0" rIns="0" tIns="0" bIns="0">
-            <a:spAutoFit/>
-          </a:bodyPr>
-          <a:lstStyle/>
-          <a:p>
-            <a:pPr algn="l"/>
-            <a:r>
-              <a:rPr sz="900" b="0" i="0">
+            <a:off x="822960" y="6236208"/>
+            <a:ext cx="10515600" cy="274320"/>
+          </a:xfrm>
+          <a:prstGeom prst="rect">
+            <a:avLst/>
+          </a:prstGeom>
+          <a:noFill/>
+        </p:spPr>
+        <p:txBody>
+          <a:bodyPr wrap="square" lIns="0" rIns="0" tIns="0" bIns="0">
+            <a:spAutoFit/>
+          </a:bodyPr>
+          <a:lstStyle/>
+          <a:p>
+            <a:pPr algn="l"/>
+            <a:r>
+              <a:rPr sz="1050" b="0" i="0">
                 <a:solidFill>
                   <a:srgbClr val="5C6B7E"/>
                 </a:solidFill>
                 <a:latin typeface="Arial"/>
               </a:rPr>
-              <a:t>Line ledger: first-seen –6.5 (Aug 18) → now –7.5 · opened –7.5 · CLV -1 · market ML 73% TCU</a:t>
-            </a:r>
-          </a:p>
-        </p:txBody>
-      </p:sp>
-      <p:sp>
-        <p:nvSpPr>
-          <p:cNvPr id="34" name="TextBox 33"/>
-          <p:cNvSpPr txBox="1"/>
-          <p:nvPr/>
-        </p:nvSpPr>
-        <p:spPr>
-          <a:xfrm>
-            <a:off x="822960" y="6263640"/>
-            <a:ext cx="10515600" cy="365760"/>
-          </a:xfrm>
-          <a:prstGeom prst="rect">
-            <a:avLst/>
-          </a:prstGeom>
-          <a:noFill/>
-        </p:spPr>
-        <p:txBody>
-          <a:bodyPr wrap="square" lIns="0" rIns="0" tIns="0" bIns="0">
-            <a:spAutoFit/>
-          </a:bodyPr>
-          <a:lstStyle/>
-          <a:p>
-            <a:pPr algn="l"/>
-            <a:r>
-              <a:rPr sz="1300" b="1" i="0">
-                <a:solidFill>
-                  <a:srgbClr val="0A2851"/>
-                </a:solidFill>
-                <a:latin typeface="Arial"/>
-              </a:rPr>
-              <a:t>Lean: UNC ATS at −7.5 — research, not a play, while the win-prob gap is this wide · O/U no lean</a:t>
+              <a:t>Line movement: first-seen –6.5 (Aug 18) → now –7.5 · opened –7.5 · CLV -1</a:t>
             </a:r>
           </a:p>
         </p:txBody>
@@ -10394,7 +10254,7 @@
         <p:spPr>
           <a:xfrm>
             <a:off x="822960" y="1417320"/>
-            <a:ext cx="5166360" cy="4160520"/>
+            <a:ext cx="5166360" cy="3977639"/>
           </a:xfrm>
           <a:prstGeom prst="roundRect">
             <a:avLst/>
@@ -10806,49 +10666,14 @@
       </p:sp>
       <p:sp>
         <p:nvSpPr>
-          <p:cNvPr id="17" name="TextBox 16"/>
-          <p:cNvSpPr txBox="1"/>
-          <p:nvPr/>
-        </p:nvSpPr>
-        <p:spPr>
-          <a:xfrm>
-            <a:off x="1143000" y="5074920"/>
-            <a:ext cx="4572000" cy="457200"/>
-          </a:xfrm>
-          <a:prstGeom prst="rect">
-            <a:avLst/>
-          </a:prstGeom>
-          <a:noFill/>
-        </p:spPr>
-        <p:txBody>
-          <a:bodyPr wrap="square" lIns="0" rIns="0" tIns="0" bIns="0">
-            <a:spAutoFit/>
-          </a:bodyPr>
-          <a:lstStyle/>
-          <a:p>
-            <a:pPr algn="l"/>
-            <a:r>
-              <a:rPr sz="900" b="1" i="0">
-                <a:solidFill>
-                  <a:srgbClr val="B64F0F"/>
-                </a:solidFill>
-                <a:latin typeface="Arial"/>
-              </a:rPr>
-              <a:t>FLAGS  DC Steve Belichick on indefinite medical leave since Aug 6; no return timeline · No interim DC named; Belichick says defense coached 'collectively' - play-caller unknown</a:t>
-            </a:r>
-          </a:p>
-        </p:txBody>
-      </p:sp>
-      <p:sp>
-        <p:nvSpPr>
-          <p:cNvPr id="18" name="Rounded Rectangle 17"/>
+          <p:cNvPr id="17" name="Rounded Rectangle 16"/>
           <p:cNvSpPr/>
           <p:nvPr/>
         </p:nvSpPr>
         <p:spPr>
           <a:xfrm>
             <a:off x="6309360" y="1417320"/>
-            <a:ext cx="5166360" cy="4160520"/>
+            <a:ext cx="5166360" cy="3977639"/>
           </a:xfrm>
           <a:prstGeom prst="roundRect">
             <a:avLst/>
@@ -10885,7 +10710,7 @@
       </p:sp>
       <p:pic>
         <p:nvPicPr>
-          <p:cNvPr id="19" name="Picture 18" descr="tcu.png"/>
+          <p:cNvPr id="18" name="Picture 17" descr="tcu.png"/>
           <p:cNvPicPr>
             <a:picLocks noChangeAspect="1"/>
           </p:cNvPicPr>
@@ -10909,7 +10734,7 @@
       </p:pic>
       <p:sp>
         <p:nvSpPr>
-          <p:cNvPr id="20" name="TextBox 19"/>
+          <p:cNvPr id="19" name="TextBox 18"/>
           <p:cNvSpPr txBox="1"/>
           <p:nvPr/>
         </p:nvSpPr>
@@ -10944,7 +10769,7 @@
       </p:sp>
       <p:sp>
         <p:nvSpPr>
-          <p:cNvPr id="21" name="Oval 20"/>
+          <p:cNvPr id="20" name="Oval 19"/>
           <p:cNvSpPr/>
           <p:nvPr/>
         </p:nvSpPr>
@@ -10988,7 +10813,7 @@
       </p:sp>
       <p:sp>
         <p:nvSpPr>
-          <p:cNvPr id="22" name="TextBox 21"/>
+          <p:cNvPr id="21" name="TextBox 20"/>
           <p:cNvSpPr txBox="1"/>
           <p:nvPr/>
         </p:nvSpPr>
@@ -11023,7 +10848,7 @@
       </p:sp>
       <p:sp>
         <p:nvSpPr>
-          <p:cNvPr id="23" name="Oval 22"/>
+          <p:cNvPr id="22" name="Oval 21"/>
           <p:cNvSpPr/>
           <p:nvPr/>
         </p:nvSpPr>
@@ -11067,7 +10892,7 @@
       </p:sp>
       <p:sp>
         <p:nvSpPr>
-          <p:cNvPr id="24" name="TextBox 23"/>
+          <p:cNvPr id="23" name="TextBox 22"/>
           <p:cNvSpPr txBox="1"/>
           <p:nvPr/>
         </p:nvSpPr>
@@ -11102,7 +10927,7 @@
       </p:sp>
       <p:sp>
         <p:nvSpPr>
-          <p:cNvPr id="25" name="Oval 24"/>
+          <p:cNvPr id="24" name="Oval 23"/>
           <p:cNvSpPr/>
           <p:nvPr/>
         </p:nvSpPr>
@@ -11146,7 +10971,7 @@
       </p:sp>
       <p:sp>
         <p:nvSpPr>
-          <p:cNvPr id="26" name="TextBox 25"/>
+          <p:cNvPr id="25" name="TextBox 24"/>
           <p:cNvSpPr txBox="1"/>
           <p:nvPr/>
         </p:nvSpPr>
@@ -11181,7 +11006,7 @@
       </p:sp>
       <p:sp>
         <p:nvSpPr>
-          <p:cNvPr id="27" name="Oval 26"/>
+          <p:cNvPr id="26" name="Oval 25"/>
           <p:cNvSpPr/>
           <p:nvPr/>
         </p:nvSpPr>
@@ -11225,7 +11050,7 @@
       </p:sp>
       <p:sp>
         <p:nvSpPr>
-          <p:cNvPr id="28" name="TextBox 27"/>
+          <p:cNvPr id="27" name="TextBox 26"/>
           <p:cNvSpPr txBox="1"/>
           <p:nvPr/>
         </p:nvSpPr>
@@ -11260,42 +11085,7 @@
       </p:sp>
       <p:sp>
         <p:nvSpPr>
-          <p:cNvPr id="29" name="TextBox 28"/>
-          <p:cNvSpPr txBox="1"/>
-          <p:nvPr/>
-        </p:nvSpPr>
-        <p:spPr>
-          <a:xfrm>
-            <a:off x="6629400" y="5074920"/>
-            <a:ext cx="4572000" cy="457200"/>
-          </a:xfrm>
-          <a:prstGeom prst="rect">
-            <a:avLst/>
-          </a:prstGeom>
-          <a:noFill/>
-        </p:spPr>
-        <p:txBody>
-          <a:bodyPr wrap="square" lIns="0" rIns="0" tIns="0" bIns="0">
-            <a:spAutoFit/>
-          </a:bodyPr>
-          <a:lstStyle/>
-          <a:p>
-            <a:pPr algn="l"/>
-            <a:r>
-              <a:rPr sz="900" b="1" i="0">
-                <a:solidFill>
-                  <a:srgbClr val="B64F0F"/>
-                </a:solidFill>
-                <a:latin typeface="Arial"/>
-              </a:rPr>
-              <a:t>FLAGS  Jaden Craig (Harvard, 0 FBS snaps) is working QB1; no formal Dykes announcement found · Projected starting S Jacob Fields dismissed Aug 18 (locker-room altercation Aug 13)</a:t>
-            </a:r>
-          </a:p>
-        </p:txBody>
-      </p:sp>
-      <p:sp>
-        <p:nvSpPr>
-          <p:cNvPr id="30" name="Rounded Rectangle 29"/>
+          <p:cNvPr id="28" name="Rounded Rectangle 27"/>
           <p:cNvSpPr/>
           <p:nvPr/>
         </p:nvSpPr>
@@ -11339,7 +11129,7 @@
       </p:sp>
       <p:sp>
         <p:nvSpPr>
-          <p:cNvPr id="31" name="TextBox 30"/>
+          <p:cNvPr id="29" name="TextBox 28"/>
           <p:cNvSpPr txBox="1"/>
           <p:nvPr/>
         </p:nvSpPr>
@@ -11374,7 +11164,7 @@
       </p:sp>
       <p:sp>
         <p:nvSpPr>
-          <p:cNvPr id="32" name="TextBox 31"/>
+          <p:cNvPr id="30" name="TextBox 29"/>
           <p:cNvSpPr txBox="1"/>
           <p:nvPr/>
         </p:nvSpPr>
@@ -11409,7 +11199,7 @@
       </p:sp>
       <p:sp>
         <p:nvSpPr>
-          <p:cNvPr id="33" name="TextBox 32"/>
+          <p:cNvPr id="31" name="TextBox 30"/>
           <p:cNvSpPr txBox="1"/>
           <p:nvPr/>
         </p:nvSpPr>
@@ -11444,7 +11234,7 @@
       </p:sp>
       <p:sp>
         <p:nvSpPr>
-          <p:cNvPr id="34" name="TextBox 33"/>
+          <p:cNvPr id="32" name="TextBox 31"/>
           <p:cNvSpPr txBox="1"/>
           <p:nvPr/>
         </p:nvSpPr>
@@ -12633,7 +12423,7 @@
                 </a:solidFill>
                 <a:latin typeface="Arial"/>
               </a:rPr>
-              <a:t>FLAGS  EDGE_GONE · CLV+2.5</a:t>
+              <a:t>LINE MOVE  –3 → –5.5 · CLV +2.5</a:t>
             </a:r>
           </a:p>
         </p:txBody>
@@ -12646,64 +12436,29 @@
         </p:nvSpPr>
         <p:spPr>
           <a:xfrm>
-            <a:off x="822960" y="6053328"/>
-            <a:ext cx="10515600" cy="228600"/>
-          </a:xfrm>
-          <a:prstGeom prst="rect">
-            <a:avLst/>
-          </a:prstGeom>
-          <a:noFill/>
-        </p:spPr>
-        <p:txBody>
-          <a:bodyPr wrap="square" lIns="0" rIns="0" tIns="0" bIns="0">
-            <a:spAutoFit/>
-          </a:bodyPr>
-          <a:lstStyle/>
-          <a:p>
-            <a:pPr algn="l"/>
-            <a:r>
-              <a:rPr sz="900" b="0" i="0">
+            <a:off x="822960" y="6236208"/>
+            <a:ext cx="10515600" cy="274320"/>
+          </a:xfrm>
+          <a:prstGeom prst="rect">
+            <a:avLst/>
+          </a:prstGeom>
+          <a:noFill/>
+        </p:spPr>
+        <p:txBody>
+          <a:bodyPr wrap="square" lIns="0" rIns="0" tIns="0" bIns="0">
+            <a:spAutoFit/>
+          </a:bodyPr>
+          <a:lstStyle/>
+          <a:p>
+            <a:pPr algn="l"/>
+            <a:r>
+              <a:rPr sz="1050" b="0" i="0">
                 <a:solidFill>
                   <a:srgbClr val="5C6B7E"/>
                 </a:solidFill>
                 <a:latin typeface="Arial"/>
               </a:rPr>
-              <a:t>Line ledger: first-seen –3 (Aug 18) → now –5.5 · opened –3.5 · CLV +2.5 · market ML 66% UVA</a:t>
-            </a:r>
-          </a:p>
-        </p:txBody>
-      </p:sp>
-      <p:sp>
-        <p:nvSpPr>
-          <p:cNvPr id="34" name="TextBox 33"/>
-          <p:cNvSpPr txBox="1"/>
-          <p:nvPr/>
-        </p:nvSpPr>
-        <p:spPr>
-          <a:xfrm>
-            <a:off x="822960" y="6263640"/>
-            <a:ext cx="10515600" cy="365760"/>
-          </a:xfrm>
-          <a:prstGeom prst="rect">
-            <a:avLst/>
-          </a:prstGeom>
-          <a:noFill/>
-        </p:spPr>
-        <p:txBody>
-          <a:bodyPr wrap="square" lIns="0" rIns="0" tIns="0" bIns="0">
-            <a:spAutoFit/>
-          </a:bodyPr>
-          <a:lstStyle/>
-          <a:p>
-            <a:pPr algn="l"/>
-            <a:r>
-              <a:rPr sz="1300" b="1" i="0">
-                <a:solidFill>
-                  <a:srgbClr val="0A2851"/>
-                </a:solidFill>
-                <a:latin typeface="Arial"/>
-              </a:rPr>
-              <a:t>No play: value was at −3, fair is −6, the market sits at −5.5 · machine still leans UVA</a:t>
+              <a:t>Line movement: first-seen –3 (Aug 18) → now –5.5 · opened –3.5 · CLV +2.5</a:t>
             </a:r>
           </a:p>
         </p:txBody>
@@ -12861,7 +12616,7 @@
         <p:spPr>
           <a:xfrm>
             <a:off x="822960" y="1417320"/>
-            <a:ext cx="5166360" cy="4160520"/>
+            <a:ext cx="5166360" cy="3977639"/>
           </a:xfrm>
           <a:prstGeom prst="roundRect">
             <a:avLst/>
@@ -13273,49 +13028,14 @@
       </p:sp>
       <p:sp>
         <p:nvSpPr>
-          <p:cNvPr id="17" name="TextBox 16"/>
-          <p:cNvSpPr txBox="1"/>
-          <p:nvPr/>
-        </p:nvSpPr>
-        <p:spPr>
-          <a:xfrm>
-            <a:off x="1143000" y="5074920"/>
-            <a:ext cx="4572000" cy="457200"/>
-          </a:xfrm>
-          <a:prstGeom prst="rect">
-            <a:avLst/>
-          </a:prstGeom>
-          <a:noFill/>
-        </p:spPr>
-        <p:txBody>
-          <a:bodyPr wrap="square" lIns="0" rIns="0" tIns="0" bIns="0">
-            <a:spAutoFit/>
-          </a:bodyPr>
-          <a:lstStyle/>
-          <a:p>
-            <a:pPr algn="l"/>
-            <a:r>
-              <a:rPr sz="900" b="1" i="0">
-                <a:solidFill>
-                  <a:srgbClr val="B64F0F"/>
-                </a:solidFill>
-                <a:latin typeface="Arial"/>
-              </a:rPr>
-              <a:t>FLAGS  CJ Bailey (3rd-yr starter) healthy; no injury reports through camp · WR Teddy Hoffmann (top returning WR) suspended all of 2026 - PED positive</a:t>
-            </a:r>
-          </a:p>
-        </p:txBody>
-      </p:sp>
-      <p:sp>
-        <p:nvSpPr>
-          <p:cNvPr id="18" name="Rounded Rectangle 17"/>
+          <p:cNvPr id="17" name="Rounded Rectangle 16"/>
           <p:cNvSpPr/>
           <p:nvPr/>
         </p:nvSpPr>
         <p:spPr>
           <a:xfrm>
             <a:off x="6309360" y="1417320"/>
-            <a:ext cx="5166360" cy="4160520"/>
+            <a:ext cx="5166360" cy="3977639"/>
           </a:xfrm>
           <a:prstGeom prst="roundRect">
             <a:avLst/>
@@ -13352,7 +13072,7 @@
       </p:sp>
       <p:pic>
         <p:nvPicPr>
-          <p:cNvPr id="19" name="Picture 18" descr="uva.png"/>
+          <p:cNvPr id="18" name="Picture 17" descr="uva.png"/>
           <p:cNvPicPr>
             <a:picLocks noChangeAspect="1"/>
           </p:cNvPicPr>
@@ -13376,7 +13096,7 @@
       </p:pic>
       <p:sp>
         <p:nvSpPr>
-          <p:cNvPr id="20" name="TextBox 19"/>
+          <p:cNvPr id="19" name="TextBox 18"/>
           <p:cNvSpPr txBox="1"/>
           <p:nvPr/>
         </p:nvSpPr>
@@ -13411,7 +13131,7 @@
       </p:sp>
       <p:sp>
         <p:nvSpPr>
-          <p:cNvPr id="21" name="Oval 20"/>
+          <p:cNvPr id="20" name="Oval 19"/>
           <p:cNvSpPr/>
           <p:nvPr/>
         </p:nvSpPr>
@@ -13455,7 +13175,7 @@
       </p:sp>
       <p:sp>
         <p:nvSpPr>
-          <p:cNvPr id="22" name="TextBox 21"/>
+          <p:cNvPr id="21" name="TextBox 20"/>
           <p:cNvSpPr txBox="1"/>
           <p:nvPr/>
         </p:nvSpPr>
@@ -13490,7 +13210,7 @@
       </p:sp>
       <p:sp>
         <p:nvSpPr>
-          <p:cNvPr id="23" name="Oval 22"/>
+          <p:cNvPr id="22" name="Oval 21"/>
           <p:cNvSpPr/>
           <p:nvPr/>
         </p:nvSpPr>
@@ -13534,7 +13254,7 @@
       </p:sp>
       <p:sp>
         <p:nvSpPr>
-          <p:cNvPr id="24" name="TextBox 23"/>
+          <p:cNvPr id="23" name="TextBox 22"/>
           <p:cNvSpPr txBox="1"/>
           <p:nvPr/>
         </p:nvSpPr>
@@ -13569,7 +13289,7 @@
       </p:sp>
       <p:sp>
         <p:nvSpPr>
-          <p:cNvPr id="25" name="Oval 24"/>
+          <p:cNvPr id="24" name="Oval 23"/>
           <p:cNvSpPr/>
           <p:nvPr/>
         </p:nvSpPr>
@@ -13613,7 +13333,7 @@
       </p:sp>
       <p:sp>
         <p:nvSpPr>
-          <p:cNvPr id="26" name="TextBox 25"/>
+          <p:cNvPr id="25" name="TextBox 24"/>
           <p:cNvSpPr txBox="1"/>
           <p:nvPr/>
         </p:nvSpPr>
@@ -13648,7 +13368,7 @@
       </p:sp>
       <p:sp>
         <p:nvSpPr>
-          <p:cNvPr id="27" name="Oval 26"/>
+          <p:cNvPr id="26" name="Oval 25"/>
           <p:cNvSpPr/>
           <p:nvPr/>
         </p:nvSpPr>
@@ -13692,7 +13412,7 @@
       </p:sp>
       <p:sp>
         <p:nvSpPr>
-          <p:cNvPr id="28" name="TextBox 27"/>
+          <p:cNvPr id="27" name="TextBox 26"/>
           <p:cNvSpPr txBox="1"/>
           <p:nvPr/>
         </p:nvSpPr>
@@ -13727,42 +13447,7 @@
       </p:sp>
       <p:sp>
         <p:nvSpPr>
-          <p:cNvPr id="29" name="TextBox 28"/>
-          <p:cNvSpPr txBox="1"/>
-          <p:nvPr/>
-        </p:nvSpPr>
-        <p:spPr>
-          <a:xfrm>
-            <a:off x="6629400" y="5074920"/>
-            <a:ext cx="4572000" cy="457200"/>
-          </a:xfrm>
-          <a:prstGeom prst="rect">
-            <a:avLst/>
-          </a:prstGeom>
-          <a:noFill/>
-        </p:spPr>
-        <p:txBody>
-          <a:bodyPr wrap="square" lIns="0" rIns="0" tIns="0" bIns="0">
-            <a:spAutoFit/>
-          </a:bodyPr>
-          <a:lstStyle/>
-          <a:p>
-            <a:pPr algn="l"/>
-            <a:r>
-              <a:rPr sz="900" b="1" i="0">
-                <a:solidFill>
-                  <a:srgbClr val="B64F0F"/>
-                </a:solidFill>
-                <a:latin typeface="Arial"/>
-              </a:rPr>
-              <a:t>FLAGS  Beau Pribula (Missouri) named starter Jul 15 at ACC Kickoff over Eli Holstein · RB/KR Solomon Beebe arrested Aug 17, 3 animal-cruelty misdemeanors; no team action yet</a:t>
-            </a:r>
-          </a:p>
-        </p:txBody>
-      </p:sp>
-      <p:sp>
-        <p:nvSpPr>
-          <p:cNvPr id="30" name="Rounded Rectangle 29"/>
+          <p:cNvPr id="28" name="Rounded Rectangle 27"/>
           <p:cNvSpPr/>
           <p:nvPr/>
         </p:nvSpPr>
@@ -13806,7 +13491,7 @@
       </p:sp>
       <p:sp>
         <p:nvSpPr>
-          <p:cNvPr id="31" name="TextBox 30"/>
+          <p:cNvPr id="29" name="TextBox 28"/>
           <p:cNvSpPr txBox="1"/>
           <p:nvPr/>
         </p:nvSpPr>
@@ -13841,7 +13526,7 @@
       </p:sp>
       <p:sp>
         <p:nvSpPr>
-          <p:cNvPr id="32" name="TextBox 31"/>
+          <p:cNvPr id="30" name="TextBox 29"/>
           <p:cNvSpPr txBox="1"/>
           <p:nvPr/>
         </p:nvSpPr>
@@ -13876,7 +13561,7 @@
       </p:sp>
       <p:sp>
         <p:nvSpPr>
-          <p:cNvPr id="33" name="TextBox 32"/>
+          <p:cNvPr id="31" name="TextBox 30"/>
           <p:cNvSpPr txBox="1"/>
           <p:nvPr/>
         </p:nvSpPr>
@@ -13911,7 +13596,7 @@
       </p:sp>
       <p:sp>
         <p:nvSpPr>
-          <p:cNvPr id="34" name="TextBox 33"/>
+          <p:cNvPr id="32" name="TextBox 31"/>
           <p:cNvSpPr txBox="1"/>
           <p:nvPr/>
         </p:nvSpPr>
@@ -15100,7 +14785,7 @@
                 </a:solidFill>
                 <a:latin typeface="Arial"/>
               </a:rPr>
-              <a:t>FLAGS  CLV+3</a:t>
+              <a:t>LINE MOVE  –10 → –7 · CLV +3</a:t>
             </a:r>
           </a:p>
         </p:txBody>
@@ -15113,64 +14798,29 @@
         </p:nvSpPr>
         <p:spPr>
           <a:xfrm>
-            <a:off x="822960" y="6053328"/>
-            <a:ext cx="10515600" cy="228600"/>
-          </a:xfrm>
-          <a:prstGeom prst="rect">
-            <a:avLst/>
-          </a:prstGeom>
-          <a:noFill/>
-        </p:spPr>
-        <p:txBody>
-          <a:bodyPr wrap="square" lIns="0" rIns="0" tIns="0" bIns="0">
-            <a:spAutoFit/>
-          </a:bodyPr>
-          <a:lstStyle/>
-          <a:p>
-            <a:pPr algn="l"/>
-            <a:r>
-              <a:rPr sz="900" b="0" i="0">
+            <a:off x="822960" y="6236208"/>
+            <a:ext cx="10515600" cy="274320"/>
+          </a:xfrm>
+          <a:prstGeom prst="rect">
+            <a:avLst/>
+          </a:prstGeom>
+          <a:noFill/>
+        </p:spPr>
+        <p:txBody>
+          <a:bodyPr wrap="square" lIns="0" rIns="0" tIns="0" bIns="0">
+            <a:spAutoFit/>
+          </a:bodyPr>
+          <a:lstStyle/>
+          <a:p>
+            <a:pPr algn="l"/>
+            <a:r>
+              <a:rPr sz="1050" b="0" i="0">
                 <a:solidFill>
                   <a:srgbClr val="5C6B7E"/>
                 </a:solidFill>
                 <a:latin typeface="Arial"/>
               </a:rPr>
-              <a:t>Line ledger: first-seen –10 (Jul 14) → now –7 · opened –10 · CLV +3 · market ML 70% NDSU</a:t>
-            </a:r>
-          </a:p>
-        </p:txBody>
-      </p:sp>
-      <p:sp>
-        <p:nvSpPr>
-          <p:cNvPr id="34" name="TextBox 33"/>
-          <p:cNvSpPr txBox="1"/>
-          <p:nvPr/>
-        </p:nvSpPr>
-        <p:spPr>
-          <a:xfrm>
-            <a:off x="822960" y="6263640"/>
-            <a:ext cx="10515600" cy="365760"/>
-          </a:xfrm>
-          <a:prstGeom prst="rect">
-            <a:avLst/>
-          </a:prstGeom>
-          <a:noFill/>
-        </p:spPr>
-        <p:txBody>
-          <a:bodyPr wrap="square" lIns="0" rIns="0" tIns="0" bIns="0">
-            <a:spAutoFit/>
-          </a:bodyPr>
-          <a:lstStyle/>
-          <a:p>
-            <a:pPr algn="l"/>
-            <a:r>
-              <a:rPr sz="1300" b="1" i="0">
-                <a:solidFill>
-                  <a:srgbClr val="0A2851"/>
-                </a:solidFill>
-                <a:latin typeface="Arial"/>
-              </a:rPr>
-              <a:t>Model side: JSU at −7 or worse — already paid in line movement</a:t>
+              <a:t>Line movement: first-seen –10 (Jul 14) → now –7 · opened –10 · CLV +3</a:t>
             </a:r>
           </a:p>
         </p:txBody>
@@ -15328,7 +14978,7 @@
         <p:spPr>
           <a:xfrm>
             <a:off x="822960" y="1417320"/>
-            <a:ext cx="5166360" cy="4160520"/>
+            <a:ext cx="5166360" cy="3977639"/>
           </a:xfrm>
           <a:prstGeom prst="roundRect">
             <a:avLst/>
@@ -15740,49 +15390,14 @@
       </p:sp>
       <p:sp>
         <p:nvSpPr>
-          <p:cNvPr id="17" name="TextBox 16"/>
-          <p:cNvSpPr txBox="1"/>
-          <p:nvPr/>
-        </p:nvSpPr>
-        <p:spPr>
-          <a:xfrm>
-            <a:off x="1143000" y="5074920"/>
-            <a:ext cx="4572000" cy="457200"/>
-          </a:xfrm>
-          <a:prstGeom prst="rect">
-            <a:avLst/>
-          </a:prstGeom>
-          <a:noFill/>
-        </p:spPr>
-        <p:txBody>
-          <a:bodyPr wrap="square" lIns="0" rIns="0" tIns="0" bIns="0">
-            <a:spAutoFit/>
-          </a:bodyPr>
-          <a:lstStyle/>
-          <a:p>
-            <a:pPr algn="l"/>
-            <a:r>
-              <a:rPr sz="900" b="1" i="0">
-                <a:solidFill>
-                  <a:srgbClr val="B64F0F"/>
-                </a:solidFill>
-                <a:latin typeface="Arial"/>
-              </a:rPr>
-              <a:t>FLAGS  Caden Creel returns as starter (1,076 rush yds / 1,514 pass yds in 2025); no injury news · RB1 Tre Cook transferred to WVU; Lando/Paul/Savage compete for carries</a:t>
-            </a:r>
-          </a:p>
-        </p:txBody>
-      </p:sp>
-      <p:sp>
-        <p:nvSpPr>
-          <p:cNvPr id="18" name="Rounded Rectangle 17"/>
+          <p:cNvPr id="17" name="Rounded Rectangle 16"/>
           <p:cNvSpPr/>
           <p:nvPr/>
         </p:nvSpPr>
         <p:spPr>
           <a:xfrm>
             <a:off x="6309360" y="1417320"/>
-            <a:ext cx="5166360" cy="4160520"/>
+            <a:ext cx="5166360" cy="3977639"/>
           </a:xfrm>
           <a:prstGeom prst="roundRect">
             <a:avLst/>
@@ -15819,7 +15434,7 @@
       </p:sp>
       <p:pic>
         <p:nvPicPr>
-          <p:cNvPr id="19" name="Picture 18" descr="ndsu.png"/>
+          <p:cNvPr id="18" name="Picture 17" descr="ndsu.png"/>
           <p:cNvPicPr>
             <a:picLocks noChangeAspect="1"/>
           </p:cNvPicPr>
@@ -15843,7 +15458,7 @@
       </p:pic>
       <p:sp>
         <p:nvSpPr>
-          <p:cNvPr id="20" name="TextBox 19"/>
+          <p:cNvPr id="19" name="TextBox 18"/>
           <p:cNvSpPr txBox="1"/>
           <p:nvPr/>
         </p:nvSpPr>
@@ -15878,7 +15493,7 @@
       </p:sp>
       <p:sp>
         <p:nvSpPr>
-          <p:cNvPr id="21" name="Oval 20"/>
+          <p:cNvPr id="20" name="Oval 19"/>
           <p:cNvSpPr/>
           <p:nvPr/>
         </p:nvSpPr>
@@ -15922,7 +15537,7 @@
       </p:sp>
       <p:sp>
         <p:nvSpPr>
-          <p:cNvPr id="22" name="TextBox 21"/>
+          <p:cNvPr id="21" name="TextBox 20"/>
           <p:cNvSpPr txBox="1"/>
           <p:nvPr/>
         </p:nvSpPr>
@@ -15957,7 +15572,7 @@
       </p:sp>
       <p:sp>
         <p:nvSpPr>
-          <p:cNvPr id="23" name="Oval 22"/>
+          <p:cNvPr id="22" name="Oval 21"/>
           <p:cNvSpPr/>
           <p:nvPr/>
         </p:nvSpPr>
@@ -16001,7 +15616,7 @@
       </p:sp>
       <p:sp>
         <p:nvSpPr>
-          <p:cNvPr id="24" name="TextBox 23"/>
+          <p:cNvPr id="23" name="TextBox 22"/>
           <p:cNvSpPr txBox="1"/>
           <p:nvPr/>
         </p:nvSpPr>
@@ -16036,7 +15651,7 @@
       </p:sp>
       <p:sp>
         <p:nvSpPr>
-          <p:cNvPr id="25" name="Oval 24"/>
+          <p:cNvPr id="24" name="Oval 23"/>
           <p:cNvSpPr/>
           <p:nvPr/>
         </p:nvSpPr>
@@ -16080,7 +15695,7 @@
       </p:sp>
       <p:sp>
         <p:nvSpPr>
-          <p:cNvPr id="26" name="TextBox 25"/>
+          <p:cNvPr id="25" name="TextBox 24"/>
           <p:cNvSpPr txBox="1"/>
           <p:nvPr/>
         </p:nvSpPr>
@@ -16115,7 +15730,7 @@
       </p:sp>
       <p:sp>
         <p:nvSpPr>
-          <p:cNvPr id="27" name="Oval 26"/>
+          <p:cNvPr id="26" name="Oval 25"/>
           <p:cNvSpPr/>
           <p:nvPr/>
         </p:nvSpPr>
@@ -16159,7 +15774,7 @@
       </p:sp>
       <p:sp>
         <p:nvSpPr>
-          <p:cNvPr id="28" name="TextBox 27"/>
+          <p:cNvPr id="27" name="TextBox 26"/>
           <p:cNvSpPr txBox="1"/>
           <p:nvPr/>
         </p:nvSpPr>
@@ -16194,42 +15809,7 @@
       </p:sp>
       <p:sp>
         <p:nvSpPr>
-          <p:cNvPr id="29" name="TextBox 28"/>
-          <p:cNvSpPr txBox="1"/>
-          <p:nvPr/>
-        </p:nvSpPr>
-        <p:spPr>
-          <a:xfrm>
-            <a:off x="6629400" y="5074920"/>
-            <a:ext cx="4572000" cy="457200"/>
-          </a:xfrm>
-          <a:prstGeom prst="rect">
-            <a:avLst/>
-          </a:prstGeom>
-          <a:noFill/>
-        </p:spPr>
-        <p:txBody>
-          <a:bodyPr wrap="square" lIns="0" rIns="0" tIns="0" bIns="0">
-            <a:spAutoFit/>
-          </a:bodyPr>
-          <a:lstStyle/>
-          <a:p>
-            <a:pPr algn="l"/>
-            <a:r>
-              <a:rPr sz="900" b="1" i="0">
-                <a:solidFill>
-                  <a:srgbClr val="B64F0F"/>
-                </a:solidFill>
-                <a:latin typeface="Arial"/>
-              </a:rPr>
-              <a:t>FLAGS  Nathan Hayes (5th-yr Sr, captain) confirmed QB1; first career start vs JSU · NOT title-ineligible: NCAA repealed 2-yr ban Jun 24 - bowl, MWC title game, CFP all open</a:t>
-            </a:r>
-          </a:p>
-        </p:txBody>
-      </p:sp>
-      <p:sp>
-        <p:nvSpPr>
-          <p:cNvPr id="30" name="Rounded Rectangle 29"/>
+          <p:cNvPr id="28" name="Rounded Rectangle 27"/>
           <p:cNvSpPr/>
           <p:nvPr/>
         </p:nvSpPr>
@@ -16273,7 +15853,7 @@
       </p:sp>
       <p:sp>
         <p:nvSpPr>
-          <p:cNvPr id="31" name="TextBox 30"/>
+          <p:cNvPr id="29" name="TextBox 28"/>
           <p:cNvSpPr txBox="1"/>
           <p:nvPr/>
         </p:nvSpPr>
@@ -16308,7 +15888,7 @@
       </p:sp>
       <p:sp>
         <p:nvSpPr>
-          <p:cNvPr id="32" name="TextBox 31"/>
+          <p:cNvPr id="30" name="TextBox 29"/>
           <p:cNvSpPr txBox="1"/>
           <p:nvPr/>
         </p:nvSpPr>
@@ -16343,7 +15923,7 @@
       </p:sp>
       <p:sp>
         <p:nvSpPr>
-          <p:cNvPr id="33" name="TextBox 32"/>
+          <p:cNvPr id="31" name="TextBox 30"/>
           <p:cNvSpPr txBox="1"/>
           <p:nvPr/>
         </p:nvSpPr>
@@ -16378,7 +15958,7 @@
       </p:sp>
       <p:sp>
         <p:nvSpPr>
-          <p:cNvPr id="34" name="TextBox 33"/>
+          <p:cNvPr id="32" name="TextBox 31"/>
           <p:cNvSpPr txBox="1"/>
           <p:nvPr/>
         </p:nvSpPr>
@@ -17567,7 +17147,7 @@
                 </a:solidFill>
                 <a:latin typeface="Arial"/>
               </a:rPr>
-              <a:t>FLAGS  CLV-2.5</a:t>
+              <a:t>LINE MOVE  –3 → –5.5 · CLV -2.5</a:t>
             </a:r>
           </a:p>
         </p:txBody>
@@ -17580,64 +17160,29 @@
         </p:nvSpPr>
         <p:spPr>
           <a:xfrm>
-            <a:off x="822960" y="6053328"/>
-            <a:ext cx="10515600" cy="228600"/>
-          </a:xfrm>
-          <a:prstGeom prst="rect">
-            <a:avLst/>
-          </a:prstGeom>
-          <a:noFill/>
-        </p:spPr>
-        <p:txBody>
-          <a:bodyPr wrap="square" lIns="0" rIns="0" tIns="0" bIns="0">
-            <a:spAutoFit/>
-          </a:bodyPr>
-          <a:lstStyle/>
-          <a:p>
-            <a:pPr algn="l"/>
-            <a:r>
-              <a:rPr sz="900" b="0" i="0">
+            <a:off x="822960" y="6236208"/>
+            <a:ext cx="10515600" cy="274320"/>
+          </a:xfrm>
+          <a:prstGeom prst="rect">
+            <a:avLst/>
+          </a:prstGeom>
+          <a:noFill/>
+        </p:spPr>
+        <p:txBody>
+          <a:bodyPr wrap="square" lIns="0" rIns="0" tIns="0" bIns="0">
+            <a:spAutoFit/>
+          </a:bodyPr>
+          <a:lstStyle/>
+          <a:p>
+            <a:pPr algn="l"/>
+            <a:r>
+              <a:rPr sz="1050" b="0" i="0">
                 <a:solidFill>
                   <a:srgbClr val="5C6B7E"/>
                 </a:solidFill>
                 <a:latin typeface="Arial"/>
               </a:rPr>
-              <a:t>Line ledger: first-seen –3 (Aug 18) → now –5.5 · opened –3 · CLV -2.5 · market ML 66% STAN</a:t>
-            </a:r>
-          </a:p>
-        </p:txBody>
-      </p:sp>
-      <p:sp>
-        <p:nvSpPr>
-          <p:cNvPr id="34" name="TextBox 33"/>
-          <p:cNvSpPr txBox="1"/>
-          <p:nvPr/>
-        </p:nvSpPr>
-        <p:spPr>
-          <a:xfrm>
-            <a:off x="822960" y="6263640"/>
-            <a:ext cx="10515600" cy="365760"/>
-          </a:xfrm>
-          <a:prstGeom prst="rect">
-            <a:avLst/>
-          </a:prstGeom>
-          <a:noFill/>
-        </p:spPr>
-        <p:txBody>
-          <a:bodyPr wrap="square" lIns="0" rIns="0" tIns="0" bIns="0">
-            <a:spAutoFit/>
-          </a:bodyPr>
-          <a:lstStyle/>
-          <a:p>
-            <a:pPr algn="l"/>
-            <a:r>
-              <a:rPr sz="1300" b="1" i="0">
-                <a:solidFill>
-                  <a:srgbClr val="0A2851"/>
-                </a:solidFill>
-                <a:latin typeface="Arial"/>
-              </a:rPr>
-              <a:t>Lean: Hawai'i +5.5 — a 4-pt gap, not a conviction; the opener at +3 was the worse number</a:t>
+              <a:t>Line movement: first-seen –3 (Aug 18) → now –5.5 · opened –3 · CLV -2.5</a:t>
             </a:r>
           </a:p>
         </p:txBody>
@@ -17795,7 +17340,7 @@
         <p:spPr>
           <a:xfrm>
             <a:off x="822960" y="1417320"/>
-            <a:ext cx="5166360" cy="4160520"/>
+            <a:ext cx="5166360" cy="3977639"/>
           </a:xfrm>
           <a:prstGeom prst="roundRect">
             <a:avLst/>
@@ -18207,49 +17752,14 @@
       </p:sp>
       <p:sp>
         <p:nvSpPr>
-          <p:cNvPr id="17" name="TextBox 16"/>
-          <p:cNvSpPr txBox="1"/>
-          <p:nvPr/>
-        </p:nvSpPr>
-        <p:spPr>
-          <a:xfrm>
-            <a:off x="1143000" y="5074920"/>
-            <a:ext cx="4572000" cy="457200"/>
-          </a:xfrm>
-          <a:prstGeom prst="rect">
-            <a:avLst/>
-          </a:prstGeom>
-          <a:noFill/>
-        </p:spPr>
-        <p:txBody>
-          <a:bodyPr wrap="square" lIns="0" rIns="0" tIns="0" bIns="0">
-            <a:spAutoFit/>
-          </a:bodyPr>
-          <a:lstStyle/>
-          <a:p>
-            <a:pPr algn="l"/>
-            <a:r>
-              <a:rPr sz="900" b="1" i="0">
-                <a:solidFill>
-                  <a:srgbClr val="B64F0F"/>
-                </a:solidFill>
-                <a:latin typeface="Arial"/>
-              </a:rPr>
-              <a:t>FLAGS  Backup QB Maika Eugenio off roster Jul 23 ('personal and team' issues per Chang) · Micah Alejado starts (MWC pre OPOY); Bjorn Jurgensen (Virginia) cemented QB2</a:t>
-            </a:r>
-          </a:p>
-        </p:txBody>
-      </p:sp>
-      <p:sp>
-        <p:nvSpPr>
-          <p:cNvPr id="18" name="Rounded Rectangle 17"/>
+          <p:cNvPr id="17" name="Rounded Rectangle 16"/>
           <p:cNvSpPr/>
           <p:nvPr/>
         </p:nvSpPr>
         <p:spPr>
           <a:xfrm>
             <a:off x="6309360" y="1417320"/>
-            <a:ext cx="5166360" cy="4160520"/>
+            <a:ext cx="5166360" cy="3977639"/>
           </a:xfrm>
           <a:prstGeom prst="roundRect">
             <a:avLst/>
@@ -18286,7 +17796,7 @@
       </p:sp>
       <p:pic>
         <p:nvPicPr>
-          <p:cNvPr id="19" name="Picture 18" descr="stanford.png"/>
+          <p:cNvPr id="18" name="Picture 17" descr="stanford.png"/>
           <p:cNvPicPr>
             <a:picLocks noChangeAspect="1"/>
           </p:cNvPicPr>
@@ -18310,7 +17820,7 @@
       </p:pic>
       <p:sp>
         <p:nvSpPr>
-          <p:cNvPr id="20" name="TextBox 19"/>
+          <p:cNvPr id="19" name="TextBox 18"/>
           <p:cNvSpPr txBox="1"/>
           <p:nvPr/>
         </p:nvSpPr>
@@ -18345,7 +17855,7 @@
       </p:sp>
       <p:sp>
         <p:nvSpPr>
-          <p:cNvPr id="21" name="Oval 20"/>
+          <p:cNvPr id="20" name="Oval 19"/>
           <p:cNvSpPr/>
           <p:nvPr/>
         </p:nvSpPr>
@@ -18389,7 +17899,7 @@
       </p:sp>
       <p:sp>
         <p:nvSpPr>
-          <p:cNvPr id="22" name="TextBox 21"/>
+          <p:cNvPr id="21" name="TextBox 20"/>
           <p:cNvSpPr txBox="1"/>
           <p:nvPr/>
         </p:nvSpPr>
@@ -18424,7 +17934,7 @@
       </p:sp>
       <p:sp>
         <p:nvSpPr>
-          <p:cNvPr id="23" name="Oval 22"/>
+          <p:cNvPr id="22" name="Oval 21"/>
           <p:cNvSpPr/>
           <p:nvPr/>
         </p:nvSpPr>
@@ -18468,7 +17978,7 @@
       </p:sp>
       <p:sp>
         <p:nvSpPr>
-          <p:cNvPr id="24" name="TextBox 23"/>
+          <p:cNvPr id="23" name="TextBox 22"/>
           <p:cNvSpPr txBox="1"/>
           <p:nvPr/>
         </p:nvSpPr>
@@ -18503,7 +18013,7 @@
       </p:sp>
       <p:sp>
         <p:nvSpPr>
-          <p:cNvPr id="25" name="Oval 24"/>
+          <p:cNvPr id="24" name="Oval 23"/>
           <p:cNvSpPr/>
           <p:nvPr/>
         </p:nvSpPr>
@@ -18547,7 +18057,7 @@
       </p:sp>
       <p:sp>
         <p:nvSpPr>
-          <p:cNvPr id="26" name="TextBox 25"/>
+          <p:cNvPr id="25" name="TextBox 24"/>
           <p:cNvSpPr txBox="1"/>
           <p:nvPr/>
         </p:nvSpPr>
@@ -18582,7 +18092,7 @@
       </p:sp>
       <p:sp>
         <p:nvSpPr>
-          <p:cNvPr id="27" name="Oval 26"/>
+          <p:cNvPr id="26" name="Oval 25"/>
           <p:cNvSpPr/>
           <p:nvPr/>
         </p:nvSpPr>
@@ -18626,7 +18136,7 @@
       </p:sp>
       <p:sp>
         <p:nvSpPr>
-          <p:cNvPr id="28" name="TextBox 27"/>
+          <p:cNvPr id="27" name="TextBox 26"/>
           <p:cNvSpPr txBox="1"/>
           <p:nvPr/>
         </p:nvSpPr>
@@ -18661,42 +18171,7 @@
       </p:sp>
       <p:sp>
         <p:nvSpPr>
-          <p:cNvPr id="29" name="TextBox 28"/>
-          <p:cNvSpPr txBox="1"/>
-          <p:nvPr/>
-        </p:nvSpPr>
-        <p:spPr>
-          <a:xfrm>
-            <a:off x="6629400" y="5074920"/>
-            <a:ext cx="4572000" cy="457200"/>
-          </a:xfrm>
-          <a:prstGeom prst="rect">
-            <a:avLst/>
-          </a:prstGeom>
-          <a:noFill/>
-        </p:spPr>
-        <p:txBody>
-          <a:bodyPr wrap="square" lIns="0" rIns="0" tIns="0" bIns="0">
-            <a:spAutoFit/>
-          </a:bodyPr>
-          <a:lstStyle/>
-          <a:p>
-            <a:pPr algn="l"/>
-            <a:r>
-              <a:rPr sz="900" b="1" i="0">
-                <a:solidFill>
-                  <a:srgbClr val="B64F0F"/>
-                </a:solidFill>
-                <a:latin typeface="Arial"/>
-              </a:rPr>
-              <a:t>FLAGS  Davis Warren (Michigan) named starter Aug 18 over Dylan Rizk, Michael Mitchell Jr. · Warren tore right ACL in Dec 2024 bowl, missed all of 2025; first game back</a:t>
-            </a:r>
-          </a:p>
-        </p:txBody>
-      </p:sp>
-      <p:sp>
-        <p:nvSpPr>
-          <p:cNvPr id="30" name="Rounded Rectangle 29"/>
+          <p:cNvPr id="28" name="Rounded Rectangle 27"/>
           <p:cNvSpPr/>
           <p:nvPr/>
         </p:nvSpPr>
@@ -18740,7 +18215,7 @@
       </p:sp>
       <p:sp>
         <p:nvSpPr>
-          <p:cNvPr id="31" name="TextBox 30"/>
+          <p:cNvPr id="29" name="TextBox 28"/>
           <p:cNvSpPr txBox="1"/>
           <p:nvPr/>
         </p:nvSpPr>
@@ -18775,7 +18250,7 @@
       </p:sp>
       <p:sp>
         <p:nvSpPr>
-          <p:cNvPr id="32" name="TextBox 31"/>
+          <p:cNvPr id="30" name="TextBox 29"/>
           <p:cNvSpPr txBox="1"/>
           <p:nvPr/>
         </p:nvSpPr>
@@ -18810,7 +18285,7 @@
       </p:sp>
       <p:sp>
         <p:nvSpPr>
-          <p:cNvPr id="33" name="TextBox 32"/>
+          <p:cNvPr id="31" name="TextBox 30"/>
           <p:cNvSpPr txBox="1"/>
           <p:nvPr/>
         </p:nvSpPr>
@@ -18845,7 +18320,7 @@
       </p:sp>
       <p:sp>
         <p:nvSpPr>
-          <p:cNvPr id="34" name="TextBox 33"/>
+          <p:cNvPr id="32" name="TextBox 31"/>
           <p:cNvSpPr txBox="1"/>
           <p:nvPr/>
         </p:nvSpPr>
